--- a/Documents/閩拼方案/閩拼聲調與變調.pptx
+++ b/Documents/閩拼方案/閩拼聲調與變調.pptx
@@ -214,7 +214,7 @@
           <a:p>
             <a:fld id="{11D0755A-CD51-4F07-BE52-8AAB17121638}" type="datetimeFigureOut">
               <a:rPr lang="zh-TW" altLang="en-US" smtClean="0"/>
-              <a:t>2026/10/13</a:t>
+              <a:t>2026/10/18</a:t>
             </a:fld>
             <a:endParaRPr lang="zh-TW" altLang="en-US"/>
           </a:p>
@@ -858,7 +858,7 @@
           <a:p>
             <a:fld id="{43DF9799-662D-42E6-ABC9-D46897B23367}" type="datetimeFigureOut">
               <a:rPr lang="zh-TW" altLang="en-US" smtClean="0"/>
-              <a:t>2026/10/13</a:t>
+              <a:t>2026/10/18</a:t>
             </a:fld>
             <a:endParaRPr lang="zh-TW" altLang="en-US"/>
           </a:p>
@@ -1028,7 +1028,7 @@
           <a:p>
             <a:fld id="{43DF9799-662D-42E6-ABC9-D46897B23367}" type="datetimeFigureOut">
               <a:rPr lang="zh-TW" altLang="en-US" smtClean="0"/>
-              <a:t>2026/10/13</a:t>
+              <a:t>2026/10/18</a:t>
             </a:fld>
             <a:endParaRPr lang="zh-TW" altLang="en-US"/>
           </a:p>
@@ -1208,7 +1208,7 @@
           <a:p>
             <a:fld id="{43DF9799-662D-42E6-ABC9-D46897B23367}" type="datetimeFigureOut">
               <a:rPr lang="zh-TW" altLang="en-US" smtClean="0"/>
-              <a:t>2026/10/13</a:t>
+              <a:t>2026/10/18</a:t>
             </a:fld>
             <a:endParaRPr lang="zh-TW" altLang="en-US"/>
           </a:p>
@@ -1844,7 +1844,7 @@
           <a:p>
             <a:fld id="{43DF9799-662D-42E6-ABC9-D46897B23367}" type="datetimeFigureOut">
               <a:rPr lang="zh-TW" altLang="en-US" smtClean="0"/>
-              <a:t>2026/10/13</a:t>
+              <a:t>2026/10/18</a:t>
             </a:fld>
             <a:endParaRPr lang="zh-TW" altLang="en-US"/>
           </a:p>
@@ -2090,7 +2090,7 @@
           <a:p>
             <a:fld id="{43DF9799-662D-42E6-ABC9-D46897B23367}" type="datetimeFigureOut">
               <a:rPr lang="zh-TW" altLang="en-US" smtClean="0"/>
-              <a:t>2026/10/13</a:t>
+              <a:t>2026/10/18</a:t>
             </a:fld>
             <a:endParaRPr lang="zh-TW" altLang="en-US"/>
           </a:p>
@@ -2322,7 +2322,7 @@
           <a:p>
             <a:fld id="{43DF9799-662D-42E6-ABC9-D46897B23367}" type="datetimeFigureOut">
               <a:rPr lang="zh-TW" altLang="en-US" smtClean="0"/>
-              <a:t>2026/10/13</a:t>
+              <a:t>2026/10/18</a:t>
             </a:fld>
             <a:endParaRPr lang="zh-TW" altLang="en-US"/>
           </a:p>
@@ -2689,7 +2689,7 @@
           <a:p>
             <a:fld id="{43DF9799-662D-42E6-ABC9-D46897B23367}" type="datetimeFigureOut">
               <a:rPr lang="zh-TW" altLang="en-US" smtClean="0"/>
-              <a:t>2026/10/13</a:t>
+              <a:t>2026/10/18</a:t>
             </a:fld>
             <a:endParaRPr lang="zh-TW" altLang="en-US"/>
           </a:p>
@@ -2807,7 +2807,7 @@
           <a:p>
             <a:fld id="{43DF9799-662D-42E6-ABC9-D46897B23367}" type="datetimeFigureOut">
               <a:rPr lang="zh-TW" altLang="en-US" smtClean="0"/>
-              <a:t>2026/10/13</a:t>
+              <a:t>2026/10/18</a:t>
             </a:fld>
             <a:endParaRPr lang="zh-TW" altLang="en-US"/>
           </a:p>
@@ -2902,7 +2902,7 @@
           <a:p>
             <a:fld id="{43DF9799-662D-42E6-ABC9-D46897B23367}" type="datetimeFigureOut">
               <a:rPr lang="zh-TW" altLang="en-US" smtClean="0"/>
-              <a:t>2026/10/13</a:t>
+              <a:t>2026/10/18</a:t>
             </a:fld>
             <a:endParaRPr lang="zh-TW" altLang="en-US"/>
           </a:p>
@@ -3179,7 +3179,7 @@
           <a:p>
             <a:fld id="{43DF9799-662D-42E6-ABC9-D46897B23367}" type="datetimeFigureOut">
               <a:rPr lang="zh-TW" altLang="en-US" smtClean="0"/>
-              <a:t>2026/10/13</a:t>
+              <a:t>2026/10/18</a:t>
             </a:fld>
             <a:endParaRPr lang="zh-TW" altLang="en-US"/>
           </a:p>
@@ -3432,7 +3432,7 @@
           <a:p>
             <a:fld id="{43DF9799-662D-42E6-ABC9-D46897B23367}" type="datetimeFigureOut">
               <a:rPr lang="zh-TW" altLang="en-US" smtClean="0"/>
-              <a:t>2026/10/13</a:t>
+              <a:t>2026/10/18</a:t>
             </a:fld>
             <a:endParaRPr lang="zh-TW" altLang="en-US"/>
           </a:p>
@@ -3645,7 +3645,7 @@
           <a:p>
             <a:fld id="{43DF9799-662D-42E6-ABC9-D46897B23367}" type="datetimeFigureOut">
               <a:rPr lang="zh-TW" altLang="en-US" smtClean="0"/>
-              <a:t>2026/10/13</a:t>
+              <a:t>2026/10/18</a:t>
             </a:fld>
             <a:endParaRPr lang="zh-TW" altLang="en-US"/>
           </a:p>
@@ -4246,36 +4246,6 @@
       </p:sp>
       <p:pic>
         <p:nvPicPr>
-          <p:cNvPr id="39" name="圖片 38">
-            <a:extLst>
-              <a:ext uri="{FF2B5EF4-FFF2-40B4-BE49-F238E27FC236}">
-                <a16:creationId xmlns:a16="http://schemas.microsoft.com/office/drawing/2014/main" id="{28CDC75B-EDE3-58C0-A62A-E4A991B26D14}"/>
-              </a:ext>
-            </a:extLst>
-          </p:cNvPr>
-          <p:cNvPicPr>
-            <a:picLocks noChangeAspect="1"/>
-          </p:cNvPicPr>
-          <p:nvPr/>
-        </p:nvPicPr>
-        <p:blipFill>
-          <a:blip r:embed="rId3"/>
-          <a:stretch>
-            <a:fillRect/>
-          </a:stretch>
-        </p:blipFill>
-        <p:spPr>
-          <a:xfrm>
-            <a:off x="304800" y="1955761"/>
-            <a:ext cx="6248400" cy="5137228"/>
-          </a:xfrm>
-          <a:prstGeom prst="rect">
-            <a:avLst/>
-          </a:prstGeom>
-        </p:spPr>
-      </p:pic>
-      <p:pic>
-        <p:nvPicPr>
           <p:cNvPr id="43" name="圖片 42">
             <a:extLst>
               <a:ext uri="{FF2B5EF4-FFF2-40B4-BE49-F238E27FC236}">
@@ -4374,6 +4344,36 @@
           </a:p>
         </p:txBody>
       </p:sp>
+      <p:pic>
+        <p:nvPicPr>
+          <p:cNvPr id="25" name="圖片 24">
+            <a:extLst>
+              <a:ext uri="{FF2B5EF4-FFF2-40B4-BE49-F238E27FC236}">
+                <a16:creationId xmlns:a16="http://schemas.microsoft.com/office/drawing/2014/main" id="{D9821941-A228-04D2-0892-1822E4A8C2DA}"/>
+              </a:ext>
+            </a:extLst>
+          </p:cNvPr>
+          <p:cNvPicPr>
+            <a:picLocks noChangeAspect="1"/>
+          </p:cNvPicPr>
+          <p:nvPr/>
+        </p:nvPicPr>
+        <p:blipFill>
+          <a:blip r:embed="rId5"/>
+          <a:stretch>
+            <a:fillRect/>
+          </a:stretch>
+        </p:blipFill>
+        <p:spPr>
+          <a:xfrm>
+            <a:off x="195018" y="1736725"/>
+            <a:ext cx="6467964" cy="5317748"/>
+          </a:xfrm>
+          <a:prstGeom prst="rect">
+            <a:avLst/>
+          </a:prstGeom>
+        </p:spPr>
+      </p:pic>
     </p:spTree>
     <p:extLst>
       <p:ext uri="{BB962C8B-B14F-4D97-AF65-F5344CB8AC3E}">
@@ -4472,10 +4472,10 @@
       </p:pic>
       <p:pic>
         <p:nvPicPr>
-          <p:cNvPr id="10" name="圖片 9">
+          <p:cNvPr id="3" name="圖片 2">
             <a:extLst>
               <a:ext uri="{FF2B5EF4-FFF2-40B4-BE49-F238E27FC236}">
-                <a16:creationId xmlns:a16="http://schemas.microsoft.com/office/drawing/2014/main" id="{E22ED662-4552-CFA2-599C-27738D2D7223}"/>
+                <a16:creationId xmlns:a16="http://schemas.microsoft.com/office/drawing/2014/main" id="{E754E60E-F484-DA4B-1604-6548EAD3BA45}"/>
               </a:ext>
             </a:extLst>
           </p:cNvPr>
@@ -4492,8 +4492,8 @@
         </p:blipFill>
         <p:spPr>
           <a:xfrm>
-            <a:off x="224846" y="6094892"/>
-            <a:ext cx="6408308" cy="3869366"/>
+            <a:off x="149630" y="6019516"/>
+            <a:ext cx="6558740" cy="3960200"/>
           </a:xfrm>
           <a:prstGeom prst="rect">
             <a:avLst/>
@@ -7699,7 +7699,7 @@
 </file>
 
 <file path=ppt/slides/slide6.xml><?xml version="1.0" encoding="utf-8"?>
-<p:sld xmlns:a="http://schemas.openxmlformats.org/drawingml/2006/main" xmlns:r="http://schemas.openxmlformats.org/officeDocument/2006/relationships" xmlns:p="http://schemas.openxmlformats.org/presentationml/2006/main">
+<p:sld xmlns:a="http://schemas.openxmlformats.org/drawingml/2006/main" xmlns:r="http://schemas.openxmlformats.org/officeDocument/2006/relationships" xmlns:p="http://schemas.openxmlformats.org/presentationml/2006/main" show="0">
   <p:cSld>
     <p:spTree>
       <p:nvGrpSpPr>

--- a/Documents/閩拼方案/閩拼聲調與變調.pptx
+++ b/Documents/閩拼方案/閩拼聲調與變調.pptx
@@ -5,7 +5,7 @@
     <p:sldMasterId id="2147483660" r:id="rId1"/>
   </p:sldMasterIdLst>
   <p:notesMasterIdLst>
-    <p:notesMasterId r:id="rId9"/>
+    <p:notesMasterId r:id="rId13"/>
   </p:notesMasterIdLst>
   <p:sldIdLst>
     <p:sldId id="256" r:id="rId2"/>
@@ -13,8 +13,12 @@
     <p:sldId id="257" r:id="rId4"/>
     <p:sldId id="363" r:id="rId5"/>
     <p:sldId id="259" r:id="rId6"/>
-    <p:sldId id="365" r:id="rId7"/>
-    <p:sldId id="260" r:id="rId8"/>
+    <p:sldId id="368" r:id="rId7"/>
+    <p:sldId id="366" r:id="rId8"/>
+    <p:sldId id="367" r:id="rId9"/>
+    <p:sldId id="369" r:id="rId10"/>
+    <p:sldId id="365" r:id="rId11"/>
+    <p:sldId id="260" r:id="rId12"/>
   </p:sldIdLst>
   <p:sldSz cx="6858000" cy="12192000"/>
   <p:notesSz cx="6858000" cy="9144000"/>
@@ -718,6 +722,129 @@
     <p:extLst>
       <p:ext uri="{BB962C8B-B14F-4D97-AF65-F5344CB8AC3E}">
         <p14:creationId xmlns:p14="http://schemas.microsoft.com/office/powerpoint/2010/main" val="104756597"/>
+      </p:ext>
+    </p:extLst>
+  </p:cSld>
+  <p:clrMapOvr>
+    <a:masterClrMapping/>
+  </p:clrMapOvr>
+</p:notes>
+</file>
+
+<file path=ppt/notesSlides/notesSlide3.xml><?xml version="1.0" encoding="utf-8"?>
+<p:notes xmlns:a="http://schemas.openxmlformats.org/drawingml/2006/main" xmlns:r="http://schemas.openxmlformats.org/officeDocument/2006/relationships" xmlns:p="http://schemas.openxmlformats.org/presentationml/2006/main">
+  <p:cSld>
+    <p:spTree>
+      <p:nvGrpSpPr>
+        <p:cNvPr id="1" name="">
+          <a:extLst>
+            <a:ext uri="{FF2B5EF4-FFF2-40B4-BE49-F238E27FC236}">
+              <a16:creationId xmlns:a16="http://schemas.microsoft.com/office/drawing/2014/main" id="{E0D90FE5-B797-E56A-4010-D8E5455E7A66}"/>
+            </a:ext>
+          </a:extLst>
+        </p:cNvPr>
+        <p:cNvGrpSpPr/>
+        <p:nvPr/>
+      </p:nvGrpSpPr>
+      <p:grpSpPr>
+        <a:xfrm>
+          <a:off x="0" y="0"/>
+          <a:ext cx="0" cy="0"/>
+          <a:chOff x="0" y="0"/>
+          <a:chExt cx="0" cy="0"/>
+        </a:xfrm>
+      </p:grpSpPr>
+      <p:sp>
+        <p:nvSpPr>
+          <p:cNvPr id="2" name="投影片影像版面配置區 1">
+            <a:extLst>
+              <a:ext uri="{FF2B5EF4-FFF2-40B4-BE49-F238E27FC236}">
+                <a16:creationId xmlns:a16="http://schemas.microsoft.com/office/drawing/2014/main" id="{4C1C4A9F-0F08-C30A-B649-B15253EB84A1}"/>
+              </a:ext>
+            </a:extLst>
+          </p:cNvPr>
+          <p:cNvSpPr>
+            <a:spLocks noGrp="1" noRot="1" noChangeAspect="1"/>
+          </p:cNvSpPr>
+          <p:nvPr>
+            <p:ph type="sldImg"/>
+          </p:nvPr>
+        </p:nvSpPr>
+        <p:spPr>
+          <a:xfrm>
+            <a:off x="2560638" y="1143000"/>
+            <a:ext cx="1736725" cy="3086100"/>
+          </a:xfrm>
+        </p:spPr>
+      </p:sp>
+      <p:sp>
+        <p:nvSpPr>
+          <p:cNvPr id="3" name="備忘稿版面配置區 2">
+            <a:extLst>
+              <a:ext uri="{FF2B5EF4-FFF2-40B4-BE49-F238E27FC236}">
+                <a16:creationId xmlns:a16="http://schemas.microsoft.com/office/drawing/2014/main" id="{C422394D-48FB-92C2-CC72-3DDA90A5004E}"/>
+              </a:ext>
+            </a:extLst>
+          </p:cNvPr>
+          <p:cNvSpPr>
+            <a:spLocks noGrp="1"/>
+          </p:cNvSpPr>
+          <p:nvPr>
+            <p:ph type="body" idx="1"/>
+          </p:nvPr>
+        </p:nvSpPr>
+        <p:spPr/>
+        <p:txBody>
+          <a:bodyPr/>
+          <a:lstStyle/>
+          <a:p>
+            <a:endParaRPr lang="zh-TW" altLang="en-US">
+              <a:latin typeface="Microsoft JhengHei UI" panose="020B0604030504040204" pitchFamily="34" charset="-120"/>
+              <a:ea typeface="Microsoft JhengHei UI" panose="020B0604030504040204" pitchFamily="34" charset="-120"/>
+            </a:endParaRPr>
+          </a:p>
+        </p:txBody>
+      </p:sp>
+      <p:sp>
+        <p:nvSpPr>
+          <p:cNvPr id="4" name="投影片編號版面配置區 3">
+            <a:extLst>
+              <a:ext uri="{FF2B5EF4-FFF2-40B4-BE49-F238E27FC236}">
+                <a16:creationId xmlns:a16="http://schemas.microsoft.com/office/drawing/2014/main" id="{8568B622-98FF-C2F7-ACC9-4485F94EE51F}"/>
+              </a:ext>
+            </a:extLst>
+          </p:cNvPr>
+          <p:cNvSpPr>
+            <a:spLocks noGrp="1"/>
+          </p:cNvSpPr>
+          <p:nvPr>
+            <p:ph type="sldNum" sz="quarter" idx="5"/>
+          </p:nvPr>
+        </p:nvSpPr>
+        <p:spPr/>
+        <p:txBody>
+          <a:bodyPr/>
+          <a:lstStyle/>
+          <a:p>
+            <a:pPr rtl="0"/>
+            <a:fld id="{D5939589-3E79-4C82-AA4A-FE78234FAA59}" type="slidenum">
+              <a:rPr lang="en-US" altLang="zh-TW" smtClean="0">
+                <a:latin typeface="Microsoft JhengHei UI" panose="020B0604030504040204" pitchFamily="34" charset="-120"/>
+                <a:ea typeface="Microsoft JhengHei UI" panose="020B0604030504040204" pitchFamily="34" charset="-120"/>
+              </a:rPr>
+              <a:t>6</a:t>
+            </a:fld>
+            <a:endParaRPr lang="zh-TW" altLang="en-US">
+              <a:latin typeface="Microsoft JhengHei UI" panose="020B0604030504040204" pitchFamily="34" charset="-120"/>
+              <a:ea typeface="Microsoft JhengHei UI" panose="020B0604030504040204" pitchFamily="34" charset="-120"/>
+            </a:endParaRPr>
+          </a:p>
+        </p:txBody>
+      </p:sp>
+    </p:spTree>
+    <p:extLst>
+      <p:ext uri="{BB962C8B-B14F-4D97-AF65-F5344CB8AC3E}">
+        <p14:creationId xmlns:p14="http://schemas.microsoft.com/office/powerpoint/2010/main" val="3411135233"/>
       </p:ext>
     </p:extLst>
   </p:cSld>
@@ -4120,6 +4247,2170 @@
 </p:sld>
 </file>
 
+<file path=ppt/slides/slide10.xml><?xml version="1.0" encoding="utf-8"?>
+<p:sld xmlns:a="http://schemas.openxmlformats.org/drawingml/2006/main" xmlns:r="http://schemas.openxmlformats.org/officeDocument/2006/relationships" xmlns:p="http://schemas.openxmlformats.org/presentationml/2006/main" show="0">
+  <p:cSld>
+    <p:spTree>
+      <p:nvGrpSpPr>
+        <p:cNvPr id="1" name="">
+          <a:extLst>
+            <a:ext uri="{FF2B5EF4-FFF2-40B4-BE49-F238E27FC236}">
+              <a16:creationId xmlns:a16="http://schemas.microsoft.com/office/drawing/2014/main" id="{33E010FF-764B-225B-1CA8-AED051EC8BBF}"/>
+            </a:ext>
+          </a:extLst>
+        </p:cNvPr>
+        <p:cNvGrpSpPr/>
+        <p:nvPr/>
+      </p:nvGrpSpPr>
+      <p:grpSpPr>
+        <a:xfrm>
+          <a:off x="0" y="0"/>
+          <a:ext cx="0" cy="0"/>
+          <a:chOff x="0" y="0"/>
+          <a:chExt cx="0" cy="0"/>
+        </a:xfrm>
+      </p:grpSpPr>
+      <p:sp>
+        <p:nvSpPr>
+          <p:cNvPr id="4" name="標題 3">
+            <a:extLst>
+              <a:ext uri="{FF2B5EF4-FFF2-40B4-BE49-F238E27FC236}">
+                <a16:creationId xmlns:a16="http://schemas.microsoft.com/office/drawing/2014/main" id="{2B28A89C-85E4-5C54-20D9-55615F1BA072}"/>
+              </a:ext>
+            </a:extLst>
+          </p:cNvPr>
+          <p:cNvSpPr>
+            <a:spLocks noGrp="1"/>
+          </p:cNvSpPr>
+          <p:nvPr>
+            <p:ph type="title"/>
+          </p:nvPr>
+        </p:nvSpPr>
+        <p:spPr>
+          <a:xfrm>
+            <a:off x="471487" y="312821"/>
+            <a:ext cx="5915025" cy="647480"/>
+          </a:xfrm>
+        </p:spPr>
+        <p:txBody>
+          <a:bodyPr/>
+          <a:lstStyle/>
+          <a:p>
+            <a:r>
+              <a:rPr lang="zh-TW" altLang="en-US">
+                <a:latin typeface="Noto Serif TC Black" panose="02020200000000000000" pitchFamily="18" charset="-128"/>
+                <a:ea typeface="Noto Serif TC Black" panose="02020200000000000000" pitchFamily="18" charset="-128"/>
+              </a:rPr>
+              <a:t>八音變調圖（台灣</a:t>
+            </a:r>
+            <a:r>
+              <a:rPr lang="en-US" altLang="zh-TW">
+                <a:latin typeface="Noto Serif TC Black" panose="02020200000000000000" pitchFamily="18" charset="-128"/>
+                <a:ea typeface="Noto Serif TC Black" panose="02020200000000000000" pitchFamily="18" charset="-128"/>
+              </a:rPr>
+              <a:t>/</a:t>
+            </a:r>
+            <a:r>
+              <a:rPr lang="zh-TW" altLang="en-US">
+                <a:latin typeface="Noto Serif TC Black" panose="02020200000000000000" pitchFamily="18" charset="-128"/>
+                <a:ea typeface="Noto Serif TC Black" panose="02020200000000000000" pitchFamily="18" charset="-128"/>
+              </a:rPr>
+              <a:t>廈門腔）</a:t>
+            </a:r>
+          </a:p>
+        </p:txBody>
+      </p:sp>
+      <p:sp>
+        <p:nvSpPr>
+          <p:cNvPr id="5" name="流程圖: 替代程序 4">
+            <a:extLst>
+              <a:ext uri="{FF2B5EF4-FFF2-40B4-BE49-F238E27FC236}">
+                <a16:creationId xmlns:a16="http://schemas.microsoft.com/office/drawing/2014/main" id="{F70ACDCF-4620-3F6A-E02D-11AFB8D27A86}"/>
+              </a:ext>
+            </a:extLst>
+          </p:cNvPr>
+          <p:cNvSpPr>
+            <a:spLocks noGrp="1" noRot="1" noMove="1" noResize="1" noEditPoints="1" noAdjustHandles="1" noChangeArrowheads="1" noChangeShapeType="1"/>
+          </p:cNvSpPr>
+          <p:nvPr/>
+        </p:nvSpPr>
+        <p:spPr>
+          <a:xfrm>
+            <a:off x="1113183" y="1290513"/>
+            <a:ext cx="2083241" cy="755374"/>
+          </a:xfrm>
+          <a:prstGeom prst="flowChartAlternateProcess">
+            <a:avLst/>
+          </a:prstGeom>
+        </p:spPr>
+        <p:style>
+          <a:lnRef idx="2">
+            <a:schemeClr val="accent1">
+              <a:shade val="15000"/>
+            </a:schemeClr>
+          </a:lnRef>
+          <a:fillRef idx="1">
+            <a:schemeClr val="accent1"/>
+          </a:fillRef>
+          <a:effectRef idx="0">
+            <a:schemeClr val="accent1"/>
+          </a:effectRef>
+          <a:fontRef idx="minor">
+            <a:schemeClr val="lt1"/>
+          </a:fontRef>
+        </p:style>
+        <p:txBody>
+          <a:bodyPr rtlCol="0" anchor="ctr"/>
+          <a:lstStyle/>
+          <a:p>
+            <a:pPr algn="ctr"/>
+            <a:r>
+              <a:rPr lang="en-US" altLang="zh-TW"/>
+              <a:t>【1】</a:t>
+            </a:r>
+            <a:r>
+              <a:rPr lang="zh-TW" altLang="en-US"/>
+              <a:t>骹底</a:t>
+            </a:r>
+            <a:r>
+              <a:rPr lang="en-US" altLang="zh-TW"/>
+              <a:t> </a:t>
+            </a:r>
+            <a:br>
+              <a:rPr lang="en-US" altLang="zh-TW"/>
+            </a:br>
+            <a:r>
+              <a:rPr lang="en-US" altLang="zh-TW"/>
+              <a:t>[ka¹⁻⁶ de³]</a:t>
+            </a:r>
+            <a:endParaRPr lang="zh-TW" altLang="en-US"/>
+          </a:p>
+        </p:txBody>
+      </p:sp>
+      <p:sp>
+        <p:nvSpPr>
+          <p:cNvPr id="6" name="流程圖: 替代程序 5">
+            <a:extLst>
+              <a:ext uri="{FF2B5EF4-FFF2-40B4-BE49-F238E27FC236}">
+                <a16:creationId xmlns:a16="http://schemas.microsoft.com/office/drawing/2014/main" id="{AE9DD801-585C-E1C4-C795-123E9850C3E2}"/>
+              </a:ext>
+            </a:extLst>
+          </p:cNvPr>
+          <p:cNvSpPr>
+            <a:spLocks noGrp="1" noRot="1" noMove="1" noResize="1" noEditPoints="1" noAdjustHandles="1" noChangeArrowheads="1" noChangeShapeType="1"/>
+          </p:cNvSpPr>
+          <p:nvPr/>
+        </p:nvSpPr>
+        <p:spPr>
+          <a:xfrm>
+            <a:off x="1113180" y="2819332"/>
+            <a:ext cx="2083241" cy="755374"/>
+          </a:xfrm>
+          <a:prstGeom prst="flowChartAlternateProcess">
+            <a:avLst/>
+          </a:prstGeom>
+        </p:spPr>
+        <p:style>
+          <a:lnRef idx="2">
+            <a:schemeClr val="accent1">
+              <a:shade val="15000"/>
+            </a:schemeClr>
+          </a:lnRef>
+          <a:fillRef idx="1">
+            <a:schemeClr val="accent1"/>
+          </a:fillRef>
+          <a:effectRef idx="0">
+            <a:schemeClr val="accent1"/>
+          </a:effectRef>
+          <a:fontRef idx="minor">
+            <a:schemeClr val="lt1"/>
+          </a:fontRef>
+        </p:style>
+        <p:txBody>
+          <a:bodyPr rtlCol="0" anchor="ctr"/>
+          <a:lstStyle/>
+          <a:p>
+            <a:pPr algn="ctr"/>
+            <a:r>
+              <a:rPr lang="en-US" altLang="zh-TW"/>
+              <a:t>【3】</a:t>
+            </a:r>
+            <a:r>
+              <a:rPr lang="zh-TW" altLang="en-US"/>
+              <a:t>手心</a:t>
+            </a:r>
+            <a:r>
+              <a:rPr lang="en-US" altLang="zh-TW"/>
+              <a:t> </a:t>
+            </a:r>
+            <a:br>
+              <a:rPr lang="en-US" altLang="zh-TW"/>
+            </a:br>
+            <a:r>
+              <a:rPr lang="en-US" altLang="zh-TW"/>
+              <a:t>[ciu³⁻¹ sim¹]</a:t>
+            </a:r>
+            <a:endParaRPr lang="zh-TW" altLang="en-US"/>
+          </a:p>
+        </p:txBody>
+      </p:sp>
+      <p:sp>
+        <p:nvSpPr>
+          <p:cNvPr id="7" name="流程圖: 替代程序 6">
+            <a:extLst>
+              <a:ext uri="{FF2B5EF4-FFF2-40B4-BE49-F238E27FC236}">
+                <a16:creationId xmlns:a16="http://schemas.microsoft.com/office/drawing/2014/main" id="{0388F498-E28A-BCBD-9590-BC188F38B3F1}"/>
+              </a:ext>
+            </a:extLst>
+          </p:cNvPr>
+          <p:cNvSpPr>
+            <a:spLocks noGrp="1" noRot="1" noMove="1" noResize="1" noEditPoints="1" noAdjustHandles="1" noChangeArrowheads="1" noChangeShapeType="1"/>
+          </p:cNvSpPr>
+          <p:nvPr/>
+        </p:nvSpPr>
+        <p:spPr>
+          <a:xfrm>
+            <a:off x="1113181" y="4371643"/>
+            <a:ext cx="2083241" cy="755374"/>
+          </a:xfrm>
+          <a:prstGeom prst="flowChartAlternateProcess">
+            <a:avLst/>
+          </a:prstGeom>
+        </p:spPr>
+        <p:style>
+          <a:lnRef idx="2">
+            <a:schemeClr val="accent1">
+              <a:shade val="15000"/>
+            </a:schemeClr>
+          </a:lnRef>
+          <a:fillRef idx="1">
+            <a:schemeClr val="accent1"/>
+          </a:fillRef>
+          <a:effectRef idx="0">
+            <a:schemeClr val="accent1"/>
+          </a:effectRef>
+          <a:fontRef idx="minor">
+            <a:schemeClr val="lt1"/>
+          </a:fontRef>
+        </p:style>
+        <p:txBody>
+          <a:bodyPr rtlCol="0" anchor="ctr"/>
+          <a:lstStyle/>
+          <a:p>
+            <a:pPr algn="ctr"/>
+            <a:r>
+              <a:rPr lang="en-US" altLang="zh-TW"/>
+              <a:t>【5】</a:t>
+            </a:r>
+            <a:r>
+              <a:rPr lang="zh-TW" altLang="en-US"/>
+              <a:t>嘴齒</a:t>
+            </a:r>
+            <a:br>
+              <a:rPr lang="en-US" altLang="zh-TW"/>
+            </a:br>
+            <a:r>
+              <a:rPr lang="en-US" altLang="zh-TW"/>
+              <a:t>[cui⁵⁻³ ki³]</a:t>
+            </a:r>
+            <a:endParaRPr lang="zh-TW" altLang="en-US"/>
+          </a:p>
+        </p:txBody>
+      </p:sp>
+      <p:sp>
+        <p:nvSpPr>
+          <p:cNvPr id="8" name="流程圖: 替代程序 7">
+            <a:extLst>
+              <a:ext uri="{FF2B5EF4-FFF2-40B4-BE49-F238E27FC236}">
+                <a16:creationId xmlns:a16="http://schemas.microsoft.com/office/drawing/2014/main" id="{6CAEFE93-7760-B0C1-B587-614DFAE86FDE}"/>
+              </a:ext>
+            </a:extLst>
+          </p:cNvPr>
+          <p:cNvSpPr>
+            <a:spLocks noGrp="1" noRot="1" noMove="1" noResize="1" noEditPoints="1" noAdjustHandles="1" noChangeArrowheads="1" noChangeShapeType="1"/>
+          </p:cNvSpPr>
+          <p:nvPr/>
+        </p:nvSpPr>
+        <p:spPr>
+          <a:xfrm>
+            <a:off x="1113182" y="6448259"/>
+            <a:ext cx="2083241" cy="755374"/>
+          </a:xfrm>
+          <a:prstGeom prst="flowChartAlternateProcess">
+            <a:avLst/>
+          </a:prstGeom>
+        </p:spPr>
+        <p:style>
+          <a:lnRef idx="2">
+            <a:schemeClr val="accent1">
+              <a:shade val="15000"/>
+            </a:schemeClr>
+          </a:lnRef>
+          <a:fillRef idx="1">
+            <a:schemeClr val="accent1"/>
+          </a:fillRef>
+          <a:effectRef idx="0">
+            <a:schemeClr val="accent1"/>
+          </a:effectRef>
+          <a:fontRef idx="minor">
+            <a:schemeClr val="lt1"/>
+          </a:fontRef>
+        </p:style>
+        <p:txBody>
+          <a:bodyPr rtlCol="0" anchor="ctr"/>
+          <a:lstStyle/>
+          <a:p>
+            <a:pPr algn="ctr"/>
+            <a:r>
+              <a:rPr lang="en-US" altLang="zh-TW"/>
+              <a:t>【7】</a:t>
+            </a:r>
+            <a:r>
+              <a:rPr lang="zh-TW" altLang="en-US"/>
+              <a:t>骨頭</a:t>
+            </a:r>
+            <a:r>
+              <a:rPr lang="en-US" altLang="zh-TW"/>
+              <a:t> </a:t>
+            </a:r>
+            <a:br>
+              <a:rPr lang="en-US" altLang="zh-TW"/>
+            </a:br>
+            <a:r>
+              <a:rPr lang="en-US" altLang="zh-TW"/>
+              <a:t>[gut⁷⁻⁸ tao²]</a:t>
+            </a:r>
+            <a:endParaRPr lang="zh-TW" altLang="en-US"/>
+          </a:p>
+        </p:txBody>
+      </p:sp>
+      <p:sp>
+        <p:nvSpPr>
+          <p:cNvPr id="9" name="流程圖: 替代程序 8">
+            <a:extLst>
+              <a:ext uri="{FF2B5EF4-FFF2-40B4-BE49-F238E27FC236}">
+                <a16:creationId xmlns:a16="http://schemas.microsoft.com/office/drawing/2014/main" id="{C4CC8EA7-FA06-4E5F-BB1F-BD5F22A6371C}"/>
+              </a:ext>
+            </a:extLst>
+          </p:cNvPr>
+          <p:cNvSpPr>
+            <a:spLocks noGrp="1" noRot="1" noMove="1" noResize="1" noEditPoints="1" noAdjustHandles="1" noChangeArrowheads="1" noChangeShapeType="1"/>
+          </p:cNvSpPr>
+          <p:nvPr/>
+        </p:nvSpPr>
+        <p:spPr>
+          <a:xfrm>
+            <a:off x="4422249" y="6448259"/>
+            <a:ext cx="2083241" cy="755374"/>
+          </a:xfrm>
+          <a:prstGeom prst="flowChartAlternateProcess">
+            <a:avLst/>
+          </a:prstGeom>
+        </p:spPr>
+        <p:style>
+          <a:lnRef idx="2">
+            <a:schemeClr val="accent1">
+              <a:shade val="15000"/>
+            </a:schemeClr>
+          </a:lnRef>
+          <a:fillRef idx="1">
+            <a:schemeClr val="accent1"/>
+          </a:fillRef>
+          <a:effectRef idx="0">
+            <a:schemeClr val="accent1"/>
+          </a:effectRef>
+          <a:fontRef idx="minor">
+            <a:schemeClr val="lt1"/>
+          </a:fontRef>
+        </p:style>
+        <p:txBody>
+          <a:bodyPr rtlCol="0" anchor="ctr"/>
+          <a:lstStyle/>
+          <a:p>
+            <a:pPr algn="ctr"/>
+            <a:r>
+              <a:rPr lang="en-US" altLang="zh-TW"/>
+              <a:t>【8】</a:t>
+            </a:r>
+            <a:r>
+              <a:rPr lang="zh-TW" altLang="en-US"/>
+              <a:t>目睭</a:t>
+            </a:r>
+            <a:br>
+              <a:rPr lang="en-US" altLang="zh-TW"/>
+            </a:br>
+            <a:r>
+              <a:rPr lang="en-US" altLang="zh-TW"/>
+              <a:t>[bbak⁸⁻⁷ ziu¹]</a:t>
+            </a:r>
+            <a:endParaRPr lang="zh-TW" altLang="en-US"/>
+          </a:p>
+        </p:txBody>
+      </p:sp>
+      <p:sp>
+        <p:nvSpPr>
+          <p:cNvPr id="10" name="流程圖: 替代程序 9">
+            <a:extLst>
+              <a:ext uri="{FF2B5EF4-FFF2-40B4-BE49-F238E27FC236}">
+                <a16:creationId xmlns:a16="http://schemas.microsoft.com/office/drawing/2014/main" id="{B84F14DE-F018-98EC-C9E6-F953DEA88001}"/>
+              </a:ext>
+            </a:extLst>
+          </p:cNvPr>
+          <p:cNvSpPr>
+            <a:spLocks noGrp="1" noRot="1" noMove="1" noResize="1" noEditPoints="1" noAdjustHandles="1" noChangeArrowheads="1" noChangeShapeType="1"/>
+          </p:cNvSpPr>
+          <p:nvPr/>
+        </p:nvSpPr>
+        <p:spPr>
+          <a:xfrm>
+            <a:off x="4422250" y="4374294"/>
+            <a:ext cx="2083241" cy="755374"/>
+          </a:xfrm>
+          <a:prstGeom prst="flowChartAlternateProcess">
+            <a:avLst/>
+          </a:prstGeom>
+        </p:spPr>
+        <p:style>
+          <a:lnRef idx="2">
+            <a:schemeClr val="accent1">
+              <a:shade val="15000"/>
+            </a:schemeClr>
+          </a:lnRef>
+          <a:fillRef idx="1">
+            <a:schemeClr val="accent1"/>
+          </a:fillRef>
+          <a:effectRef idx="0">
+            <a:schemeClr val="accent1"/>
+          </a:effectRef>
+          <a:fontRef idx="minor">
+            <a:schemeClr val="lt1"/>
+          </a:fontRef>
+        </p:style>
+        <p:txBody>
+          <a:bodyPr rtlCol="0" anchor="ctr"/>
+          <a:lstStyle/>
+          <a:p>
+            <a:pPr algn="ctr"/>
+            <a:r>
+              <a:rPr lang="en-US" altLang="zh-TW"/>
+              <a:t>【6】</a:t>
+            </a:r>
+            <a:r>
+              <a:rPr lang="zh-TW" altLang="en-US"/>
+              <a:t>鼻孔</a:t>
+            </a:r>
+            <a:r>
+              <a:rPr lang="en-US" altLang="zh-TW"/>
+              <a:t> </a:t>
+            </a:r>
+            <a:br>
+              <a:rPr lang="en-US" altLang="zh-TW"/>
+            </a:br>
+            <a:r>
+              <a:rPr lang="en-US" altLang="zh-TW"/>
+              <a:t>[pni⁶⁻⁵ kang¹]</a:t>
+            </a:r>
+            <a:endParaRPr lang="zh-TW" altLang="en-US"/>
+          </a:p>
+        </p:txBody>
+      </p:sp>
+      <p:sp>
+        <p:nvSpPr>
+          <p:cNvPr id="11" name="流程圖: 替代程序 10">
+            <a:extLst>
+              <a:ext uri="{FF2B5EF4-FFF2-40B4-BE49-F238E27FC236}">
+                <a16:creationId xmlns:a16="http://schemas.microsoft.com/office/drawing/2014/main" id="{642890ED-ED73-E289-4CC7-C5DE6830AF48}"/>
+              </a:ext>
+            </a:extLst>
+          </p:cNvPr>
+          <p:cNvSpPr>
+            <a:spLocks noGrp="1" noRot="1" noMove="1" noResize="1" noEditPoints="1" noAdjustHandles="1" noChangeArrowheads="1" noChangeShapeType="1"/>
+          </p:cNvSpPr>
+          <p:nvPr/>
+        </p:nvSpPr>
+        <p:spPr>
+          <a:xfrm>
+            <a:off x="4422250" y="1290513"/>
+            <a:ext cx="2083241" cy="755374"/>
+          </a:xfrm>
+          <a:prstGeom prst="flowChartAlternateProcess">
+            <a:avLst/>
+          </a:prstGeom>
+        </p:spPr>
+        <p:style>
+          <a:lnRef idx="2">
+            <a:schemeClr val="accent1">
+              <a:shade val="15000"/>
+            </a:schemeClr>
+          </a:lnRef>
+          <a:fillRef idx="1">
+            <a:schemeClr val="accent1"/>
+          </a:fillRef>
+          <a:effectRef idx="0">
+            <a:schemeClr val="accent1"/>
+          </a:effectRef>
+          <a:fontRef idx="minor">
+            <a:schemeClr val="lt1"/>
+          </a:fontRef>
+        </p:style>
+        <p:txBody>
+          <a:bodyPr rtlCol="0" anchor="ctr"/>
+          <a:lstStyle/>
+          <a:p>
+            <a:pPr algn="ctr"/>
+            <a:r>
+              <a:rPr lang="en-US" altLang="zh-TW"/>
+              <a:t>【2】</a:t>
+            </a:r>
+            <a:r>
+              <a:rPr lang="zh-TW" altLang="en-US"/>
+              <a:t>頭殼</a:t>
+            </a:r>
+            <a:br>
+              <a:rPr lang="en-US" altLang="zh-TW"/>
+            </a:br>
+            <a:r>
+              <a:rPr lang="en-US" altLang="zh-TW"/>
+              <a:t>[tao²⁻⁶ kak⁷]</a:t>
+            </a:r>
+            <a:endParaRPr lang="zh-TW" altLang="en-US"/>
+          </a:p>
+        </p:txBody>
+      </p:sp>
+      <p:cxnSp>
+        <p:nvCxnSpPr>
+          <p:cNvPr id="13" name="接點: 肘形 12">
+            <a:extLst>
+              <a:ext uri="{FF2B5EF4-FFF2-40B4-BE49-F238E27FC236}">
+                <a16:creationId xmlns:a16="http://schemas.microsoft.com/office/drawing/2014/main" id="{04C5C01E-2460-11B4-FFA8-69E7AF5F7386}"/>
+              </a:ext>
+            </a:extLst>
+          </p:cNvPr>
+          <p:cNvCxnSpPr>
+            <a:cxnSpLocks noGrp="1" noRot="1" noMove="1" noResize="1" noEditPoints="1" noAdjustHandles="1" noChangeArrowheads="1" noChangeShapeType="1"/>
+            <a:stCxn id="9" idx="0"/>
+            <a:endCxn id="7" idx="2"/>
+          </p:cNvCxnSpPr>
+          <p:nvPr/>
+        </p:nvCxnSpPr>
+        <p:spPr>
+          <a:xfrm rot="16200000" flipV="1">
+            <a:off x="3148715" y="4133104"/>
+            <a:ext cx="1321242" cy="3309068"/>
+          </a:xfrm>
+          <a:prstGeom prst="bentConnector3">
+            <a:avLst>
+              <a:gd name="adj1" fmla="val 50000"/>
+            </a:avLst>
+          </a:prstGeom>
+          <a:ln>
+            <a:solidFill>
+              <a:schemeClr val="accent6"/>
+            </a:solidFill>
+            <a:prstDash val="sysDash"/>
+            <a:tailEnd type="triangle"/>
+          </a:ln>
+        </p:spPr>
+        <p:style>
+          <a:lnRef idx="2">
+            <a:schemeClr val="accent1"/>
+          </a:lnRef>
+          <a:fillRef idx="0">
+            <a:schemeClr val="accent1"/>
+          </a:fillRef>
+          <a:effectRef idx="1">
+            <a:schemeClr val="accent1"/>
+          </a:effectRef>
+          <a:fontRef idx="minor">
+            <a:schemeClr val="tx1"/>
+          </a:fontRef>
+        </p:style>
+      </p:cxnSp>
+      <p:cxnSp>
+        <p:nvCxnSpPr>
+          <p:cNvPr id="17" name="接點: 肘形 16">
+            <a:extLst>
+              <a:ext uri="{FF2B5EF4-FFF2-40B4-BE49-F238E27FC236}">
+                <a16:creationId xmlns:a16="http://schemas.microsoft.com/office/drawing/2014/main" id="{B973B922-DFE4-DFA4-366D-0D504F9B9FEC}"/>
+              </a:ext>
+            </a:extLst>
+          </p:cNvPr>
+          <p:cNvCxnSpPr>
+            <a:cxnSpLocks noGrp="1" noRot="1" noMove="1" noResize="1" noEditPoints="1" noAdjustHandles="1" noChangeArrowheads="1" noChangeShapeType="1"/>
+          </p:cNvCxnSpPr>
+          <p:nvPr/>
+        </p:nvCxnSpPr>
+        <p:spPr>
+          <a:xfrm rot="16200000" flipH="1">
+            <a:off x="2822713" y="2049858"/>
+            <a:ext cx="2325759" cy="2258174"/>
+          </a:xfrm>
+          <a:prstGeom prst="bentConnector3">
+            <a:avLst>
+              <a:gd name="adj1" fmla="val 16838"/>
+            </a:avLst>
+          </a:prstGeom>
+          <a:ln>
+            <a:tailEnd type="triangle"/>
+          </a:ln>
+        </p:spPr>
+        <p:style>
+          <a:lnRef idx="2">
+            <a:schemeClr val="accent1"/>
+          </a:lnRef>
+          <a:fillRef idx="0">
+            <a:schemeClr val="accent1"/>
+          </a:fillRef>
+          <a:effectRef idx="1">
+            <a:schemeClr val="accent1"/>
+          </a:effectRef>
+          <a:fontRef idx="minor">
+            <a:schemeClr val="tx1"/>
+          </a:fontRef>
+        </p:style>
+      </p:cxnSp>
+      <p:cxnSp>
+        <p:nvCxnSpPr>
+          <p:cNvPr id="28" name="直線單箭頭接點 27">
+            <a:extLst>
+              <a:ext uri="{FF2B5EF4-FFF2-40B4-BE49-F238E27FC236}">
+                <a16:creationId xmlns:a16="http://schemas.microsoft.com/office/drawing/2014/main" id="{8B9F96CE-FCC9-6D0D-6A8B-53D531E150F2}"/>
+              </a:ext>
+            </a:extLst>
+          </p:cNvPr>
+          <p:cNvCxnSpPr>
+            <a:cxnSpLocks noGrp="1" noRot="1" noMove="1" noResize="1" noEditPoints="1" noAdjustHandles="1" noChangeArrowheads="1" noChangeShapeType="1"/>
+          </p:cNvCxnSpPr>
+          <p:nvPr/>
+        </p:nvCxnSpPr>
+        <p:spPr>
+          <a:xfrm>
+            <a:off x="5764696" y="2045887"/>
+            <a:ext cx="0" cy="2325756"/>
+          </a:xfrm>
+          <a:prstGeom prst="straightConnector1">
+            <a:avLst/>
+          </a:prstGeom>
+          <a:ln>
+            <a:tailEnd type="triangle"/>
+          </a:ln>
+        </p:spPr>
+        <p:style>
+          <a:lnRef idx="2">
+            <a:schemeClr val="accent1"/>
+          </a:lnRef>
+          <a:fillRef idx="0">
+            <a:schemeClr val="accent1"/>
+          </a:fillRef>
+          <a:effectRef idx="1">
+            <a:schemeClr val="accent1"/>
+          </a:effectRef>
+          <a:fontRef idx="minor">
+            <a:schemeClr val="tx1"/>
+          </a:fontRef>
+        </p:style>
+      </p:cxnSp>
+      <p:cxnSp>
+        <p:nvCxnSpPr>
+          <p:cNvPr id="29" name="直線單箭頭接點 28">
+            <a:extLst>
+              <a:ext uri="{FF2B5EF4-FFF2-40B4-BE49-F238E27FC236}">
+                <a16:creationId xmlns:a16="http://schemas.microsoft.com/office/drawing/2014/main" id="{9458FA01-24F0-16D0-F9F8-D6A6C6EEC72B}"/>
+              </a:ext>
+            </a:extLst>
+          </p:cNvPr>
+          <p:cNvCxnSpPr>
+            <a:cxnSpLocks noGrp="1" noRot="1" noMove="1" noResize="1" noEditPoints="1" noAdjustHandles="1" noChangeArrowheads="1" noChangeShapeType="1"/>
+          </p:cNvCxnSpPr>
+          <p:nvPr/>
+        </p:nvCxnSpPr>
+        <p:spPr>
+          <a:xfrm flipH="1">
+            <a:off x="3196421" y="6916726"/>
+            <a:ext cx="1225827" cy="0"/>
+          </a:xfrm>
+          <a:prstGeom prst="straightConnector1">
+            <a:avLst/>
+          </a:prstGeom>
+          <a:ln>
+            <a:solidFill>
+              <a:schemeClr val="accent6"/>
+            </a:solidFill>
+            <a:tailEnd type="triangle"/>
+          </a:ln>
+        </p:spPr>
+        <p:style>
+          <a:lnRef idx="2">
+            <a:schemeClr val="accent1"/>
+          </a:lnRef>
+          <a:fillRef idx="0">
+            <a:schemeClr val="accent1"/>
+          </a:fillRef>
+          <a:effectRef idx="1">
+            <a:schemeClr val="accent1"/>
+          </a:effectRef>
+          <a:fontRef idx="minor">
+            <a:schemeClr val="tx1"/>
+          </a:fontRef>
+        </p:style>
+      </p:cxnSp>
+      <p:cxnSp>
+        <p:nvCxnSpPr>
+          <p:cNvPr id="33" name="直線單箭頭接點 32">
+            <a:extLst>
+              <a:ext uri="{FF2B5EF4-FFF2-40B4-BE49-F238E27FC236}">
+                <a16:creationId xmlns:a16="http://schemas.microsoft.com/office/drawing/2014/main" id="{8B883DAF-E929-C328-0D63-B64F239A207C}"/>
+              </a:ext>
+            </a:extLst>
+          </p:cNvPr>
+          <p:cNvCxnSpPr>
+            <a:cxnSpLocks noGrp="1" noRot="1" noMove="1" noResize="1" noEditPoints="1" noAdjustHandles="1" noChangeArrowheads="1" noChangeShapeType="1"/>
+          </p:cNvCxnSpPr>
+          <p:nvPr/>
+        </p:nvCxnSpPr>
+        <p:spPr>
+          <a:xfrm>
+            <a:off x="3196420" y="6706683"/>
+            <a:ext cx="1225827" cy="0"/>
+          </a:xfrm>
+          <a:prstGeom prst="straightConnector1">
+            <a:avLst/>
+          </a:prstGeom>
+          <a:ln>
+            <a:solidFill>
+              <a:schemeClr val="accent5"/>
+            </a:solidFill>
+            <a:tailEnd type="triangle"/>
+          </a:ln>
+        </p:spPr>
+        <p:style>
+          <a:lnRef idx="2">
+            <a:schemeClr val="accent1"/>
+          </a:lnRef>
+          <a:fillRef idx="0">
+            <a:schemeClr val="accent1"/>
+          </a:fillRef>
+          <a:effectRef idx="1">
+            <a:schemeClr val="accent1"/>
+          </a:effectRef>
+          <a:fontRef idx="minor">
+            <a:schemeClr val="tx1"/>
+          </a:fontRef>
+        </p:style>
+      </p:cxnSp>
+      <p:cxnSp>
+        <p:nvCxnSpPr>
+          <p:cNvPr id="34" name="直線單箭頭接點 33">
+            <a:extLst>
+              <a:ext uri="{FF2B5EF4-FFF2-40B4-BE49-F238E27FC236}">
+                <a16:creationId xmlns:a16="http://schemas.microsoft.com/office/drawing/2014/main" id="{A06D7326-74C8-7ADA-3E09-96CEA3A55398}"/>
+              </a:ext>
+            </a:extLst>
+          </p:cNvPr>
+          <p:cNvCxnSpPr>
+            <a:cxnSpLocks noGrp="1" noRot="1" noMove="1" noResize="1" noEditPoints="1" noAdjustHandles="1" noChangeArrowheads="1" noChangeShapeType="1"/>
+          </p:cNvCxnSpPr>
+          <p:nvPr/>
+        </p:nvCxnSpPr>
+        <p:spPr>
+          <a:xfrm flipH="1">
+            <a:off x="3196420" y="4707587"/>
+            <a:ext cx="1225827" cy="0"/>
+          </a:xfrm>
+          <a:prstGeom prst="straightConnector1">
+            <a:avLst/>
+          </a:prstGeom>
+          <a:ln>
+            <a:tailEnd type="triangle"/>
+          </a:ln>
+        </p:spPr>
+        <p:style>
+          <a:lnRef idx="2">
+            <a:schemeClr val="accent1"/>
+          </a:lnRef>
+          <a:fillRef idx="0">
+            <a:schemeClr val="accent1"/>
+          </a:fillRef>
+          <a:effectRef idx="1">
+            <a:schemeClr val="accent1"/>
+          </a:effectRef>
+          <a:fontRef idx="minor">
+            <a:schemeClr val="tx1"/>
+          </a:fontRef>
+        </p:style>
+      </p:cxnSp>
+      <p:cxnSp>
+        <p:nvCxnSpPr>
+          <p:cNvPr id="37" name="直線單箭頭接點 36">
+            <a:extLst>
+              <a:ext uri="{FF2B5EF4-FFF2-40B4-BE49-F238E27FC236}">
+                <a16:creationId xmlns:a16="http://schemas.microsoft.com/office/drawing/2014/main" id="{415C7050-0840-CD01-2C47-668E40B332CF}"/>
+              </a:ext>
+            </a:extLst>
+          </p:cNvPr>
+          <p:cNvCxnSpPr>
+            <a:cxnSpLocks noGrp="1" noRot="1" noMove="1" noResize="1" noEditPoints="1" noAdjustHandles="1" noChangeArrowheads="1" noChangeShapeType="1"/>
+          </p:cNvCxnSpPr>
+          <p:nvPr/>
+        </p:nvCxnSpPr>
+        <p:spPr>
+          <a:xfrm flipH="1" flipV="1">
+            <a:off x="2115046" y="3574706"/>
+            <a:ext cx="1" cy="796937"/>
+          </a:xfrm>
+          <a:prstGeom prst="straightConnector1">
+            <a:avLst/>
+          </a:prstGeom>
+          <a:ln>
+            <a:tailEnd type="triangle"/>
+          </a:ln>
+        </p:spPr>
+        <p:style>
+          <a:lnRef idx="2">
+            <a:schemeClr val="accent1"/>
+          </a:lnRef>
+          <a:fillRef idx="0">
+            <a:schemeClr val="accent1"/>
+          </a:fillRef>
+          <a:effectRef idx="1">
+            <a:schemeClr val="accent1"/>
+          </a:effectRef>
+          <a:fontRef idx="minor">
+            <a:schemeClr val="tx1"/>
+          </a:fontRef>
+        </p:style>
+      </p:cxnSp>
+      <p:cxnSp>
+        <p:nvCxnSpPr>
+          <p:cNvPr id="41" name="直線單箭頭接點 40">
+            <a:extLst>
+              <a:ext uri="{FF2B5EF4-FFF2-40B4-BE49-F238E27FC236}">
+                <a16:creationId xmlns:a16="http://schemas.microsoft.com/office/drawing/2014/main" id="{BB8EF7D6-605B-5632-8A92-64B0B7026627}"/>
+              </a:ext>
+            </a:extLst>
+          </p:cNvPr>
+          <p:cNvCxnSpPr>
+            <a:cxnSpLocks noGrp="1" noRot="1" noMove="1" noResize="1" noEditPoints="1" noAdjustHandles="1" noChangeArrowheads="1" noChangeShapeType="1"/>
+          </p:cNvCxnSpPr>
+          <p:nvPr/>
+        </p:nvCxnSpPr>
+        <p:spPr>
+          <a:xfrm flipV="1">
+            <a:off x="2115046" y="2045887"/>
+            <a:ext cx="3" cy="773445"/>
+          </a:xfrm>
+          <a:prstGeom prst="straightConnector1">
+            <a:avLst/>
+          </a:prstGeom>
+          <a:ln>
+            <a:tailEnd type="triangle"/>
+          </a:ln>
+        </p:spPr>
+        <p:style>
+          <a:lnRef idx="2">
+            <a:schemeClr val="accent1"/>
+          </a:lnRef>
+          <a:fillRef idx="0">
+            <a:schemeClr val="accent1"/>
+          </a:fillRef>
+          <a:effectRef idx="1">
+            <a:schemeClr val="accent1"/>
+          </a:effectRef>
+          <a:fontRef idx="minor">
+            <a:schemeClr val="tx1"/>
+          </a:fontRef>
+        </p:style>
+      </p:cxnSp>
+      <p:sp>
+        <p:nvSpPr>
+          <p:cNvPr id="72" name="左中括弧 71">
+            <a:extLst>
+              <a:ext uri="{FF2B5EF4-FFF2-40B4-BE49-F238E27FC236}">
+                <a16:creationId xmlns:a16="http://schemas.microsoft.com/office/drawing/2014/main" id="{07658648-9292-4DEE-DED5-88015A9454BF}"/>
+              </a:ext>
+            </a:extLst>
+          </p:cNvPr>
+          <p:cNvSpPr>
+            <a:spLocks noGrp="1" noRot="1" noMove="1" noResize="1" noEditPoints="1" noAdjustHandles="1" noChangeArrowheads="1" noChangeShapeType="1"/>
+          </p:cNvSpPr>
+          <p:nvPr/>
+        </p:nvSpPr>
+        <p:spPr>
+          <a:xfrm>
+            <a:off x="371721" y="3226072"/>
+            <a:ext cx="741455" cy="3599874"/>
+          </a:xfrm>
+          <a:prstGeom prst="leftBracket">
+            <a:avLst>
+              <a:gd name="adj" fmla="val 0"/>
+            </a:avLst>
+          </a:prstGeom>
+          <a:ln>
+            <a:solidFill>
+              <a:schemeClr val="accent5"/>
+            </a:solidFill>
+            <a:prstDash val="sysDash"/>
+            <a:headEnd type="none"/>
+            <a:tailEnd type="triangle"/>
+          </a:ln>
+        </p:spPr>
+        <p:style>
+          <a:lnRef idx="2">
+            <a:schemeClr val="accent1"/>
+          </a:lnRef>
+          <a:fillRef idx="0">
+            <a:schemeClr val="accent1"/>
+          </a:fillRef>
+          <a:effectRef idx="1">
+            <a:schemeClr val="accent1"/>
+          </a:effectRef>
+          <a:fontRef idx="minor">
+            <a:schemeClr val="tx1"/>
+          </a:fontRef>
+        </p:style>
+        <p:txBody>
+          <a:bodyPr rtlCol="0" anchor="ctr"/>
+          <a:lstStyle/>
+          <a:p>
+            <a:pPr algn="ctr"/>
+            <a:endParaRPr lang="zh-TW" altLang="en-US"/>
+          </a:p>
+        </p:txBody>
+      </p:sp>
+      <p:sp>
+        <p:nvSpPr>
+          <p:cNvPr id="75" name="文字方塊 74">
+            <a:extLst>
+              <a:ext uri="{FF2B5EF4-FFF2-40B4-BE49-F238E27FC236}">
+                <a16:creationId xmlns:a16="http://schemas.microsoft.com/office/drawing/2014/main" id="{D8F9566A-4D7F-2A06-B15A-082ED48993B6}"/>
+              </a:ext>
+            </a:extLst>
+          </p:cNvPr>
+          <p:cNvSpPr txBox="1">
+            <a:spLocks noGrp="1" noRot="1" noMove="1" noResize="1" noEditPoints="1" noAdjustHandles="1" noChangeArrowheads="1" noChangeShapeType="1"/>
+          </p:cNvSpPr>
+          <p:nvPr/>
+        </p:nvSpPr>
+        <p:spPr>
+          <a:xfrm>
+            <a:off x="3429000" y="6375783"/>
+            <a:ext cx="762000" cy="369332"/>
+          </a:xfrm>
+          <a:prstGeom prst="rect">
+            <a:avLst/>
+          </a:prstGeom>
+          <a:noFill/>
+        </p:spPr>
+        <p:txBody>
+          <a:bodyPr wrap="square" rtlCol="0">
+            <a:spAutoFit/>
+          </a:bodyPr>
+          <a:lstStyle/>
+          <a:p>
+            <a:pPr algn="ctr"/>
+            <a:r>
+              <a:rPr lang="en-US" altLang="zh-TW">
+                <a:solidFill>
+                  <a:schemeClr val="accent5"/>
+                </a:solidFill>
+              </a:rPr>
+              <a:t>p/t/k</a:t>
+            </a:r>
+            <a:endParaRPr lang="zh-TW" altLang="en-US">
+              <a:solidFill>
+                <a:schemeClr val="accent5"/>
+              </a:solidFill>
+            </a:endParaRPr>
+          </a:p>
+        </p:txBody>
+      </p:sp>
+      <p:sp>
+        <p:nvSpPr>
+          <p:cNvPr id="76" name="文字方塊 75">
+            <a:extLst>
+              <a:ext uri="{FF2B5EF4-FFF2-40B4-BE49-F238E27FC236}">
+                <a16:creationId xmlns:a16="http://schemas.microsoft.com/office/drawing/2014/main" id="{101255CD-3871-7ED2-7B6E-BFA24AE84C5C}"/>
+              </a:ext>
+            </a:extLst>
+          </p:cNvPr>
+          <p:cNvSpPr txBox="1">
+            <a:spLocks noGrp="1" noRot="1" noMove="1" noResize="1" noEditPoints="1" noAdjustHandles="1" noChangeArrowheads="1" noChangeShapeType="1"/>
+          </p:cNvSpPr>
+          <p:nvPr/>
+        </p:nvSpPr>
+        <p:spPr>
+          <a:xfrm>
+            <a:off x="3429000" y="6850136"/>
+            <a:ext cx="762000" cy="369332"/>
+          </a:xfrm>
+          <a:prstGeom prst="rect">
+            <a:avLst/>
+          </a:prstGeom>
+          <a:noFill/>
+        </p:spPr>
+        <p:txBody>
+          <a:bodyPr wrap="square" rtlCol="0">
+            <a:spAutoFit/>
+          </a:bodyPr>
+          <a:lstStyle/>
+          <a:p>
+            <a:pPr algn="ctr"/>
+            <a:r>
+              <a:rPr lang="en-US" altLang="zh-TW">
+                <a:solidFill>
+                  <a:schemeClr val="accent6"/>
+                </a:solidFill>
+              </a:rPr>
+              <a:t>p/t/k</a:t>
+            </a:r>
+            <a:endParaRPr lang="zh-TW" altLang="en-US">
+              <a:solidFill>
+                <a:schemeClr val="accent6"/>
+              </a:solidFill>
+            </a:endParaRPr>
+          </a:p>
+        </p:txBody>
+      </p:sp>
+      <p:sp>
+        <p:nvSpPr>
+          <p:cNvPr id="77" name="文字方塊 76">
+            <a:extLst>
+              <a:ext uri="{FF2B5EF4-FFF2-40B4-BE49-F238E27FC236}">
+                <a16:creationId xmlns:a16="http://schemas.microsoft.com/office/drawing/2014/main" id="{966F5127-65E7-8C2B-45C3-953B525FA7B7}"/>
+              </a:ext>
+            </a:extLst>
+          </p:cNvPr>
+          <p:cNvSpPr txBox="1">
+            <a:spLocks noGrp="1" noRot="1" noMove="1" noResize="1" noEditPoints="1" noAdjustHandles="1" noChangeArrowheads="1" noChangeShapeType="1"/>
+          </p:cNvSpPr>
+          <p:nvPr/>
+        </p:nvSpPr>
+        <p:spPr>
+          <a:xfrm>
+            <a:off x="3502512" y="5296343"/>
+            <a:ext cx="212242" cy="369332"/>
+          </a:xfrm>
+          <a:prstGeom prst="rect">
+            <a:avLst/>
+          </a:prstGeom>
+          <a:noFill/>
+        </p:spPr>
+        <p:txBody>
+          <a:bodyPr wrap="square" rtlCol="0">
+            <a:spAutoFit/>
+          </a:bodyPr>
+          <a:lstStyle/>
+          <a:p>
+            <a:pPr algn="ctr"/>
+            <a:r>
+              <a:rPr lang="en-US" altLang="zh-TW">
+                <a:solidFill>
+                  <a:schemeClr val="accent6"/>
+                </a:solidFill>
+              </a:rPr>
+              <a:t>h</a:t>
+            </a:r>
+            <a:endParaRPr lang="zh-TW" altLang="en-US">
+              <a:solidFill>
+                <a:schemeClr val="accent6"/>
+              </a:solidFill>
+            </a:endParaRPr>
+          </a:p>
+        </p:txBody>
+      </p:sp>
+      <p:sp>
+        <p:nvSpPr>
+          <p:cNvPr id="78" name="文字方塊 77">
+            <a:extLst>
+              <a:ext uri="{FF2B5EF4-FFF2-40B4-BE49-F238E27FC236}">
+                <a16:creationId xmlns:a16="http://schemas.microsoft.com/office/drawing/2014/main" id="{5FA13A60-ADD2-987A-B313-211624685ADE}"/>
+              </a:ext>
+            </a:extLst>
+          </p:cNvPr>
+          <p:cNvSpPr txBox="1">
+            <a:spLocks noGrp="1" noRot="1" noMove="1" noResize="1" noEditPoints="1" noAdjustHandles="1" noChangeArrowheads="1" noChangeShapeType="1"/>
+          </p:cNvSpPr>
+          <p:nvPr/>
+        </p:nvSpPr>
+        <p:spPr>
+          <a:xfrm>
+            <a:off x="365366" y="5953770"/>
+            <a:ext cx="212242" cy="369332"/>
+          </a:xfrm>
+          <a:prstGeom prst="rect">
+            <a:avLst/>
+          </a:prstGeom>
+          <a:noFill/>
+        </p:spPr>
+        <p:txBody>
+          <a:bodyPr wrap="square" rtlCol="0">
+            <a:spAutoFit/>
+          </a:bodyPr>
+          <a:lstStyle/>
+          <a:p>
+            <a:pPr algn="ctr"/>
+            <a:r>
+              <a:rPr lang="en-US" altLang="zh-TW">
+                <a:solidFill>
+                  <a:schemeClr val="accent5"/>
+                </a:solidFill>
+              </a:rPr>
+              <a:t>h</a:t>
+            </a:r>
+            <a:endParaRPr lang="zh-TW" altLang="en-US">
+              <a:solidFill>
+                <a:schemeClr val="accent5"/>
+              </a:solidFill>
+            </a:endParaRPr>
+          </a:p>
+        </p:txBody>
+      </p:sp>
+      <p:sp>
+        <p:nvSpPr>
+          <p:cNvPr id="79" name="矩形: 圓角 78">
+            <a:extLst>
+              <a:ext uri="{FF2B5EF4-FFF2-40B4-BE49-F238E27FC236}">
+                <a16:creationId xmlns:a16="http://schemas.microsoft.com/office/drawing/2014/main" id="{DB4BD723-2833-4BEB-D6DC-E7BB149FED09}"/>
+              </a:ext>
+            </a:extLst>
+          </p:cNvPr>
+          <p:cNvSpPr>
+            <a:spLocks noGrp="1" noRot="1" noMove="1" noResize="1" noEditPoints="1" noAdjustHandles="1" noChangeArrowheads="1" noChangeShapeType="1"/>
+          </p:cNvSpPr>
+          <p:nvPr/>
+        </p:nvSpPr>
+        <p:spPr>
+          <a:xfrm>
+            <a:off x="3716153" y="5278705"/>
+            <a:ext cx="2389371" cy="369332"/>
+          </a:xfrm>
+          <a:prstGeom prst="roundRect">
+            <a:avLst/>
+          </a:prstGeom>
+        </p:spPr>
+        <p:style>
+          <a:lnRef idx="0">
+            <a:schemeClr val="accent2"/>
+          </a:lnRef>
+          <a:fillRef idx="3">
+            <a:schemeClr val="accent2"/>
+          </a:fillRef>
+          <a:effectRef idx="3">
+            <a:schemeClr val="accent2"/>
+          </a:effectRef>
+          <a:fontRef idx="minor">
+            <a:schemeClr val="lt1"/>
+          </a:fontRef>
+        </p:style>
+        <p:txBody>
+          <a:bodyPr rtlCol="0" anchor="ctr"/>
+          <a:lstStyle/>
+          <a:p>
+            <a:pPr algn="ctr"/>
+            <a:r>
+              <a:rPr lang="zh-TW" altLang="en-US"/>
+              <a:t>白頭 </a:t>
+            </a:r>
+            <a:r>
+              <a:rPr lang="en-US" altLang="zh-TW"/>
+              <a:t>[beh⁸⁻⁵ tao²]</a:t>
+            </a:r>
+            <a:endParaRPr lang="zh-TW" altLang="en-US"/>
+          </a:p>
+        </p:txBody>
+      </p:sp>
+      <p:sp>
+        <p:nvSpPr>
+          <p:cNvPr id="82" name="矩形: 圓角 81">
+            <a:extLst>
+              <a:ext uri="{FF2B5EF4-FFF2-40B4-BE49-F238E27FC236}">
+                <a16:creationId xmlns:a16="http://schemas.microsoft.com/office/drawing/2014/main" id="{83A7847E-C005-AAEC-8F5D-795598DBE26F}"/>
+              </a:ext>
+            </a:extLst>
+          </p:cNvPr>
+          <p:cNvSpPr>
+            <a:spLocks noGrp="1" noRot="1" noMove="1" noResize="1" noEditPoints="1" noAdjustHandles="1" noChangeArrowheads="1" noChangeShapeType="1"/>
+          </p:cNvSpPr>
+          <p:nvPr/>
+        </p:nvSpPr>
+        <p:spPr>
+          <a:xfrm>
+            <a:off x="593482" y="5946450"/>
+            <a:ext cx="2187818" cy="369332"/>
+          </a:xfrm>
+          <a:prstGeom prst="roundRect">
+            <a:avLst/>
+          </a:prstGeom>
+        </p:spPr>
+        <p:style>
+          <a:lnRef idx="0">
+            <a:schemeClr val="accent2"/>
+          </a:lnRef>
+          <a:fillRef idx="3">
+            <a:schemeClr val="accent2"/>
+          </a:fillRef>
+          <a:effectRef idx="3">
+            <a:schemeClr val="accent2"/>
+          </a:effectRef>
+          <a:fontRef idx="minor">
+            <a:schemeClr val="lt1"/>
+          </a:fontRef>
+        </p:style>
+        <p:txBody>
+          <a:bodyPr rtlCol="0" anchor="ctr"/>
+          <a:lstStyle/>
+          <a:p>
+            <a:pPr algn="ctr"/>
+            <a:r>
+              <a:rPr lang="zh-TW" altLang="en-US"/>
+              <a:t>拍頭 </a:t>
+            </a:r>
+            <a:r>
+              <a:rPr lang="en-US" altLang="zh-TW"/>
+              <a:t>[pah⁷⁻³ tao²]</a:t>
+            </a:r>
+            <a:endParaRPr lang="zh-TW" altLang="en-US"/>
+          </a:p>
+        </p:txBody>
+      </p:sp>
+      <p:sp>
+        <p:nvSpPr>
+          <p:cNvPr id="86" name="矩形: 按鈕形 85">
+            <a:extLst>
+              <a:ext uri="{FF2B5EF4-FFF2-40B4-BE49-F238E27FC236}">
+                <a16:creationId xmlns:a16="http://schemas.microsoft.com/office/drawing/2014/main" id="{8B95B49A-C4BE-83C5-B605-A2CFE1FECEF9}"/>
+              </a:ext>
+            </a:extLst>
+          </p:cNvPr>
+          <p:cNvSpPr/>
+          <p:nvPr/>
+        </p:nvSpPr>
+        <p:spPr>
+          <a:xfrm>
+            <a:off x="1494211" y="7776736"/>
+            <a:ext cx="3869577" cy="740025"/>
+          </a:xfrm>
+          <a:prstGeom prst="bevel">
+            <a:avLst/>
+          </a:prstGeom>
+        </p:spPr>
+        <p:style>
+          <a:lnRef idx="0">
+            <a:schemeClr val="accent5"/>
+          </a:lnRef>
+          <a:fillRef idx="3">
+            <a:schemeClr val="accent5"/>
+          </a:fillRef>
+          <a:effectRef idx="3">
+            <a:schemeClr val="accent5"/>
+          </a:effectRef>
+          <a:fontRef idx="minor">
+            <a:schemeClr val="lt1"/>
+          </a:fontRef>
+        </p:style>
+        <p:txBody>
+          <a:bodyPr rtlCol="0" anchor="ctr"/>
+          <a:lstStyle/>
+          <a:p>
+            <a:pPr algn="ctr"/>
+            <a:r>
+              <a:rPr lang="en-US" altLang="zh-TW" sz="2800">
+                <a:effectLst>
+                  <a:outerShdw blurRad="50800" dist="38100" dir="5400000" algn="t" rotWithShape="0">
+                    <a:prstClr val="black">
+                      <a:alpha val="40000"/>
+                    </a:prstClr>
+                  </a:outerShdw>
+                </a:effectLst>
+                <a:latin typeface="Noto Sans TC Black" panose="020B0200000000000000" pitchFamily="34" charset="-128"/>
+                <a:ea typeface="Noto Sans TC Black" panose="020B0200000000000000" pitchFamily="34" charset="-128"/>
+                <a:cs typeface="ADLaM Display" panose="020F0502020204030204" pitchFamily="2" charset="0"/>
+              </a:rPr>
+              <a:t>1 6 5 3 2 7 8</a:t>
+            </a:r>
+            <a:endParaRPr lang="zh-TW" altLang="en-US" sz="2800">
+              <a:effectLst>
+                <a:outerShdw blurRad="50800" dist="38100" dir="5400000" algn="t" rotWithShape="0">
+                  <a:prstClr val="black">
+                    <a:alpha val="40000"/>
+                  </a:prstClr>
+                </a:outerShdw>
+              </a:effectLst>
+              <a:latin typeface="Noto Sans TC Black" panose="020B0200000000000000" pitchFamily="34" charset="-128"/>
+              <a:ea typeface="Noto Sans TC Black" panose="020B0200000000000000" pitchFamily="34" charset="-128"/>
+              <a:cs typeface="ADLaM Display" panose="020F0502020204030204" pitchFamily="2" charset="0"/>
+            </a:endParaRPr>
+          </a:p>
+        </p:txBody>
+      </p:sp>
+      <p:pic>
+        <p:nvPicPr>
+          <p:cNvPr id="88" name="圖片 87">
+            <a:extLst>
+              <a:ext uri="{FF2B5EF4-FFF2-40B4-BE49-F238E27FC236}">
+                <a16:creationId xmlns:a16="http://schemas.microsoft.com/office/drawing/2014/main" id="{84AB6647-AAF0-EE15-8FE3-49922EF19085}"/>
+              </a:ext>
+            </a:extLst>
+          </p:cNvPr>
+          <p:cNvPicPr>
+            <a:picLocks noChangeAspect="1"/>
+          </p:cNvPicPr>
+          <p:nvPr/>
+        </p:nvPicPr>
+        <p:blipFill>
+          <a:blip r:embed="rId2"/>
+          <a:stretch>
+            <a:fillRect/>
+          </a:stretch>
+        </p:blipFill>
+        <p:spPr>
+          <a:xfrm>
+            <a:off x="0" y="8373584"/>
+            <a:ext cx="6858000" cy="3788732"/>
+          </a:xfrm>
+          <a:prstGeom prst="rect">
+            <a:avLst/>
+          </a:prstGeom>
+        </p:spPr>
+      </p:pic>
+    </p:spTree>
+    <p:extLst>
+      <p:ext uri="{BB962C8B-B14F-4D97-AF65-F5344CB8AC3E}">
+        <p14:creationId xmlns:p14="http://schemas.microsoft.com/office/powerpoint/2010/main" val="777039886"/>
+      </p:ext>
+    </p:extLst>
+  </p:cSld>
+  <p:clrMapOvr>
+    <a:masterClrMapping/>
+  </p:clrMapOvr>
+</p:sld>
+</file>
+
+<file path=ppt/slides/slide11.xml><?xml version="1.0" encoding="utf-8"?>
+<p:sld xmlns:a="http://schemas.openxmlformats.org/drawingml/2006/main" xmlns:r="http://schemas.openxmlformats.org/officeDocument/2006/relationships" xmlns:p="http://schemas.openxmlformats.org/presentationml/2006/main" show="0">
+  <p:cSld>
+    <p:spTree>
+      <p:nvGrpSpPr>
+        <p:cNvPr id="1" name="">
+          <a:extLst>
+            <a:ext uri="{FF2B5EF4-FFF2-40B4-BE49-F238E27FC236}">
+              <a16:creationId xmlns:a16="http://schemas.microsoft.com/office/drawing/2014/main" id="{29B67BEE-19A1-6F1F-3100-934A7F9F4E28}"/>
+            </a:ext>
+          </a:extLst>
+        </p:cNvPr>
+        <p:cNvGrpSpPr/>
+        <p:nvPr/>
+      </p:nvGrpSpPr>
+      <p:grpSpPr>
+        <a:xfrm>
+          <a:off x="0" y="0"/>
+          <a:ext cx="0" cy="0"/>
+          <a:chOff x="0" y="0"/>
+          <a:chExt cx="0" cy="0"/>
+        </a:xfrm>
+      </p:grpSpPr>
+      <p:sp>
+        <p:nvSpPr>
+          <p:cNvPr id="4" name="標題 3">
+            <a:extLst>
+              <a:ext uri="{FF2B5EF4-FFF2-40B4-BE49-F238E27FC236}">
+                <a16:creationId xmlns:a16="http://schemas.microsoft.com/office/drawing/2014/main" id="{DFD08DEE-E338-76C7-E961-2C2D593CEFB2}"/>
+              </a:ext>
+            </a:extLst>
+          </p:cNvPr>
+          <p:cNvSpPr>
+            <a:spLocks noGrp="1"/>
+          </p:cNvSpPr>
+          <p:nvPr>
+            <p:ph type="title"/>
+          </p:nvPr>
+        </p:nvSpPr>
+        <p:spPr>
+          <a:xfrm>
+            <a:off x="471487" y="312821"/>
+            <a:ext cx="5915025" cy="647480"/>
+          </a:xfrm>
+        </p:spPr>
+        <p:txBody>
+          <a:bodyPr/>
+          <a:lstStyle/>
+          <a:p>
+            <a:r>
+              <a:rPr lang="zh-TW" altLang="en-US">
+                <a:latin typeface="Noto Serif TC Black" panose="02020200000000000000" pitchFamily="18" charset="-128"/>
+                <a:ea typeface="Noto Serif TC Black" panose="02020200000000000000" pitchFamily="18" charset="-128"/>
+              </a:rPr>
+              <a:t>八音變調圖</a:t>
+            </a:r>
+          </a:p>
+        </p:txBody>
+      </p:sp>
+      <p:pic>
+        <p:nvPicPr>
+          <p:cNvPr id="3" name="圖片 2">
+            <a:extLst>
+              <a:ext uri="{FF2B5EF4-FFF2-40B4-BE49-F238E27FC236}">
+                <a16:creationId xmlns:a16="http://schemas.microsoft.com/office/drawing/2014/main" id="{737A70BC-4614-0E78-8279-6151A4F11E01}"/>
+              </a:ext>
+            </a:extLst>
+          </p:cNvPr>
+          <p:cNvPicPr>
+            <a:picLocks noGrp="1" noRot="1" noChangeAspect="1" noMove="1" noResize="1" noEditPoints="1" noAdjustHandles="1" noChangeArrowheads="1" noChangeShapeType="1" noCrop="1"/>
+          </p:cNvPicPr>
+          <p:nvPr/>
+        </p:nvPicPr>
+        <p:blipFill>
+          <a:blip r:embed="rId2">
+            <a:grayscl/>
+            <a:alphaModFix amt="13000"/>
+          </a:blip>
+          <a:stretch>
+            <a:fillRect/>
+          </a:stretch>
+        </p:blipFill>
+        <p:spPr>
+          <a:xfrm>
+            <a:off x="0" y="1560709"/>
+            <a:ext cx="6858000" cy="10064496"/>
+          </a:xfrm>
+          <a:prstGeom prst="rect">
+            <a:avLst/>
+          </a:prstGeom>
+        </p:spPr>
+      </p:pic>
+      <p:sp>
+        <p:nvSpPr>
+          <p:cNvPr id="5" name="流程圖: 替代程序 4">
+            <a:extLst>
+              <a:ext uri="{FF2B5EF4-FFF2-40B4-BE49-F238E27FC236}">
+                <a16:creationId xmlns:a16="http://schemas.microsoft.com/office/drawing/2014/main" id="{30D6E88B-576A-DFA8-2D79-A0745A9F8092}"/>
+              </a:ext>
+            </a:extLst>
+          </p:cNvPr>
+          <p:cNvSpPr/>
+          <p:nvPr/>
+        </p:nvSpPr>
+        <p:spPr>
+          <a:xfrm>
+            <a:off x="1113183" y="1757238"/>
+            <a:ext cx="2083241" cy="755374"/>
+          </a:xfrm>
+          <a:prstGeom prst="flowChartAlternateProcess">
+            <a:avLst/>
+          </a:prstGeom>
+        </p:spPr>
+        <p:style>
+          <a:lnRef idx="2">
+            <a:schemeClr val="accent1">
+              <a:shade val="15000"/>
+            </a:schemeClr>
+          </a:lnRef>
+          <a:fillRef idx="1">
+            <a:schemeClr val="accent1"/>
+          </a:fillRef>
+          <a:effectRef idx="0">
+            <a:schemeClr val="accent1"/>
+          </a:effectRef>
+          <a:fontRef idx="minor">
+            <a:schemeClr val="lt1"/>
+          </a:fontRef>
+        </p:style>
+        <p:txBody>
+          <a:bodyPr rtlCol="0" anchor="ctr"/>
+          <a:lstStyle/>
+          <a:p>
+            <a:pPr algn="ctr"/>
+            <a:endParaRPr lang="zh-TW" altLang="en-US"/>
+          </a:p>
+        </p:txBody>
+      </p:sp>
+      <p:sp>
+        <p:nvSpPr>
+          <p:cNvPr id="6" name="流程圖: 替代程序 5">
+            <a:extLst>
+              <a:ext uri="{FF2B5EF4-FFF2-40B4-BE49-F238E27FC236}">
+                <a16:creationId xmlns:a16="http://schemas.microsoft.com/office/drawing/2014/main" id="{ECD8560F-3EC6-ECC8-FA31-DF19BE8CF860}"/>
+              </a:ext>
+            </a:extLst>
+          </p:cNvPr>
+          <p:cNvSpPr/>
+          <p:nvPr/>
+        </p:nvSpPr>
+        <p:spPr>
+          <a:xfrm>
+            <a:off x="1113180" y="3286057"/>
+            <a:ext cx="2083241" cy="755374"/>
+          </a:xfrm>
+          <a:prstGeom prst="flowChartAlternateProcess">
+            <a:avLst/>
+          </a:prstGeom>
+        </p:spPr>
+        <p:style>
+          <a:lnRef idx="2">
+            <a:schemeClr val="accent1">
+              <a:shade val="15000"/>
+            </a:schemeClr>
+          </a:lnRef>
+          <a:fillRef idx="1">
+            <a:schemeClr val="accent1"/>
+          </a:fillRef>
+          <a:effectRef idx="0">
+            <a:schemeClr val="accent1"/>
+          </a:effectRef>
+          <a:fontRef idx="minor">
+            <a:schemeClr val="lt1"/>
+          </a:fontRef>
+        </p:style>
+        <p:txBody>
+          <a:bodyPr rtlCol="0" anchor="ctr"/>
+          <a:lstStyle/>
+          <a:p>
+            <a:pPr algn="ctr"/>
+            <a:endParaRPr lang="zh-TW" altLang="en-US"/>
+          </a:p>
+        </p:txBody>
+      </p:sp>
+      <p:sp>
+        <p:nvSpPr>
+          <p:cNvPr id="7" name="流程圖: 替代程序 6">
+            <a:extLst>
+              <a:ext uri="{FF2B5EF4-FFF2-40B4-BE49-F238E27FC236}">
+                <a16:creationId xmlns:a16="http://schemas.microsoft.com/office/drawing/2014/main" id="{81060C4D-40F4-AA14-CB1C-DB7DBBC4510E}"/>
+              </a:ext>
+            </a:extLst>
+          </p:cNvPr>
+          <p:cNvSpPr/>
+          <p:nvPr/>
+        </p:nvSpPr>
+        <p:spPr>
+          <a:xfrm>
+            <a:off x="1113181" y="4838368"/>
+            <a:ext cx="2083241" cy="755374"/>
+          </a:xfrm>
+          <a:prstGeom prst="flowChartAlternateProcess">
+            <a:avLst/>
+          </a:prstGeom>
+        </p:spPr>
+        <p:style>
+          <a:lnRef idx="2">
+            <a:schemeClr val="accent1">
+              <a:shade val="15000"/>
+            </a:schemeClr>
+          </a:lnRef>
+          <a:fillRef idx="1">
+            <a:schemeClr val="accent1"/>
+          </a:fillRef>
+          <a:effectRef idx="0">
+            <a:schemeClr val="accent1"/>
+          </a:effectRef>
+          <a:fontRef idx="minor">
+            <a:schemeClr val="lt1"/>
+          </a:fontRef>
+        </p:style>
+        <p:txBody>
+          <a:bodyPr rtlCol="0" anchor="ctr"/>
+          <a:lstStyle/>
+          <a:p>
+            <a:pPr algn="ctr"/>
+            <a:endParaRPr lang="zh-TW" altLang="en-US"/>
+          </a:p>
+        </p:txBody>
+      </p:sp>
+      <p:sp>
+        <p:nvSpPr>
+          <p:cNvPr id="8" name="流程圖: 替代程序 7">
+            <a:extLst>
+              <a:ext uri="{FF2B5EF4-FFF2-40B4-BE49-F238E27FC236}">
+                <a16:creationId xmlns:a16="http://schemas.microsoft.com/office/drawing/2014/main" id="{CF531656-7385-FA41-49E3-2B62D79C7048}"/>
+              </a:ext>
+            </a:extLst>
+          </p:cNvPr>
+          <p:cNvSpPr/>
+          <p:nvPr/>
+        </p:nvSpPr>
+        <p:spPr>
+          <a:xfrm>
+            <a:off x="1113182" y="6914984"/>
+            <a:ext cx="2083241" cy="755374"/>
+          </a:xfrm>
+          <a:prstGeom prst="flowChartAlternateProcess">
+            <a:avLst/>
+          </a:prstGeom>
+        </p:spPr>
+        <p:style>
+          <a:lnRef idx="2">
+            <a:schemeClr val="accent1">
+              <a:shade val="15000"/>
+            </a:schemeClr>
+          </a:lnRef>
+          <a:fillRef idx="1">
+            <a:schemeClr val="accent1"/>
+          </a:fillRef>
+          <a:effectRef idx="0">
+            <a:schemeClr val="accent1"/>
+          </a:effectRef>
+          <a:fontRef idx="minor">
+            <a:schemeClr val="lt1"/>
+          </a:fontRef>
+        </p:style>
+        <p:txBody>
+          <a:bodyPr rtlCol="0" anchor="ctr"/>
+          <a:lstStyle/>
+          <a:p>
+            <a:pPr algn="ctr"/>
+            <a:endParaRPr lang="zh-TW" altLang="en-US"/>
+          </a:p>
+        </p:txBody>
+      </p:sp>
+      <p:sp>
+        <p:nvSpPr>
+          <p:cNvPr id="9" name="流程圖: 替代程序 8">
+            <a:extLst>
+              <a:ext uri="{FF2B5EF4-FFF2-40B4-BE49-F238E27FC236}">
+                <a16:creationId xmlns:a16="http://schemas.microsoft.com/office/drawing/2014/main" id="{9FA0335D-B031-0198-9D8D-3904B6B43D31}"/>
+              </a:ext>
+            </a:extLst>
+          </p:cNvPr>
+          <p:cNvSpPr/>
+          <p:nvPr/>
+        </p:nvSpPr>
+        <p:spPr>
+          <a:xfrm>
+            <a:off x="4422249" y="6914984"/>
+            <a:ext cx="2083241" cy="755374"/>
+          </a:xfrm>
+          <a:prstGeom prst="flowChartAlternateProcess">
+            <a:avLst/>
+          </a:prstGeom>
+        </p:spPr>
+        <p:style>
+          <a:lnRef idx="2">
+            <a:schemeClr val="accent1">
+              <a:shade val="15000"/>
+            </a:schemeClr>
+          </a:lnRef>
+          <a:fillRef idx="1">
+            <a:schemeClr val="accent1"/>
+          </a:fillRef>
+          <a:effectRef idx="0">
+            <a:schemeClr val="accent1"/>
+          </a:effectRef>
+          <a:fontRef idx="minor">
+            <a:schemeClr val="lt1"/>
+          </a:fontRef>
+        </p:style>
+        <p:txBody>
+          <a:bodyPr rtlCol="0" anchor="ctr"/>
+          <a:lstStyle/>
+          <a:p>
+            <a:pPr algn="ctr"/>
+            <a:endParaRPr lang="zh-TW" altLang="en-US"/>
+          </a:p>
+        </p:txBody>
+      </p:sp>
+      <p:sp>
+        <p:nvSpPr>
+          <p:cNvPr id="10" name="流程圖: 替代程序 9">
+            <a:extLst>
+              <a:ext uri="{FF2B5EF4-FFF2-40B4-BE49-F238E27FC236}">
+                <a16:creationId xmlns:a16="http://schemas.microsoft.com/office/drawing/2014/main" id="{B56F0ADC-DE2B-63A0-3DFE-F5ACA278E98F}"/>
+              </a:ext>
+            </a:extLst>
+          </p:cNvPr>
+          <p:cNvSpPr/>
+          <p:nvPr/>
+        </p:nvSpPr>
+        <p:spPr>
+          <a:xfrm>
+            <a:off x="4422250" y="4841019"/>
+            <a:ext cx="2083241" cy="755374"/>
+          </a:xfrm>
+          <a:prstGeom prst="flowChartAlternateProcess">
+            <a:avLst/>
+          </a:prstGeom>
+        </p:spPr>
+        <p:style>
+          <a:lnRef idx="2">
+            <a:schemeClr val="accent1">
+              <a:shade val="15000"/>
+            </a:schemeClr>
+          </a:lnRef>
+          <a:fillRef idx="1">
+            <a:schemeClr val="accent1"/>
+          </a:fillRef>
+          <a:effectRef idx="0">
+            <a:schemeClr val="accent1"/>
+          </a:effectRef>
+          <a:fontRef idx="minor">
+            <a:schemeClr val="lt1"/>
+          </a:fontRef>
+        </p:style>
+        <p:txBody>
+          <a:bodyPr rtlCol="0" anchor="ctr"/>
+          <a:lstStyle/>
+          <a:p>
+            <a:pPr algn="ctr"/>
+            <a:endParaRPr lang="zh-TW" altLang="en-US"/>
+          </a:p>
+        </p:txBody>
+      </p:sp>
+      <p:sp>
+        <p:nvSpPr>
+          <p:cNvPr id="11" name="流程圖: 替代程序 10">
+            <a:extLst>
+              <a:ext uri="{FF2B5EF4-FFF2-40B4-BE49-F238E27FC236}">
+                <a16:creationId xmlns:a16="http://schemas.microsoft.com/office/drawing/2014/main" id="{E847B6F9-01E4-BE37-0DFF-2D1F2BED4E4A}"/>
+              </a:ext>
+            </a:extLst>
+          </p:cNvPr>
+          <p:cNvSpPr/>
+          <p:nvPr/>
+        </p:nvSpPr>
+        <p:spPr>
+          <a:xfrm>
+            <a:off x="4422250" y="1757238"/>
+            <a:ext cx="2083241" cy="755374"/>
+          </a:xfrm>
+          <a:prstGeom prst="flowChartAlternateProcess">
+            <a:avLst/>
+          </a:prstGeom>
+        </p:spPr>
+        <p:style>
+          <a:lnRef idx="2">
+            <a:schemeClr val="accent1">
+              <a:shade val="15000"/>
+            </a:schemeClr>
+          </a:lnRef>
+          <a:fillRef idx="1">
+            <a:schemeClr val="accent1"/>
+          </a:fillRef>
+          <a:effectRef idx="0">
+            <a:schemeClr val="accent1"/>
+          </a:effectRef>
+          <a:fontRef idx="minor">
+            <a:schemeClr val="lt1"/>
+          </a:fontRef>
+        </p:style>
+        <p:txBody>
+          <a:bodyPr rtlCol="0" anchor="ctr"/>
+          <a:lstStyle/>
+          <a:p>
+            <a:pPr algn="ctr"/>
+            <a:endParaRPr lang="zh-TW" altLang="en-US"/>
+          </a:p>
+        </p:txBody>
+      </p:sp>
+      <p:cxnSp>
+        <p:nvCxnSpPr>
+          <p:cNvPr id="13" name="接點: 肘形 12">
+            <a:extLst>
+              <a:ext uri="{FF2B5EF4-FFF2-40B4-BE49-F238E27FC236}">
+                <a16:creationId xmlns:a16="http://schemas.microsoft.com/office/drawing/2014/main" id="{C26424D9-1F0F-27AF-29AA-110DC9321F57}"/>
+              </a:ext>
+            </a:extLst>
+          </p:cNvPr>
+          <p:cNvCxnSpPr>
+            <a:cxnSpLocks/>
+            <a:stCxn id="9" idx="0"/>
+            <a:endCxn id="7" idx="2"/>
+          </p:cNvCxnSpPr>
+          <p:nvPr/>
+        </p:nvCxnSpPr>
+        <p:spPr>
+          <a:xfrm rot="16200000" flipV="1">
+            <a:off x="3148715" y="4599829"/>
+            <a:ext cx="1321242" cy="3309068"/>
+          </a:xfrm>
+          <a:prstGeom prst="bentConnector3">
+            <a:avLst>
+              <a:gd name="adj1" fmla="val 50000"/>
+            </a:avLst>
+          </a:prstGeom>
+          <a:ln>
+            <a:solidFill>
+              <a:schemeClr val="accent6"/>
+            </a:solidFill>
+            <a:prstDash val="sysDash"/>
+            <a:tailEnd type="triangle"/>
+          </a:ln>
+        </p:spPr>
+        <p:style>
+          <a:lnRef idx="2">
+            <a:schemeClr val="accent1"/>
+          </a:lnRef>
+          <a:fillRef idx="0">
+            <a:schemeClr val="accent1"/>
+          </a:fillRef>
+          <a:effectRef idx="1">
+            <a:schemeClr val="accent1"/>
+          </a:effectRef>
+          <a:fontRef idx="minor">
+            <a:schemeClr val="tx1"/>
+          </a:fontRef>
+        </p:style>
+      </p:cxnSp>
+      <p:cxnSp>
+        <p:nvCxnSpPr>
+          <p:cNvPr id="17" name="接點: 肘形 16">
+            <a:extLst>
+              <a:ext uri="{FF2B5EF4-FFF2-40B4-BE49-F238E27FC236}">
+                <a16:creationId xmlns:a16="http://schemas.microsoft.com/office/drawing/2014/main" id="{B58633B8-958C-7FE1-C32C-DE0E4705EA83}"/>
+              </a:ext>
+            </a:extLst>
+          </p:cNvPr>
+          <p:cNvCxnSpPr>
+            <a:cxnSpLocks noGrp="1" noRot="1" noMove="1" noResize="1" noEditPoints="1" noAdjustHandles="1" noChangeArrowheads="1" noChangeShapeType="1"/>
+          </p:cNvCxnSpPr>
+          <p:nvPr/>
+        </p:nvCxnSpPr>
+        <p:spPr>
+          <a:xfrm rot="16200000" flipH="1">
+            <a:off x="2822713" y="2516583"/>
+            <a:ext cx="2325759" cy="2258174"/>
+          </a:xfrm>
+          <a:prstGeom prst="bentConnector3">
+            <a:avLst>
+              <a:gd name="adj1" fmla="val 16838"/>
+            </a:avLst>
+          </a:prstGeom>
+          <a:ln>
+            <a:tailEnd type="triangle"/>
+          </a:ln>
+        </p:spPr>
+        <p:style>
+          <a:lnRef idx="2">
+            <a:schemeClr val="accent1"/>
+          </a:lnRef>
+          <a:fillRef idx="0">
+            <a:schemeClr val="accent1"/>
+          </a:fillRef>
+          <a:effectRef idx="1">
+            <a:schemeClr val="accent1"/>
+          </a:effectRef>
+          <a:fontRef idx="minor">
+            <a:schemeClr val="tx1"/>
+          </a:fontRef>
+        </p:style>
+      </p:cxnSp>
+      <p:cxnSp>
+        <p:nvCxnSpPr>
+          <p:cNvPr id="28" name="直線單箭頭接點 27">
+            <a:extLst>
+              <a:ext uri="{FF2B5EF4-FFF2-40B4-BE49-F238E27FC236}">
+                <a16:creationId xmlns:a16="http://schemas.microsoft.com/office/drawing/2014/main" id="{D5BDFFBE-AFBE-A60E-D25C-55ABD9E689F3}"/>
+              </a:ext>
+            </a:extLst>
+          </p:cNvPr>
+          <p:cNvCxnSpPr/>
+          <p:nvPr/>
+        </p:nvCxnSpPr>
+        <p:spPr>
+          <a:xfrm>
+            <a:off x="5764696" y="2512612"/>
+            <a:ext cx="0" cy="2325756"/>
+          </a:xfrm>
+          <a:prstGeom prst="straightConnector1">
+            <a:avLst/>
+          </a:prstGeom>
+          <a:ln>
+            <a:tailEnd type="triangle"/>
+          </a:ln>
+        </p:spPr>
+        <p:style>
+          <a:lnRef idx="2">
+            <a:schemeClr val="accent1"/>
+          </a:lnRef>
+          <a:fillRef idx="0">
+            <a:schemeClr val="accent1"/>
+          </a:fillRef>
+          <a:effectRef idx="1">
+            <a:schemeClr val="accent1"/>
+          </a:effectRef>
+          <a:fontRef idx="minor">
+            <a:schemeClr val="tx1"/>
+          </a:fontRef>
+        </p:style>
+      </p:cxnSp>
+      <p:cxnSp>
+        <p:nvCxnSpPr>
+          <p:cNvPr id="29" name="直線單箭頭接點 28">
+            <a:extLst>
+              <a:ext uri="{FF2B5EF4-FFF2-40B4-BE49-F238E27FC236}">
+                <a16:creationId xmlns:a16="http://schemas.microsoft.com/office/drawing/2014/main" id="{232A6B40-9CC9-E30A-5DF4-703E30718897}"/>
+              </a:ext>
+            </a:extLst>
+          </p:cNvPr>
+          <p:cNvCxnSpPr>
+            <a:cxnSpLocks/>
+          </p:cNvCxnSpPr>
+          <p:nvPr/>
+        </p:nvCxnSpPr>
+        <p:spPr>
+          <a:xfrm flipH="1">
+            <a:off x="3196421" y="7383451"/>
+            <a:ext cx="1225827" cy="0"/>
+          </a:xfrm>
+          <a:prstGeom prst="straightConnector1">
+            <a:avLst/>
+          </a:prstGeom>
+          <a:ln>
+            <a:solidFill>
+              <a:schemeClr val="accent6"/>
+            </a:solidFill>
+            <a:tailEnd type="triangle"/>
+          </a:ln>
+        </p:spPr>
+        <p:style>
+          <a:lnRef idx="2">
+            <a:schemeClr val="accent1"/>
+          </a:lnRef>
+          <a:fillRef idx="0">
+            <a:schemeClr val="accent1"/>
+          </a:fillRef>
+          <a:effectRef idx="1">
+            <a:schemeClr val="accent1"/>
+          </a:effectRef>
+          <a:fontRef idx="minor">
+            <a:schemeClr val="tx1"/>
+          </a:fontRef>
+        </p:style>
+      </p:cxnSp>
+      <p:cxnSp>
+        <p:nvCxnSpPr>
+          <p:cNvPr id="33" name="直線單箭頭接點 32">
+            <a:extLst>
+              <a:ext uri="{FF2B5EF4-FFF2-40B4-BE49-F238E27FC236}">
+                <a16:creationId xmlns:a16="http://schemas.microsoft.com/office/drawing/2014/main" id="{A73E0610-D5F4-517A-C94C-680E6CC10FF2}"/>
+              </a:ext>
+            </a:extLst>
+          </p:cNvPr>
+          <p:cNvCxnSpPr>
+            <a:cxnSpLocks/>
+          </p:cNvCxnSpPr>
+          <p:nvPr/>
+        </p:nvCxnSpPr>
+        <p:spPr>
+          <a:xfrm>
+            <a:off x="3196420" y="7173408"/>
+            <a:ext cx="1225827" cy="0"/>
+          </a:xfrm>
+          <a:prstGeom prst="straightConnector1">
+            <a:avLst/>
+          </a:prstGeom>
+          <a:ln>
+            <a:solidFill>
+              <a:schemeClr val="accent5"/>
+            </a:solidFill>
+            <a:tailEnd type="triangle"/>
+          </a:ln>
+        </p:spPr>
+        <p:style>
+          <a:lnRef idx="2">
+            <a:schemeClr val="accent1"/>
+          </a:lnRef>
+          <a:fillRef idx="0">
+            <a:schemeClr val="accent1"/>
+          </a:fillRef>
+          <a:effectRef idx="1">
+            <a:schemeClr val="accent1"/>
+          </a:effectRef>
+          <a:fontRef idx="minor">
+            <a:schemeClr val="tx1"/>
+          </a:fontRef>
+        </p:style>
+      </p:cxnSp>
+      <p:cxnSp>
+        <p:nvCxnSpPr>
+          <p:cNvPr id="34" name="直線單箭頭接點 33">
+            <a:extLst>
+              <a:ext uri="{FF2B5EF4-FFF2-40B4-BE49-F238E27FC236}">
+                <a16:creationId xmlns:a16="http://schemas.microsoft.com/office/drawing/2014/main" id="{2A17D67A-7327-4DF7-5E0F-E3CB31DB1B9D}"/>
+              </a:ext>
+            </a:extLst>
+          </p:cNvPr>
+          <p:cNvCxnSpPr>
+            <a:cxnSpLocks/>
+          </p:cNvCxnSpPr>
+          <p:nvPr/>
+        </p:nvCxnSpPr>
+        <p:spPr>
+          <a:xfrm flipH="1">
+            <a:off x="3196420" y="5174312"/>
+            <a:ext cx="1225827" cy="0"/>
+          </a:xfrm>
+          <a:prstGeom prst="straightConnector1">
+            <a:avLst/>
+          </a:prstGeom>
+          <a:ln>
+            <a:tailEnd type="triangle"/>
+          </a:ln>
+        </p:spPr>
+        <p:style>
+          <a:lnRef idx="2">
+            <a:schemeClr val="accent1"/>
+          </a:lnRef>
+          <a:fillRef idx="0">
+            <a:schemeClr val="accent1"/>
+          </a:fillRef>
+          <a:effectRef idx="1">
+            <a:schemeClr val="accent1"/>
+          </a:effectRef>
+          <a:fontRef idx="minor">
+            <a:schemeClr val="tx1"/>
+          </a:fontRef>
+        </p:style>
+      </p:cxnSp>
+      <p:cxnSp>
+        <p:nvCxnSpPr>
+          <p:cNvPr id="37" name="直線單箭頭接點 36">
+            <a:extLst>
+              <a:ext uri="{FF2B5EF4-FFF2-40B4-BE49-F238E27FC236}">
+                <a16:creationId xmlns:a16="http://schemas.microsoft.com/office/drawing/2014/main" id="{84728C71-BFAE-BAF6-F5F2-E8ECDFA168CE}"/>
+              </a:ext>
+            </a:extLst>
+          </p:cNvPr>
+          <p:cNvCxnSpPr>
+            <a:cxnSpLocks/>
+          </p:cNvCxnSpPr>
+          <p:nvPr/>
+        </p:nvCxnSpPr>
+        <p:spPr>
+          <a:xfrm flipH="1" flipV="1">
+            <a:off x="2115046" y="4041431"/>
+            <a:ext cx="1" cy="796937"/>
+          </a:xfrm>
+          <a:prstGeom prst="straightConnector1">
+            <a:avLst/>
+          </a:prstGeom>
+          <a:ln>
+            <a:tailEnd type="triangle"/>
+          </a:ln>
+        </p:spPr>
+        <p:style>
+          <a:lnRef idx="2">
+            <a:schemeClr val="accent1"/>
+          </a:lnRef>
+          <a:fillRef idx="0">
+            <a:schemeClr val="accent1"/>
+          </a:fillRef>
+          <a:effectRef idx="1">
+            <a:schemeClr val="accent1"/>
+          </a:effectRef>
+          <a:fontRef idx="minor">
+            <a:schemeClr val="tx1"/>
+          </a:fontRef>
+        </p:style>
+      </p:cxnSp>
+      <p:cxnSp>
+        <p:nvCxnSpPr>
+          <p:cNvPr id="41" name="直線單箭頭接點 40">
+            <a:extLst>
+              <a:ext uri="{FF2B5EF4-FFF2-40B4-BE49-F238E27FC236}">
+                <a16:creationId xmlns:a16="http://schemas.microsoft.com/office/drawing/2014/main" id="{1446E769-8390-0499-1F71-DEC1F30C550E}"/>
+              </a:ext>
+            </a:extLst>
+          </p:cNvPr>
+          <p:cNvCxnSpPr>
+            <a:cxnSpLocks/>
+          </p:cNvCxnSpPr>
+          <p:nvPr/>
+        </p:nvCxnSpPr>
+        <p:spPr>
+          <a:xfrm flipV="1">
+            <a:off x="2115046" y="2512612"/>
+            <a:ext cx="3" cy="773445"/>
+          </a:xfrm>
+          <a:prstGeom prst="straightConnector1">
+            <a:avLst/>
+          </a:prstGeom>
+          <a:ln>
+            <a:tailEnd type="triangle"/>
+          </a:ln>
+        </p:spPr>
+        <p:style>
+          <a:lnRef idx="2">
+            <a:schemeClr val="accent1"/>
+          </a:lnRef>
+          <a:fillRef idx="0">
+            <a:schemeClr val="accent1"/>
+          </a:fillRef>
+          <a:effectRef idx="1">
+            <a:schemeClr val="accent1"/>
+          </a:effectRef>
+          <a:fontRef idx="minor">
+            <a:schemeClr val="tx1"/>
+          </a:fontRef>
+        </p:style>
+      </p:cxnSp>
+      <p:sp>
+        <p:nvSpPr>
+          <p:cNvPr id="72" name="左中括弧 71">
+            <a:extLst>
+              <a:ext uri="{FF2B5EF4-FFF2-40B4-BE49-F238E27FC236}">
+                <a16:creationId xmlns:a16="http://schemas.microsoft.com/office/drawing/2014/main" id="{B8141D24-4E8E-40A0-AC32-3F06E1469F4E}"/>
+              </a:ext>
+            </a:extLst>
+          </p:cNvPr>
+          <p:cNvSpPr>
+            <a:spLocks noGrp="1" noRot="1" noMove="1" noResize="1" noEditPoints="1" noAdjustHandles="1" noChangeArrowheads="1" noChangeShapeType="1"/>
+          </p:cNvSpPr>
+          <p:nvPr/>
+        </p:nvSpPr>
+        <p:spPr>
+          <a:xfrm>
+            <a:off x="371721" y="3692797"/>
+            <a:ext cx="741455" cy="3599874"/>
+          </a:xfrm>
+          <a:prstGeom prst="leftBracket">
+            <a:avLst>
+              <a:gd name="adj" fmla="val 0"/>
+            </a:avLst>
+          </a:prstGeom>
+          <a:ln>
+            <a:solidFill>
+              <a:schemeClr val="accent5"/>
+            </a:solidFill>
+            <a:prstDash val="sysDash"/>
+            <a:headEnd type="none"/>
+            <a:tailEnd type="triangle"/>
+          </a:ln>
+        </p:spPr>
+        <p:style>
+          <a:lnRef idx="2">
+            <a:schemeClr val="accent1"/>
+          </a:lnRef>
+          <a:fillRef idx="0">
+            <a:schemeClr val="accent1"/>
+          </a:fillRef>
+          <a:effectRef idx="1">
+            <a:schemeClr val="accent1"/>
+          </a:effectRef>
+          <a:fontRef idx="minor">
+            <a:schemeClr val="tx1"/>
+          </a:fontRef>
+        </p:style>
+        <p:txBody>
+          <a:bodyPr rtlCol="0" anchor="ctr"/>
+          <a:lstStyle/>
+          <a:p>
+            <a:pPr algn="ctr"/>
+            <a:endParaRPr lang="zh-TW" altLang="en-US"/>
+          </a:p>
+        </p:txBody>
+      </p:sp>
+    </p:spTree>
+    <p:extLst>
+      <p:ext uri="{BB962C8B-B14F-4D97-AF65-F5344CB8AC3E}">
+        <p14:creationId xmlns:p14="http://schemas.microsoft.com/office/powerpoint/2010/main" val="33361210"/>
+      </p:ext>
+    </p:extLst>
+  </p:cSld>
+  <p:clrMapOvr>
+    <a:masterClrMapping/>
+  </p:clrMapOvr>
+</p:sld>
+</file>
+
 <file path=ppt/slides/slide2.xml><?xml version="1.0" encoding="utf-8"?>
 <p:sld xmlns:a="http://schemas.openxmlformats.org/drawingml/2006/main" xmlns:r="http://schemas.openxmlformats.org/officeDocument/2006/relationships" xmlns:p="http://schemas.openxmlformats.org/presentationml/2006/main">
   <p:cSld>
@@ -7699,14 +9990,14 @@
 </file>
 
 <file path=ppt/slides/slide6.xml><?xml version="1.0" encoding="utf-8"?>
-<p:sld xmlns:a="http://schemas.openxmlformats.org/drawingml/2006/main" xmlns:r="http://schemas.openxmlformats.org/officeDocument/2006/relationships" xmlns:p="http://schemas.openxmlformats.org/presentationml/2006/main" show="0">
+<p:sld xmlns:a="http://schemas.openxmlformats.org/drawingml/2006/main" xmlns:r="http://schemas.openxmlformats.org/officeDocument/2006/relationships" xmlns:p="http://schemas.openxmlformats.org/presentationml/2006/main">
   <p:cSld>
     <p:spTree>
       <p:nvGrpSpPr>
         <p:cNvPr id="1" name="">
           <a:extLst>
             <a:ext uri="{FF2B5EF4-FFF2-40B4-BE49-F238E27FC236}">
-              <a16:creationId xmlns:a16="http://schemas.microsoft.com/office/drawing/2014/main" id="{33E010FF-764B-225B-1CA8-AED051EC8BBF}"/>
+              <a16:creationId xmlns:a16="http://schemas.microsoft.com/office/drawing/2014/main" id="{A021C74E-B8A0-8BF9-79C1-CD37767C0CA1}"/>
             </a:ext>
           </a:extLst>
         </p:cNvPr>
@@ -7723,10 +10014,47 @@
       </p:grpSpPr>
       <p:sp>
         <p:nvSpPr>
-          <p:cNvPr id="4" name="標題 3">
-            <a:extLst>
-              <a:ext uri="{FF2B5EF4-FFF2-40B4-BE49-F238E27FC236}">
-                <a16:creationId xmlns:a16="http://schemas.microsoft.com/office/drawing/2014/main" id="{2B28A89C-85E4-5C54-20D9-55615F1BA072}"/>
+          <p:cNvPr id="11" name="投影片編號版面配置區 10">
+            <a:extLst>
+              <a:ext uri="{FF2B5EF4-FFF2-40B4-BE49-F238E27FC236}">
+                <a16:creationId xmlns:a16="http://schemas.microsoft.com/office/drawing/2014/main" id="{81F2B96F-D8C9-9475-86BB-73518CB49C53}"/>
+              </a:ext>
+            </a:extLst>
+          </p:cNvPr>
+          <p:cNvSpPr>
+            <a:spLocks noGrp="1"/>
+          </p:cNvSpPr>
+          <p:nvPr>
+            <p:ph type="sldNum" sz="quarter" idx="12"/>
+          </p:nvPr>
+        </p:nvSpPr>
+        <p:spPr/>
+        <p:txBody>
+          <a:bodyPr rtlCol="0"/>
+          <a:lstStyle/>
+          <a:p>
+            <a:pPr rtl="0"/>
+            <a:fld id="{D8DA9DAA-006C-4F4B-980E-E3DF019B24E2}" type="slidenum">
+              <a:rPr lang="en-US" altLang="zh-TW" smtClean="0">
+                <a:latin typeface="Microsoft JhengHei UI" panose="020B0604030504040204" pitchFamily="34" charset="-120"/>
+                <a:ea typeface="Microsoft JhengHei UI" panose="020B0604030504040204" pitchFamily="34" charset="-120"/>
+              </a:rPr>
+              <a:pPr rtl="0"/>
+              <a:t>6</a:t>
+            </a:fld>
+            <a:endParaRPr lang="zh-TW" altLang="en-US">
+              <a:latin typeface="Microsoft JhengHei UI" panose="020B0604030504040204" pitchFamily="34" charset="-120"/>
+              <a:ea typeface="Microsoft JhengHei UI" panose="020B0604030504040204" pitchFamily="34" charset="-120"/>
+            </a:endParaRPr>
+          </a:p>
+        </p:txBody>
+      </p:sp>
+      <p:sp>
+        <p:nvSpPr>
+          <p:cNvPr id="7" name="標題 6">
+            <a:extLst>
+              <a:ext uri="{FF2B5EF4-FFF2-40B4-BE49-F238E27FC236}">
+                <a16:creationId xmlns:a16="http://schemas.microsoft.com/office/drawing/2014/main" id="{42DE9A58-148E-5AA4-231C-FFF100390825}"/>
               </a:ext>
             </a:extLst>
           </p:cNvPr>
@@ -7739,12 +10067,14 @@
         </p:nvSpPr>
         <p:spPr>
           <a:xfrm>
-            <a:off x="471487" y="312821"/>
-            <a:ext cx="5915025" cy="647480"/>
-          </a:xfrm>
-        </p:spPr>
-        <p:txBody>
-          <a:bodyPr/>
+            <a:off x="237490" y="885138"/>
+            <a:ext cx="5280808" cy="509524"/>
+          </a:xfrm>
+        </p:spPr>
+        <p:txBody>
+          <a:bodyPr>
+            <a:normAutofit/>
+          </a:bodyPr>
           <a:lstStyle/>
           <a:p>
             <a:r>
@@ -7752,42 +10082,61 @@
                 <a:latin typeface="Noto Serif TC Black" panose="02020200000000000000" pitchFamily="18" charset="-128"/>
                 <a:ea typeface="Noto Serif TC Black" panose="02020200000000000000" pitchFamily="18" charset="-128"/>
               </a:rPr>
-              <a:t>八音變調圖（台灣</a:t>
-            </a:r>
-            <a:r>
-              <a:rPr lang="en-US" altLang="zh-TW">
-                <a:latin typeface="Noto Serif TC Black" panose="02020200000000000000" pitchFamily="18" charset="-128"/>
-                <a:ea typeface="Noto Serif TC Black" panose="02020200000000000000" pitchFamily="18" charset="-128"/>
-              </a:rPr>
-              <a:t>/</a:t>
-            </a:r>
-            <a:r>
-              <a:rPr lang="zh-TW" altLang="en-US">
-                <a:latin typeface="Noto Serif TC Black" panose="02020200000000000000" pitchFamily="18" charset="-128"/>
-                <a:ea typeface="Noto Serif TC Black" panose="02020200000000000000" pitchFamily="18" charset="-128"/>
-              </a:rPr>
-              <a:t>廈門腔）</a:t>
-            </a:r>
-          </a:p>
-        </p:txBody>
-      </p:sp>
-      <p:sp>
-        <p:nvSpPr>
-          <p:cNvPr id="5" name="流程圖: 替代程序 4">
-            <a:extLst>
-              <a:ext uri="{FF2B5EF4-FFF2-40B4-BE49-F238E27FC236}">
-                <a16:creationId xmlns:a16="http://schemas.microsoft.com/office/drawing/2014/main" id="{F70ACDCF-4620-3F6A-E02D-11AFB8D27A86}"/>
-              </a:ext>
-            </a:extLst>
-          </p:cNvPr>
-          <p:cNvSpPr>
-            <a:spLocks noGrp="1" noRot="1" noMove="1" noResize="1" noEditPoints="1" noAdjustHandles="1" noChangeArrowheads="1" noChangeShapeType="1"/>
-          </p:cNvSpPr>
+              <a:t>八音變調規則圖</a:t>
+            </a:r>
+            <a:endParaRPr lang="zh-TW" altLang="en-US" dirty="0">
+              <a:solidFill>
+                <a:schemeClr val="accent5"/>
+              </a:solidFill>
+            </a:endParaRPr>
+          </a:p>
+        </p:txBody>
+      </p:sp>
+      <p:pic>
+        <p:nvPicPr>
+          <p:cNvPr id="4" name="圖片 3">
+            <a:extLst>
+              <a:ext uri="{FF2B5EF4-FFF2-40B4-BE49-F238E27FC236}">
+                <a16:creationId xmlns:a16="http://schemas.microsoft.com/office/drawing/2014/main" id="{F48DD8A0-3742-8A88-3818-53C08BAD4CBA}"/>
+              </a:ext>
+            </a:extLst>
+          </p:cNvPr>
+          <p:cNvPicPr>
+            <a:picLocks noChangeAspect="1"/>
+          </p:cNvPicPr>
           <p:nvPr/>
-        </p:nvSpPr>
+        </p:nvPicPr>
+        <p:blipFill>
+          <a:blip r:embed="rId3"/>
+          <a:stretch>
+            <a:fillRect/>
+          </a:stretch>
+        </p:blipFill>
         <p:spPr>
           <a:xfrm>
-            <a:off x="1113183" y="1290513"/>
+            <a:off x="249545" y="8782881"/>
+            <a:ext cx="6358908" cy="3513008"/>
+          </a:xfrm>
+          <a:prstGeom prst="rect">
+            <a:avLst/>
+          </a:prstGeom>
+        </p:spPr>
+      </p:pic>
+      <p:sp>
+        <p:nvSpPr>
+          <p:cNvPr id="2" name="流程圖: 替代程序 1">
+            <a:extLst>
+              <a:ext uri="{FF2B5EF4-FFF2-40B4-BE49-F238E27FC236}">
+                <a16:creationId xmlns:a16="http://schemas.microsoft.com/office/drawing/2014/main" id="{ED0AFEE9-A273-1F51-5065-673D8208075D}"/>
+              </a:ext>
+            </a:extLst>
+          </p:cNvPr>
+          <p:cNvSpPr/>
+          <p:nvPr/>
+        </p:nvSpPr>
+        <p:spPr>
+          <a:xfrm>
+            <a:off x="403746" y="1663099"/>
             <a:ext cx="2083241" cy="755374"/>
           </a:xfrm>
           <a:prstGeom prst="flowChartAlternateProcess">
@@ -7816,45 +10165,89 @@
           <a:p>
             <a:pPr algn="ctr"/>
             <a:r>
-              <a:rPr lang="en-US" altLang="zh-TW"/>
+              <a:rPr lang="en-US" altLang="zh-TW">
+                <a:effectLst>
+                  <a:outerShdw blurRad="38100" dist="38100" dir="2700000" algn="tl">
+                    <a:srgbClr val="000000">
+                      <a:alpha val="43137"/>
+                    </a:srgbClr>
+                  </a:outerShdw>
+                </a:effectLst>
+                <a:latin typeface="Charis SemiBold" panose="02000500060000020004" pitchFamily="2" charset="0"/>
+                <a:ea typeface="Noto Sans TC Medium" panose="020B0200000000000000" pitchFamily="34" charset="-128"/>
+              </a:rPr>
               <a:t>【1】</a:t>
             </a:r>
             <a:r>
-              <a:rPr lang="zh-TW" altLang="en-US"/>
-              <a:t>骹底</a:t>
-            </a:r>
-            <a:r>
-              <a:rPr lang="en-US" altLang="zh-TW"/>
-              <a:t> </a:t>
+              <a:rPr lang="zh-TW" altLang="en-US">
+                <a:effectLst>
+                  <a:outerShdw blurRad="38100" dist="38100" dir="2700000" algn="tl">
+                    <a:srgbClr val="000000">
+                      <a:alpha val="43137"/>
+                    </a:srgbClr>
+                  </a:outerShdw>
+                </a:effectLst>
+                <a:latin typeface="Charis SemiBold" panose="02000500060000020004" pitchFamily="2" charset="0"/>
+                <a:ea typeface="Noto Sans TC Medium" panose="020B0200000000000000" pitchFamily="34" charset="-128"/>
+              </a:rPr>
+              <a:t>花車</a:t>
             </a:r>
             <a:br>
-              <a:rPr lang="en-US" altLang="zh-TW"/>
+              <a:rPr lang="en-US" altLang="zh-TW">
+                <a:effectLst>
+                  <a:outerShdw blurRad="38100" dist="38100" dir="2700000" algn="tl">
+                    <a:srgbClr val="000000">
+                      <a:alpha val="43137"/>
+                    </a:srgbClr>
+                  </a:outerShdw>
+                </a:effectLst>
+                <a:latin typeface="Charis SemiBold" panose="02000500060000020004" pitchFamily="2" charset="0"/>
+                <a:ea typeface="Noto Sans TC Medium" panose="020B0200000000000000" pitchFamily="34" charset="-128"/>
+              </a:rPr>
             </a:br>
             <a:r>
-              <a:rPr lang="en-US" altLang="zh-TW"/>
-              <a:t>[ka¹⁻⁶ de³]</a:t>
-            </a:r>
-            <a:endParaRPr lang="zh-TW" altLang="en-US"/>
-          </a:p>
-        </p:txBody>
-      </p:sp>
-      <p:sp>
-        <p:nvSpPr>
-          <p:cNvPr id="6" name="流程圖: 替代程序 5">
-            <a:extLst>
-              <a:ext uri="{FF2B5EF4-FFF2-40B4-BE49-F238E27FC236}">
-                <a16:creationId xmlns:a16="http://schemas.microsoft.com/office/drawing/2014/main" id="{AE9DD801-585C-E1C4-C795-123E9850C3E2}"/>
-              </a:ext>
-            </a:extLst>
-          </p:cNvPr>
-          <p:cNvSpPr>
-            <a:spLocks noGrp="1" noRot="1" noMove="1" noResize="1" noEditPoints="1" noAdjustHandles="1" noChangeArrowheads="1" noChangeShapeType="1"/>
-          </p:cNvSpPr>
+              <a:rPr lang="en-US" altLang="zh-TW">
+                <a:effectLst>
+                  <a:outerShdw blurRad="38100" dist="38100" dir="2700000" algn="tl">
+                    <a:srgbClr val="000000">
+                      <a:alpha val="43137"/>
+                    </a:srgbClr>
+                  </a:outerShdw>
+                </a:effectLst>
+                <a:latin typeface="Charis SemiBold" panose="02000500060000020004" pitchFamily="2" charset="0"/>
+                <a:ea typeface="Noto Sans TC Medium" panose="020B0200000000000000" pitchFamily="34" charset="-128"/>
+              </a:rPr>
+              <a:t>[hue¹⁻⁶ cia¹]</a:t>
+            </a:r>
+            <a:endParaRPr lang="zh-TW" altLang="en-US">
+              <a:effectLst>
+                <a:outerShdw blurRad="38100" dist="38100" dir="2700000" algn="tl">
+                  <a:srgbClr val="000000">
+                    <a:alpha val="43137"/>
+                  </a:srgbClr>
+                </a:outerShdw>
+              </a:effectLst>
+              <a:latin typeface="Charis SemiBold" panose="02000500060000020004" pitchFamily="2" charset="0"/>
+              <a:ea typeface="Noto Sans TC Medium" panose="020B0200000000000000" pitchFamily="34" charset="-128"/>
+            </a:endParaRPr>
+          </a:p>
+        </p:txBody>
+      </p:sp>
+      <p:sp>
+        <p:nvSpPr>
+          <p:cNvPr id="3" name="流程圖: 替代程序 2">
+            <a:extLst>
+              <a:ext uri="{FF2B5EF4-FFF2-40B4-BE49-F238E27FC236}">
+                <a16:creationId xmlns:a16="http://schemas.microsoft.com/office/drawing/2014/main" id="{8284D1F8-72FB-1A7D-ABE4-29EB1DA6BB1E}"/>
+              </a:ext>
+            </a:extLst>
+          </p:cNvPr>
+          <p:cNvSpPr/>
           <p:nvPr/>
         </p:nvSpPr>
         <p:spPr>
           <a:xfrm>
-            <a:off x="1113180" y="2819332"/>
+            <a:off x="403746" y="4750904"/>
             <a:ext cx="2083241" cy="755374"/>
           </a:xfrm>
           <a:prstGeom prst="flowChartAlternateProcess">
@@ -7883,45 +10276,89 @@
           <a:p>
             <a:pPr algn="ctr"/>
             <a:r>
-              <a:rPr lang="en-US" altLang="zh-TW"/>
+              <a:rPr lang="en-US" altLang="zh-TW">
+                <a:effectLst>
+                  <a:outerShdw blurRad="38100" dist="38100" dir="2700000" algn="tl">
+                    <a:srgbClr val="000000">
+                      <a:alpha val="43137"/>
+                    </a:srgbClr>
+                  </a:outerShdw>
+                </a:effectLst>
+                <a:latin typeface="Charis SemiBold" panose="02000500060000020004" pitchFamily="2" charset="0"/>
+                <a:ea typeface="Noto Sans TC Medium" panose="020B0200000000000000" pitchFamily="34" charset="-128"/>
+              </a:rPr>
               <a:t>【3】</a:t>
             </a:r>
             <a:r>
-              <a:rPr lang="zh-TW" altLang="en-US"/>
-              <a:t>手心</a:t>
-            </a:r>
-            <a:r>
-              <a:rPr lang="en-US" altLang="zh-TW"/>
-              <a:t> </a:t>
+              <a:rPr lang="zh-TW" altLang="en-US">
+                <a:effectLst>
+                  <a:outerShdw blurRad="38100" dist="38100" dir="2700000" algn="tl">
+                    <a:srgbClr val="000000">
+                      <a:alpha val="43137"/>
+                    </a:srgbClr>
+                  </a:outerShdw>
+                </a:effectLst>
+                <a:latin typeface="Charis SemiBold" panose="02000500060000020004" pitchFamily="2" charset="0"/>
+                <a:ea typeface="Noto Sans TC Medium" panose="020B0200000000000000" pitchFamily="34" charset="-128"/>
+              </a:rPr>
+              <a:t>火車</a:t>
             </a:r>
             <a:br>
-              <a:rPr lang="en-US" altLang="zh-TW"/>
+              <a:rPr lang="en-US" altLang="zh-TW">
+                <a:effectLst>
+                  <a:outerShdw blurRad="38100" dist="38100" dir="2700000" algn="tl">
+                    <a:srgbClr val="000000">
+                      <a:alpha val="43137"/>
+                    </a:srgbClr>
+                  </a:outerShdw>
+                </a:effectLst>
+                <a:latin typeface="Charis SemiBold" panose="02000500060000020004" pitchFamily="2" charset="0"/>
+                <a:ea typeface="Noto Sans TC Medium" panose="020B0200000000000000" pitchFamily="34" charset="-128"/>
+              </a:rPr>
             </a:br>
             <a:r>
-              <a:rPr lang="en-US" altLang="zh-TW"/>
-              <a:t>[ciu³⁻¹ sim¹]</a:t>
-            </a:r>
-            <a:endParaRPr lang="zh-TW" altLang="en-US"/>
-          </a:p>
-        </p:txBody>
-      </p:sp>
-      <p:sp>
-        <p:nvSpPr>
-          <p:cNvPr id="7" name="流程圖: 替代程序 6">
-            <a:extLst>
-              <a:ext uri="{FF2B5EF4-FFF2-40B4-BE49-F238E27FC236}">
-                <a16:creationId xmlns:a16="http://schemas.microsoft.com/office/drawing/2014/main" id="{0388F498-E28A-BCBD-9590-BC188F38B3F1}"/>
-              </a:ext>
-            </a:extLst>
-          </p:cNvPr>
-          <p:cNvSpPr>
-            <a:spLocks noGrp="1" noRot="1" noMove="1" noResize="1" noEditPoints="1" noAdjustHandles="1" noChangeArrowheads="1" noChangeShapeType="1"/>
-          </p:cNvSpPr>
+              <a:rPr lang="en-US" altLang="zh-TW">
+                <a:effectLst>
+                  <a:outerShdw blurRad="38100" dist="38100" dir="2700000" algn="tl">
+                    <a:srgbClr val="000000">
+                      <a:alpha val="43137"/>
+                    </a:srgbClr>
+                  </a:outerShdw>
+                </a:effectLst>
+                <a:latin typeface="Charis SemiBold" panose="02000500060000020004" pitchFamily="2" charset="0"/>
+                <a:ea typeface="Noto Sans TC Medium" panose="020B0200000000000000" pitchFamily="34" charset="-128"/>
+              </a:rPr>
+              <a:t>[hue³⁻¹ cia¹]</a:t>
+            </a:r>
+            <a:endParaRPr lang="zh-TW" altLang="en-US">
+              <a:effectLst>
+                <a:outerShdw blurRad="38100" dist="38100" dir="2700000" algn="tl">
+                  <a:srgbClr val="000000">
+                    <a:alpha val="43137"/>
+                  </a:srgbClr>
+                </a:outerShdw>
+              </a:effectLst>
+              <a:latin typeface="Charis SemiBold" panose="02000500060000020004" pitchFamily="2" charset="0"/>
+              <a:ea typeface="Noto Sans TC Medium" panose="020B0200000000000000" pitchFamily="34" charset="-128"/>
+            </a:endParaRPr>
+          </a:p>
+        </p:txBody>
+      </p:sp>
+      <p:sp>
+        <p:nvSpPr>
+          <p:cNvPr id="5" name="流程圖: 替代程序 4">
+            <a:extLst>
+              <a:ext uri="{FF2B5EF4-FFF2-40B4-BE49-F238E27FC236}">
+                <a16:creationId xmlns:a16="http://schemas.microsoft.com/office/drawing/2014/main" id="{B63F016F-20BF-1205-28E3-3E4979820879}"/>
+              </a:ext>
+            </a:extLst>
+          </p:cNvPr>
+          <p:cNvSpPr/>
           <p:nvPr/>
         </p:nvSpPr>
         <p:spPr>
           <a:xfrm>
-            <a:off x="1113181" y="4371643"/>
+            <a:off x="4341344" y="4750904"/>
             <a:ext cx="2083241" cy="755374"/>
           </a:xfrm>
           <a:prstGeom prst="flowChartAlternateProcess">
@@ -7950,986 +10387,80 @@
           <a:p>
             <a:pPr algn="ctr"/>
             <a:r>
-              <a:rPr lang="en-US" altLang="zh-TW"/>
+              <a:rPr lang="en-US" altLang="zh-TW">
+                <a:effectLst>
+                  <a:outerShdw blurRad="38100" dist="38100" dir="2700000" algn="tl">
+                    <a:srgbClr val="000000">
+                      <a:alpha val="43137"/>
+                    </a:srgbClr>
+                  </a:outerShdw>
+                </a:effectLst>
+                <a:latin typeface="Charis SemiBold" panose="02000500060000020004" pitchFamily="2" charset="0"/>
+                <a:ea typeface="Noto Sans TC Medium" panose="020B0200000000000000" pitchFamily="34" charset="-128"/>
+              </a:rPr>
               <a:t>【5】</a:t>
             </a:r>
             <a:r>
-              <a:rPr lang="zh-TW" altLang="en-US"/>
-              <a:t>嘴齒</a:t>
+              <a:rPr lang="zh-TW" altLang="en-US">
+                <a:effectLst>
+                  <a:outerShdw blurRad="38100" dist="38100" dir="2700000" algn="tl">
+                    <a:srgbClr val="000000">
+                      <a:alpha val="43137"/>
+                    </a:srgbClr>
+                  </a:outerShdw>
+                </a:effectLst>
+                <a:latin typeface="Charis SemiBold" panose="02000500060000020004" pitchFamily="2" charset="0"/>
+                <a:ea typeface="Noto Sans TC Medium" panose="020B0200000000000000" pitchFamily="34" charset="-128"/>
+              </a:rPr>
+              <a:t>貨車</a:t>
             </a:r>
             <a:br>
-              <a:rPr lang="en-US" altLang="zh-TW"/>
+              <a:rPr lang="en-US" altLang="zh-TW">
+                <a:effectLst>
+                  <a:outerShdw blurRad="38100" dist="38100" dir="2700000" algn="tl">
+                    <a:srgbClr val="000000">
+                      <a:alpha val="43137"/>
+                    </a:srgbClr>
+                  </a:outerShdw>
+                </a:effectLst>
+                <a:latin typeface="Charis SemiBold" panose="02000500060000020004" pitchFamily="2" charset="0"/>
+                <a:ea typeface="Noto Sans TC Medium" panose="020B0200000000000000" pitchFamily="34" charset="-128"/>
+              </a:rPr>
             </a:br>
             <a:r>
-              <a:rPr lang="en-US" altLang="zh-TW"/>
-              <a:t>[cui⁵⁻³ ki³]</a:t>
-            </a:r>
-            <a:endParaRPr lang="zh-TW" altLang="en-US"/>
-          </a:p>
-        </p:txBody>
-      </p:sp>
-      <p:sp>
-        <p:nvSpPr>
-          <p:cNvPr id="8" name="流程圖: 替代程序 7">
-            <a:extLst>
-              <a:ext uri="{FF2B5EF4-FFF2-40B4-BE49-F238E27FC236}">
-                <a16:creationId xmlns:a16="http://schemas.microsoft.com/office/drawing/2014/main" id="{6CAEFE93-7760-B0C1-B587-614DFAE86FDE}"/>
-              </a:ext>
-            </a:extLst>
-          </p:cNvPr>
-          <p:cNvSpPr>
-            <a:spLocks noGrp="1" noRot="1" noMove="1" noResize="1" noEditPoints="1" noAdjustHandles="1" noChangeArrowheads="1" noChangeShapeType="1"/>
-          </p:cNvSpPr>
-          <p:nvPr/>
-        </p:nvSpPr>
-        <p:spPr>
-          <a:xfrm>
-            <a:off x="1113182" y="6448259"/>
-            <a:ext cx="2083241" cy="755374"/>
-          </a:xfrm>
-          <a:prstGeom prst="flowChartAlternateProcess">
-            <a:avLst/>
-          </a:prstGeom>
-        </p:spPr>
-        <p:style>
-          <a:lnRef idx="2">
-            <a:schemeClr val="accent1">
-              <a:shade val="15000"/>
-            </a:schemeClr>
-          </a:lnRef>
-          <a:fillRef idx="1">
-            <a:schemeClr val="accent1"/>
-          </a:fillRef>
-          <a:effectRef idx="0">
-            <a:schemeClr val="accent1"/>
-          </a:effectRef>
-          <a:fontRef idx="minor">
-            <a:schemeClr val="lt1"/>
-          </a:fontRef>
-        </p:style>
-        <p:txBody>
-          <a:bodyPr rtlCol="0" anchor="ctr"/>
-          <a:lstStyle/>
-          <a:p>
-            <a:pPr algn="ctr"/>
-            <a:r>
-              <a:rPr lang="en-US" altLang="zh-TW"/>
-              <a:t>【7】</a:t>
-            </a:r>
-            <a:r>
-              <a:rPr lang="zh-TW" altLang="en-US"/>
-              <a:t>骨頭</a:t>
-            </a:r>
-            <a:r>
-              <a:rPr lang="en-US" altLang="zh-TW"/>
-              <a:t> </a:t>
-            </a:r>
-            <a:br>
-              <a:rPr lang="en-US" altLang="zh-TW"/>
-            </a:br>
-            <a:r>
-              <a:rPr lang="en-US" altLang="zh-TW"/>
-              <a:t>[gut⁷⁻⁸ tao²]</a:t>
-            </a:r>
-            <a:endParaRPr lang="zh-TW" altLang="en-US"/>
-          </a:p>
-        </p:txBody>
-      </p:sp>
-      <p:sp>
-        <p:nvSpPr>
-          <p:cNvPr id="9" name="流程圖: 替代程序 8">
-            <a:extLst>
-              <a:ext uri="{FF2B5EF4-FFF2-40B4-BE49-F238E27FC236}">
-                <a16:creationId xmlns:a16="http://schemas.microsoft.com/office/drawing/2014/main" id="{C4CC8EA7-FA06-4E5F-BB1F-BD5F22A6371C}"/>
-              </a:ext>
-            </a:extLst>
-          </p:cNvPr>
-          <p:cNvSpPr>
-            <a:spLocks noGrp="1" noRot="1" noMove="1" noResize="1" noEditPoints="1" noAdjustHandles="1" noChangeArrowheads="1" noChangeShapeType="1"/>
-          </p:cNvSpPr>
-          <p:nvPr/>
-        </p:nvSpPr>
-        <p:spPr>
-          <a:xfrm>
-            <a:off x="4422249" y="6448259"/>
-            <a:ext cx="2083241" cy="755374"/>
-          </a:xfrm>
-          <a:prstGeom prst="flowChartAlternateProcess">
-            <a:avLst/>
-          </a:prstGeom>
-        </p:spPr>
-        <p:style>
-          <a:lnRef idx="2">
-            <a:schemeClr val="accent1">
-              <a:shade val="15000"/>
-            </a:schemeClr>
-          </a:lnRef>
-          <a:fillRef idx="1">
-            <a:schemeClr val="accent1"/>
-          </a:fillRef>
-          <a:effectRef idx="0">
-            <a:schemeClr val="accent1"/>
-          </a:effectRef>
-          <a:fontRef idx="minor">
-            <a:schemeClr val="lt1"/>
-          </a:fontRef>
-        </p:style>
-        <p:txBody>
-          <a:bodyPr rtlCol="0" anchor="ctr"/>
-          <a:lstStyle/>
-          <a:p>
-            <a:pPr algn="ctr"/>
-            <a:r>
-              <a:rPr lang="en-US" altLang="zh-TW"/>
-              <a:t>【8】</a:t>
-            </a:r>
-            <a:r>
-              <a:rPr lang="zh-TW" altLang="en-US"/>
-              <a:t>目睭</a:t>
-            </a:r>
-            <a:br>
-              <a:rPr lang="en-US" altLang="zh-TW"/>
-            </a:br>
-            <a:r>
-              <a:rPr lang="en-US" altLang="zh-TW"/>
-              <a:t>[bbak⁸⁻⁷ ziu¹]</a:t>
-            </a:r>
-            <a:endParaRPr lang="zh-TW" altLang="en-US"/>
-          </a:p>
-        </p:txBody>
-      </p:sp>
-      <p:sp>
-        <p:nvSpPr>
-          <p:cNvPr id="10" name="流程圖: 替代程序 9">
-            <a:extLst>
-              <a:ext uri="{FF2B5EF4-FFF2-40B4-BE49-F238E27FC236}">
-                <a16:creationId xmlns:a16="http://schemas.microsoft.com/office/drawing/2014/main" id="{B84F14DE-F018-98EC-C9E6-F953DEA88001}"/>
-              </a:ext>
-            </a:extLst>
-          </p:cNvPr>
-          <p:cNvSpPr>
-            <a:spLocks noGrp="1" noRot="1" noMove="1" noResize="1" noEditPoints="1" noAdjustHandles="1" noChangeArrowheads="1" noChangeShapeType="1"/>
-          </p:cNvSpPr>
-          <p:nvPr/>
-        </p:nvSpPr>
-        <p:spPr>
-          <a:xfrm>
-            <a:off x="4422250" y="4374294"/>
-            <a:ext cx="2083241" cy="755374"/>
-          </a:xfrm>
-          <a:prstGeom prst="flowChartAlternateProcess">
-            <a:avLst/>
-          </a:prstGeom>
-        </p:spPr>
-        <p:style>
-          <a:lnRef idx="2">
-            <a:schemeClr val="accent1">
-              <a:shade val="15000"/>
-            </a:schemeClr>
-          </a:lnRef>
-          <a:fillRef idx="1">
-            <a:schemeClr val="accent1"/>
-          </a:fillRef>
-          <a:effectRef idx="0">
-            <a:schemeClr val="accent1"/>
-          </a:effectRef>
-          <a:fontRef idx="minor">
-            <a:schemeClr val="lt1"/>
-          </a:fontRef>
-        </p:style>
-        <p:txBody>
-          <a:bodyPr rtlCol="0" anchor="ctr"/>
-          <a:lstStyle/>
-          <a:p>
-            <a:pPr algn="ctr"/>
-            <a:r>
-              <a:rPr lang="en-US" altLang="zh-TW"/>
-              <a:t>【6】</a:t>
-            </a:r>
-            <a:r>
-              <a:rPr lang="zh-TW" altLang="en-US"/>
-              <a:t>鼻孔</a:t>
-            </a:r>
-            <a:r>
-              <a:rPr lang="en-US" altLang="zh-TW"/>
-              <a:t> </a:t>
-            </a:r>
-            <a:br>
-              <a:rPr lang="en-US" altLang="zh-TW"/>
-            </a:br>
-            <a:r>
-              <a:rPr lang="en-US" altLang="zh-TW"/>
-              <a:t>[pni⁶⁻⁵ kang¹]</a:t>
-            </a:r>
-            <a:endParaRPr lang="zh-TW" altLang="en-US"/>
-          </a:p>
-        </p:txBody>
-      </p:sp>
-      <p:sp>
-        <p:nvSpPr>
-          <p:cNvPr id="11" name="流程圖: 替代程序 10">
-            <a:extLst>
-              <a:ext uri="{FF2B5EF4-FFF2-40B4-BE49-F238E27FC236}">
-                <a16:creationId xmlns:a16="http://schemas.microsoft.com/office/drawing/2014/main" id="{642890ED-ED73-E289-4CC7-C5DE6830AF48}"/>
-              </a:ext>
-            </a:extLst>
-          </p:cNvPr>
-          <p:cNvSpPr>
-            <a:spLocks noGrp="1" noRot="1" noMove="1" noResize="1" noEditPoints="1" noAdjustHandles="1" noChangeArrowheads="1" noChangeShapeType="1"/>
-          </p:cNvSpPr>
-          <p:nvPr/>
-        </p:nvSpPr>
-        <p:spPr>
-          <a:xfrm>
-            <a:off x="4422250" y="1290513"/>
-            <a:ext cx="2083241" cy="755374"/>
-          </a:xfrm>
-          <a:prstGeom prst="flowChartAlternateProcess">
-            <a:avLst/>
-          </a:prstGeom>
-        </p:spPr>
-        <p:style>
-          <a:lnRef idx="2">
-            <a:schemeClr val="accent1">
-              <a:shade val="15000"/>
-            </a:schemeClr>
-          </a:lnRef>
-          <a:fillRef idx="1">
-            <a:schemeClr val="accent1"/>
-          </a:fillRef>
-          <a:effectRef idx="0">
-            <a:schemeClr val="accent1"/>
-          </a:effectRef>
-          <a:fontRef idx="minor">
-            <a:schemeClr val="lt1"/>
-          </a:fontRef>
-        </p:style>
-        <p:txBody>
-          <a:bodyPr rtlCol="0" anchor="ctr"/>
-          <a:lstStyle/>
-          <a:p>
-            <a:pPr algn="ctr"/>
-            <a:r>
-              <a:rPr lang="en-US" altLang="zh-TW"/>
-              <a:t>【2】</a:t>
-            </a:r>
-            <a:r>
-              <a:rPr lang="zh-TW" altLang="en-US"/>
-              <a:t>頭殼</a:t>
-            </a:r>
-            <a:br>
-              <a:rPr lang="en-US" altLang="zh-TW"/>
-            </a:br>
-            <a:r>
-              <a:rPr lang="en-US" altLang="zh-TW"/>
-              <a:t>[tao²⁻⁶ kak⁷]</a:t>
-            </a:r>
-            <a:endParaRPr lang="zh-TW" altLang="en-US"/>
-          </a:p>
-        </p:txBody>
-      </p:sp>
-      <p:cxnSp>
-        <p:nvCxnSpPr>
-          <p:cNvPr id="13" name="接點: 肘形 12">
-            <a:extLst>
-              <a:ext uri="{FF2B5EF4-FFF2-40B4-BE49-F238E27FC236}">
-                <a16:creationId xmlns:a16="http://schemas.microsoft.com/office/drawing/2014/main" id="{04C5C01E-2460-11B4-FFA8-69E7AF5F7386}"/>
-              </a:ext>
-            </a:extLst>
-          </p:cNvPr>
-          <p:cNvCxnSpPr>
-            <a:cxnSpLocks noGrp="1" noRot="1" noMove="1" noResize="1" noEditPoints="1" noAdjustHandles="1" noChangeArrowheads="1" noChangeShapeType="1"/>
-            <a:stCxn id="9" idx="0"/>
-            <a:endCxn id="7" idx="2"/>
-          </p:cNvCxnSpPr>
-          <p:nvPr/>
-        </p:nvCxnSpPr>
-        <p:spPr>
-          <a:xfrm rot="16200000" flipV="1">
-            <a:off x="3148715" y="4133104"/>
-            <a:ext cx="1321242" cy="3309068"/>
-          </a:xfrm>
-          <a:prstGeom prst="bentConnector3">
-            <a:avLst>
-              <a:gd name="adj1" fmla="val 50000"/>
-            </a:avLst>
-          </a:prstGeom>
-          <a:ln>
-            <a:solidFill>
-              <a:schemeClr val="accent6"/>
-            </a:solidFill>
-            <a:prstDash val="sysDash"/>
-            <a:tailEnd type="triangle"/>
-          </a:ln>
-        </p:spPr>
-        <p:style>
-          <a:lnRef idx="2">
-            <a:schemeClr val="accent1"/>
-          </a:lnRef>
-          <a:fillRef idx="0">
-            <a:schemeClr val="accent1"/>
-          </a:fillRef>
-          <a:effectRef idx="1">
-            <a:schemeClr val="accent1"/>
-          </a:effectRef>
-          <a:fontRef idx="minor">
-            <a:schemeClr val="tx1"/>
-          </a:fontRef>
-        </p:style>
-      </p:cxnSp>
-      <p:cxnSp>
-        <p:nvCxnSpPr>
-          <p:cNvPr id="17" name="接點: 肘形 16">
-            <a:extLst>
-              <a:ext uri="{FF2B5EF4-FFF2-40B4-BE49-F238E27FC236}">
-                <a16:creationId xmlns:a16="http://schemas.microsoft.com/office/drawing/2014/main" id="{B973B922-DFE4-DFA4-366D-0D504F9B9FEC}"/>
-              </a:ext>
-            </a:extLst>
-          </p:cNvPr>
-          <p:cNvCxnSpPr>
-            <a:cxnSpLocks noGrp="1" noRot="1" noMove="1" noResize="1" noEditPoints="1" noAdjustHandles="1" noChangeArrowheads="1" noChangeShapeType="1"/>
-          </p:cNvCxnSpPr>
-          <p:nvPr/>
-        </p:nvCxnSpPr>
-        <p:spPr>
-          <a:xfrm rot="16200000" flipH="1">
-            <a:off x="2822713" y="2049858"/>
-            <a:ext cx="2325759" cy="2258174"/>
-          </a:xfrm>
-          <a:prstGeom prst="bentConnector3">
-            <a:avLst>
-              <a:gd name="adj1" fmla="val 16838"/>
-            </a:avLst>
-          </a:prstGeom>
-          <a:ln>
-            <a:tailEnd type="triangle"/>
-          </a:ln>
-        </p:spPr>
-        <p:style>
-          <a:lnRef idx="2">
-            <a:schemeClr val="accent1"/>
-          </a:lnRef>
-          <a:fillRef idx="0">
-            <a:schemeClr val="accent1"/>
-          </a:fillRef>
-          <a:effectRef idx="1">
-            <a:schemeClr val="accent1"/>
-          </a:effectRef>
-          <a:fontRef idx="minor">
-            <a:schemeClr val="tx1"/>
-          </a:fontRef>
-        </p:style>
-      </p:cxnSp>
-      <p:cxnSp>
-        <p:nvCxnSpPr>
-          <p:cNvPr id="28" name="直線單箭頭接點 27">
-            <a:extLst>
-              <a:ext uri="{FF2B5EF4-FFF2-40B4-BE49-F238E27FC236}">
-                <a16:creationId xmlns:a16="http://schemas.microsoft.com/office/drawing/2014/main" id="{8B9F96CE-FCC9-6D0D-6A8B-53D531E150F2}"/>
-              </a:ext>
-            </a:extLst>
-          </p:cNvPr>
-          <p:cNvCxnSpPr>
-            <a:cxnSpLocks noGrp="1" noRot="1" noMove="1" noResize="1" noEditPoints="1" noAdjustHandles="1" noChangeArrowheads="1" noChangeShapeType="1"/>
-          </p:cNvCxnSpPr>
-          <p:nvPr/>
-        </p:nvCxnSpPr>
-        <p:spPr>
-          <a:xfrm>
-            <a:off x="5764696" y="2045887"/>
-            <a:ext cx="0" cy="2325756"/>
-          </a:xfrm>
-          <a:prstGeom prst="straightConnector1">
-            <a:avLst/>
-          </a:prstGeom>
-          <a:ln>
-            <a:tailEnd type="triangle"/>
-          </a:ln>
-        </p:spPr>
-        <p:style>
-          <a:lnRef idx="2">
-            <a:schemeClr val="accent1"/>
-          </a:lnRef>
-          <a:fillRef idx="0">
-            <a:schemeClr val="accent1"/>
-          </a:fillRef>
-          <a:effectRef idx="1">
-            <a:schemeClr val="accent1"/>
-          </a:effectRef>
-          <a:fontRef idx="minor">
-            <a:schemeClr val="tx1"/>
-          </a:fontRef>
-        </p:style>
-      </p:cxnSp>
-      <p:cxnSp>
-        <p:nvCxnSpPr>
-          <p:cNvPr id="29" name="直線單箭頭接點 28">
-            <a:extLst>
-              <a:ext uri="{FF2B5EF4-FFF2-40B4-BE49-F238E27FC236}">
-                <a16:creationId xmlns:a16="http://schemas.microsoft.com/office/drawing/2014/main" id="{9458FA01-24F0-16D0-F9F8-D6A6C6EEC72B}"/>
-              </a:ext>
-            </a:extLst>
-          </p:cNvPr>
-          <p:cNvCxnSpPr>
-            <a:cxnSpLocks noGrp="1" noRot="1" noMove="1" noResize="1" noEditPoints="1" noAdjustHandles="1" noChangeArrowheads="1" noChangeShapeType="1"/>
-          </p:cNvCxnSpPr>
-          <p:nvPr/>
-        </p:nvCxnSpPr>
-        <p:spPr>
-          <a:xfrm flipH="1">
-            <a:off x="3196421" y="6916726"/>
-            <a:ext cx="1225827" cy="0"/>
-          </a:xfrm>
-          <a:prstGeom prst="straightConnector1">
-            <a:avLst/>
-          </a:prstGeom>
-          <a:ln>
-            <a:solidFill>
-              <a:schemeClr val="accent6"/>
-            </a:solidFill>
-            <a:tailEnd type="triangle"/>
-          </a:ln>
-        </p:spPr>
-        <p:style>
-          <a:lnRef idx="2">
-            <a:schemeClr val="accent1"/>
-          </a:lnRef>
-          <a:fillRef idx="0">
-            <a:schemeClr val="accent1"/>
-          </a:fillRef>
-          <a:effectRef idx="1">
-            <a:schemeClr val="accent1"/>
-          </a:effectRef>
-          <a:fontRef idx="minor">
-            <a:schemeClr val="tx1"/>
-          </a:fontRef>
-        </p:style>
-      </p:cxnSp>
-      <p:cxnSp>
-        <p:nvCxnSpPr>
-          <p:cNvPr id="33" name="直線單箭頭接點 32">
-            <a:extLst>
-              <a:ext uri="{FF2B5EF4-FFF2-40B4-BE49-F238E27FC236}">
-                <a16:creationId xmlns:a16="http://schemas.microsoft.com/office/drawing/2014/main" id="{8B883DAF-E929-C328-0D63-B64F239A207C}"/>
-              </a:ext>
-            </a:extLst>
-          </p:cNvPr>
-          <p:cNvCxnSpPr>
-            <a:cxnSpLocks noGrp="1" noRot="1" noMove="1" noResize="1" noEditPoints="1" noAdjustHandles="1" noChangeArrowheads="1" noChangeShapeType="1"/>
-          </p:cNvCxnSpPr>
-          <p:nvPr/>
-        </p:nvCxnSpPr>
-        <p:spPr>
-          <a:xfrm>
-            <a:off x="3196420" y="6706683"/>
-            <a:ext cx="1225827" cy="0"/>
-          </a:xfrm>
-          <a:prstGeom prst="straightConnector1">
-            <a:avLst/>
-          </a:prstGeom>
-          <a:ln>
-            <a:solidFill>
-              <a:schemeClr val="accent5"/>
-            </a:solidFill>
-            <a:tailEnd type="triangle"/>
-          </a:ln>
-        </p:spPr>
-        <p:style>
-          <a:lnRef idx="2">
-            <a:schemeClr val="accent1"/>
-          </a:lnRef>
-          <a:fillRef idx="0">
-            <a:schemeClr val="accent1"/>
-          </a:fillRef>
-          <a:effectRef idx="1">
-            <a:schemeClr val="accent1"/>
-          </a:effectRef>
-          <a:fontRef idx="minor">
-            <a:schemeClr val="tx1"/>
-          </a:fontRef>
-        </p:style>
-      </p:cxnSp>
-      <p:cxnSp>
-        <p:nvCxnSpPr>
-          <p:cNvPr id="34" name="直線單箭頭接點 33">
-            <a:extLst>
-              <a:ext uri="{FF2B5EF4-FFF2-40B4-BE49-F238E27FC236}">
-                <a16:creationId xmlns:a16="http://schemas.microsoft.com/office/drawing/2014/main" id="{A06D7326-74C8-7ADA-3E09-96CEA3A55398}"/>
-              </a:ext>
-            </a:extLst>
-          </p:cNvPr>
-          <p:cNvCxnSpPr>
-            <a:cxnSpLocks noGrp="1" noRot="1" noMove="1" noResize="1" noEditPoints="1" noAdjustHandles="1" noChangeArrowheads="1" noChangeShapeType="1"/>
-          </p:cNvCxnSpPr>
-          <p:nvPr/>
-        </p:nvCxnSpPr>
-        <p:spPr>
-          <a:xfrm flipH="1">
-            <a:off x="3196420" y="4707587"/>
-            <a:ext cx="1225827" cy="0"/>
-          </a:xfrm>
-          <a:prstGeom prst="straightConnector1">
-            <a:avLst/>
-          </a:prstGeom>
-          <a:ln>
-            <a:tailEnd type="triangle"/>
-          </a:ln>
-        </p:spPr>
-        <p:style>
-          <a:lnRef idx="2">
-            <a:schemeClr val="accent1"/>
-          </a:lnRef>
-          <a:fillRef idx="0">
-            <a:schemeClr val="accent1"/>
-          </a:fillRef>
-          <a:effectRef idx="1">
-            <a:schemeClr val="accent1"/>
-          </a:effectRef>
-          <a:fontRef idx="minor">
-            <a:schemeClr val="tx1"/>
-          </a:fontRef>
-        </p:style>
-      </p:cxnSp>
-      <p:cxnSp>
-        <p:nvCxnSpPr>
-          <p:cNvPr id="37" name="直線單箭頭接點 36">
-            <a:extLst>
-              <a:ext uri="{FF2B5EF4-FFF2-40B4-BE49-F238E27FC236}">
-                <a16:creationId xmlns:a16="http://schemas.microsoft.com/office/drawing/2014/main" id="{415C7050-0840-CD01-2C47-668E40B332CF}"/>
-              </a:ext>
-            </a:extLst>
-          </p:cNvPr>
-          <p:cNvCxnSpPr>
-            <a:cxnSpLocks noGrp="1" noRot="1" noMove="1" noResize="1" noEditPoints="1" noAdjustHandles="1" noChangeArrowheads="1" noChangeShapeType="1"/>
-          </p:cNvCxnSpPr>
-          <p:nvPr/>
-        </p:nvCxnSpPr>
-        <p:spPr>
-          <a:xfrm flipH="1" flipV="1">
-            <a:off x="2115046" y="3574706"/>
-            <a:ext cx="1" cy="796937"/>
-          </a:xfrm>
-          <a:prstGeom prst="straightConnector1">
-            <a:avLst/>
-          </a:prstGeom>
-          <a:ln>
-            <a:tailEnd type="triangle"/>
-          </a:ln>
-        </p:spPr>
-        <p:style>
-          <a:lnRef idx="2">
-            <a:schemeClr val="accent1"/>
-          </a:lnRef>
-          <a:fillRef idx="0">
-            <a:schemeClr val="accent1"/>
-          </a:fillRef>
-          <a:effectRef idx="1">
-            <a:schemeClr val="accent1"/>
-          </a:effectRef>
-          <a:fontRef idx="minor">
-            <a:schemeClr val="tx1"/>
-          </a:fontRef>
-        </p:style>
-      </p:cxnSp>
-      <p:cxnSp>
-        <p:nvCxnSpPr>
-          <p:cNvPr id="41" name="直線單箭頭接點 40">
-            <a:extLst>
-              <a:ext uri="{FF2B5EF4-FFF2-40B4-BE49-F238E27FC236}">
-                <a16:creationId xmlns:a16="http://schemas.microsoft.com/office/drawing/2014/main" id="{BB8EF7D6-605B-5632-8A92-64B0B7026627}"/>
-              </a:ext>
-            </a:extLst>
-          </p:cNvPr>
-          <p:cNvCxnSpPr>
-            <a:cxnSpLocks noGrp="1" noRot="1" noMove="1" noResize="1" noEditPoints="1" noAdjustHandles="1" noChangeArrowheads="1" noChangeShapeType="1"/>
-          </p:cNvCxnSpPr>
-          <p:nvPr/>
-        </p:nvCxnSpPr>
-        <p:spPr>
-          <a:xfrm flipV="1">
-            <a:off x="2115046" y="2045887"/>
-            <a:ext cx="3" cy="773445"/>
-          </a:xfrm>
-          <a:prstGeom prst="straightConnector1">
-            <a:avLst/>
-          </a:prstGeom>
-          <a:ln>
-            <a:tailEnd type="triangle"/>
-          </a:ln>
-        </p:spPr>
-        <p:style>
-          <a:lnRef idx="2">
-            <a:schemeClr val="accent1"/>
-          </a:lnRef>
-          <a:fillRef idx="0">
-            <a:schemeClr val="accent1"/>
-          </a:fillRef>
-          <a:effectRef idx="1">
-            <a:schemeClr val="accent1"/>
-          </a:effectRef>
-          <a:fontRef idx="minor">
-            <a:schemeClr val="tx1"/>
-          </a:fontRef>
-        </p:style>
-      </p:cxnSp>
-      <p:sp>
-        <p:nvSpPr>
-          <p:cNvPr id="72" name="左中括弧 71">
-            <a:extLst>
-              <a:ext uri="{FF2B5EF4-FFF2-40B4-BE49-F238E27FC236}">
-                <a16:creationId xmlns:a16="http://schemas.microsoft.com/office/drawing/2014/main" id="{07658648-9292-4DEE-DED5-88015A9454BF}"/>
-              </a:ext>
-            </a:extLst>
-          </p:cNvPr>
-          <p:cNvSpPr>
-            <a:spLocks noGrp="1" noRot="1" noMove="1" noResize="1" noEditPoints="1" noAdjustHandles="1" noChangeArrowheads="1" noChangeShapeType="1"/>
-          </p:cNvSpPr>
-          <p:nvPr/>
-        </p:nvSpPr>
-        <p:spPr>
-          <a:xfrm>
-            <a:off x="371721" y="3226072"/>
-            <a:ext cx="741455" cy="3599874"/>
-          </a:xfrm>
-          <a:prstGeom prst="leftBracket">
-            <a:avLst>
-              <a:gd name="adj" fmla="val 0"/>
-            </a:avLst>
-          </a:prstGeom>
-          <a:ln>
-            <a:solidFill>
-              <a:schemeClr val="accent5"/>
-            </a:solidFill>
-            <a:prstDash val="sysDash"/>
-            <a:headEnd type="none"/>
-            <a:tailEnd type="triangle"/>
-          </a:ln>
-        </p:spPr>
-        <p:style>
-          <a:lnRef idx="2">
-            <a:schemeClr val="accent1"/>
-          </a:lnRef>
-          <a:fillRef idx="0">
-            <a:schemeClr val="accent1"/>
-          </a:fillRef>
-          <a:effectRef idx="1">
-            <a:schemeClr val="accent1"/>
-          </a:effectRef>
-          <a:fontRef idx="minor">
-            <a:schemeClr val="tx1"/>
-          </a:fontRef>
-        </p:style>
-        <p:txBody>
-          <a:bodyPr rtlCol="0" anchor="ctr"/>
-          <a:lstStyle/>
-          <a:p>
-            <a:pPr algn="ctr"/>
-            <a:endParaRPr lang="zh-TW" altLang="en-US"/>
-          </a:p>
-        </p:txBody>
-      </p:sp>
-      <p:sp>
-        <p:nvSpPr>
-          <p:cNvPr id="75" name="文字方塊 74">
-            <a:extLst>
-              <a:ext uri="{FF2B5EF4-FFF2-40B4-BE49-F238E27FC236}">
-                <a16:creationId xmlns:a16="http://schemas.microsoft.com/office/drawing/2014/main" id="{D8F9566A-4D7F-2A06-B15A-082ED48993B6}"/>
-              </a:ext>
-            </a:extLst>
-          </p:cNvPr>
-          <p:cNvSpPr txBox="1">
-            <a:spLocks noGrp="1" noRot="1" noMove="1" noResize="1" noEditPoints="1" noAdjustHandles="1" noChangeArrowheads="1" noChangeShapeType="1"/>
-          </p:cNvSpPr>
-          <p:nvPr/>
-        </p:nvSpPr>
-        <p:spPr>
-          <a:xfrm>
-            <a:off x="3429000" y="6375783"/>
-            <a:ext cx="762000" cy="369332"/>
-          </a:xfrm>
-          <a:prstGeom prst="rect">
-            <a:avLst/>
-          </a:prstGeom>
-          <a:noFill/>
-        </p:spPr>
-        <p:txBody>
-          <a:bodyPr wrap="square" rtlCol="0">
-            <a:spAutoFit/>
-          </a:bodyPr>
-          <a:lstStyle/>
-          <a:p>
-            <a:pPr algn="ctr"/>
-            <a:r>
               <a:rPr lang="en-US" altLang="zh-TW">
-                <a:solidFill>
-                  <a:schemeClr val="accent5"/>
-                </a:solidFill>
-              </a:rPr>
-              <a:t>p/t/k</a:t>
+                <a:effectLst>
+                  <a:outerShdw blurRad="38100" dist="38100" dir="2700000" algn="tl">
+                    <a:srgbClr val="000000">
+                      <a:alpha val="43137"/>
+                    </a:srgbClr>
+                  </a:outerShdw>
+                </a:effectLst>
+                <a:latin typeface="Charis SemiBold" panose="02000500060000020004" pitchFamily="2" charset="0"/>
+                <a:ea typeface="Noto Sans TC Medium" panose="020B0200000000000000" pitchFamily="34" charset="-128"/>
+              </a:rPr>
+              <a:t>[hue⁵⁻³ cia¹]</a:t>
             </a:r>
             <a:endParaRPr lang="zh-TW" altLang="en-US">
-              <a:solidFill>
-                <a:schemeClr val="accent5"/>
-              </a:solidFill>
+              <a:effectLst>
+                <a:outerShdw blurRad="38100" dist="38100" dir="2700000" algn="tl">
+                  <a:srgbClr val="000000">
+                    <a:alpha val="43137"/>
+                  </a:srgbClr>
+                </a:outerShdw>
+              </a:effectLst>
+              <a:latin typeface="Charis SemiBold" panose="02000500060000020004" pitchFamily="2" charset="0"/>
+              <a:ea typeface="Noto Sans TC Medium" panose="020B0200000000000000" pitchFamily="34" charset="-128"/>
             </a:endParaRPr>
           </a:p>
         </p:txBody>
       </p:sp>
       <p:sp>
         <p:nvSpPr>
-          <p:cNvPr id="76" name="文字方塊 75">
-            <a:extLst>
-              <a:ext uri="{FF2B5EF4-FFF2-40B4-BE49-F238E27FC236}">
-                <a16:creationId xmlns:a16="http://schemas.microsoft.com/office/drawing/2014/main" id="{101255CD-3871-7ED2-7B6E-BFA24AE84C5C}"/>
-              </a:ext>
-            </a:extLst>
-          </p:cNvPr>
-          <p:cNvSpPr txBox="1">
-            <a:spLocks noGrp="1" noRot="1" noMove="1" noResize="1" noEditPoints="1" noAdjustHandles="1" noChangeArrowheads="1" noChangeShapeType="1"/>
-          </p:cNvSpPr>
-          <p:nvPr/>
-        </p:nvSpPr>
-        <p:spPr>
-          <a:xfrm>
-            <a:off x="3429000" y="6850136"/>
-            <a:ext cx="762000" cy="369332"/>
-          </a:xfrm>
-          <a:prstGeom prst="rect">
-            <a:avLst/>
-          </a:prstGeom>
-          <a:noFill/>
-        </p:spPr>
-        <p:txBody>
-          <a:bodyPr wrap="square" rtlCol="0">
-            <a:spAutoFit/>
-          </a:bodyPr>
-          <a:lstStyle/>
-          <a:p>
-            <a:pPr algn="ctr"/>
-            <a:r>
-              <a:rPr lang="en-US" altLang="zh-TW">
-                <a:solidFill>
-                  <a:schemeClr val="accent6"/>
-                </a:solidFill>
-              </a:rPr>
-              <a:t>p/t/k</a:t>
-            </a:r>
-            <a:endParaRPr lang="zh-TW" altLang="en-US">
-              <a:solidFill>
-                <a:schemeClr val="accent6"/>
-              </a:solidFill>
-            </a:endParaRPr>
-          </a:p>
-        </p:txBody>
-      </p:sp>
-      <p:sp>
-        <p:nvSpPr>
-          <p:cNvPr id="77" name="文字方塊 76">
-            <a:extLst>
-              <a:ext uri="{FF2B5EF4-FFF2-40B4-BE49-F238E27FC236}">
-                <a16:creationId xmlns:a16="http://schemas.microsoft.com/office/drawing/2014/main" id="{966F5127-65E7-8C2B-45C3-953B525FA7B7}"/>
-              </a:ext>
-            </a:extLst>
-          </p:cNvPr>
-          <p:cNvSpPr txBox="1">
-            <a:spLocks noGrp="1" noRot="1" noMove="1" noResize="1" noEditPoints="1" noAdjustHandles="1" noChangeArrowheads="1" noChangeShapeType="1"/>
-          </p:cNvSpPr>
-          <p:nvPr/>
-        </p:nvSpPr>
-        <p:spPr>
-          <a:xfrm>
-            <a:off x="3502512" y="5296343"/>
-            <a:ext cx="212242" cy="369332"/>
-          </a:xfrm>
-          <a:prstGeom prst="rect">
-            <a:avLst/>
-          </a:prstGeom>
-          <a:noFill/>
-        </p:spPr>
-        <p:txBody>
-          <a:bodyPr wrap="square" rtlCol="0">
-            <a:spAutoFit/>
-          </a:bodyPr>
-          <a:lstStyle/>
-          <a:p>
-            <a:pPr algn="ctr"/>
-            <a:r>
-              <a:rPr lang="en-US" altLang="zh-TW">
-                <a:solidFill>
-                  <a:schemeClr val="accent6"/>
-                </a:solidFill>
-              </a:rPr>
-              <a:t>h</a:t>
-            </a:r>
-            <a:endParaRPr lang="zh-TW" altLang="en-US">
-              <a:solidFill>
-                <a:schemeClr val="accent6"/>
-              </a:solidFill>
-            </a:endParaRPr>
-          </a:p>
-        </p:txBody>
-      </p:sp>
-      <p:sp>
-        <p:nvSpPr>
-          <p:cNvPr id="78" name="文字方塊 77">
-            <a:extLst>
-              <a:ext uri="{FF2B5EF4-FFF2-40B4-BE49-F238E27FC236}">
-                <a16:creationId xmlns:a16="http://schemas.microsoft.com/office/drawing/2014/main" id="{5FA13A60-ADD2-987A-B313-211624685ADE}"/>
-              </a:ext>
-            </a:extLst>
-          </p:cNvPr>
-          <p:cNvSpPr txBox="1">
-            <a:spLocks noGrp="1" noRot="1" noMove="1" noResize="1" noEditPoints="1" noAdjustHandles="1" noChangeArrowheads="1" noChangeShapeType="1"/>
-          </p:cNvSpPr>
-          <p:nvPr/>
-        </p:nvSpPr>
-        <p:spPr>
-          <a:xfrm>
-            <a:off x="365366" y="5953770"/>
-            <a:ext cx="212242" cy="369332"/>
-          </a:xfrm>
-          <a:prstGeom prst="rect">
-            <a:avLst/>
-          </a:prstGeom>
-          <a:noFill/>
-        </p:spPr>
-        <p:txBody>
-          <a:bodyPr wrap="square" rtlCol="0">
-            <a:spAutoFit/>
-          </a:bodyPr>
-          <a:lstStyle/>
-          <a:p>
-            <a:pPr algn="ctr"/>
-            <a:r>
-              <a:rPr lang="en-US" altLang="zh-TW">
-                <a:solidFill>
-                  <a:schemeClr val="accent5"/>
-                </a:solidFill>
-              </a:rPr>
-              <a:t>h</a:t>
-            </a:r>
-            <a:endParaRPr lang="zh-TW" altLang="en-US">
-              <a:solidFill>
-                <a:schemeClr val="accent5"/>
-              </a:solidFill>
-            </a:endParaRPr>
-          </a:p>
-        </p:txBody>
-      </p:sp>
-      <p:sp>
-        <p:nvSpPr>
-          <p:cNvPr id="79" name="矩形: 圓角 78">
-            <a:extLst>
-              <a:ext uri="{FF2B5EF4-FFF2-40B4-BE49-F238E27FC236}">
-                <a16:creationId xmlns:a16="http://schemas.microsoft.com/office/drawing/2014/main" id="{DB4BD723-2833-4BEB-D6DC-E7BB149FED09}"/>
-              </a:ext>
-            </a:extLst>
-          </p:cNvPr>
-          <p:cNvSpPr>
-            <a:spLocks noGrp="1" noRot="1" noMove="1" noResize="1" noEditPoints="1" noAdjustHandles="1" noChangeArrowheads="1" noChangeShapeType="1"/>
-          </p:cNvSpPr>
-          <p:nvPr/>
-        </p:nvSpPr>
-        <p:spPr>
-          <a:xfrm>
-            <a:off x="3716153" y="5278705"/>
-            <a:ext cx="2389371" cy="369332"/>
-          </a:xfrm>
-          <a:prstGeom prst="roundRect">
-            <a:avLst/>
-          </a:prstGeom>
-        </p:spPr>
-        <p:style>
-          <a:lnRef idx="0">
-            <a:schemeClr val="accent2"/>
-          </a:lnRef>
-          <a:fillRef idx="3">
-            <a:schemeClr val="accent2"/>
-          </a:fillRef>
-          <a:effectRef idx="3">
-            <a:schemeClr val="accent2"/>
-          </a:effectRef>
-          <a:fontRef idx="minor">
-            <a:schemeClr val="lt1"/>
-          </a:fontRef>
-        </p:style>
-        <p:txBody>
-          <a:bodyPr rtlCol="0" anchor="ctr"/>
-          <a:lstStyle/>
-          <a:p>
-            <a:pPr algn="ctr"/>
-            <a:r>
-              <a:rPr lang="zh-TW" altLang="en-US"/>
-              <a:t>白目 </a:t>
-            </a:r>
-            <a:r>
-              <a:rPr lang="en-US" altLang="zh-TW"/>
-              <a:t>[Beh⁸⁻⁵ bbak⁸]</a:t>
-            </a:r>
-            <a:endParaRPr lang="zh-TW" altLang="en-US"/>
-          </a:p>
-        </p:txBody>
-      </p:sp>
-      <p:sp>
-        <p:nvSpPr>
-          <p:cNvPr id="82" name="矩形: 圓角 81">
-            <a:extLst>
-              <a:ext uri="{FF2B5EF4-FFF2-40B4-BE49-F238E27FC236}">
-                <a16:creationId xmlns:a16="http://schemas.microsoft.com/office/drawing/2014/main" id="{83A7847E-C005-AAEC-8F5D-795598DBE26F}"/>
-              </a:ext>
-            </a:extLst>
-          </p:cNvPr>
-          <p:cNvSpPr>
-            <a:spLocks noGrp="1" noRot="1" noMove="1" noResize="1" noEditPoints="1" noAdjustHandles="1" noChangeArrowheads="1" noChangeShapeType="1"/>
-          </p:cNvSpPr>
-          <p:nvPr/>
-        </p:nvSpPr>
-        <p:spPr>
-          <a:xfrm>
-            <a:off x="593482" y="5946450"/>
-            <a:ext cx="2187818" cy="369332"/>
-          </a:xfrm>
-          <a:prstGeom prst="roundRect">
-            <a:avLst/>
-          </a:prstGeom>
-        </p:spPr>
-        <p:style>
-          <a:lnRef idx="0">
-            <a:schemeClr val="accent2"/>
-          </a:lnRef>
-          <a:fillRef idx="3">
-            <a:schemeClr val="accent2"/>
-          </a:fillRef>
-          <a:effectRef idx="3">
-            <a:schemeClr val="accent2"/>
-          </a:effectRef>
-          <a:fontRef idx="minor">
-            <a:schemeClr val="lt1"/>
-          </a:fontRef>
-        </p:style>
-        <p:txBody>
-          <a:bodyPr rtlCol="0" anchor="ctr"/>
-          <a:lstStyle/>
-          <a:p>
-            <a:pPr algn="ctr"/>
-            <a:r>
-              <a:rPr lang="zh-TW" altLang="en-US"/>
-              <a:t>拍破</a:t>
-            </a:r>
-            <a:r>
-              <a:rPr lang="en-US" altLang="zh-TW"/>
-              <a:t> [pah⁷⁻³ pua⁵]</a:t>
-            </a:r>
-            <a:endParaRPr lang="zh-TW" altLang="en-US"/>
-          </a:p>
-        </p:txBody>
-      </p:sp>
-      <p:sp>
-        <p:nvSpPr>
-          <p:cNvPr id="86" name="矩形: 按鈕形 85">
-            <a:extLst>
-              <a:ext uri="{FF2B5EF4-FFF2-40B4-BE49-F238E27FC236}">
-                <a16:creationId xmlns:a16="http://schemas.microsoft.com/office/drawing/2014/main" id="{8B95B49A-C4BE-83C5-B605-A2CFE1FECEF9}"/>
+          <p:cNvPr id="6" name="流程圖: 替代程序 5">
+            <a:extLst>
+              <a:ext uri="{FF2B5EF4-FFF2-40B4-BE49-F238E27FC236}">
+                <a16:creationId xmlns:a16="http://schemas.microsoft.com/office/drawing/2014/main" id="{AFBB7F9F-F424-649B-0062-73E1F032222F}"/>
               </a:ext>
             </a:extLst>
           </p:cNvPr>
@@ -8938,10 +10469,10 @@
         </p:nvSpPr>
         <p:spPr>
           <a:xfrm>
-            <a:off x="1494211" y="7776736"/>
-            <a:ext cx="3869577" cy="740025"/>
-          </a:xfrm>
-          <a:prstGeom prst="bevel">
+            <a:off x="403746" y="7665142"/>
+            <a:ext cx="2083241" cy="755374"/>
+          </a:xfrm>
+          <a:prstGeom prst="flowChartAlternateProcess">
             <a:avLst/>
           </a:prstGeom>
         </p:spPr>
@@ -8965,69 +10496,1375 @@
           <a:p>
             <a:pPr algn="ctr"/>
             <a:r>
-              <a:rPr lang="en-US" altLang="zh-TW" sz="2800">
+              <a:rPr lang="en-US" altLang="zh-TW">
                 <a:effectLst>
-                  <a:outerShdw blurRad="50800" dist="38100" dir="5400000" algn="t" rotWithShape="0">
-                    <a:prstClr val="black">
-                      <a:alpha val="40000"/>
-                    </a:prstClr>
+                  <a:outerShdw blurRad="38100" dist="38100" dir="2700000" algn="tl">
+                    <a:srgbClr val="000000">
+                      <a:alpha val="43137"/>
+                    </a:srgbClr>
                   </a:outerShdw>
                 </a:effectLst>
-                <a:latin typeface="Noto Sans TC Black" panose="020B0200000000000000" pitchFamily="34" charset="-128"/>
-                <a:ea typeface="Noto Sans TC Black" panose="020B0200000000000000" pitchFamily="34" charset="-128"/>
-                <a:cs typeface="ADLaM Display" panose="020F0502020204030204" pitchFamily="2" charset="0"/>
-              </a:rPr>
-              <a:t>1 6 5 3 2 7 8</a:t>
-            </a:r>
-            <a:endParaRPr lang="zh-TW" altLang="en-US" sz="2800">
+                <a:latin typeface="Charis SemiBold" panose="02000500060000020004" pitchFamily="2" charset="0"/>
+                <a:ea typeface="Noto Sans TC Medium" panose="020B0200000000000000" pitchFamily="34" charset="-128"/>
+              </a:rPr>
+              <a:t>【7】</a:t>
+            </a:r>
+            <a:r>
+              <a:rPr lang="zh-TW" altLang="en-US">
+                <a:effectLst>
+                  <a:outerShdw blurRad="38100" dist="38100" dir="2700000" algn="tl">
+                    <a:srgbClr val="000000">
+                      <a:alpha val="43137"/>
+                    </a:srgbClr>
+                  </a:outerShdw>
+                </a:effectLst>
+                <a:latin typeface="Charis SemiBold" panose="02000500060000020004" pitchFamily="2" charset="0"/>
+                <a:ea typeface="Noto Sans TC Medium" panose="020B0200000000000000" pitchFamily="34" charset="-128"/>
+              </a:rPr>
+              <a:t>骨頭</a:t>
+            </a:r>
+            <a:r>
+              <a:rPr lang="en-US" altLang="zh-TW">
+                <a:effectLst>
+                  <a:outerShdw blurRad="38100" dist="38100" dir="2700000" algn="tl">
+                    <a:srgbClr val="000000">
+                      <a:alpha val="43137"/>
+                    </a:srgbClr>
+                  </a:outerShdw>
+                </a:effectLst>
+                <a:latin typeface="Charis SemiBold" panose="02000500060000020004" pitchFamily="2" charset="0"/>
+                <a:ea typeface="Noto Sans TC Medium" panose="020B0200000000000000" pitchFamily="34" charset="-128"/>
+              </a:rPr>
+              <a:t> </a:t>
+            </a:r>
+            <a:br>
+              <a:rPr lang="en-US" altLang="zh-TW">
+                <a:effectLst>
+                  <a:outerShdw blurRad="38100" dist="38100" dir="2700000" algn="tl">
+                    <a:srgbClr val="000000">
+                      <a:alpha val="43137"/>
+                    </a:srgbClr>
+                  </a:outerShdw>
+                </a:effectLst>
+                <a:latin typeface="Charis SemiBold" panose="02000500060000020004" pitchFamily="2" charset="0"/>
+                <a:ea typeface="Noto Sans TC Medium" panose="020B0200000000000000" pitchFamily="34" charset="-128"/>
+              </a:rPr>
+            </a:br>
+            <a:r>
+              <a:rPr lang="en-US" altLang="zh-TW">
+                <a:effectLst>
+                  <a:outerShdw blurRad="38100" dist="38100" dir="2700000" algn="tl">
+                    <a:srgbClr val="000000">
+                      <a:alpha val="43137"/>
+                    </a:srgbClr>
+                  </a:outerShdw>
+                </a:effectLst>
+                <a:latin typeface="Charis SemiBold" panose="02000500060000020004" pitchFamily="2" charset="0"/>
+                <a:ea typeface="Noto Sans TC Medium" panose="020B0200000000000000" pitchFamily="34" charset="-128"/>
+              </a:rPr>
+              <a:t>[gut⁷⁻⁸ tao²]</a:t>
+            </a:r>
+            <a:endParaRPr lang="zh-TW" altLang="en-US">
               <a:effectLst>
-                <a:outerShdw blurRad="50800" dist="38100" dir="5400000" algn="t" rotWithShape="0">
-                  <a:prstClr val="black">
-                    <a:alpha val="40000"/>
-                  </a:prstClr>
+                <a:outerShdw blurRad="38100" dist="38100" dir="2700000" algn="tl">
+                  <a:srgbClr val="000000">
+                    <a:alpha val="43137"/>
+                  </a:srgbClr>
                 </a:outerShdw>
               </a:effectLst>
-              <a:latin typeface="Noto Sans TC Black" panose="020B0200000000000000" pitchFamily="34" charset="-128"/>
-              <a:ea typeface="Noto Sans TC Black" panose="020B0200000000000000" pitchFamily="34" charset="-128"/>
-              <a:cs typeface="ADLaM Display" panose="020F0502020204030204" pitchFamily="2" charset="0"/>
+              <a:latin typeface="Charis SemiBold" panose="02000500060000020004" pitchFamily="2" charset="0"/>
+              <a:ea typeface="Noto Sans TC Medium" panose="020B0200000000000000" pitchFamily="34" charset="-128"/>
             </a:endParaRPr>
           </a:p>
         </p:txBody>
       </p:sp>
-      <p:pic>
-        <p:nvPicPr>
-          <p:cNvPr id="88" name="圖片 87">
-            <a:extLst>
-              <a:ext uri="{FF2B5EF4-FFF2-40B4-BE49-F238E27FC236}">
-                <a16:creationId xmlns:a16="http://schemas.microsoft.com/office/drawing/2014/main" id="{84AB6647-AAF0-EE15-8FE3-49922EF19085}"/>
-              </a:ext>
-            </a:extLst>
-          </p:cNvPr>
-          <p:cNvPicPr>
-            <a:picLocks noChangeAspect="1"/>
-          </p:cNvPicPr>
+      <p:sp>
+        <p:nvSpPr>
+          <p:cNvPr id="8" name="流程圖: 替代程序 7">
+            <a:extLst>
+              <a:ext uri="{FF2B5EF4-FFF2-40B4-BE49-F238E27FC236}">
+                <a16:creationId xmlns:a16="http://schemas.microsoft.com/office/drawing/2014/main" id="{BCADC31C-741A-0112-2967-3C52EFDA7A5B}"/>
+              </a:ext>
+            </a:extLst>
+          </p:cNvPr>
+          <p:cNvSpPr/>
           <p:nvPr/>
-        </p:nvPicPr>
-        <p:blipFill>
-          <a:blip r:embed="rId2"/>
-          <a:stretch>
-            <a:fillRect/>
-          </a:stretch>
-        </p:blipFill>
+        </p:nvSpPr>
         <p:spPr>
           <a:xfrm>
-            <a:off x="0" y="8373584"/>
-            <a:ext cx="6858000" cy="3788732"/>
+            <a:off x="4341344" y="7659856"/>
+            <a:ext cx="2083241" cy="755374"/>
+          </a:xfrm>
+          <a:prstGeom prst="flowChartAlternateProcess">
+            <a:avLst/>
+          </a:prstGeom>
+        </p:spPr>
+        <p:style>
+          <a:lnRef idx="0">
+            <a:schemeClr val="accent6"/>
+          </a:lnRef>
+          <a:fillRef idx="3">
+            <a:schemeClr val="accent6"/>
+          </a:fillRef>
+          <a:effectRef idx="3">
+            <a:schemeClr val="accent6"/>
+          </a:effectRef>
+          <a:fontRef idx="minor">
+            <a:schemeClr val="lt1"/>
+          </a:fontRef>
+        </p:style>
+        <p:txBody>
+          <a:bodyPr rtlCol="0" anchor="ctr"/>
+          <a:lstStyle/>
+          <a:p>
+            <a:pPr algn="ctr"/>
+            <a:r>
+              <a:rPr lang="en-US" altLang="zh-TW">
+                <a:effectLst>
+                  <a:outerShdw blurRad="38100" dist="38100" dir="2700000" algn="tl">
+                    <a:srgbClr val="000000">
+                      <a:alpha val="43137"/>
+                    </a:srgbClr>
+                  </a:outerShdw>
+                </a:effectLst>
+                <a:latin typeface="Charis SemiBold" panose="02000500060000020004" pitchFamily="2" charset="0"/>
+                <a:ea typeface="Noto Sans TC Medium" panose="020B0200000000000000" pitchFamily="34" charset="-128"/>
+              </a:rPr>
+              <a:t>【8】</a:t>
+            </a:r>
+            <a:r>
+              <a:rPr lang="zh-TW" altLang="en-US">
+                <a:effectLst>
+                  <a:outerShdw blurRad="38100" dist="38100" dir="2700000" algn="tl">
+                    <a:srgbClr val="000000">
+                      <a:alpha val="43137"/>
+                    </a:srgbClr>
+                  </a:outerShdw>
+                </a:effectLst>
+                <a:latin typeface="Charis SemiBold" panose="02000500060000020004" pitchFamily="2" charset="0"/>
+                <a:ea typeface="Noto Sans TC Medium" panose="020B0200000000000000" pitchFamily="34" charset="-128"/>
+              </a:rPr>
+              <a:t>轉頭</a:t>
+            </a:r>
+            <a:br>
+              <a:rPr lang="en-US" altLang="zh-TW">
+                <a:effectLst>
+                  <a:outerShdw blurRad="38100" dist="38100" dir="2700000" algn="tl">
+                    <a:srgbClr val="000000">
+                      <a:alpha val="43137"/>
+                    </a:srgbClr>
+                  </a:outerShdw>
+                </a:effectLst>
+                <a:latin typeface="Charis SemiBold" panose="02000500060000020004" pitchFamily="2" charset="0"/>
+                <a:ea typeface="Noto Sans TC Medium" panose="020B0200000000000000" pitchFamily="34" charset="-128"/>
+              </a:rPr>
+            </a:br>
+            <a:r>
+              <a:rPr lang="en-US" altLang="zh-TW">
+                <a:effectLst>
+                  <a:outerShdw blurRad="38100" dist="38100" dir="2700000" algn="tl">
+                    <a:srgbClr val="000000">
+                      <a:alpha val="43137"/>
+                    </a:srgbClr>
+                  </a:outerShdw>
+                </a:effectLst>
+                <a:latin typeface="Charis SemiBold" panose="02000500060000020004" pitchFamily="2" charset="0"/>
+                <a:ea typeface="Noto Sans TC Medium" panose="020B0200000000000000" pitchFamily="34" charset="-128"/>
+              </a:rPr>
+              <a:t>[wat⁸⁻⁷ tao²]</a:t>
+            </a:r>
+            <a:endParaRPr lang="zh-TW" altLang="en-US">
+              <a:effectLst>
+                <a:outerShdw blurRad="38100" dist="38100" dir="2700000" algn="tl">
+                  <a:srgbClr val="000000">
+                    <a:alpha val="43137"/>
+                  </a:srgbClr>
+                </a:outerShdw>
+              </a:effectLst>
+              <a:latin typeface="Charis SemiBold" panose="02000500060000020004" pitchFamily="2" charset="0"/>
+              <a:ea typeface="Noto Sans TC Medium" panose="020B0200000000000000" pitchFamily="34" charset="-128"/>
+            </a:endParaRPr>
+          </a:p>
+        </p:txBody>
+      </p:sp>
+      <p:sp>
+        <p:nvSpPr>
+          <p:cNvPr id="9" name="流程圖: 替代程序 8">
+            <a:extLst>
+              <a:ext uri="{FF2B5EF4-FFF2-40B4-BE49-F238E27FC236}">
+                <a16:creationId xmlns:a16="http://schemas.microsoft.com/office/drawing/2014/main" id="{807B889B-E1C1-B549-4C20-9074259CF512}"/>
+              </a:ext>
+            </a:extLst>
+          </p:cNvPr>
+          <p:cNvSpPr/>
+          <p:nvPr/>
+        </p:nvSpPr>
+        <p:spPr>
+          <a:xfrm>
+            <a:off x="4341344" y="1663099"/>
+            <a:ext cx="2083241" cy="755374"/>
+          </a:xfrm>
+          <a:prstGeom prst="flowChartAlternateProcess">
+            <a:avLst/>
+          </a:prstGeom>
+        </p:spPr>
+        <p:style>
+          <a:lnRef idx="2">
+            <a:schemeClr val="accent1">
+              <a:shade val="15000"/>
+            </a:schemeClr>
+          </a:lnRef>
+          <a:fillRef idx="1">
+            <a:schemeClr val="accent1"/>
+          </a:fillRef>
+          <a:effectRef idx="0">
+            <a:schemeClr val="accent1"/>
+          </a:effectRef>
+          <a:fontRef idx="minor">
+            <a:schemeClr val="lt1"/>
+          </a:fontRef>
+        </p:style>
+        <p:txBody>
+          <a:bodyPr rtlCol="0" anchor="ctr"/>
+          <a:lstStyle/>
+          <a:p>
+            <a:pPr algn="ctr"/>
+            <a:r>
+              <a:rPr lang="en-US" altLang="zh-TW">
+                <a:effectLst>
+                  <a:outerShdw blurRad="38100" dist="38100" dir="2700000" algn="tl">
+                    <a:srgbClr val="000000">
+                      <a:alpha val="43137"/>
+                    </a:srgbClr>
+                  </a:outerShdw>
+                </a:effectLst>
+                <a:latin typeface="Charis SemiBold" panose="02000500060000020004" pitchFamily="2" charset="0"/>
+                <a:ea typeface="Noto Sans TC Medium" panose="020B0200000000000000" pitchFamily="34" charset="-128"/>
+              </a:rPr>
+              <a:t>【6】</a:t>
+            </a:r>
+            <a:r>
+              <a:rPr lang="zh-TW" altLang="en-US">
+                <a:effectLst>
+                  <a:outerShdw blurRad="38100" dist="38100" dir="2700000" algn="tl">
+                    <a:srgbClr val="000000">
+                      <a:alpha val="43137"/>
+                    </a:srgbClr>
+                  </a:outerShdw>
+                </a:effectLst>
+                <a:latin typeface="Charis SemiBold" panose="02000500060000020004" pitchFamily="2" charset="0"/>
+                <a:ea typeface="Noto Sans TC Medium" panose="020B0200000000000000" pitchFamily="34" charset="-128"/>
+              </a:rPr>
+              <a:t>會車</a:t>
+            </a:r>
+            <a:br>
+              <a:rPr lang="en-US" altLang="zh-TW">
+                <a:effectLst>
+                  <a:outerShdw blurRad="38100" dist="38100" dir="2700000" algn="tl">
+                    <a:srgbClr val="000000">
+                      <a:alpha val="43137"/>
+                    </a:srgbClr>
+                  </a:outerShdw>
+                </a:effectLst>
+                <a:latin typeface="Charis SemiBold" panose="02000500060000020004" pitchFamily="2" charset="0"/>
+                <a:ea typeface="Noto Sans TC Medium" panose="020B0200000000000000" pitchFamily="34" charset="-128"/>
+              </a:rPr>
+            </a:br>
+            <a:r>
+              <a:rPr lang="en-US" altLang="zh-TW">
+                <a:effectLst>
+                  <a:outerShdw blurRad="38100" dist="38100" dir="2700000" algn="tl">
+                    <a:srgbClr val="000000">
+                      <a:alpha val="43137"/>
+                    </a:srgbClr>
+                  </a:outerShdw>
+                </a:effectLst>
+                <a:latin typeface="Charis SemiBold" panose="02000500060000020004" pitchFamily="2" charset="0"/>
+                <a:ea typeface="Noto Sans TC Medium" panose="020B0200000000000000" pitchFamily="34" charset="-128"/>
+              </a:rPr>
+              <a:t>[hue⁶⁻⁵ cia¹]</a:t>
+            </a:r>
+            <a:endParaRPr lang="zh-TW" altLang="en-US">
+              <a:effectLst>
+                <a:outerShdw blurRad="38100" dist="38100" dir="2700000" algn="tl">
+                  <a:srgbClr val="000000">
+                    <a:alpha val="43137"/>
+                  </a:srgbClr>
+                </a:outerShdw>
+              </a:effectLst>
+              <a:latin typeface="Charis SemiBold" panose="02000500060000020004" pitchFamily="2" charset="0"/>
+              <a:ea typeface="Noto Sans TC Medium" panose="020B0200000000000000" pitchFamily="34" charset="-128"/>
+            </a:endParaRPr>
+          </a:p>
+        </p:txBody>
+      </p:sp>
+      <p:sp>
+        <p:nvSpPr>
+          <p:cNvPr id="10" name="流程圖: 替代程序 9">
+            <a:extLst>
+              <a:ext uri="{FF2B5EF4-FFF2-40B4-BE49-F238E27FC236}">
+                <a16:creationId xmlns:a16="http://schemas.microsoft.com/office/drawing/2014/main" id="{EFC5146C-C9F9-765A-F836-2C0801A5CAC8}"/>
+              </a:ext>
+            </a:extLst>
+          </p:cNvPr>
+          <p:cNvSpPr/>
+          <p:nvPr/>
+        </p:nvSpPr>
+        <p:spPr>
+          <a:xfrm>
+            <a:off x="2372545" y="3167595"/>
+            <a:ext cx="2083241" cy="755374"/>
+          </a:xfrm>
+          <a:prstGeom prst="flowChartAlternateProcess">
+            <a:avLst/>
+          </a:prstGeom>
+        </p:spPr>
+        <p:style>
+          <a:lnRef idx="2">
+            <a:schemeClr val="accent1">
+              <a:shade val="15000"/>
+            </a:schemeClr>
+          </a:lnRef>
+          <a:fillRef idx="1">
+            <a:schemeClr val="accent1"/>
+          </a:fillRef>
+          <a:effectRef idx="0">
+            <a:schemeClr val="accent1"/>
+          </a:effectRef>
+          <a:fontRef idx="minor">
+            <a:schemeClr val="lt1"/>
+          </a:fontRef>
+        </p:style>
+        <p:txBody>
+          <a:bodyPr rtlCol="0" anchor="ctr"/>
+          <a:lstStyle/>
+          <a:p>
+            <a:pPr algn="ctr"/>
+            <a:r>
+              <a:rPr lang="en-US" altLang="zh-TW">
+                <a:effectLst>
+                  <a:outerShdw blurRad="38100" dist="38100" dir="2700000" algn="tl">
+                    <a:srgbClr val="000000">
+                      <a:alpha val="43137"/>
+                    </a:srgbClr>
+                  </a:outerShdw>
+                </a:effectLst>
+                <a:latin typeface="Charis SemiBold" panose="02000500060000020004" pitchFamily="2" charset="0"/>
+                <a:ea typeface="Noto Sans TC Medium" panose="020B0200000000000000" pitchFamily="34" charset="-128"/>
+              </a:rPr>
+              <a:t>【2】</a:t>
+            </a:r>
+            <a:r>
+              <a:rPr lang="zh-TW" altLang="en-US">
+                <a:effectLst>
+                  <a:outerShdw blurRad="38100" dist="38100" dir="2700000" algn="tl">
+                    <a:srgbClr val="000000">
+                      <a:alpha val="43137"/>
+                    </a:srgbClr>
+                  </a:outerShdw>
+                </a:effectLst>
+                <a:latin typeface="Charis SemiBold" panose="02000500060000020004" pitchFamily="2" charset="0"/>
+                <a:ea typeface="Noto Sans TC Medium" panose="020B0200000000000000" pitchFamily="34" charset="-128"/>
+              </a:rPr>
+              <a:t>回車</a:t>
+            </a:r>
+            <a:br>
+              <a:rPr lang="en-US" altLang="zh-TW">
+                <a:effectLst>
+                  <a:outerShdw blurRad="38100" dist="38100" dir="2700000" algn="tl">
+                    <a:srgbClr val="000000">
+                      <a:alpha val="43137"/>
+                    </a:srgbClr>
+                  </a:outerShdw>
+                </a:effectLst>
+                <a:latin typeface="Charis SemiBold" panose="02000500060000020004" pitchFamily="2" charset="0"/>
+                <a:ea typeface="Noto Sans TC Medium" panose="020B0200000000000000" pitchFamily="34" charset="-128"/>
+              </a:rPr>
+            </a:br>
+            <a:r>
+              <a:rPr lang="en-US" altLang="zh-TW">
+                <a:effectLst>
+                  <a:outerShdw blurRad="38100" dist="38100" dir="2700000" algn="tl">
+                    <a:srgbClr val="000000">
+                      <a:alpha val="43137"/>
+                    </a:srgbClr>
+                  </a:outerShdw>
+                </a:effectLst>
+                <a:latin typeface="Charis SemiBold" panose="02000500060000020004" pitchFamily="2" charset="0"/>
+                <a:ea typeface="Noto Sans TC Medium" panose="020B0200000000000000" pitchFamily="34" charset="-128"/>
+              </a:rPr>
+              <a:t>[hue²⁻⁶ cia¹]</a:t>
+            </a:r>
+            <a:endParaRPr lang="zh-TW" altLang="en-US">
+              <a:effectLst>
+                <a:outerShdw blurRad="38100" dist="38100" dir="2700000" algn="tl">
+                  <a:srgbClr val="000000">
+                    <a:alpha val="43137"/>
+                  </a:srgbClr>
+                </a:outerShdw>
+              </a:effectLst>
+              <a:latin typeface="Charis SemiBold" panose="02000500060000020004" pitchFamily="2" charset="0"/>
+              <a:ea typeface="Noto Sans TC Medium" panose="020B0200000000000000" pitchFamily="34" charset="-128"/>
+            </a:endParaRPr>
+          </a:p>
+        </p:txBody>
+      </p:sp>
+      <p:cxnSp>
+        <p:nvCxnSpPr>
+          <p:cNvPr id="12" name="直線單箭頭接點 11">
+            <a:extLst>
+              <a:ext uri="{FF2B5EF4-FFF2-40B4-BE49-F238E27FC236}">
+                <a16:creationId xmlns:a16="http://schemas.microsoft.com/office/drawing/2014/main" id="{092EA716-F98F-4B60-9983-63F5E25C4575}"/>
+              </a:ext>
+            </a:extLst>
+          </p:cNvPr>
+          <p:cNvCxnSpPr>
+            <a:cxnSpLocks/>
+            <a:stCxn id="9" idx="2"/>
+            <a:endCxn id="5" idx="0"/>
+          </p:cNvCxnSpPr>
+          <p:nvPr/>
+        </p:nvCxnSpPr>
+        <p:spPr>
+          <a:xfrm>
+            <a:off x="5382965" y="2418473"/>
+            <a:ext cx="0" cy="2332431"/>
+          </a:xfrm>
+          <a:prstGeom prst="straightConnector1">
+            <a:avLst/>
+          </a:prstGeom>
+          <a:ln>
+            <a:tailEnd type="triangle"/>
+          </a:ln>
+        </p:spPr>
+        <p:style>
+          <a:lnRef idx="2">
+            <a:schemeClr val="accent1"/>
+          </a:lnRef>
+          <a:fillRef idx="0">
+            <a:schemeClr val="accent1"/>
+          </a:fillRef>
+          <a:effectRef idx="1">
+            <a:schemeClr val="accent1"/>
+          </a:effectRef>
+          <a:fontRef idx="minor">
+            <a:schemeClr val="tx1"/>
+          </a:fontRef>
+        </p:style>
+      </p:cxnSp>
+      <p:cxnSp>
+        <p:nvCxnSpPr>
+          <p:cNvPr id="13" name="直線單箭頭接點 12">
+            <a:extLst>
+              <a:ext uri="{FF2B5EF4-FFF2-40B4-BE49-F238E27FC236}">
+                <a16:creationId xmlns:a16="http://schemas.microsoft.com/office/drawing/2014/main" id="{474D504B-625D-B4E9-3BD1-5666E2909693}"/>
+              </a:ext>
+            </a:extLst>
+          </p:cNvPr>
+          <p:cNvCxnSpPr>
+            <a:cxnSpLocks/>
+          </p:cNvCxnSpPr>
+          <p:nvPr/>
+        </p:nvCxnSpPr>
+        <p:spPr>
+          <a:xfrm flipH="1">
+            <a:off x="2485162" y="8158138"/>
+            <a:ext cx="1889047" cy="0"/>
+          </a:xfrm>
+          <a:prstGeom prst="straightConnector1">
+            <a:avLst/>
+          </a:prstGeom>
+          <a:ln>
+            <a:solidFill>
+              <a:schemeClr val="accent6"/>
+            </a:solidFill>
+            <a:tailEnd type="triangle"/>
+          </a:ln>
+        </p:spPr>
+        <p:style>
+          <a:lnRef idx="2">
+            <a:schemeClr val="accent1"/>
+          </a:lnRef>
+          <a:fillRef idx="0">
+            <a:schemeClr val="accent1"/>
+          </a:fillRef>
+          <a:effectRef idx="1">
+            <a:schemeClr val="accent1"/>
+          </a:effectRef>
+          <a:fontRef idx="minor">
+            <a:schemeClr val="tx1"/>
+          </a:fontRef>
+        </p:style>
+      </p:cxnSp>
+      <p:cxnSp>
+        <p:nvCxnSpPr>
+          <p:cNvPr id="14" name="直線單箭頭接點 13">
+            <a:extLst>
+              <a:ext uri="{FF2B5EF4-FFF2-40B4-BE49-F238E27FC236}">
+                <a16:creationId xmlns:a16="http://schemas.microsoft.com/office/drawing/2014/main" id="{FDF4B664-1EFA-008D-94E1-2EA1154780CA}"/>
+              </a:ext>
+            </a:extLst>
+          </p:cNvPr>
+          <p:cNvCxnSpPr>
+            <a:cxnSpLocks/>
+          </p:cNvCxnSpPr>
+          <p:nvPr/>
+        </p:nvCxnSpPr>
+        <p:spPr>
+          <a:xfrm>
+            <a:off x="2470163" y="7913798"/>
+            <a:ext cx="1868737" cy="0"/>
+          </a:xfrm>
+          <a:prstGeom prst="straightConnector1">
+            <a:avLst/>
+          </a:prstGeom>
+          <a:ln>
+            <a:solidFill>
+              <a:schemeClr val="accent5"/>
+            </a:solidFill>
+            <a:tailEnd type="triangle"/>
+          </a:ln>
+        </p:spPr>
+        <p:style>
+          <a:lnRef idx="2">
+            <a:schemeClr val="accent1"/>
+          </a:lnRef>
+          <a:fillRef idx="0">
+            <a:schemeClr val="accent1"/>
+          </a:fillRef>
+          <a:effectRef idx="1">
+            <a:schemeClr val="accent1"/>
+          </a:effectRef>
+          <a:fontRef idx="minor">
+            <a:schemeClr val="tx1"/>
+          </a:fontRef>
+        </p:style>
+      </p:cxnSp>
+      <p:cxnSp>
+        <p:nvCxnSpPr>
+          <p:cNvPr id="15" name="直線單箭頭接點 14">
+            <a:extLst>
+              <a:ext uri="{FF2B5EF4-FFF2-40B4-BE49-F238E27FC236}">
+                <a16:creationId xmlns:a16="http://schemas.microsoft.com/office/drawing/2014/main" id="{FCEE50F7-A9E3-ACAB-3880-0FE9A8B64490}"/>
+              </a:ext>
+            </a:extLst>
+          </p:cNvPr>
+          <p:cNvCxnSpPr>
+            <a:cxnSpLocks/>
+          </p:cNvCxnSpPr>
+          <p:nvPr/>
+        </p:nvCxnSpPr>
+        <p:spPr>
+          <a:xfrm>
+            <a:off x="2486987" y="2040786"/>
+            <a:ext cx="1854357" cy="0"/>
+          </a:xfrm>
+          <a:prstGeom prst="straightConnector1">
+            <a:avLst/>
+          </a:prstGeom>
+          <a:ln>
+            <a:tailEnd type="triangle"/>
+          </a:ln>
+        </p:spPr>
+        <p:style>
+          <a:lnRef idx="2">
+            <a:schemeClr val="accent1"/>
+          </a:lnRef>
+          <a:fillRef idx="0">
+            <a:schemeClr val="accent1"/>
+          </a:fillRef>
+          <a:effectRef idx="1">
+            <a:schemeClr val="accent1"/>
+          </a:effectRef>
+          <a:fontRef idx="minor">
+            <a:schemeClr val="tx1"/>
+          </a:fontRef>
+        </p:style>
+      </p:cxnSp>
+      <p:cxnSp>
+        <p:nvCxnSpPr>
+          <p:cNvPr id="16" name="直線單箭頭接點 15">
+            <a:extLst>
+              <a:ext uri="{FF2B5EF4-FFF2-40B4-BE49-F238E27FC236}">
+                <a16:creationId xmlns:a16="http://schemas.microsoft.com/office/drawing/2014/main" id="{93FEA001-7547-AE15-4E8D-29822B149BD8}"/>
+              </a:ext>
+            </a:extLst>
+          </p:cNvPr>
+          <p:cNvCxnSpPr>
+            <a:cxnSpLocks/>
+            <a:stCxn id="6" idx="0"/>
+            <a:endCxn id="3" idx="2"/>
+          </p:cNvCxnSpPr>
+          <p:nvPr/>
+        </p:nvCxnSpPr>
+        <p:spPr>
+          <a:xfrm flipV="1">
+            <a:off x="1445367" y="5506278"/>
+            <a:ext cx="0" cy="2158864"/>
+          </a:xfrm>
+          <a:prstGeom prst="straightConnector1">
+            <a:avLst/>
+          </a:prstGeom>
+          <a:ln>
+            <a:solidFill>
+              <a:schemeClr val="accent5"/>
+            </a:solidFill>
+            <a:tailEnd type="triangle"/>
+          </a:ln>
+        </p:spPr>
+        <p:style>
+          <a:lnRef idx="2">
+            <a:schemeClr val="accent1"/>
+          </a:lnRef>
+          <a:fillRef idx="0">
+            <a:schemeClr val="accent1"/>
+          </a:fillRef>
+          <a:effectRef idx="1">
+            <a:schemeClr val="accent1"/>
+          </a:effectRef>
+          <a:fontRef idx="minor">
+            <a:schemeClr val="tx1"/>
+          </a:fontRef>
+        </p:style>
+      </p:cxnSp>
+      <p:cxnSp>
+        <p:nvCxnSpPr>
+          <p:cNvPr id="17" name="直線單箭頭接點 16">
+            <a:extLst>
+              <a:ext uri="{FF2B5EF4-FFF2-40B4-BE49-F238E27FC236}">
+                <a16:creationId xmlns:a16="http://schemas.microsoft.com/office/drawing/2014/main" id="{E21F5137-03AC-5267-FC59-1BFAEC09832C}"/>
+              </a:ext>
+            </a:extLst>
+          </p:cNvPr>
+          <p:cNvCxnSpPr>
+            <a:cxnSpLocks/>
+            <a:stCxn id="3" idx="0"/>
+            <a:endCxn id="2" idx="2"/>
+          </p:cNvCxnSpPr>
+          <p:nvPr/>
+        </p:nvCxnSpPr>
+        <p:spPr>
+          <a:xfrm flipV="1">
+            <a:off x="1445367" y="2418473"/>
+            <a:ext cx="0" cy="2332431"/>
+          </a:xfrm>
+          <a:prstGeom prst="straightConnector1">
+            <a:avLst/>
+          </a:prstGeom>
+          <a:ln>
+            <a:tailEnd type="triangle"/>
+          </a:ln>
+        </p:spPr>
+        <p:style>
+          <a:lnRef idx="2">
+            <a:schemeClr val="accent1"/>
+          </a:lnRef>
+          <a:fillRef idx="0">
+            <a:schemeClr val="accent1"/>
+          </a:fillRef>
+          <a:effectRef idx="1">
+            <a:schemeClr val="accent1"/>
+          </a:effectRef>
+          <a:fontRef idx="minor">
+            <a:schemeClr val="tx1"/>
+          </a:fontRef>
+        </p:style>
+      </p:cxnSp>
+      <p:sp>
+        <p:nvSpPr>
+          <p:cNvPr id="18" name="文字方塊 17">
+            <a:extLst>
+              <a:ext uri="{FF2B5EF4-FFF2-40B4-BE49-F238E27FC236}">
+                <a16:creationId xmlns:a16="http://schemas.microsoft.com/office/drawing/2014/main" id="{98D84304-9B95-1471-BE1D-427A1FFEEE98}"/>
+              </a:ext>
+            </a:extLst>
+          </p:cNvPr>
+          <p:cNvSpPr txBox="1"/>
+          <p:nvPr/>
+        </p:nvSpPr>
+        <p:spPr>
+          <a:xfrm>
+            <a:off x="3084060" y="7562576"/>
+            <a:ext cx="762000" cy="369332"/>
           </a:xfrm>
           <a:prstGeom prst="rect">
             <a:avLst/>
           </a:prstGeom>
-        </p:spPr>
-      </p:pic>
+          <a:noFill/>
+        </p:spPr>
+        <p:txBody>
+          <a:bodyPr wrap="square" rtlCol="0">
+            <a:spAutoFit/>
+          </a:bodyPr>
+          <a:lstStyle/>
+          <a:p>
+            <a:pPr algn="ctr"/>
+            <a:r>
+              <a:rPr lang="en-US" altLang="zh-TW">
+                <a:solidFill>
+                  <a:schemeClr val="accent5"/>
+                </a:solidFill>
+                <a:effectLst>
+                  <a:outerShdw blurRad="38100" dist="38100" dir="2700000" algn="tl">
+                    <a:srgbClr val="000000">
+                      <a:alpha val="43137"/>
+                    </a:srgbClr>
+                  </a:outerShdw>
+                </a:effectLst>
+                <a:latin typeface="Charis SemiBold" panose="02000500060000020004" pitchFamily="2" charset="0"/>
+                <a:ea typeface="Noto Sans TC Medium" panose="020B0200000000000000" pitchFamily="34" charset="-128"/>
+              </a:rPr>
+              <a:t>p/t/k</a:t>
+            </a:r>
+            <a:endParaRPr lang="zh-TW" altLang="en-US">
+              <a:solidFill>
+                <a:schemeClr val="accent5"/>
+              </a:solidFill>
+              <a:effectLst>
+                <a:outerShdw blurRad="38100" dist="38100" dir="2700000" algn="tl">
+                  <a:srgbClr val="000000">
+                    <a:alpha val="43137"/>
+                  </a:srgbClr>
+                </a:outerShdw>
+              </a:effectLst>
+              <a:latin typeface="Charis SemiBold" panose="02000500060000020004" pitchFamily="2" charset="0"/>
+              <a:ea typeface="Noto Sans TC Medium" panose="020B0200000000000000" pitchFamily="34" charset="-128"/>
+            </a:endParaRPr>
+          </a:p>
+        </p:txBody>
+      </p:sp>
+      <p:sp>
+        <p:nvSpPr>
+          <p:cNvPr id="19" name="文字方塊 18">
+            <a:extLst>
+              <a:ext uri="{FF2B5EF4-FFF2-40B4-BE49-F238E27FC236}">
+                <a16:creationId xmlns:a16="http://schemas.microsoft.com/office/drawing/2014/main" id="{C7FFAFD7-DF9C-0AFA-5685-F3F449D425FA}"/>
+              </a:ext>
+            </a:extLst>
+          </p:cNvPr>
+          <p:cNvSpPr txBox="1"/>
+          <p:nvPr/>
+        </p:nvSpPr>
+        <p:spPr>
+          <a:xfrm>
+            <a:off x="3084060" y="8136043"/>
+            <a:ext cx="762000" cy="369332"/>
+          </a:xfrm>
+          <a:prstGeom prst="rect">
+            <a:avLst/>
+          </a:prstGeom>
+          <a:noFill/>
+        </p:spPr>
+        <p:txBody>
+          <a:bodyPr wrap="square" rtlCol="0">
+            <a:spAutoFit/>
+          </a:bodyPr>
+          <a:lstStyle/>
+          <a:p>
+            <a:pPr algn="ctr"/>
+            <a:r>
+              <a:rPr lang="en-US" altLang="zh-TW">
+                <a:solidFill>
+                  <a:schemeClr val="accent6"/>
+                </a:solidFill>
+                <a:effectLst>
+                  <a:outerShdw blurRad="38100" dist="38100" dir="2700000" algn="tl">
+                    <a:srgbClr val="000000">
+                      <a:alpha val="43137"/>
+                    </a:srgbClr>
+                  </a:outerShdw>
+                </a:effectLst>
+                <a:latin typeface="Charis SemiBold" panose="02000500060000020004" pitchFamily="2" charset="0"/>
+                <a:ea typeface="Noto Sans TC Medium" panose="020B0200000000000000" pitchFamily="34" charset="-128"/>
+              </a:rPr>
+              <a:t>p/t/k</a:t>
+            </a:r>
+            <a:endParaRPr lang="zh-TW" altLang="en-US">
+              <a:solidFill>
+                <a:schemeClr val="accent6"/>
+              </a:solidFill>
+              <a:effectLst>
+                <a:outerShdw blurRad="38100" dist="38100" dir="2700000" algn="tl">
+                  <a:srgbClr val="000000">
+                    <a:alpha val="43137"/>
+                  </a:srgbClr>
+                </a:outerShdw>
+              </a:effectLst>
+              <a:latin typeface="Charis SemiBold" panose="02000500060000020004" pitchFamily="2" charset="0"/>
+              <a:ea typeface="Noto Sans TC Medium" panose="020B0200000000000000" pitchFamily="34" charset="-128"/>
+            </a:endParaRPr>
+          </a:p>
+        </p:txBody>
+      </p:sp>
+      <p:sp>
+        <p:nvSpPr>
+          <p:cNvPr id="20" name="文字方塊 19">
+            <a:extLst>
+              <a:ext uri="{FF2B5EF4-FFF2-40B4-BE49-F238E27FC236}">
+                <a16:creationId xmlns:a16="http://schemas.microsoft.com/office/drawing/2014/main" id="{0EE0012C-A180-EADC-15D4-B6FB77FC787F}"/>
+              </a:ext>
+            </a:extLst>
+          </p:cNvPr>
+          <p:cNvSpPr txBox="1"/>
+          <p:nvPr/>
+        </p:nvSpPr>
+        <p:spPr>
+          <a:xfrm>
+            <a:off x="5153484" y="6343639"/>
+            <a:ext cx="212242" cy="369332"/>
+          </a:xfrm>
+          <a:prstGeom prst="rect">
+            <a:avLst/>
+          </a:prstGeom>
+          <a:noFill/>
+        </p:spPr>
+        <p:txBody>
+          <a:bodyPr wrap="square" rtlCol="0">
+            <a:spAutoFit/>
+          </a:bodyPr>
+          <a:lstStyle/>
+          <a:p>
+            <a:pPr algn="ctr"/>
+            <a:r>
+              <a:rPr lang="en-US" altLang="zh-TW">
+                <a:solidFill>
+                  <a:schemeClr val="accent6"/>
+                </a:solidFill>
+                <a:effectLst>
+                  <a:outerShdw blurRad="38100" dist="38100" dir="2700000" algn="tl">
+                    <a:srgbClr val="000000">
+                      <a:alpha val="43137"/>
+                    </a:srgbClr>
+                  </a:outerShdw>
+                </a:effectLst>
+                <a:latin typeface="Charis SemiBold" panose="02000500060000020004" pitchFamily="2" charset="0"/>
+                <a:ea typeface="Noto Sans TC Medium" panose="020B0200000000000000" pitchFamily="34" charset="-128"/>
+              </a:rPr>
+              <a:t>h</a:t>
+            </a:r>
+            <a:endParaRPr lang="zh-TW" altLang="en-US">
+              <a:solidFill>
+                <a:schemeClr val="accent6"/>
+              </a:solidFill>
+              <a:effectLst>
+                <a:outerShdw blurRad="38100" dist="38100" dir="2700000" algn="tl">
+                  <a:srgbClr val="000000">
+                    <a:alpha val="43137"/>
+                  </a:srgbClr>
+                </a:outerShdw>
+              </a:effectLst>
+              <a:latin typeface="Charis SemiBold" panose="02000500060000020004" pitchFamily="2" charset="0"/>
+              <a:ea typeface="Noto Sans TC Medium" panose="020B0200000000000000" pitchFamily="34" charset="-128"/>
+            </a:endParaRPr>
+          </a:p>
+        </p:txBody>
+      </p:sp>
+      <p:sp>
+        <p:nvSpPr>
+          <p:cNvPr id="21" name="文字方塊 20">
+            <a:extLst>
+              <a:ext uri="{FF2B5EF4-FFF2-40B4-BE49-F238E27FC236}">
+                <a16:creationId xmlns:a16="http://schemas.microsoft.com/office/drawing/2014/main" id="{5307F004-F7A3-8E17-6C06-0C6B03D88049}"/>
+              </a:ext>
+            </a:extLst>
+          </p:cNvPr>
+          <p:cNvSpPr txBox="1"/>
+          <p:nvPr/>
+        </p:nvSpPr>
+        <p:spPr>
+          <a:xfrm>
+            <a:off x="1445600" y="6343639"/>
+            <a:ext cx="212242" cy="369332"/>
+          </a:xfrm>
+          <a:prstGeom prst="rect">
+            <a:avLst/>
+          </a:prstGeom>
+          <a:noFill/>
+        </p:spPr>
+        <p:txBody>
+          <a:bodyPr wrap="square" rtlCol="0">
+            <a:spAutoFit/>
+          </a:bodyPr>
+          <a:lstStyle/>
+          <a:p>
+            <a:pPr algn="ctr"/>
+            <a:r>
+              <a:rPr lang="en-US" altLang="zh-TW">
+                <a:solidFill>
+                  <a:schemeClr val="accent5"/>
+                </a:solidFill>
+                <a:effectLst>
+                  <a:outerShdw blurRad="38100" dist="38100" dir="2700000" algn="tl">
+                    <a:srgbClr val="000000">
+                      <a:alpha val="43137"/>
+                    </a:srgbClr>
+                  </a:outerShdw>
+                </a:effectLst>
+                <a:latin typeface="Charis SemiBold" panose="02000500060000020004" pitchFamily="2" charset="0"/>
+                <a:ea typeface="Noto Sans TC Medium" panose="020B0200000000000000" pitchFamily="34" charset="-128"/>
+              </a:rPr>
+              <a:t>h</a:t>
+            </a:r>
+            <a:endParaRPr lang="zh-TW" altLang="en-US">
+              <a:solidFill>
+                <a:schemeClr val="accent5"/>
+              </a:solidFill>
+              <a:effectLst>
+                <a:outerShdw blurRad="38100" dist="38100" dir="2700000" algn="tl">
+                  <a:srgbClr val="000000">
+                    <a:alpha val="43137"/>
+                  </a:srgbClr>
+                </a:outerShdw>
+              </a:effectLst>
+              <a:latin typeface="Charis SemiBold" panose="02000500060000020004" pitchFamily="2" charset="0"/>
+              <a:ea typeface="Noto Sans TC Medium" panose="020B0200000000000000" pitchFamily="34" charset="-128"/>
+            </a:endParaRPr>
+          </a:p>
+        </p:txBody>
+      </p:sp>
+      <p:sp>
+        <p:nvSpPr>
+          <p:cNvPr id="22" name="矩形: 圓角 21">
+            <a:extLst>
+              <a:ext uri="{FF2B5EF4-FFF2-40B4-BE49-F238E27FC236}">
+                <a16:creationId xmlns:a16="http://schemas.microsoft.com/office/drawing/2014/main" id="{AD815132-9A96-8111-E1F1-23070A0F3C78}"/>
+              </a:ext>
+            </a:extLst>
+          </p:cNvPr>
+          <p:cNvSpPr/>
+          <p:nvPr/>
+        </p:nvSpPr>
+        <p:spPr>
+          <a:xfrm>
+            <a:off x="2982273" y="6694861"/>
+            <a:ext cx="2324277" cy="369332"/>
+          </a:xfrm>
+          <a:prstGeom prst="roundRect">
+            <a:avLst/>
+          </a:prstGeom>
+        </p:spPr>
+        <p:style>
+          <a:lnRef idx="0">
+            <a:schemeClr val="accent6"/>
+          </a:lnRef>
+          <a:fillRef idx="3">
+            <a:schemeClr val="accent6"/>
+          </a:fillRef>
+          <a:effectRef idx="3">
+            <a:schemeClr val="accent6"/>
+          </a:effectRef>
+          <a:fontRef idx="minor">
+            <a:schemeClr val="lt1"/>
+          </a:fontRef>
+        </p:style>
+        <p:txBody>
+          <a:bodyPr rtlCol="0" anchor="ctr"/>
+          <a:lstStyle/>
+          <a:p>
+            <a:pPr algn="ctr"/>
+            <a:r>
+              <a:rPr lang="zh-TW" altLang="en-US">
+                <a:effectLst>
+                  <a:outerShdw blurRad="38100" dist="38100" dir="2700000" algn="tl">
+                    <a:srgbClr val="000000">
+                      <a:alpha val="43137"/>
+                    </a:srgbClr>
+                  </a:outerShdw>
+                </a:effectLst>
+                <a:latin typeface="Charis SemiBold" panose="02000500060000020004" pitchFamily="2" charset="0"/>
+                <a:ea typeface="Noto Sans TC Medium" panose="020B0200000000000000" pitchFamily="34" charset="-128"/>
+              </a:rPr>
+              <a:t>白頭</a:t>
+            </a:r>
+            <a:r>
+              <a:rPr lang="en-US" altLang="zh-TW">
+                <a:effectLst>
+                  <a:outerShdw blurRad="38100" dist="38100" dir="2700000" algn="tl">
+                    <a:srgbClr val="000000">
+                      <a:alpha val="43137"/>
+                    </a:srgbClr>
+                  </a:outerShdw>
+                </a:effectLst>
+                <a:latin typeface="Charis SemiBold" panose="02000500060000020004" pitchFamily="2" charset="0"/>
+                <a:ea typeface="Noto Sans TC Medium" panose="020B0200000000000000" pitchFamily="34" charset="-128"/>
+              </a:rPr>
+              <a:t>〔beh⁸⁻⁵ tao²〕</a:t>
+            </a:r>
+            <a:endParaRPr lang="zh-TW" altLang="en-US">
+              <a:effectLst>
+                <a:outerShdw blurRad="38100" dist="38100" dir="2700000" algn="tl">
+                  <a:srgbClr val="000000">
+                    <a:alpha val="43137"/>
+                  </a:srgbClr>
+                </a:outerShdw>
+              </a:effectLst>
+              <a:latin typeface="Charis SemiBold" panose="02000500060000020004" pitchFamily="2" charset="0"/>
+              <a:ea typeface="Noto Sans TC Medium" panose="020B0200000000000000" pitchFamily="34" charset="-128"/>
+            </a:endParaRPr>
+          </a:p>
+        </p:txBody>
+      </p:sp>
+      <p:sp>
+        <p:nvSpPr>
+          <p:cNvPr id="23" name="矩形: 圓角 22">
+            <a:extLst>
+              <a:ext uri="{FF2B5EF4-FFF2-40B4-BE49-F238E27FC236}">
+                <a16:creationId xmlns:a16="http://schemas.microsoft.com/office/drawing/2014/main" id="{67963C57-D72E-D251-2B14-4FA5796A890B}"/>
+              </a:ext>
+            </a:extLst>
+          </p:cNvPr>
+          <p:cNvSpPr/>
+          <p:nvPr/>
+        </p:nvSpPr>
+        <p:spPr>
+          <a:xfrm>
+            <a:off x="1517676" y="5974306"/>
+            <a:ext cx="2247645" cy="426493"/>
+          </a:xfrm>
+          <a:prstGeom prst="roundRect">
+            <a:avLst/>
+          </a:prstGeom>
+        </p:spPr>
+        <p:style>
+          <a:lnRef idx="0">
+            <a:schemeClr val="accent5"/>
+          </a:lnRef>
+          <a:fillRef idx="3">
+            <a:schemeClr val="accent5"/>
+          </a:fillRef>
+          <a:effectRef idx="3">
+            <a:schemeClr val="accent5"/>
+          </a:effectRef>
+          <a:fontRef idx="minor">
+            <a:schemeClr val="lt1"/>
+          </a:fontRef>
+        </p:style>
+        <p:txBody>
+          <a:bodyPr rtlCol="0" anchor="ctr"/>
+          <a:lstStyle/>
+          <a:p>
+            <a:pPr algn="ctr"/>
+            <a:r>
+              <a:rPr lang="zh-TW" altLang="en-US">
+                <a:effectLst>
+                  <a:outerShdw blurRad="38100" dist="38100" dir="2700000" algn="tl">
+                    <a:srgbClr val="000000">
+                      <a:alpha val="43137"/>
+                    </a:srgbClr>
+                  </a:outerShdw>
+                </a:effectLst>
+                <a:latin typeface="Charis SemiBold" panose="02000500060000020004" pitchFamily="2" charset="0"/>
+                <a:ea typeface="Noto Sans TC Medium" panose="020B0200000000000000" pitchFamily="34" charset="-128"/>
+              </a:rPr>
+              <a:t>拍頭 </a:t>
+            </a:r>
+            <a:r>
+              <a:rPr lang="en-US" altLang="zh-TW">
+                <a:effectLst>
+                  <a:outerShdw blurRad="38100" dist="38100" dir="2700000" algn="tl">
+                    <a:srgbClr val="000000">
+                      <a:alpha val="43137"/>
+                    </a:srgbClr>
+                  </a:outerShdw>
+                </a:effectLst>
+                <a:latin typeface="Charis SemiBold" panose="02000500060000020004" pitchFamily="2" charset="0"/>
+                <a:ea typeface="Noto Sans TC Medium" panose="020B0200000000000000" pitchFamily="34" charset="-128"/>
+              </a:rPr>
+              <a:t>[pah⁷⁻³ tao²]</a:t>
+            </a:r>
+            <a:endParaRPr lang="zh-TW" altLang="en-US">
+              <a:effectLst>
+                <a:outerShdw blurRad="38100" dist="38100" dir="2700000" algn="tl">
+                  <a:srgbClr val="000000">
+                    <a:alpha val="43137"/>
+                  </a:srgbClr>
+                </a:outerShdw>
+              </a:effectLst>
+              <a:latin typeface="Charis SemiBold" panose="02000500060000020004" pitchFamily="2" charset="0"/>
+              <a:ea typeface="Noto Sans TC Medium" panose="020B0200000000000000" pitchFamily="34" charset="-128"/>
+            </a:endParaRPr>
+          </a:p>
+        </p:txBody>
+      </p:sp>
+      <p:cxnSp>
+        <p:nvCxnSpPr>
+          <p:cNvPr id="24" name="直線單箭頭接點 23">
+            <a:extLst>
+              <a:ext uri="{FF2B5EF4-FFF2-40B4-BE49-F238E27FC236}">
+                <a16:creationId xmlns:a16="http://schemas.microsoft.com/office/drawing/2014/main" id="{8878B7C0-1526-F6B1-DBC9-F68284D09385}"/>
+              </a:ext>
+            </a:extLst>
+          </p:cNvPr>
+          <p:cNvCxnSpPr>
+            <a:cxnSpLocks/>
+            <a:stCxn id="8" idx="0"/>
+            <a:endCxn id="5" idx="2"/>
+          </p:cNvCxnSpPr>
+          <p:nvPr/>
+        </p:nvCxnSpPr>
+        <p:spPr>
+          <a:xfrm flipV="1">
+            <a:off x="5382965" y="5506278"/>
+            <a:ext cx="0" cy="2153578"/>
+          </a:xfrm>
+          <a:prstGeom prst="straightConnector1">
+            <a:avLst/>
+          </a:prstGeom>
+          <a:ln>
+            <a:solidFill>
+              <a:schemeClr val="accent6"/>
+            </a:solidFill>
+            <a:tailEnd type="triangle"/>
+          </a:ln>
+        </p:spPr>
+        <p:style>
+          <a:lnRef idx="2">
+            <a:schemeClr val="accent1"/>
+          </a:lnRef>
+          <a:fillRef idx="0">
+            <a:schemeClr val="accent1"/>
+          </a:fillRef>
+          <a:effectRef idx="1">
+            <a:schemeClr val="accent1"/>
+          </a:effectRef>
+          <a:fontRef idx="minor">
+            <a:schemeClr val="tx1"/>
+          </a:fontRef>
+        </p:style>
+      </p:cxnSp>
+      <p:cxnSp>
+        <p:nvCxnSpPr>
+          <p:cNvPr id="25" name="直線單箭頭接點 24">
+            <a:extLst>
+              <a:ext uri="{FF2B5EF4-FFF2-40B4-BE49-F238E27FC236}">
+                <a16:creationId xmlns:a16="http://schemas.microsoft.com/office/drawing/2014/main" id="{59D235E2-5817-CED7-B801-06586D443342}"/>
+              </a:ext>
+            </a:extLst>
+          </p:cNvPr>
+          <p:cNvCxnSpPr>
+            <a:cxnSpLocks/>
+            <a:stCxn id="10" idx="0"/>
+          </p:cNvCxnSpPr>
+          <p:nvPr/>
+        </p:nvCxnSpPr>
+        <p:spPr>
+          <a:xfrm flipV="1">
+            <a:off x="3414166" y="2430655"/>
+            <a:ext cx="960043" cy="736940"/>
+          </a:xfrm>
+          <a:prstGeom prst="straightConnector1">
+            <a:avLst/>
+          </a:prstGeom>
+          <a:ln>
+            <a:tailEnd type="triangle"/>
+          </a:ln>
+        </p:spPr>
+        <p:style>
+          <a:lnRef idx="2">
+            <a:schemeClr val="accent1"/>
+          </a:lnRef>
+          <a:fillRef idx="0">
+            <a:schemeClr val="accent1"/>
+          </a:fillRef>
+          <a:effectRef idx="1">
+            <a:schemeClr val="accent1"/>
+          </a:effectRef>
+          <a:fontRef idx="minor">
+            <a:schemeClr val="tx1"/>
+          </a:fontRef>
+        </p:style>
+      </p:cxnSp>
+      <p:cxnSp>
+        <p:nvCxnSpPr>
+          <p:cNvPr id="26" name="直線單箭頭接點 25">
+            <a:extLst>
+              <a:ext uri="{FF2B5EF4-FFF2-40B4-BE49-F238E27FC236}">
+                <a16:creationId xmlns:a16="http://schemas.microsoft.com/office/drawing/2014/main" id="{3C04F1AF-3788-DA87-20F1-D0FF12B97BBA}"/>
+              </a:ext>
+            </a:extLst>
+          </p:cNvPr>
+          <p:cNvCxnSpPr>
+            <a:cxnSpLocks/>
+            <a:stCxn id="10" idx="2"/>
+          </p:cNvCxnSpPr>
+          <p:nvPr/>
+        </p:nvCxnSpPr>
+        <p:spPr>
+          <a:xfrm>
+            <a:off x="3414166" y="3922969"/>
+            <a:ext cx="924734" cy="875969"/>
+          </a:xfrm>
+          <a:prstGeom prst="straightConnector1">
+            <a:avLst/>
+          </a:prstGeom>
+          <a:ln>
+            <a:solidFill>
+              <a:schemeClr val="accent2"/>
+            </a:solidFill>
+            <a:prstDash val="sysDash"/>
+            <a:tailEnd type="triangle"/>
+          </a:ln>
+        </p:spPr>
+        <p:style>
+          <a:lnRef idx="2">
+            <a:schemeClr val="accent1"/>
+          </a:lnRef>
+          <a:fillRef idx="0">
+            <a:schemeClr val="accent1"/>
+          </a:fillRef>
+          <a:effectRef idx="1">
+            <a:schemeClr val="accent1"/>
+          </a:effectRef>
+          <a:fontRef idx="minor">
+            <a:schemeClr val="tx1"/>
+          </a:fontRef>
+        </p:style>
+      </p:cxnSp>
+      <p:cxnSp>
+        <p:nvCxnSpPr>
+          <p:cNvPr id="27" name="直線單箭頭接點 26">
+            <a:extLst>
+              <a:ext uri="{FF2B5EF4-FFF2-40B4-BE49-F238E27FC236}">
+                <a16:creationId xmlns:a16="http://schemas.microsoft.com/office/drawing/2014/main" id="{8C49887D-2659-12C2-AEDF-DE9146E7CCF5}"/>
+              </a:ext>
+            </a:extLst>
+          </p:cNvPr>
+          <p:cNvCxnSpPr>
+            <a:cxnSpLocks/>
+            <a:stCxn id="5" idx="1"/>
+            <a:endCxn id="3" idx="3"/>
+          </p:cNvCxnSpPr>
+          <p:nvPr/>
+        </p:nvCxnSpPr>
+        <p:spPr>
+          <a:xfrm flipH="1">
+            <a:off x="2486987" y="5128591"/>
+            <a:ext cx="1854357" cy="0"/>
+          </a:xfrm>
+          <a:prstGeom prst="straightConnector1">
+            <a:avLst/>
+          </a:prstGeom>
+          <a:ln>
+            <a:tailEnd type="triangle"/>
+          </a:ln>
+        </p:spPr>
+        <p:style>
+          <a:lnRef idx="2">
+            <a:schemeClr val="accent1"/>
+          </a:lnRef>
+          <a:fillRef idx="0">
+            <a:schemeClr val="accent1"/>
+          </a:fillRef>
+          <a:effectRef idx="1">
+            <a:schemeClr val="accent1"/>
+          </a:effectRef>
+          <a:fontRef idx="minor">
+            <a:schemeClr val="tx1"/>
+          </a:fontRef>
+        </p:style>
+      </p:cxnSp>
+      <p:sp>
+        <p:nvSpPr>
+          <p:cNvPr id="28" name="文字方塊 27">
+            <a:extLst>
+              <a:ext uri="{FF2B5EF4-FFF2-40B4-BE49-F238E27FC236}">
+                <a16:creationId xmlns:a16="http://schemas.microsoft.com/office/drawing/2014/main" id="{EF3DD6CD-6854-6927-F517-6DFE33EA4860}"/>
+              </a:ext>
+            </a:extLst>
+          </p:cNvPr>
+          <p:cNvSpPr txBox="1"/>
+          <p:nvPr/>
+        </p:nvSpPr>
+        <p:spPr>
+          <a:xfrm>
+            <a:off x="3894187" y="2777727"/>
+            <a:ext cx="212242" cy="369332"/>
+          </a:xfrm>
+          <a:prstGeom prst="rect">
+            <a:avLst/>
+          </a:prstGeom>
+          <a:noFill/>
+        </p:spPr>
+        <p:txBody>
+          <a:bodyPr wrap="square" rtlCol="0">
+            <a:spAutoFit/>
+          </a:bodyPr>
+          <a:lstStyle/>
+          <a:p>
+            <a:pPr algn="ctr"/>
+            <a:r>
+              <a:rPr lang="zh-TW" altLang="en-US">
+                <a:solidFill>
+                  <a:srgbClr val="FF0000"/>
+                </a:solidFill>
+                <a:effectLst>
+                  <a:outerShdw blurRad="38100" dist="38100" dir="2700000" algn="tl">
+                    <a:srgbClr val="000000">
+                      <a:alpha val="43137"/>
+                    </a:srgbClr>
+                  </a:outerShdw>
+                </a:effectLst>
+                <a:latin typeface="Charis SemiBold" panose="02000500060000020004" pitchFamily="2" charset="0"/>
+                <a:ea typeface="Noto Sans TC Medium" panose="020B0200000000000000" pitchFamily="34" charset="-128"/>
+              </a:rPr>
+              <a:t>漳</a:t>
+            </a:r>
+          </a:p>
+        </p:txBody>
+      </p:sp>
+      <p:sp>
+        <p:nvSpPr>
+          <p:cNvPr id="29" name="文字方塊 28">
+            <a:extLst>
+              <a:ext uri="{FF2B5EF4-FFF2-40B4-BE49-F238E27FC236}">
+                <a16:creationId xmlns:a16="http://schemas.microsoft.com/office/drawing/2014/main" id="{3A0E23BF-84CD-8B17-9B80-E2621A123804}"/>
+              </a:ext>
+            </a:extLst>
+          </p:cNvPr>
+          <p:cNvSpPr txBox="1"/>
+          <p:nvPr/>
+        </p:nvSpPr>
+        <p:spPr>
+          <a:xfrm>
+            <a:off x="3874624" y="4031963"/>
+            <a:ext cx="212242" cy="369332"/>
+          </a:xfrm>
+          <a:prstGeom prst="rect">
+            <a:avLst/>
+          </a:prstGeom>
+          <a:noFill/>
+        </p:spPr>
+        <p:txBody>
+          <a:bodyPr wrap="square" rtlCol="0">
+            <a:spAutoFit/>
+          </a:bodyPr>
+          <a:lstStyle/>
+          <a:p>
+            <a:pPr algn="ctr"/>
+            <a:r>
+              <a:rPr lang="zh-TW" altLang="en-US">
+                <a:solidFill>
+                  <a:srgbClr val="FF0000"/>
+                </a:solidFill>
+                <a:effectLst>
+                  <a:outerShdw blurRad="38100" dist="38100" dir="2700000" algn="tl">
+                    <a:srgbClr val="000000">
+                      <a:alpha val="43137"/>
+                    </a:srgbClr>
+                  </a:outerShdw>
+                </a:effectLst>
+                <a:latin typeface="Charis SemiBold" panose="02000500060000020004" pitchFamily="2" charset="0"/>
+                <a:ea typeface="Noto Sans TC Medium" panose="020B0200000000000000" pitchFamily="34" charset="-128"/>
+              </a:rPr>
+              <a:t>泉</a:t>
+            </a:r>
+          </a:p>
+        </p:txBody>
+      </p:sp>
     </p:spTree>
     <p:extLst>
       <p:ext uri="{BB962C8B-B14F-4D97-AF65-F5344CB8AC3E}">
-        <p14:creationId xmlns:p14="http://schemas.microsoft.com/office/powerpoint/2010/main" val="777039886"/>
+        <p14:creationId xmlns:p14="http://schemas.microsoft.com/office/powerpoint/2010/main" val="1223798686"/>
       </p:ext>
     </p:extLst>
   </p:cSld>
@@ -9038,14 +11875,1849 @@
 </file>
 
 <file path=ppt/slides/slide7.xml><?xml version="1.0" encoding="utf-8"?>
-<p:sld xmlns:a="http://schemas.openxmlformats.org/drawingml/2006/main" xmlns:r="http://schemas.openxmlformats.org/officeDocument/2006/relationships" xmlns:p="http://schemas.openxmlformats.org/presentationml/2006/main" show="0">
+<p:sld xmlns:a="http://schemas.openxmlformats.org/drawingml/2006/main" xmlns:r="http://schemas.openxmlformats.org/officeDocument/2006/relationships" xmlns:p="http://schemas.openxmlformats.org/presentationml/2006/main">
+  <p:cSld>
+    <p:spTree>
+      <p:nvGrpSpPr>
+        <p:cNvPr id="1" name=""/>
+        <p:cNvGrpSpPr/>
+        <p:nvPr/>
+      </p:nvGrpSpPr>
+      <p:grpSpPr>
+        <a:xfrm>
+          <a:off x="0" y="0"/>
+          <a:ext cx="0" cy="0"/>
+          <a:chOff x="0" y="0"/>
+          <a:chExt cx="0" cy="0"/>
+        </a:xfrm>
+      </p:grpSpPr>
+      <p:sp>
+        <p:nvSpPr>
+          <p:cNvPr id="2" name="標題 1">
+            <a:extLst>
+              <a:ext uri="{FF2B5EF4-FFF2-40B4-BE49-F238E27FC236}">
+                <a16:creationId xmlns:a16="http://schemas.microsoft.com/office/drawing/2014/main" id="{B32A2643-0E9B-B164-6B76-EF7AFFF99211}"/>
+              </a:ext>
+            </a:extLst>
+          </p:cNvPr>
+          <p:cNvSpPr>
+            <a:spLocks noGrp="1"/>
+          </p:cNvSpPr>
+          <p:nvPr>
+            <p:ph type="title"/>
+          </p:nvPr>
+        </p:nvSpPr>
+        <p:spPr>
+          <a:xfrm>
+            <a:off x="458629" y="669870"/>
+            <a:ext cx="5915025" cy="2356556"/>
+          </a:xfrm>
+        </p:spPr>
+        <p:txBody>
+          <a:bodyPr/>
+          <a:lstStyle/>
+          <a:p>
+            <a:endParaRPr lang="zh-TW" altLang="en-US"/>
+          </a:p>
+        </p:txBody>
+      </p:sp>
+      <p:sp>
+        <p:nvSpPr>
+          <p:cNvPr id="38" name="流程圖: 替代程序 37">
+            <a:extLst>
+              <a:ext uri="{FF2B5EF4-FFF2-40B4-BE49-F238E27FC236}">
+                <a16:creationId xmlns:a16="http://schemas.microsoft.com/office/drawing/2014/main" id="{F06E941B-1E39-1529-8709-7F7434651C6C}"/>
+              </a:ext>
+            </a:extLst>
+          </p:cNvPr>
+          <p:cNvSpPr/>
+          <p:nvPr/>
+        </p:nvSpPr>
+        <p:spPr>
+          <a:xfrm>
+            <a:off x="320962" y="3674777"/>
+            <a:ext cx="2083241" cy="755374"/>
+          </a:xfrm>
+          <a:prstGeom prst="flowChartAlternateProcess">
+            <a:avLst/>
+          </a:prstGeom>
+        </p:spPr>
+        <p:style>
+          <a:lnRef idx="2">
+            <a:schemeClr val="accent1">
+              <a:shade val="15000"/>
+            </a:schemeClr>
+          </a:lnRef>
+          <a:fillRef idx="1">
+            <a:schemeClr val="accent1"/>
+          </a:fillRef>
+          <a:effectRef idx="0">
+            <a:schemeClr val="accent1"/>
+          </a:effectRef>
+          <a:fontRef idx="minor">
+            <a:schemeClr val="lt1"/>
+          </a:fontRef>
+        </p:style>
+        <p:txBody>
+          <a:bodyPr rtlCol="0" anchor="ctr"/>
+          <a:lstStyle/>
+          <a:p>
+            <a:pPr algn="ctr"/>
+            <a:r>
+              <a:rPr lang="en-US" altLang="zh-TW">
+                <a:effectLst>
+                  <a:outerShdw blurRad="38100" dist="38100" dir="2700000" algn="tl">
+                    <a:srgbClr val="000000">
+                      <a:alpha val="43137"/>
+                    </a:srgbClr>
+                  </a:outerShdw>
+                </a:effectLst>
+                <a:latin typeface="Charis SemiBold" panose="02000500060000020004" pitchFamily="2" charset="0"/>
+                <a:ea typeface="Noto Sans TC Medium" panose="020B0200000000000000" pitchFamily="34" charset="-128"/>
+              </a:rPr>
+              <a:t>【1】</a:t>
+            </a:r>
+            <a:r>
+              <a:rPr lang="zh-TW" altLang="en-US">
+                <a:effectLst>
+                  <a:outerShdw blurRad="38100" dist="38100" dir="2700000" algn="tl">
+                    <a:srgbClr val="000000">
+                      <a:alpha val="43137"/>
+                    </a:srgbClr>
+                  </a:outerShdw>
+                </a:effectLst>
+                <a:latin typeface="Charis SemiBold" panose="02000500060000020004" pitchFamily="2" charset="0"/>
+                <a:ea typeface="Noto Sans TC Medium" panose="020B0200000000000000" pitchFamily="34" charset="-128"/>
+              </a:rPr>
+              <a:t>骹底</a:t>
+            </a:r>
+            <a:r>
+              <a:rPr lang="en-US" altLang="zh-TW">
+                <a:effectLst>
+                  <a:outerShdw blurRad="38100" dist="38100" dir="2700000" algn="tl">
+                    <a:srgbClr val="000000">
+                      <a:alpha val="43137"/>
+                    </a:srgbClr>
+                  </a:outerShdw>
+                </a:effectLst>
+                <a:latin typeface="Charis SemiBold" panose="02000500060000020004" pitchFamily="2" charset="0"/>
+                <a:ea typeface="Noto Sans TC Medium" panose="020B0200000000000000" pitchFamily="34" charset="-128"/>
+              </a:rPr>
+              <a:t> </a:t>
+            </a:r>
+            <a:br>
+              <a:rPr lang="en-US" altLang="zh-TW">
+                <a:effectLst>
+                  <a:outerShdw blurRad="38100" dist="38100" dir="2700000" algn="tl">
+                    <a:srgbClr val="000000">
+                      <a:alpha val="43137"/>
+                    </a:srgbClr>
+                  </a:outerShdw>
+                </a:effectLst>
+                <a:latin typeface="Charis SemiBold" panose="02000500060000020004" pitchFamily="2" charset="0"/>
+                <a:ea typeface="Noto Sans TC Medium" panose="020B0200000000000000" pitchFamily="34" charset="-128"/>
+              </a:rPr>
+            </a:br>
+            <a:r>
+              <a:rPr lang="en-US" altLang="zh-TW">
+                <a:effectLst>
+                  <a:outerShdw blurRad="38100" dist="38100" dir="2700000" algn="tl">
+                    <a:srgbClr val="000000">
+                      <a:alpha val="43137"/>
+                    </a:srgbClr>
+                  </a:outerShdw>
+                </a:effectLst>
+                <a:latin typeface="Charis SemiBold" panose="02000500060000020004" pitchFamily="2" charset="0"/>
+                <a:ea typeface="Noto Sans TC Medium" panose="020B0200000000000000" pitchFamily="34" charset="-128"/>
+              </a:rPr>
+              <a:t>[ka¹⁻⁶ de³]</a:t>
+            </a:r>
+            <a:endParaRPr lang="zh-TW" altLang="en-US">
+              <a:effectLst>
+                <a:outerShdw blurRad="38100" dist="38100" dir="2700000" algn="tl">
+                  <a:srgbClr val="000000">
+                    <a:alpha val="43137"/>
+                  </a:srgbClr>
+                </a:outerShdw>
+              </a:effectLst>
+              <a:latin typeface="Charis SemiBold" panose="02000500060000020004" pitchFamily="2" charset="0"/>
+              <a:ea typeface="Noto Sans TC Medium" panose="020B0200000000000000" pitchFamily="34" charset="-128"/>
+            </a:endParaRPr>
+          </a:p>
+        </p:txBody>
+      </p:sp>
+      <p:sp>
+        <p:nvSpPr>
+          <p:cNvPr id="39" name="流程圖: 替代程序 38">
+            <a:extLst>
+              <a:ext uri="{FF2B5EF4-FFF2-40B4-BE49-F238E27FC236}">
+                <a16:creationId xmlns:a16="http://schemas.microsoft.com/office/drawing/2014/main" id="{D3A9B982-490F-7F20-E46F-9FA6ED5A547C}"/>
+              </a:ext>
+            </a:extLst>
+          </p:cNvPr>
+          <p:cNvSpPr/>
+          <p:nvPr/>
+        </p:nvSpPr>
+        <p:spPr>
+          <a:xfrm>
+            <a:off x="320962" y="7212830"/>
+            <a:ext cx="2083241" cy="755374"/>
+          </a:xfrm>
+          <a:prstGeom prst="flowChartAlternateProcess">
+            <a:avLst/>
+          </a:prstGeom>
+        </p:spPr>
+        <p:style>
+          <a:lnRef idx="2">
+            <a:schemeClr val="accent1">
+              <a:shade val="15000"/>
+            </a:schemeClr>
+          </a:lnRef>
+          <a:fillRef idx="1">
+            <a:schemeClr val="accent1"/>
+          </a:fillRef>
+          <a:effectRef idx="0">
+            <a:schemeClr val="accent1"/>
+          </a:effectRef>
+          <a:fontRef idx="minor">
+            <a:schemeClr val="lt1"/>
+          </a:fontRef>
+        </p:style>
+        <p:txBody>
+          <a:bodyPr rtlCol="0" anchor="ctr"/>
+          <a:lstStyle/>
+          <a:p>
+            <a:pPr algn="ctr"/>
+            <a:r>
+              <a:rPr lang="en-US" altLang="zh-TW">
+                <a:effectLst>
+                  <a:outerShdw blurRad="38100" dist="38100" dir="2700000" algn="tl">
+                    <a:srgbClr val="000000">
+                      <a:alpha val="43137"/>
+                    </a:srgbClr>
+                  </a:outerShdw>
+                </a:effectLst>
+                <a:latin typeface="Charis SemiBold" panose="02000500060000020004" pitchFamily="2" charset="0"/>
+                <a:ea typeface="Noto Sans TC Medium" panose="020B0200000000000000" pitchFamily="34" charset="-128"/>
+              </a:rPr>
+              <a:t>【3】</a:t>
+            </a:r>
+            <a:r>
+              <a:rPr lang="zh-TW" altLang="en-US">
+                <a:effectLst>
+                  <a:outerShdw blurRad="38100" dist="38100" dir="2700000" algn="tl">
+                    <a:srgbClr val="000000">
+                      <a:alpha val="43137"/>
+                    </a:srgbClr>
+                  </a:outerShdw>
+                </a:effectLst>
+                <a:latin typeface="Charis SemiBold" panose="02000500060000020004" pitchFamily="2" charset="0"/>
+                <a:ea typeface="Noto Sans TC Medium" panose="020B0200000000000000" pitchFamily="34" charset="-128"/>
+              </a:rPr>
+              <a:t>手心</a:t>
+            </a:r>
+            <a:r>
+              <a:rPr lang="en-US" altLang="zh-TW">
+                <a:effectLst>
+                  <a:outerShdw blurRad="38100" dist="38100" dir="2700000" algn="tl">
+                    <a:srgbClr val="000000">
+                      <a:alpha val="43137"/>
+                    </a:srgbClr>
+                  </a:outerShdw>
+                </a:effectLst>
+                <a:latin typeface="Charis SemiBold" panose="02000500060000020004" pitchFamily="2" charset="0"/>
+                <a:ea typeface="Noto Sans TC Medium" panose="020B0200000000000000" pitchFamily="34" charset="-128"/>
+              </a:rPr>
+              <a:t> </a:t>
+            </a:r>
+            <a:br>
+              <a:rPr lang="en-US" altLang="zh-TW">
+                <a:effectLst>
+                  <a:outerShdw blurRad="38100" dist="38100" dir="2700000" algn="tl">
+                    <a:srgbClr val="000000">
+                      <a:alpha val="43137"/>
+                    </a:srgbClr>
+                  </a:outerShdw>
+                </a:effectLst>
+                <a:latin typeface="Charis SemiBold" panose="02000500060000020004" pitchFamily="2" charset="0"/>
+                <a:ea typeface="Noto Sans TC Medium" panose="020B0200000000000000" pitchFamily="34" charset="-128"/>
+              </a:rPr>
+            </a:br>
+            <a:r>
+              <a:rPr lang="en-US" altLang="zh-TW">
+                <a:effectLst>
+                  <a:outerShdw blurRad="38100" dist="38100" dir="2700000" algn="tl">
+                    <a:srgbClr val="000000">
+                      <a:alpha val="43137"/>
+                    </a:srgbClr>
+                  </a:outerShdw>
+                </a:effectLst>
+                <a:latin typeface="Charis SemiBold" panose="02000500060000020004" pitchFamily="2" charset="0"/>
+                <a:ea typeface="Noto Sans TC Medium" panose="020B0200000000000000" pitchFamily="34" charset="-128"/>
+              </a:rPr>
+              <a:t>[ciu³⁻¹ sim¹]</a:t>
+            </a:r>
+            <a:endParaRPr lang="zh-TW" altLang="en-US">
+              <a:effectLst>
+                <a:outerShdw blurRad="38100" dist="38100" dir="2700000" algn="tl">
+                  <a:srgbClr val="000000">
+                    <a:alpha val="43137"/>
+                  </a:srgbClr>
+                </a:outerShdw>
+              </a:effectLst>
+              <a:latin typeface="Charis SemiBold" panose="02000500060000020004" pitchFamily="2" charset="0"/>
+              <a:ea typeface="Noto Sans TC Medium" panose="020B0200000000000000" pitchFamily="34" charset="-128"/>
+            </a:endParaRPr>
+          </a:p>
+        </p:txBody>
+      </p:sp>
+      <p:sp>
+        <p:nvSpPr>
+          <p:cNvPr id="40" name="流程圖: 替代程序 39">
+            <a:extLst>
+              <a:ext uri="{FF2B5EF4-FFF2-40B4-BE49-F238E27FC236}">
+                <a16:creationId xmlns:a16="http://schemas.microsoft.com/office/drawing/2014/main" id="{167605DE-5076-088B-454D-62FA1655E529}"/>
+              </a:ext>
+            </a:extLst>
+          </p:cNvPr>
+          <p:cNvSpPr/>
+          <p:nvPr/>
+        </p:nvSpPr>
+        <p:spPr>
+          <a:xfrm>
+            <a:off x="4258560" y="7212830"/>
+            <a:ext cx="2083241" cy="755374"/>
+          </a:xfrm>
+          <a:prstGeom prst="flowChartAlternateProcess">
+            <a:avLst/>
+          </a:prstGeom>
+        </p:spPr>
+        <p:style>
+          <a:lnRef idx="2">
+            <a:schemeClr val="accent1">
+              <a:shade val="15000"/>
+            </a:schemeClr>
+          </a:lnRef>
+          <a:fillRef idx="1">
+            <a:schemeClr val="accent1"/>
+          </a:fillRef>
+          <a:effectRef idx="0">
+            <a:schemeClr val="accent1"/>
+          </a:effectRef>
+          <a:fontRef idx="minor">
+            <a:schemeClr val="lt1"/>
+          </a:fontRef>
+        </p:style>
+        <p:txBody>
+          <a:bodyPr rtlCol="0" anchor="ctr"/>
+          <a:lstStyle/>
+          <a:p>
+            <a:pPr algn="ctr"/>
+            <a:r>
+              <a:rPr lang="en-US" altLang="zh-TW">
+                <a:effectLst>
+                  <a:outerShdw blurRad="38100" dist="38100" dir="2700000" algn="tl">
+                    <a:srgbClr val="000000">
+                      <a:alpha val="43137"/>
+                    </a:srgbClr>
+                  </a:outerShdw>
+                </a:effectLst>
+                <a:latin typeface="Charis SemiBold" panose="02000500060000020004" pitchFamily="2" charset="0"/>
+                <a:ea typeface="Noto Sans TC Medium" panose="020B0200000000000000" pitchFamily="34" charset="-128"/>
+              </a:rPr>
+              <a:t>【5】</a:t>
+            </a:r>
+            <a:r>
+              <a:rPr lang="zh-TW" altLang="en-US">
+                <a:effectLst>
+                  <a:outerShdw blurRad="38100" dist="38100" dir="2700000" algn="tl">
+                    <a:srgbClr val="000000">
+                      <a:alpha val="43137"/>
+                    </a:srgbClr>
+                  </a:outerShdw>
+                </a:effectLst>
+                <a:latin typeface="Charis SemiBold" panose="02000500060000020004" pitchFamily="2" charset="0"/>
+                <a:ea typeface="Noto Sans TC Medium" panose="020B0200000000000000" pitchFamily="34" charset="-128"/>
+              </a:rPr>
+              <a:t>嘴齒</a:t>
+            </a:r>
+            <a:br>
+              <a:rPr lang="en-US" altLang="zh-TW">
+                <a:effectLst>
+                  <a:outerShdw blurRad="38100" dist="38100" dir="2700000" algn="tl">
+                    <a:srgbClr val="000000">
+                      <a:alpha val="43137"/>
+                    </a:srgbClr>
+                  </a:outerShdw>
+                </a:effectLst>
+                <a:latin typeface="Charis SemiBold" panose="02000500060000020004" pitchFamily="2" charset="0"/>
+                <a:ea typeface="Noto Sans TC Medium" panose="020B0200000000000000" pitchFamily="34" charset="-128"/>
+              </a:rPr>
+            </a:br>
+            <a:r>
+              <a:rPr lang="en-US" altLang="zh-TW">
+                <a:effectLst>
+                  <a:outerShdw blurRad="38100" dist="38100" dir="2700000" algn="tl">
+                    <a:srgbClr val="000000">
+                      <a:alpha val="43137"/>
+                    </a:srgbClr>
+                  </a:outerShdw>
+                </a:effectLst>
+                <a:latin typeface="Charis SemiBold" panose="02000500060000020004" pitchFamily="2" charset="0"/>
+                <a:ea typeface="Noto Sans TC Medium" panose="020B0200000000000000" pitchFamily="34" charset="-128"/>
+              </a:rPr>
+              <a:t>[cui⁵⁻³ ki³]</a:t>
+            </a:r>
+            <a:endParaRPr lang="zh-TW" altLang="en-US">
+              <a:effectLst>
+                <a:outerShdw blurRad="38100" dist="38100" dir="2700000" algn="tl">
+                  <a:srgbClr val="000000">
+                    <a:alpha val="43137"/>
+                  </a:srgbClr>
+                </a:outerShdw>
+              </a:effectLst>
+              <a:latin typeface="Charis SemiBold" panose="02000500060000020004" pitchFamily="2" charset="0"/>
+              <a:ea typeface="Noto Sans TC Medium" panose="020B0200000000000000" pitchFamily="34" charset="-128"/>
+            </a:endParaRPr>
+          </a:p>
+        </p:txBody>
+      </p:sp>
+      <p:sp>
+        <p:nvSpPr>
+          <p:cNvPr id="41" name="流程圖: 替代程序 40">
+            <a:extLst>
+              <a:ext uri="{FF2B5EF4-FFF2-40B4-BE49-F238E27FC236}">
+                <a16:creationId xmlns:a16="http://schemas.microsoft.com/office/drawing/2014/main" id="{D8D854A7-302A-8F8B-FE9C-D13ED2AC7DBE}"/>
+              </a:ext>
+            </a:extLst>
+          </p:cNvPr>
+          <p:cNvSpPr/>
+          <p:nvPr/>
+        </p:nvSpPr>
+        <p:spPr>
+          <a:xfrm>
+            <a:off x="320962" y="10305774"/>
+            <a:ext cx="2083241" cy="755374"/>
+          </a:xfrm>
+          <a:prstGeom prst="flowChartAlternateProcess">
+            <a:avLst/>
+          </a:prstGeom>
+        </p:spPr>
+        <p:style>
+          <a:lnRef idx="0">
+            <a:schemeClr val="accent5"/>
+          </a:lnRef>
+          <a:fillRef idx="3">
+            <a:schemeClr val="accent5"/>
+          </a:fillRef>
+          <a:effectRef idx="3">
+            <a:schemeClr val="accent5"/>
+          </a:effectRef>
+          <a:fontRef idx="minor">
+            <a:schemeClr val="lt1"/>
+          </a:fontRef>
+        </p:style>
+        <p:txBody>
+          <a:bodyPr rtlCol="0" anchor="ctr"/>
+          <a:lstStyle/>
+          <a:p>
+            <a:pPr algn="ctr"/>
+            <a:r>
+              <a:rPr lang="en-US" altLang="zh-TW">
+                <a:effectLst>
+                  <a:outerShdw blurRad="38100" dist="38100" dir="2700000" algn="tl">
+                    <a:srgbClr val="000000">
+                      <a:alpha val="43137"/>
+                    </a:srgbClr>
+                  </a:outerShdw>
+                </a:effectLst>
+                <a:latin typeface="Charis SemiBold" panose="02000500060000020004" pitchFamily="2" charset="0"/>
+                <a:ea typeface="Noto Sans TC Medium" panose="020B0200000000000000" pitchFamily="34" charset="-128"/>
+              </a:rPr>
+              <a:t>【7】</a:t>
+            </a:r>
+            <a:r>
+              <a:rPr lang="zh-TW" altLang="en-US">
+                <a:effectLst>
+                  <a:outerShdw blurRad="38100" dist="38100" dir="2700000" algn="tl">
+                    <a:srgbClr val="000000">
+                      <a:alpha val="43137"/>
+                    </a:srgbClr>
+                  </a:outerShdw>
+                </a:effectLst>
+                <a:latin typeface="Charis SemiBold" panose="02000500060000020004" pitchFamily="2" charset="0"/>
+                <a:ea typeface="Noto Sans TC Medium" panose="020B0200000000000000" pitchFamily="34" charset="-128"/>
+              </a:rPr>
+              <a:t>骨頭</a:t>
+            </a:r>
+            <a:r>
+              <a:rPr lang="en-US" altLang="zh-TW">
+                <a:effectLst>
+                  <a:outerShdw blurRad="38100" dist="38100" dir="2700000" algn="tl">
+                    <a:srgbClr val="000000">
+                      <a:alpha val="43137"/>
+                    </a:srgbClr>
+                  </a:outerShdw>
+                </a:effectLst>
+                <a:latin typeface="Charis SemiBold" panose="02000500060000020004" pitchFamily="2" charset="0"/>
+                <a:ea typeface="Noto Sans TC Medium" panose="020B0200000000000000" pitchFamily="34" charset="-128"/>
+              </a:rPr>
+              <a:t> </a:t>
+            </a:r>
+            <a:br>
+              <a:rPr lang="en-US" altLang="zh-TW">
+                <a:effectLst>
+                  <a:outerShdw blurRad="38100" dist="38100" dir="2700000" algn="tl">
+                    <a:srgbClr val="000000">
+                      <a:alpha val="43137"/>
+                    </a:srgbClr>
+                  </a:outerShdw>
+                </a:effectLst>
+                <a:latin typeface="Charis SemiBold" panose="02000500060000020004" pitchFamily="2" charset="0"/>
+                <a:ea typeface="Noto Sans TC Medium" panose="020B0200000000000000" pitchFamily="34" charset="-128"/>
+              </a:rPr>
+            </a:br>
+            <a:r>
+              <a:rPr lang="en-US" altLang="zh-TW">
+                <a:effectLst>
+                  <a:outerShdw blurRad="38100" dist="38100" dir="2700000" algn="tl">
+                    <a:srgbClr val="000000">
+                      <a:alpha val="43137"/>
+                    </a:srgbClr>
+                  </a:outerShdw>
+                </a:effectLst>
+                <a:latin typeface="Charis SemiBold" panose="02000500060000020004" pitchFamily="2" charset="0"/>
+                <a:ea typeface="Noto Sans TC Medium" panose="020B0200000000000000" pitchFamily="34" charset="-128"/>
+              </a:rPr>
+              <a:t>[gut⁷⁻⁸ tao²]</a:t>
+            </a:r>
+            <a:endParaRPr lang="zh-TW" altLang="en-US">
+              <a:effectLst>
+                <a:outerShdw blurRad="38100" dist="38100" dir="2700000" algn="tl">
+                  <a:srgbClr val="000000">
+                    <a:alpha val="43137"/>
+                  </a:srgbClr>
+                </a:outerShdw>
+              </a:effectLst>
+              <a:latin typeface="Charis SemiBold" panose="02000500060000020004" pitchFamily="2" charset="0"/>
+              <a:ea typeface="Noto Sans TC Medium" panose="020B0200000000000000" pitchFamily="34" charset="-128"/>
+            </a:endParaRPr>
+          </a:p>
+        </p:txBody>
+      </p:sp>
+      <p:sp>
+        <p:nvSpPr>
+          <p:cNvPr id="42" name="流程圖: 替代程序 41">
+            <a:extLst>
+              <a:ext uri="{FF2B5EF4-FFF2-40B4-BE49-F238E27FC236}">
+                <a16:creationId xmlns:a16="http://schemas.microsoft.com/office/drawing/2014/main" id="{567F79D8-7BBA-C96F-66F2-8A4CEE39B15E}"/>
+              </a:ext>
+            </a:extLst>
+          </p:cNvPr>
+          <p:cNvSpPr/>
+          <p:nvPr/>
+        </p:nvSpPr>
+        <p:spPr>
+          <a:xfrm>
+            <a:off x="4258560" y="10300488"/>
+            <a:ext cx="2083241" cy="755374"/>
+          </a:xfrm>
+          <a:prstGeom prst="flowChartAlternateProcess">
+            <a:avLst/>
+          </a:prstGeom>
+        </p:spPr>
+        <p:style>
+          <a:lnRef idx="0">
+            <a:schemeClr val="accent6"/>
+          </a:lnRef>
+          <a:fillRef idx="3">
+            <a:schemeClr val="accent6"/>
+          </a:fillRef>
+          <a:effectRef idx="3">
+            <a:schemeClr val="accent6"/>
+          </a:effectRef>
+          <a:fontRef idx="minor">
+            <a:schemeClr val="lt1"/>
+          </a:fontRef>
+        </p:style>
+        <p:txBody>
+          <a:bodyPr rtlCol="0" anchor="ctr"/>
+          <a:lstStyle/>
+          <a:p>
+            <a:pPr algn="ctr"/>
+            <a:r>
+              <a:rPr lang="en-US" altLang="zh-TW">
+                <a:effectLst>
+                  <a:outerShdw blurRad="38100" dist="38100" dir="2700000" algn="tl">
+                    <a:srgbClr val="000000">
+                      <a:alpha val="43137"/>
+                    </a:srgbClr>
+                  </a:outerShdw>
+                </a:effectLst>
+                <a:latin typeface="Charis SemiBold" panose="02000500060000020004" pitchFamily="2" charset="0"/>
+                <a:ea typeface="Noto Sans TC Medium" panose="020B0200000000000000" pitchFamily="34" charset="-128"/>
+              </a:rPr>
+              <a:t>【8】</a:t>
+            </a:r>
+            <a:r>
+              <a:rPr lang="zh-TW" altLang="en-US">
+                <a:effectLst>
+                  <a:outerShdw blurRad="38100" dist="38100" dir="2700000" algn="tl">
+                    <a:srgbClr val="000000">
+                      <a:alpha val="43137"/>
+                    </a:srgbClr>
+                  </a:outerShdw>
+                </a:effectLst>
+                <a:latin typeface="Charis SemiBold" panose="02000500060000020004" pitchFamily="2" charset="0"/>
+                <a:ea typeface="Noto Sans TC Medium" panose="020B0200000000000000" pitchFamily="34" charset="-128"/>
+              </a:rPr>
+              <a:t>目睭</a:t>
+            </a:r>
+            <a:br>
+              <a:rPr lang="en-US" altLang="zh-TW">
+                <a:effectLst>
+                  <a:outerShdw blurRad="38100" dist="38100" dir="2700000" algn="tl">
+                    <a:srgbClr val="000000">
+                      <a:alpha val="43137"/>
+                    </a:srgbClr>
+                  </a:outerShdw>
+                </a:effectLst>
+                <a:latin typeface="Charis SemiBold" panose="02000500060000020004" pitchFamily="2" charset="0"/>
+                <a:ea typeface="Noto Sans TC Medium" panose="020B0200000000000000" pitchFamily="34" charset="-128"/>
+              </a:rPr>
+            </a:br>
+            <a:r>
+              <a:rPr lang="en-US" altLang="zh-TW">
+                <a:effectLst>
+                  <a:outerShdw blurRad="38100" dist="38100" dir="2700000" algn="tl">
+                    <a:srgbClr val="000000">
+                      <a:alpha val="43137"/>
+                    </a:srgbClr>
+                  </a:outerShdw>
+                </a:effectLst>
+                <a:latin typeface="Charis SemiBold" panose="02000500060000020004" pitchFamily="2" charset="0"/>
+                <a:ea typeface="Noto Sans TC Medium" panose="020B0200000000000000" pitchFamily="34" charset="-128"/>
+              </a:rPr>
+              <a:t>[bbak⁸⁻⁷ ziu¹]</a:t>
+            </a:r>
+            <a:endParaRPr lang="zh-TW" altLang="en-US">
+              <a:effectLst>
+                <a:outerShdw blurRad="38100" dist="38100" dir="2700000" algn="tl">
+                  <a:srgbClr val="000000">
+                    <a:alpha val="43137"/>
+                  </a:srgbClr>
+                </a:outerShdw>
+              </a:effectLst>
+              <a:latin typeface="Charis SemiBold" panose="02000500060000020004" pitchFamily="2" charset="0"/>
+              <a:ea typeface="Noto Sans TC Medium" panose="020B0200000000000000" pitchFamily="34" charset="-128"/>
+            </a:endParaRPr>
+          </a:p>
+        </p:txBody>
+      </p:sp>
+      <p:sp>
+        <p:nvSpPr>
+          <p:cNvPr id="43" name="流程圖: 替代程序 42">
+            <a:extLst>
+              <a:ext uri="{FF2B5EF4-FFF2-40B4-BE49-F238E27FC236}">
+                <a16:creationId xmlns:a16="http://schemas.microsoft.com/office/drawing/2014/main" id="{EAF1264E-AC69-230C-97A5-1A91071385C9}"/>
+              </a:ext>
+            </a:extLst>
+          </p:cNvPr>
+          <p:cNvSpPr/>
+          <p:nvPr/>
+        </p:nvSpPr>
+        <p:spPr>
+          <a:xfrm>
+            <a:off x="4258560" y="3674777"/>
+            <a:ext cx="2083241" cy="755374"/>
+          </a:xfrm>
+          <a:prstGeom prst="flowChartAlternateProcess">
+            <a:avLst/>
+          </a:prstGeom>
+        </p:spPr>
+        <p:style>
+          <a:lnRef idx="2">
+            <a:schemeClr val="accent1">
+              <a:shade val="15000"/>
+            </a:schemeClr>
+          </a:lnRef>
+          <a:fillRef idx="1">
+            <a:schemeClr val="accent1"/>
+          </a:fillRef>
+          <a:effectRef idx="0">
+            <a:schemeClr val="accent1"/>
+          </a:effectRef>
+          <a:fontRef idx="minor">
+            <a:schemeClr val="lt1"/>
+          </a:fontRef>
+        </p:style>
+        <p:txBody>
+          <a:bodyPr rtlCol="0" anchor="ctr"/>
+          <a:lstStyle/>
+          <a:p>
+            <a:pPr algn="ctr"/>
+            <a:r>
+              <a:rPr lang="en-US" altLang="zh-TW">
+                <a:effectLst>
+                  <a:outerShdw blurRad="38100" dist="38100" dir="2700000" algn="tl">
+                    <a:srgbClr val="000000">
+                      <a:alpha val="43137"/>
+                    </a:srgbClr>
+                  </a:outerShdw>
+                </a:effectLst>
+                <a:latin typeface="Charis SemiBold" panose="02000500060000020004" pitchFamily="2" charset="0"/>
+                <a:ea typeface="Noto Sans TC Medium" panose="020B0200000000000000" pitchFamily="34" charset="-128"/>
+              </a:rPr>
+              <a:t>【6】</a:t>
+            </a:r>
+            <a:r>
+              <a:rPr lang="zh-TW" altLang="en-US">
+                <a:effectLst>
+                  <a:outerShdw blurRad="38100" dist="38100" dir="2700000" algn="tl">
+                    <a:srgbClr val="000000">
+                      <a:alpha val="43137"/>
+                    </a:srgbClr>
+                  </a:outerShdw>
+                </a:effectLst>
+                <a:latin typeface="Charis SemiBold" panose="02000500060000020004" pitchFamily="2" charset="0"/>
+                <a:ea typeface="Noto Sans TC Medium" panose="020B0200000000000000" pitchFamily="34" charset="-128"/>
+              </a:rPr>
+              <a:t>鼻孔</a:t>
+            </a:r>
+            <a:r>
+              <a:rPr lang="en-US" altLang="zh-TW">
+                <a:effectLst>
+                  <a:outerShdw blurRad="38100" dist="38100" dir="2700000" algn="tl">
+                    <a:srgbClr val="000000">
+                      <a:alpha val="43137"/>
+                    </a:srgbClr>
+                  </a:outerShdw>
+                </a:effectLst>
+                <a:latin typeface="Charis SemiBold" panose="02000500060000020004" pitchFamily="2" charset="0"/>
+                <a:ea typeface="Noto Sans TC Medium" panose="020B0200000000000000" pitchFamily="34" charset="-128"/>
+              </a:rPr>
+              <a:t> </a:t>
+            </a:r>
+            <a:br>
+              <a:rPr lang="en-US" altLang="zh-TW">
+                <a:effectLst>
+                  <a:outerShdw blurRad="38100" dist="38100" dir="2700000" algn="tl">
+                    <a:srgbClr val="000000">
+                      <a:alpha val="43137"/>
+                    </a:srgbClr>
+                  </a:outerShdw>
+                </a:effectLst>
+                <a:latin typeface="Charis SemiBold" panose="02000500060000020004" pitchFamily="2" charset="0"/>
+                <a:ea typeface="Noto Sans TC Medium" panose="020B0200000000000000" pitchFamily="34" charset="-128"/>
+              </a:rPr>
+            </a:br>
+            <a:r>
+              <a:rPr lang="en-US" altLang="zh-TW">
+                <a:effectLst>
+                  <a:outerShdw blurRad="38100" dist="38100" dir="2700000" algn="tl">
+                    <a:srgbClr val="000000">
+                      <a:alpha val="43137"/>
+                    </a:srgbClr>
+                  </a:outerShdw>
+                </a:effectLst>
+                <a:latin typeface="Charis SemiBold" panose="02000500060000020004" pitchFamily="2" charset="0"/>
+                <a:ea typeface="Noto Sans TC Medium" panose="020B0200000000000000" pitchFamily="34" charset="-128"/>
+              </a:rPr>
+              <a:t>[pni⁶⁻⁵ kang¹]</a:t>
+            </a:r>
+            <a:endParaRPr lang="zh-TW" altLang="en-US">
+              <a:effectLst>
+                <a:outerShdw blurRad="38100" dist="38100" dir="2700000" algn="tl">
+                  <a:srgbClr val="000000">
+                    <a:alpha val="43137"/>
+                  </a:srgbClr>
+                </a:outerShdw>
+              </a:effectLst>
+              <a:latin typeface="Charis SemiBold" panose="02000500060000020004" pitchFamily="2" charset="0"/>
+              <a:ea typeface="Noto Sans TC Medium" panose="020B0200000000000000" pitchFamily="34" charset="-128"/>
+            </a:endParaRPr>
+          </a:p>
+        </p:txBody>
+      </p:sp>
+      <p:sp>
+        <p:nvSpPr>
+          <p:cNvPr id="44" name="流程圖: 替代程序 43">
+            <a:extLst>
+              <a:ext uri="{FF2B5EF4-FFF2-40B4-BE49-F238E27FC236}">
+                <a16:creationId xmlns:a16="http://schemas.microsoft.com/office/drawing/2014/main" id="{076B5E65-FE3D-997C-2CFA-B2540C08F998}"/>
+              </a:ext>
+            </a:extLst>
+          </p:cNvPr>
+          <p:cNvSpPr/>
+          <p:nvPr/>
+        </p:nvSpPr>
+        <p:spPr>
+          <a:xfrm>
+            <a:off x="2289761" y="5429093"/>
+            <a:ext cx="2083241" cy="755374"/>
+          </a:xfrm>
+          <a:prstGeom prst="flowChartAlternateProcess">
+            <a:avLst/>
+          </a:prstGeom>
+        </p:spPr>
+        <p:style>
+          <a:lnRef idx="2">
+            <a:schemeClr val="accent1">
+              <a:shade val="15000"/>
+            </a:schemeClr>
+          </a:lnRef>
+          <a:fillRef idx="1">
+            <a:schemeClr val="accent1"/>
+          </a:fillRef>
+          <a:effectRef idx="0">
+            <a:schemeClr val="accent1"/>
+          </a:effectRef>
+          <a:fontRef idx="minor">
+            <a:schemeClr val="lt1"/>
+          </a:fontRef>
+        </p:style>
+        <p:txBody>
+          <a:bodyPr rtlCol="0" anchor="ctr"/>
+          <a:lstStyle/>
+          <a:p>
+            <a:pPr algn="ctr"/>
+            <a:r>
+              <a:rPr lang="en-US" altLang="zh-TW">
+                <a:effectLst>
+                  <a:outerShdw blurRad="38100" dist="38100" dir="2700000" algn="tl">
+                    <a:srgbClr val="000000">
+                      <a:alpha val="43137"/>
+                    </a:srgbClr>
+                  </a:outerShdw>
+                </a:effectLst>
+                <a:latin typeface="Charis SemiBold" panose="02000500060000020004" pitchFamily="2" charset="0"/>
+                <a:ea typeface="Noto Sans TC Medium" panose="020B0200000000000000" pitchFamily="34" charset="-128"/>
+              </a:rPr>
+              <a:t>【2】</a:t>
+            </a:r>
+            <a:r>
+              <a:rPr lang="zh-TW" altLang="en-US">
+                <a:effectLst>
+                  <a:outerShdw blurRad="38100" dist="38100" dir="2700000" algn="tl">
+                    <a:srgbClr val="000000">
+                      <a:alpha val="43137"/>
+                    </a:srgbClr>
+                  </a:outerShdw>
+                </a:effectLst>
+                <a:latin typeface="Charis SemiBold" panose="02000500060000020004" pitchFamily="2" charset="0"/>
+                <a:ea typeface="Noto Sans TC Medium" panose="020B0200000000000000" pitchFamily="34" charset="-128"/>
+              </a:rPr>
+              <a:t>頭殼</a:t>
+            </a:r>
+            <a:br>
+              <a:rPr lang="en-US" altLang="zh-TW">
+                <a:effectLst>
+                  <a:outerShdw blurRad="38100" dist="38100" dir="2700000" algn="tl">
+                    <a:srgbClr val="000000">
+                      <a:alpha val="43137"/>
+                    </a:srgbClr>
+                  </a:outerShdw>
+                </a:effectLst>
+                <a:latin typeface="Charis SemiBold" panose="02000500060000020004" pitchFamily="2" charset="0"/>
+                <a:ea typeface="Noto Sans TC Medium" panose="020B0200000000000000" pitchFamily="34" charset="-128"/>
+              </a:rPr>
+            </a:br>
+            <a:r>
+              <a:rPr lang="en-US" altLang="zh-TW">
+                <a:effectLst>
+                  <a:outerShdw blurRad="38100" dist="38100" dir="2700000" algn="tl">
+                    <a:srgbClr val="000000">
+                      <a:alpha val="43137"/>
+                    </a:srgbClr>
+                  </a:outerShdw>
+                </a:effectLst>
+                <a:latin typeface="Charis SemiBold" panose="02000500060000020004" pitchFamily="2" charset="0"/>
+                <a:ea typeface="Noto Sans TC Medium" panose="020B0200000000000000" pitchFamily="34" charset="-128"/>
+              </a:rPr>
+              <a:t>[tao²⁻⁶ kak⁷]</a:t>
+            </a:r>
+            <a:endParaRPr lang="zh-TW" altLang="en-US">
+              <a:effectLst>
+                <a:outerShdw blurRad="38100" dist="38100" dir="2700000" algn="tl">
+                  <a:srgbClr val="000000">
+                    <a:alpha val="43137"/>
+                  </a:srgbClr>
+                </a:outerShdw>
+              </a:effectLst>
+              <a:latin typeface="Charis SemiBold" panose="02000500060000020004" pitchFamily="2" charset="0"/>
+              <a:ea typeface="Noto Sans TC Medium" panose="020B0200000000000000" pitchFamily="34" charset="-128"/>
+            </a:endParaRPr>
+          </a:p>
+        </p:txBody>
+      </p:sp>
+      <p:cxnSp>
+        <p:nvCxnSpPr>
+          <p:cNvPr id="47" name="直線單箭頭接點 46">
+            <a:extLst>
+              <a:ext uri="{FF2B5EF4-FFF2-40B4-BE49-F238E27FC236}">
+                <a16:creationId xmlns:a16="http://schemas.microsoft.com/office/drawing/2014/main" id="{BE4E1FE6-F0D5-82C2-A531-D2DE5AAC8944}"/>
+              </a:ext>
+            </a:extLst>
+          </p:cNvPr>
+          <p:cNvCxnSpPr>
+            <a:cxnSpLocks/>
+            <a:stCxn id="43" idx="2"/>
+            <a:endCxn id="40" idx="0"/>
+          </p:cNvCxnSpPr>
+          <p:nvPr/>
+        </p:nvCxnSpPr>
+        <p:spPr>
+          <a:xfrm>
+            <a:off x="5300181" y="4430151"/>
+            <a:ext cx="0" cy="2782679"/>
+          </a:xfrm>
+          <a:prstGeom prst="straightConnector1">
+            <a:avLst/>
+          </a:prstGeom>
+          <a:ln>
+            <a:tailEnd type="triangle"/>
+          </a:ln>
+        </p:spPr>
+        <p:style>
+          <a:lnRef idx="2">
+            <a:schemeClr val="accent1"/>
+          </a:lnRef>
+          <a:fillRef idx="0">
+            <a:schemeClr val="accent1"/>
+          </a:fillRef>
+          <a:effectRef idx="1">
+            <a:schemeClr val="accent1"/>
+          </a:effectRef>
+          <a:fontRef idx="minor">
+            <a:schemeClr val="tx1"/>
+          </a:fontRef>
+        </p:style>
+      </p:cxnSp>
+      <p:cxnSp>
+        <p:nvCxnSpPr>
+          <p:cNvPr id="48" name="直線單箭頭接點 47">
+            <a:extLst>
+              <a:ext uri="{FF2B5EF4-FFF2-40B4-BE49-F238E27FC236}">
+                <a16:creationId xmlns:a16="http://schemas.microsoft.com/office/drawing/2014/main" id="{31AD153A-0F8C-8DF1-1D4F-C12B68AF080C}"/>
+              </a:ext>
+            </a:extLst>
+          </p:cNvPr>
+          <p:cNvCxnSpPr>
+            <a:cxnSpLocks/>
+          </p:cNvCxnSpPr>
+          <p:nvPr/>
+        </p:nvCxnSpPr>
+        <p:spPr>
+          <a:xfrm flipH="1">
+            <a:off x="2402378" y="10798770"/>
+            <a:ext cx="1889047" cy="0"/>
+          </a:xfrm>
+          <a:prstGeom prst="straightConnector1">
+            <a:avLst/>
+          </a:prstGeom>
+          <a:ln>
+            <a:solidFill>
+              <a:schemeClr val="accent6"/>
+            </a:solidFill>
+            <a:tailEnd type="triangle"/>
+          </a:ln>
+        </p:spPr>
+        <p:style>
+          <a:lnRef idx="2">
+            <a:schemeClr val="accent1"/>
+          </a:lnRef>
+          <a:fillRef idx="0">
+            <a:schemeClr val="accent1"/>
+          </a:fillRef>
+          <a:effectRef idx="1">
+            <a:schemeClr val="accent1"/>
+          </a:effectRef>
+          <a:fontRef idx="minor">
+            <a:schemeClr val="tx1"/>
+          </a:fontRef>
+        </p:style>
+      </p:cxnSp>
+      <p:cxnSp>
+        <p:nvCxnSpPr>
+          <p:cNvPr id="49" name="直線單箭頭接點 48">
+            <a:extLst>
+              <a:ext uri="{FF2B5EF4-FFF2-40B4-BE49-F238E27FC236}">
+                <a16:creationId xmlns:a16="http://schemas.microsoft.com/office/drawing/2014/main" id="{9C215AC0-E098-CE9D-7921-C65677B215B0}"/>
+              </a:ext>
+            </a:extLst>
+          </p:cNvPr>
+          <p:cNvCxnSpPr>
+            <a:cxnSpLocks/>
+          </p:cNvCxnSpPr>
+          <p:nvPr/>
+        </p:nvCxnSpPr>
+        <p:spPr>
+          <a:xfrm>
+            <a:off x="2387379" y="10554430"/>
+            <a:ext cx="1868737" cy="0"/>
+          </a:xfrm>
+          <a:prstGeom prst="straightConnector1">
+            <a:avLst/>
+          </a:prstGeom>
+          <a:ln>
+            <a:solidFill>
+              <a:schemeClr val="accent5"/>
+            </a:solidFill>
+            <a:tailEnd type="triangle"/>
+          </a:ln>
+        </p:spPr>
+        <p:style>
+          <a:lnRef idx="2">
+            <a:schemeClr val="accent1"/>
+          </a:lnRef>
+          <a:fillRef idx="0">
+            <a:schemeClr val="accent1"/>
+          </a:fillRef>
+          <a:effectRef idx="1">
+            <a:schemeClr val="accent1"/>
+          </a:effectRef>
+          <a:fontRef idx="minor">
+            <a:schemeClr val="tx1"/>
+          </a:fontRef>
+        </p:style>
+      </p:cxnSp>
+      <p:cxnSp>
+        <p:nvCxnSpPr>
+          <p:cNvPr id="50" name="直線單箭頭接點 49">
+            <a:extLst>
+              <a:ext uri="{FF2B5EF4-FFF2-40B4-BE49-F238E27FC236}">
+                <a16:creationId xmlns:a16="http://schemas.microsoft.com/office/drawing/2014/main" id="{9FDD3231-FAE5-F4D0-F967-5D2C074A66DE}"/>
+              </a:ext>
+            </a:extLst>
+          </p:cNvPr>
+          <p:cNvCxnSpPr>
+            <a:cxnSpLocks/>
+          </p:cNvCxnSpPr>
+          <p:nvPr/>
+        </p:nvCxnSpPr>
+        <p:spPr>
+          <a:xfrm>
+            <a:off x="2404203" y="4052464"/>
+            <a:ext cx="1854357" cy="0"/>
+          </a:xfrm>
+          <a:prstGeom prst="straightConnector1">
+            <a:avLst/>
+          </a:prstGeom>
+          <a:ln>
+            <a:tailEnd type="triangle"/>
+          </a:ln>
+        </p:spPr>
+        <p:style>
+          <a:lnRef idx="2">
+            <a:schemeClr val="accent1"/>
+          </a:lnRef>
+          <a:fillRef idx="0">
+            <a:schemeClr val="accent1"/>
+          </a:fillRef>
+          <a:effectRef idx="1">
+            <a:schemeClr val="accent1"/>
+          </a:effectRef>
+          <a:fontRef idx="minor">
+            <a:schemeClr val="tx1"/>
+          </a:fontRef>
+        </p:style>
+      </p:cxnSp>
+      <p:cxnSp>
+        <p:nvCxnSpPr>
+          <p:cNvPr id="51" name="直線單箭頭接點 50">
+            <a:extLst>
+              <a:ext uri="{FF2B5EF4-FFF2-40B4-BE49-F238E27FC236}">
+                <a16:creationId xmlns:a16="http://schemas.microsoft.com/office/drawing/2014/main" id="{B2A7CA1E-C8D4-26BC-72D7-FAC5813A0D48}"/>
+              </a:ext>
+            </a:extLst>
+          </p:cNvPr>
+          <p:cNvCxnSpPr>
+            <a:cxnSpLocks/>
+            <a:stCxn id="41" idx="0"/>
+            <a:endCxn id="39" idx="2"/>
+          </p:cNvCxnSpPr>
+          <p:nvPr/>
+        </p:nvCxnSpPr>
+        <p:spPr>
+          <a:xfrm flipV="1">
+            <a:off x="1362583" y="7968204"/>
+            <a:ext cx="0" cy="2337570"/>
+          </a:xfrm>
+          <a:prstGeom prst="straightConnector1">
+            <a:avLst/>
+          </a:prstGeom>
+          <a:ln>
+            <a:solidFill>
+              <a:schemeClr val="accent5"/>
+            </a:solidFill>
+            <a:tailEnd type="triangle"/>
+          </a:ln>
+        </p:spPr>
+        <p:style>
+          <a:lnRef idx="2">
+            <a:schemeClr val="accent1"/>
+          </a:lnRef>
+          <a:fillRef idx="0">
+            <a:schemeClr val="accent1"/>
+          </a:fillRef>
+          <a:effectRef idx="1">
+            <a:schemeClr val="accent1"/>
+          </a:effectRef>
+          <a:fontRef idx="minor">
+            <a:schemeClr val="tx1"/>
+          </a:fontRef>
+        </p:style>
+      </p:cxnSp>
+      <p:cxnSp>
+        <p:nvCxnSpPr>
+          <p:cNvPr id="52" name="直線單箭頭接點 51">
+            <a:extLst>
+              <a:ext uri="{FF2B5EF4-FFF2-40B4-BE49-F238E27FC236}">
+                <a16:creationId xmlns:a16="http://schemas.microsoft.com/office/drawing/2014/main" id="{A7A589D5-26CC-FF1B-A3C8-D035885DD043}"/>
+              </a:ext>
+            </a:extLst>
+          </p:cNvPr>
+          <p:cNvCxnSpPr>
+            <a:cxnSpLocks/>
+            <a:stCxn id="39" idx="0"/>
+            <a:endCxn id="38" idx="2"/>
+          </p:cNvCxnSpPr>
+          <p:nvPr/>
+        </p:nvCxnSpPr>
+        <p:spPr>
+          <a:xfrm flipV="1">
+            <a:off x="1362583" y="4430151"/>
+            <a:ext cx="0" cy="2782679"/>
+          </a:xfrm>
+          <a:prstGeom prst="straightConnector1">
+            <a:avLst/>
+          </a:prstGeom>
+          <a:ln>
+            <a:tailEnd type="triangle"/>
+          </a:ln>
+        </p:spPr>
+        <p:style>
+          <a:lnRef idx="2">
+            <a:schemeClr val="accent1"/>
+          </a:lnRef>
+          <a:fillRef idx="0">
+            <a:schemeClr val="accent1"/>
+          </a:fillRef>
+          <a:effectRef idx="1">
+            <a:schemeClr val="accent1"/>
+          </a:effectRef>
+          <a:fontRef idx="minor">
+            <a:schemeClr val="tx1"/>
+          </a:fontRef>
+        </p:style>
+      </p:cxnSp>
+      <p:sp>
+        <p:nvSpPr>
+          <p:cNvPr id="54" name="文字方塊 53">
+            <a:extLst>
+              <a:ext uri="{FF2B5EF4-FFF2-40B4-BE49-F238E27FC236}">
+                <a16:creationId xmlns:a16="http://schemas.microsoft.com/office/drawing/2014/main" id="{6E237EE6-E482-563E-F11A-39ED01B6A47E}"/>
+              </a:ext>
+            </a:extLst>
+          </p:cNvPr>
+          <p:cNvSpPr txBox="1"/>
+          <p:nvPr/>
+        </p:nvSpPr>
+        <p:spPr>
+          <a:xfrm>
+            <a:off x="3001276" y="10203208"/>
+            <a:ext cx="762000" cy="369332"/>
+          </a:xfrm>
+          <a:prstGeom prst="rect">
+            <a:avLst/>
+          </a:prstGeom>
+          <a:noFill/>
+        </p:spPr>
+        <p:txBody>
+          <a:bodyPr wrap="square" rtlCol="0">
+            <a:spAutoFit/>
+          </a:bodyPr>
+          <a:lstStyle/>
+          <a:p>
+            <a:pPr algn="ctr"/>
+            <a:r>
+              <a:rPr lang="en-US" altLang="zh-TW">
+                <a:solidFill>
+                  <a:schemeClr val="accent5"/>
+                </a:solidFill>
+                <a:effectLst>
+                  <a:outerShdw blurRad="38100" dist="38100" dir="2700000" algn="tl">
+                    <a:srgbClr val="000000">
+                      <a:alpha val="43137"/>
+                    </a:srgbClr>
+                  </a:outerShdw>
+                </a:effectLst>
+                <a:latin typeface="Charis SemiBold" panose="02000500060000020004" pitchFamily="2" charset="0"/>
+                <a:ea typeface="Noto Sans TC Medium" panose="020B0200000000000000" pitchFamily="34" charset="-128"/>
+              </a:rPr>
+              <a:t>p/t/k</a:t>
+            </a:r>
+            <a:endParaRPr lang="zh-TW" altLang="en-US">
+              <a:solidFill>
+                <a:schemeClr val="accent5"/>
+              </a:solidFill>
+              <a:effectLst>
+                <a:outerShdw blurRad="38100" dist="38100" dir="2700000" algn="tl">
+                  <a:srgbClr val="000000">
+                    <a:alpha val="43137"/>
+                  </a:srgbClr>
+                </a:outerShdw>
+              </a:effectLst>
+              <a:latin typeface="Charis SemiBold" panose="02000500060000020004" pitchFamily="2" charset="0"/>
+              <a:ea typeface="Noto Sans TC Medium" panose="020B0200000000000000" pitchFamily="34" charset="-128"/>
+            </a:endParaRPr>
+          </a:p>
+        </p:txBody>
+      </p:sp>
+      <p:sp>
+        <p:nvSpPr>
+          <p:cNvPr id="55" name="文字方塊 54">
+            <a:extLst>
+              <a:ext uri="{FF2B5EF4-FFF2-40B4-BE49-F238E27FC236}">
+                <a16:creationId xmlns:a16="http://schemas.microsoft.com/office/drawing/2014/main" id="{F55A0878-1974-E28C-555E-116998776285}"/>
+              </a:ext>
+            </a:extLst>
+          </p:cNvPr>
+          <p:cNvSpPr txBox="1"/>
+          <p:nvPr/>
+        </p:nvSpPr>
+        <p:spPr>
+          <a:xfrm>
+            <a:off x="3001276" y="10776675"/>
+            <a:ext cx="762000" cy="369332"/>
+          </a:xfrm>
+          <a:prstGeom prst="rect">
+            <a:avLst/>
+          </a:prstGeom>
+          <a:noFill/>
+        </p:spPr>
+        <p:txBody>
+          <a:bodyPr wrap="square" rtlCol="0">
+            <a:spAutoFit/>
+          </a:bodyPr>
+          <a:lstStyle/>
+          <a:p>
+            <a:pPr algn="ctr"/>
+            <a:r>
+              <a:rPr lang="en-US" altLang="zh-TW">
+                <a:solidFill>
+                  <a:schemeClr val="accent6"/>
+                </a:solidFill>
+                <a:effectLst>
+                  <a:outerShdw blurRad="38100" dist="38100" dir="2700000" algn="tl">
+                    <a:srgbClr val="000000">
+                      <a:alpha val="43137"/>
+                    </a:srgbClr>
+                  </a:outerShdw>
+                </a:effectLst>
+                <a:latin typeface="Charis SemiBold" panose="02000500060000020004" pitchFamily="2" charset="0"/>
+                <a:ea typeface="Noto Sans TC Medium" panose="020B0200000000000000" pitchFamily="34" charset="-128"/>
+              </a:rPr>
+              <a:t>p/t/k</a:t>
+            </a:r>
+            <a:endParaRPr lang="zh-TW" altLang="en-US">
+              <a:solidFill>
+                <a:schemeClr val="accent6"/>
+              </a:solidFill>
+              <a:effectLst>
+                <a:outerShdw blurRad="38100" dist="38100" dir="2700000" algn="tl">
+                  <a:srgbClr val="000000">
+                    <a:alpha val="43137"/>
+                  </a:srgbClr>
+                </a:outerShdw>
+              </a:effectLst>
+              <a:latin typeface="Charis SemiBold" panose="02000500060000020004" pitchFamily="2" charset="0"/>
+              <a:ea typeface="Noto Sans TC Medium" panose="020B0200000000000000" pitchFamily="34" charset="-128"/>
+            </a:endParaRPr>
+          </a:p>
+        </p:txBody>
+      </p:sp>
+      <p:sp>
+        <p:nvSpPr>
+          <p:cNvPr id="56" name="文字方塊 55">
+            <a:extLst>
+              <a:ext uri="{FF2B5EF4-FFF2-40B4-BE49-F238E27FC236}">
+                <a16:creationId xmlns:a16="http://schemas.microsoft.com/office/drawing/2014/main" id="{5C0D93D3-146D-7374-E1D1-3D47D222EF3C}"/>
+              </a:ext>
+            </a:extLst>
+          </p:cNvPr>
+          <p:cNvSpPr txBox="1"/>
+          <p:nvPr/>
+        </p:nvSpPr>
+        <p:spPr>
+          <a:xfrm>
+            <a:off x="5070700" y="9095152"/>
+            <a:ext cx="212242" cy="369332"/>
+          </a:xfrm>
+          <a:prstGeom prst="rect">
+            <a:avLst/>
+          </a:prstGeom>
+          <a:noFill/>
+        </p:spPr>
+        <p:txBody>
+          <a:bodyPr wrap="square" rtlCol="0">
+            <a:spAutoFit/>
+          </a:bodyPr>
+          <a:lstStyle/>
+          <a:p>
+            <a:pPr algn="ctr"/>
+            <a:r>
+              <a:rPr lang="en-US" altLang="zh-TW">
+                <a:solidFill>
+                  <a:schemeClr val="accent6"/>
+                </a:solidFill>
+                <a:effectLst>
+                  <a:outerShdw blurRad="38100" dist="38100" dir="2700000" algn="tl">
+                    <a:srgbClr val="000000">
+                      <a:alpha val="43137"/>
+                    </a:srgbClr>
+                  </a:outerShdw>
+                </a:effectLst>
+                <a:latin typeface="Charis SemiBold" panose="02000500060000020004" pitchFamily="2" charset="0"/>
+                <a:ea typeface="Noto Sans TC Medium" panose="020B0200000000000000" pitchFamily="34" charset="-128"/>
+              </a:rPr>
+              <a:t>h</a:t>
+            </a:r>
+            <a:endParaRPr lang="zh-TW" altLang="en-US">
+              <a:solidFill>
+                <a:schemeClr val="accent6"/>
+              </a:solidFill>
+              <a:effectLst>
+                <a:outerShdw blurRad="38100" dist="38100" dir="2700000" algn="tl">
+                  <a:srgbClr val="000000">
+                    <a:alpha val="43137"/>
+                  </a:srgbClr>
+                </a:outerShdw>
+              </a:effectLst>
+              <a:latin typeface="Charis SemiBold" panose="02000500060000020004" pitchFamily="2" charset="0"/>
+              <a:ea typeface="Noto Sans TC Medium" panose="020B0200000000000000" pitchFamily="34" charset="-128"/>
+            </a:endParaRPr>
+          </a:p>
+        </p:txBody>
+      </p:sp>
+      <p:sp>
+        <p:nvSpPr>
+          <p:cNvPr id="57" name="文字方塊 56">
+            <a:extLst>
+              <a:ext uri="{FF2B5EF4-FFF2-40B4-BE49-F238E27FC236}">
+                <a16:creationId xmlns:a16="http://schemas.microsoft.com/office/drawing/2014/main" id="{897F0D6B-A635-B141-243A-D568BB8AE6CA}"/>
+              </a:ext>
+            </a:extLst>
+          </p:cNvPr>
+          <p:cNvSpPr txBox="1"/>
+          <p:nvPr/>
+        </p:nvSpPr>
+        <p:spPr>
+          <a:xfrm>
+            <a:off x="1362816" y="9095152"/>
+            <a:ext cx="212242" cy="369332"/>
+          </a:xfrm>
+          <a:prstGeom prst="rect">
+            <a:avLst/>
+          </a:prstGeom>
+          <a:noFill/>
+        </p:spPr>
+        <p:txBody>
+          <a:bodyPr wrap="square" rtlCol="0">
+            <a:spAutoFit/>
+          </a:bodyPr>
+          <a:lstStyle/>
+          <a:p>
+            <a:pPr algn="ctr"/>
+            <a:r>
+              <a:rPr lang="en-US" altLang="zh-TW">
+                <a:solidFill>
+                  <a:schemeClr val="accent5"/>
+                </a:solidFill>
+                <a:effectLst>
+                  <a:outerShdw blurRad="38100" dist="38100" dir="2700000" algn="tl">
+                    <a:srgbClr val="000000">
+                      <a:alpha val="43137"/>
+                    </a:srgbClr>
+                  </a:outerShdw>
+                </a:effectLst>
+                <a:latin typeface="Charis SemiBold" panose="02000500060000020004" pitchFamily="2" charset="0"/>
+                <a:ea typeface="Noto Sans TC Medium" panose="020B0200000000000000" pitchFamily="34" charset="-128"/>
+              </a:rPr>
+              <a:t>h</a:t>
+            </a:r>
+            <a:endParaRPr lang="zh-TW" altLang="en-US">
+              <a:solidFill>
+                <a:schemeClr val="accent5"/>
+              </a:solidFill>
+              <a:effectLst>
+                <a:outerShdw blurRad="38100" dist="38100" dir="2700000" algn="tl">
+                  <a:srgbClr val="000000">
+                    <a:alpha val="43137"/>
+                  </a:srgbClr>
+                </a:outerShdw>
+              </a:effectLst>
+              <a:latin typeface="Charis SemiBold" panose="02000500060000020004" pitchFamily="2" charset="0"/>
+              <a:ea typeface="Noto Sans TC Medium" panose="020B0200000000000000" pitchFamily="34" charset="-128"/>
+            </a:endParaRPr>
+          </a:p>
+        </p:txBody>
+      </p:sp>
+      <p:sp>
+        <p:nvSpPr>
+          <p:cNvPr id="58" name="矩形: 圓角 57">
+            <a:extLst>
+              <a:ext uri="{FF2B5EF4-FFF2-40B4-BE49-F238E27FC236}">
+                <a16:creationId xmlns:a16="http://schemas.microsoft.com/office/drawing/2014/main" id="{0AF49147-FF21-5491-F7FF-A610E2CF9924}"/>
+              </a:ext>
+            </a:extLst>
+          </p:cNvPr>
+          <p:cNvSpPr/>
+          <p:nvPr/>
+        </p:nvSpPr>
+        <p:spPr>
+          <a:xfrm>
+            <a:off x="2834395" y="9446374"/>
+            <a:ext cx="2389371" cy="369332"/>
+          </a:xfrm>
+          <a:prstGeom prst="roundRect">
+            <a:avLst/>
+          </a:prstGeom>
+        </p:spPr>
+        <p:style>
+          <a:lnRef idx="0">
+            <a:schemeClr val="accent6"/>
+          </a:lnRef>
+          <a:fillRef idx="3">
+            <a:schemeClr val="accent6"/>
+          </a:fillRef>
+          <a:effectRef idx="3">
+            <a:schemeClr val="accent6"/>
+          </a:effectRef>
+          <a:fontRef idx="minor">
+            <a:schemeClr val="lt1"/>
+          </a:fontRef>
+        </p:style>
+        <p:txBody>
+          <a:bodyPr rtlCol="0" anchor="ctr"/>
+          <a:lstStyle/>
+          <a:p>
+            <a:pPr algn="ctr"/>
+            <a:r>
+              <a:rPr lang="zh-TW" altLang="en-US">
+                <a:effectLst>
+                  <a:outerShdw blurRad="38100" dist="38100" dir="2700000" algn="tl">
+                    <a:srgbClr val="000000">
+                      <a:alpha val="43137"/>
+                    </a:srgbClr>
+                  </a:outerShdw>
+                </a:effectLst>
+                <a:latin typeface="Charis SemiBold" panose="02000500060000020004" pitchFamily="2" charset="0"/>
+                <a:ea typeface="Noto Sans TC Medium" panose="020B0200000000000000" pitchFamily="34" charset="-128"/>
+              </a:rPr>
+              <a:t>白目 </a:t>
+            </a:r>
+            <a:r>
+              <a:rPr lang="en-US" altLang="zh-TW">
+                <a:effectLst>
+                  <a:outerShdw blurRad="38100" dist="38100" dir="2700000" algn="tl">
+                    <a:srgbClr val="000000">
+                      <a:alpha val="43137"/>
+                    </a:srgbClr>
+                  </a:outerShdw>
+                </a:effectLst>
+                <a:latin typeface="Charis SemiBold" panose="02000500060000020004" pitchFamily="2" charset="0"/>
+                <a:ea typeface="Noto Sans TC Medium" panose="020B0200000000000000" pitchFamily="34" charset="-128"/>
+              </a:rPr>
+              <a:t>[Beh⁸⁻⁵ bbak⁸]</a:t>
+            </a:r>
+            <a:endParaRPr lang="zh-TW" altLang="en-US">
+              <a:effectLst>
+                <a:outerShdw blurRad="38100" dist="38100" dir="2700000" algn="tl">
+                  <a:srgbClr val="000000">
+                    <a:alpha val="43137"/>
+                  </a:srgbClr>
+                </a:outerShdw>
+              </a:effectLst>
+              <a:latin typeface="Charis SemiBold" panose="02000500060000020004" pitchFamily="2" charset="0"/>
+              <a:ea typeface="Noto Sans TC Medium" panose="020B0200000000000000" pitchFamily="34" charset="-128"/>
+            </a:endParaRPr>
+          </a:p>
+        </p:txBody>
+      </p:sp>
+      <p:sp>
+        <p:nvSpPr>
+          <p:cNvPr id="59" name="矩形: 圓角 58">
+            <a:extLst>
+              <a:ext uri="{FF2B5EF4-FFF2-40B4-BE49-F238E27FC236}">
+                <a16:creationId xmlns:a16="http://schemas.microsoft.com/office/drawing/2014/main" id="{0386C6AF-108D-B3E7-6E9F-7B86206AD73B}"/>
+              </a:ext>
+            </a:extLst>
+          </p:cNvPr>
+          <p:cNvSpPr/>
+          <p:nvPr/>
+        </p:nvSpPr>
+        <p:spPr>
+          <a:xfrm>
+            <a:off x="1434893" y="8725820"/>
+            <a:ext cx="2187818" cy="369332"/>
+          </a:xfrm>
+          <a:prstGeom prst="roundRect">
+            <a:avLst/>
+          </a:prstGeom>
+        </p:spPr>
+        <p:style>
+          <a:lnRef idx="0">
+            <a:schemeClr val="accent5"/>
+          </a:lnRef>
+          <a:fillRef idx="3">
+            <a:schemeClr val="accent5"/>
+          </a:fillRef>
+          <a:effectRef idx="3">
+            <a:schemeClr val="accent5"/>
+          </a:effectRef>
+          <a:fontRef idx="minor">
+            <a:schemeClr val="lt1"/>
+          </a:fontRef>
+        </p:style>
+        <p:txBody>
+          <a:bodyPr rtlCol="0" anchor="ctr"/>
+          <a:lstStyle/>
+          <a:p>
+            <a:pPr algn="ctr"/>
+            <a:r>
+              <a:rPr lang="zh-TW" altLang="en-US">
+                <a:effectLst>
+                  <a:outerShdw blurRad="38100" dist="38100" dir="2700000" algn="tl">
+                    <a:srgbClr val="000000">
+                      <a:alpha val="43137"/>
+                    </a:srgbClr>
+                  </a:outerShdw>
+                </a:effectLst>
+                <a:latin typeface="Charis SemiBold" panose="02000500060000020004" pitchFamily="2" charset="0"/>
+                <a:ea typeface="Noto Sans TC Medium" panose="020B0200000000000000" pitchFamily="34" charset="-128"/>
+              </a:rPr>
+              <a:t>拍破</a:t>
+            </a:r>
+            <a:r>
+              <a:rPr lang="en-US" altLang="zh-TW">
+                <a:effectLst>
+                  <a:outerShdw blurRad="38100" dist="38100" dir="2700000" algn="tl">
+                    <a:srgbClr val="000000">
+                      <a:alpha val="43137"/>
+                    </a:srgbClr>
+                  </a:outerShdw>
+                </a:effectLst>
+                <a:latin typeface="Charis SemiBold" panose="02000500060000020004" pitchFamily="2" charset="0"/>
+                <a:ea typeface="Noto Sans TC Medium" panose="020B0200000000000000" pitchFamily="34" charset="-128"/>
+              </a:rPr>
+              <a:t> [pah⁷⁻³ pua⁵]</a:t>
+            </a:r>
+            <a:endParaRPr lang="zh-TW" altLang="en-US">
+              <a:effectLst>
+                <a:outerShdw blurRad="38100" dist="38100" dir="2700000" algn="tl">
+                  <a:srgbClr val="000000">
+                    <a:alpha val="43137"/>
+                  </a:srgbClr>
+                </a:outerShdw>
+              </a:effectLst>
+              <a:latin typeface="Charis SemiBold" panose="02000500060000020004" pitchFamily="2" charset="0"/>
+              <a:ea typeface="Noto Sans TC Medium" panose="020B0200000000000000" pitchFamily="34" charset="-128"/>
+            </a:endParaRPr>
+          </a:p>
+        </p:txBody>
+      </p:sp>
+      <p:cxnSp>
+        <p:nvCxnSpPr>
+          <p:cNvPr id="80" name="直線單箭頭接點 79">
+            <a:extLst>
+              <a:ext uri="{FF2B5EF4-FFF2-40B4-BE49-F238E27FC236}">
+                <a16:creationId xmlns:a16="http://schemas.microsoft.com/office/drawing/2014/main" id="{0CC098EA-9685-CC88-3C39-5820B8EE3406}"/>
+              </a:ext>
+            </a:extLst>
+          </p:cNvPr>
+          <p:cNvCxnSpPr>
+            <a:cxnSpLocks/>
+          </p:cNvCxnSpPr>
+          <p:nvPr/>
+        </p:nvCxnSpPr>
+        <p:spPr>
+          <a:xfrm flipV="1">
+            <a:off x="5300181" y="7968204"/>
+            <a:ext cx="0" cy="2332284"/>
+          </a:xfrm>
+          <a:prstGeom prst="straightConnector1">
+            <a:avLst/>
+          </a:prstGeom>
+          <a:ln>
+            <a:solidFill>
+              <a:schemeClr val="accent6"/>
+            </a:solidFill>
+            <a:tailEnd type="triangle"/>
+          </a:ln>
+        </p:spPr>
+        <p:style>
+          <a:lnRef idx="2">
+            <a:schemeClr val="accent1"/>
+          </a:lnRef>
+          <a:fillRef idx="0">
+            <a:schemeClr val="accent1"/>
+          </a:fillRef>
+          <a:effectRef idx="1">
+            <a:schemeClr val="accent1"/>
+          </a:effectRef>
+          <a:fontRef idx="minor">
+            <a:schemeClr val="tx1"/>
+          </a:fontRef>
+        </p:style>
+      </p:cxnSp>
+      <p:cxnSp>
+        <p:nvCxnSpPr>
+          <p:cNvPr id="102" name="直線單箭頭接點 101">
+            <a:extLst>
+              <a:ext uri="{FF2B5EF4-FFF2-40B4-BE49-F238E27FC236}">
+                <a16:creationId xmlns:a16="http://schemas.microsoft.com/office/drawing/2014/main" id="{FDE85902-EECC-3EFB-7253-1008B188136B}"/>
+              </a:ext>
+            </a:extLst>
+          </p:cNvPr>
+          <p:cNvCxnSpPr>
+            <a:cxnSpLocks/>
+          </p:cNvCxnSpPr>
+          <p:nvPr/>
+        </p:nvCxnSpPr>
+        <p:spPr>
+          <a:xfrm flipH="1">
+            <a:off x="2404203" y="7590517"/>
+            <a:ext cx="1854357" cy="0"/>
+          </a:xfrm>
+          <a:prstGeom prst="straightConnector1">
+            <a:avLst/>
+          </a:prstGeom>
+          <a:ln>
+            <a:tailEnd type="triangle"/>
+          </a:ln>
+        </p:spPr>
+        <p:style>
+          <a:lnRef idx="2">
+            <a:schemeClr val="accent1"/>
+          </a:lnRef>
+          <a:fillRef idx="0">
+            <a:schemeClr val="accent1"/>
+          </a:fillRef>
+          <a:effectRef idx="1">
+            <a:schemeClr val="accent1"/>
+          </a:effectRef>
+          <a:fontRef idx="minor">
+            <a:schemeClr val="tx1"/>
+          </a:fontRef>
+        </p:style>
+      </p:cxnSp>
+      <p:cxnSp>
+        <p:nvCxnSpPr>
+          <p:cNvPr id="103" name="直線單箭頭接點 102">
+            <a:extLst>
+              <a:ext uri="{FF2B5EF4-FFF2-40B4-BE49-F238E27FC236}">
+                <a16:creationId xmlns:a16="http://schemas.microsoft.com/office/drawing/2014/main" id="{DFAB0589-7685-EE6D-E836-7FE299DEFA86}"/>
+              </a:ext>
+            </a:extLst>
+          </p:cNvPr>
+          <p:cNvCxnSpPr>
+            <a:cxnSpLocks/>
+          </p:cNvCxnSpPr>
+          <p:nvPr/>
+        </p:nvCxnSpPr>
+        <p:spPr>
+          <a:xfrm flipV="1">
+            <a:off x="3331382" y="4405745"/>
+            <a:ext cx="941360" cy="1023348"/>
+          </a:xfrm>
+          <a:prstGeom prst="straightConnector1">
+            <a:avLst/>
+          </a:prstGeom>
+          <a:ln>
+            <a:tailEnd type="triangle"/>
+          </a:ln>
+        </p:spPr>
+        <p:style>
+          <a:lnRef idx="2">
+            <a:schemeClr val="accent1"/>
+          </a:lnRef>
+          <a:fillRef idx="0">
+            <a:schemeClr val="accent1"/>
+          </a:fillRef>
+          <a:effectRef idx="1">
+            <a:schemeClr val="accent1"/>
+          </a:effectRef>
+          <a:fontRef idx="minor">
+            <a:schemeClr val="tx1"/>
+          </a:fontRef>
+        </p:style>
+      </p:cxnSp>
+      <p:cxnSp>
+        <p:nvCxnSpPr>
+          <p:cNvPr id="104" name="直線單箭頭接點 103">
+            <a:extLst>
+              <a:ext uri="{FF2B5EF4-FFF2-40B4-BE49-F238E27FC236}">
+                <a16:creationId xmlns:a16="http://schemas.microsoft.com/office/drawing/2014/main" id="{D3700883-ED0C-10C8-555E-F988EB0EB735}"/>
+              </a:ext>
+            </a:extLst>
+          </p:cNvPr>
+          <p:cNvCxnSpPr>
+            <a:cxnSpLocks/>
+          </p:cNvCxnSpPr>
+          <p:nvPr/>
+        </p:nvCxnSpPr>
+        <p:spPr>
+          <a:xfrm>
+            <a:off x="3331382" y="6184467"/>
+            <a:ext cx="924734" cy="1082075"/>
+          </a:xfrm>
+          <a:prstGeom prst="straightConnector1">
+            <a:avLst/>
+          </a:prstGeom>
+          <a:ln>
+            <a:solidFill>
+              <a:schemeClr val="accent2"/>
+            </a:solidFill>
+            <a:prstDash val="sysDash"/>
+            <a:tailEnd type="triangle"/>
+          </a:ln>
+        </p:spPr>
+        <p:style>
+          <a:lnRef idx="2">
+            <a:schemeClr val="accent1"/>
+          </a:lnRef>
+          <a:fillRef idx="0">
+            <a:schemeClr val="accent1"/>
+          </a:fillRef>
+          <a:effectRef idx="1">
+            <a:schemeClr val="accent1"/>
+          </a:effectRef>
+          <a:fontRef idx="minor">
+            <a:schemeClr val="tx1"/>
+          </a:fontRef>
+        </p:style>
+      </p:cxnSp>
+      <p:sp>
+        <p:nvSpPr>
+          <p:cNvPr id="105" name="文字方塊 104">
+            <a:extLst>
+              <a:ext uri="{FF2B5EF4-FFF2-40B4-BE49-F238E27FC236}">
+                <a16:creationId xmlns:a16="http://schemas.microsoft.com/office/drawing/2014/main" id="{7FCFAFC6-17F3-DEB5-19BD-D7650CDDED0E}"/>
+              </a:ext>
+            </a:extLst>
+          </p:cNvPr>
+          <p:cNvSpPr txBox="1"/>
+          <p:nvPr/>
+        </p:nvSpPr>
+        <p:spPr>
+          <a:xfrm>
+            <a:off x="3816838" y="4820019"/>
+            <a:ext cx="212242" cy="369332"/>
+          </a:xfrm>
+          <a:prstGeom prst="rect">
+            <a:avLst/>
+          </a:prstGeom>
+          <a:noFill/>
+        </p:spPr>
+        <p:txBody>
+          <a:bodyPr wrap="square" rtlCol="0">
+            <a:spAutoFit/>
+          </a:bodyPr>
+          <a:lstStyle/>
+          <a:p>
+            <a:pPr algn="ctr"/>
+            <a:r>
+              <a:rPr lang="zh-TW" altLang="en-US">
+                <a:solidFill>
+                  <a:srgbClr val="FF0000"/>
+                </a:solidFill>
+                <a:effectLst>
+                  <a:outerShdw blurRad="38100" dist="38100" dir="2700000" algn="tl">
+                    <a:srgbClr val="000000">
+                      <a:alpha val="43137"/>
+                    </a:srgbClr>
+                  </a:outerShdw>
+                </a:effectLst>
+                <a:latin typeface="Charis SemiBold" panose="02000500060000020004" pitchFamily="2" charset="0"/>
+                <a:ea typeface="Noto Sans TC Medium" panose="020B0200000000000000" pitchFamily="34" charset="-128"/>
+              </a:rPr>
+              <a:t>漳</a:t>
+            </a:r>
+          </a:p>
+        </p:txBody>
+      </p:sp>
+      <p:sp>
+        <p:nvSpPr>
+          <p:cNvPr id="106" name="文字方塊 105">
+            <a:extLst>
+              <a:ext uri="{FF2B5EF4-FFF2-40B4-BE49-F238E27FC236}">
+                <a16:creationId xmlns:a16="http://schemas.microsoft.com/office/drawing/2014/main" id="{B66DB96C-9230-9F43-2458-03B39C85D7A8}"/>
+              </a:ext>
+            </a:extLst>
+          </p:cNvPr>
+          <p:cNvSpPr txBox="1"/>
+          <p:nvPr/>
+        </p:nvSpPr>
+        <p:spPr>
+          <a:xfrm>
+            <a:off x="3816838" y="6410697"/>
+            <a:ext cx="212242" cy="369332"/>
+          </a:xfrm>
+          <a:prstGeom prst="rect">
+            <a:avLst/>
+          </a:prstGeom>
+          <a:noFill/>
+        </p:spPr>
+        <p:txBody>
+          <a:bodyPr wrap="square" rtlCol="0">
+            <a:spAutoFit/>
+          </a:bodyPr>
+          <a:lstStyle/>
+          <a:p>
+            <a:pPr algn="ctr"/>
+            <a:r>
+              <a:rPr lang="zh-TW" altLang="en-US">
+                <a:solidFill>
+                  <a:srgbClr val="FF0000"/>
+                </a:solidFill>
+                <a:effectLst>
+                  <a:outerShdw blurRad="38100" dist="38100" dir="2700000" algn="tl">
+                    <a:srgbClr val="000000">
+                      <a:alpha val="43137"/>
+                    </a:srgbClr>
+                  </a:outerShdw>
+                </a:effectLst>
+                <a:latin typeface="Charis SemiBold" panose="02000500060000020004" pitchFamily="2" charset="0"/>
+                <a:ea typeface="Noto Sans TC Medium" panose="020B0200000000000000" pitchFamily="34" charset="-128"/>
+              </a:rPr>
+              <a:t>泉</a:t>
+            </a:r>
+          </a:p>
+        </p:txBody>
+      </p:sp>
+    </p:spTree>
+    <p:extLst>
+      <p:ext uri="{BB962C8B-B14F-4D97-AF65-F5344CB8AC3E}">
+        <p14:creationId xmlns:p14="http://schemas.microsoft.com/office/powerpoint/2010/main" val="2570783010"/>
+      </p:ext>
+    </p:extLst>
+  </p:cSld>
+  <p:clrMapOvr>
+    <a:masterClrMapping/>
+  </p:clrMapOvr>
+</p:sld>
+</file>
+
+<file path=ppt/slides/slide8.xml><?xml version="1.0" encoding="utf-8"?>
+<p:sld xmlns:a="http://schemas.openxmlformats.org/drawingml/2006/main" xmlns:r="http://schemas.openxmlformats.org/officeDocument/2006/relationships" xmlns:p="http://schemas.openxmlformats.org/presentationml/2006/main">
   <p:cSld>
     <p:spTree>
       <p:nvGrpSpPr>
         <p:cNvPr id="1" name="">
           <a:extLst>
             <a:ext uri="{FF2B5EF4-FFF2-40B4-BE49-F238E27FC236}">
-              <a16:creationId xmlns:a16="http://schemas.microsoft.com/office/drawing/2014/main" id="{29B67BEE-19A1-6F1F-3100-934A7F9F4E28}"/>
+              <a16:creationId xmlns:a16="http://schemas.microsoft.com/office/drawing/2014/main" id="{6160F549-A917-9456-4E4B-D79E08006F9F}"/>
             </a:ext>
           </a:extLst>
         </p:cNvPr>
@@ -9062,10 +13734,10 @@
       </p:grpSpPr>
       <p:sp>
         <p:nvSpPr>
-          <p:cNvPr id="4" name="標題 3">
-            <a:extLst>
-              <a:ext uri="{FF2B5EF4-FFF2-40B4-BE49-F238E27FC236}">
-                <a16:creationId xmlns:a16="http://schemas.microsoft.com/office/drawing/2014/main" id="{DFD08DEE-E338-76C7-E961-2C2D593CEFB2}"/>
+          <p:cNvPr id="2" name="標題 1">
+            <a:extLst>
+              <a:ext uri="{FF2B5EF4-FFF2-40B4-BE49-F238E27FC236}">
+                <a16:creationId xmlns:a16="http://schemas.microsoft.com/office/drawing/2014/main" id="{95C638FC-D5C3-1897-9260-0D9B153119F5}"/>
               </a:ext>
             </a:extLst>
           </p:cNvPr>
@@ -9078,63 +13750,24 @@
         </p:nvSpPr>
         <p:spPr>
           <a:xfrm>
-            <a:off x="471487" y="312821"/>
-            <a:ext cx="5915025" cy="647480"/>
+            <a:off x="458629" y="669870"/>
+            <a:ext cx="5915025" cy="2356556"/>
           </a:xfrm>
         </p:spPr>
         <p:txBody>
           <a:bodyPr/>
           <a:lstStyle/>
           <a:p>
-            <a:r>
-              <a:rPr lang="zh-TW" altLang="en-US">
-                <a:latin typeface="Noto Serif TC Black" panose="02020200000000000000" pitchFamily="18" charset="-128"/>
-                <a:ea typeface="Noto Serif TC Black" panose="02020200000000000000" pitchFamily="18" charset="-128"/>
-              </a:rPr>
-              <a:t>八音變調圖</a:t>
-            </a:r>
-          </a:p>
-        </p:txBody>
-      </p:sp>
-      <p:pic>
-        <p:nvPicPr>
-          <p:cNvPr id="3" name="圖片 2">
-            <a:extLst>
-              <a:ext uri="{FF2B5EF4-FFF2-40B4-BE49-F238E27FC236}">
-                <a16:creationId xmlns:a16="http://schemas.microsoft.com/office/drawing/2014/main" id="{737A70BC-4614-0E78-8279-6151A4F11E01}"/>
-              </a:ext>
-            </a:extLst>
-          </p:cNvPr>
-          <p:cNvPicPr>
-            <a:picLocks noGrp="1" noRot="1" noChangeAspect="1" noMove="1" noResize="1" noEditPoints="1" noAdjustHandles="1" noChangeArrowheads="1" noChangeShapeType="1" noCrop="1"/>
-          </p:cNvPicPr>
-          <p:nvPr/>
-        </p:nvPicPr>
-        <p:blipFill>
-          <a:blip r:embed="rId2">
-            <a:grayscl/>
-            <a:alphaModFix amt="13000"/>
-          </a:blip>
-          <a:stretch>
-            <a:fillRect/>
-          </a:stretch>
-        </p:blipFill>
-        <p:spPr>
-          <a:xfrm>
-            <a:off x="0" y="1560709"/>
-            <a:ext cx="6858000" cy="10064496"/>
-          </a:xfrm>
-          <a:prstGeom prst="rect">
-            <a:avLst/>
-          </a:prstGeom>
-        </p:spPr>
-      </p:pic>
-      <p:sp>
-        <p:nvSpPr>
-          <p:cNvPr id="5" name="流程圖: 替代程序 4">
-            <a:extLst>
-              <a:ext uri="{FF2B5EF4-FFF2-40B4-BE49-F238E27FC236}">
-                <a16:creationId xmlns:a16="http://schemas.microsoft.com/office/drawing/2014/main" id="{30D6E88B-576A-DFA8-2D79-A0745A9F8092}"/>
+            <a:endParaRPr lang="zh-TW" altLang="en-US"/>
+          </a:p>
+        </p:txBody>
+      </p:sp>
+      <p:sp>
+        <p:nvSpPr>
+          <p:cNvPr id="38" name="流程圖: 替代程序 37">
+            <a:extLst>
+              <a:ext uri="{FF2B5EF4-FFF2-40B4-BE49-F238E27FC236}">
+                <a16:creationId xmlns:a16="http://schemas.microsoft.com/office/drawing/2014/main" id="{902E8141-7EF8-5DEF-E700-8FF7021A01FF}"/>
               </a:ext>
             </a:extLst>
           </p:cNvPr>
@@ -9143,7 +13776,7 @@
         </p:nvSpPr>
         <p:spPr>
           <a:xfrm>
-            <a:off x="1113183" y="1757238"/>
+            <a:off x="320962" y="3674777"/>
             <a:ext cx="2083241" cy="755374"/>
           </a:xfrm>
           <a:prstGeom prst="flowChartAlternateProcess">
@@ -9171,16 +13804,81 @@
           <a:lstStyle/>
           <a:p>
             <a:pPr algn="ctr"/>
-            <a:endParaRPr lang="zh-TW" altLang="en-US"/>
-          </a:p>
-        </p:txBody>
-      </p:sp>
-      <p:sp>
-        <p:nvSpPr>
-          <p:cNvPr id="6" name="流程圖: 替代程序 5">
-            <a:extLst>
-              <a:ext uri="{FF2B5EF4-FFF2-40B4-BE49-F238E27FC236}">
-                <a16:creationId xmlns:a16="http://schemas.microsoft.com/office/drawing/2014/main" id="{ECD8560F-3EC6-ECC8-FA31-DF19BE8CF860}"/>
+            <a:r>
+              <a:rPr lang="en-US" altLang="zh-TW">
+                <a:effectLst>
+                  <a:outerShdw blurRad="38100" dist="38100" dir="2700000" algn="tl">
+                    <a:srgbClr val="000000">
+                      <a:alpha val="43137"/>
+                    </a:srgbClr>
+                  </a:outerShdw>
+                </a:effectLst>
+                <a:latin typeface="Charis SemiBold" panose="02000500060000020004" pitchFamily="2" charset="0"/>
+                <a:ea typeface="Noto Sans TC Medium" panose="020B0200000000000000" pitchFamily="34" charset="-128"/>
+              </a:rPr>
+              <a:t>【1】</a:t>
+            </a:r>
+            <a:r>
+              <a:rPr lang="zh-TW" altLang="en-US">
+                <a:effectLst>
+                  <a:outerShdw blurRad="38100" dist="38100" dir="2700000" algn="tl">
+                    <a:srgbClr val="000000">
+                      <a:alpha val="43137"/>
+                    </a:srgbClr>
+                  </a:outerShdw>
+                </a:effectLst>
+                <a:latin typeface="Charis SemiBold" panose="02000500060000020004" pitchFamily="2" charset="0"/>
+                <a:ea typeface="Noto Sans TC Medium" panose="020B0200000000000000" pitchFamily="34" charset="-128"/>
+              </a:rPr>
+              <a:t>花車</a:t>
+            </a:r>
+            <a:br>
+              <a:rPr lang="en-US" altLang="zh-TW">
+                <a:effectLst>
+                  <a:outerShdw blurRad="38100" dist="38100" dir="2700000" algn="tl">
+                    <a:srgbClr val="000000">
+                      <a:alpha val="43137"/>
+                    </a:srgbClr>
+                  </a:outerShdw>
+                </a:effectLst>
+                <a:latin typeface="Charis SemiBold" panose="02000500060000020004" pitchFamily="2" charset="0"/>
+                <a:ea typeface="Noto Sans TC Medium" panose="020B0200000000000000" pitchFamily="34" charset="-128"/>
+              </a:rPr>
+            </a:br>
+            <a:r>
+              <a:rPr lang="en-US" altLang="zh-TW">
+                <a:effectLst>
+                  <a:outerShdw blurRad="38100" dist="38100" dir="2700000" algn="tl">
+                    <a:srgbClr val="000000">
+                      <a:alpha val="43137"/>
+                    </a:srgbClr>
+                  </a:outerShdw>
+                </a:effectLst>
+                <a:latin typeface="Charis SemiBold" panose="02000500060000020004" pitchFamily="2" charset="0"/>
+                <a:ea typeface="Noto Sans TC Medium" panose="020B0200000000000000" pitchFamily="34" charset="-128"/>
+              </a:rPr>
+              <a:t>[hue¹⁻⁶ cia¹]</a:t>
+            </a:r>
+            <a:endParaRPr lang="zh-TW" altLang="en-US">
+              <a:effectLst>
+                <a:outerShdw blurRad="38100" dist="38100" dir="2700000" algn="tl">
+                  <a:srgbClr val="000000">
+                    <a:alpha val="43137"/>
+                  </a:srgbClr>
+                </a:outerShdw>
+              </a:effectLst>
+              <a:latin typeface="Charis SemiBold" panose="02000500060000020004" pitchFamily="2" charset="0"/>
+              <a:ea typeface="Noto Sans TC Medium" panose="020B0200000000000000" pitchFamily="34" charset="-128"/>
+            </a:endParaRPr>
+          </a:p>
+        </p:txBody>
+      </p:sp>
+      <p:sp>
+        <p:nvSpPr>
+          <p:cNvPr id="39" name="流程圖: 替代程序 38">
+            <a:extLst>
+              <a:ext uri="{FF2B5EF4-FFF2-40B4-BE49-F238E27FC236}">
+                <a16:creationId xmlns:a16="http://schemas.microsoft.com/office/drawing/2014/main" id="{18B07E19-CF7A-5D6E-8DDE-955133AD4FD4}"/>
               </a:ext>
             </a:extLst>
           </p:cNvPr>
@@ -9189,7 +13887,7 @@
         </p:nvSpPr>
         <p:spPr>
           <a:xfrm>
-            <a:off x="1113180" y="3286057"/>
+            <a:off x="320962" y="7212830"/>
             <a:ext cx="2083241" cy="755374"/>
           </a:xfrm>
           <a:prstGeom prst="flowChartAlternateProcess">
@@ -9217,16 +13915,81 @@
           <a:lstStyle/>
           <a:p>
             <a:pPr algn="ctr"/>
-            <a:endParaRPr lang="zh-TW" altLang="en-US"/>
-          </a:p>
-        </p:txBody>
-      </p:sp>
-      <p:sp>
-        <p:nvSpPr>
-          <p:cNvPr id="7" name="流程圖: 替代程序 6">
-            <a:extLst>
-              <a:ext uri="{FF2B5EF4-FFF2-40B4-BE49-F238E27FC236}">
-                <a16:creationId xmlns:a16="http://schemas.microsoft.com/office/drawing/2014/main" id="{81060C4D-40F4-AA14-CB1C-DB7DBBC4510E}"/>
+            <a:r>
+              <a:rPr lang="en-US" altLang="zh-TW">
+                <a:effectLst>
+                  <a:outerShdw blurRad="38100" dist="38100" dir="2700000" algn="tl">
+                    <a:srgbClr val="000000">
+                      <a:alpha val="43137"/>
+                    </a:srgbClr>
+                  </a:outerShdw>
+                </a:effectLst>
+                <a:latin typeface="Charis SemiBold" panose="02000500060000020004" pitchFamily="2" charset="0"/>
+                <a:ea typeface="Noto Sans TC Medium" panose="020B0200000000000000" pitchFamily="34" charset="-128"/>
+              </a:rPr>
+              <a:t>【3】</a:t>
+            </a:r>
+            <a:r>
+              <a:rPr lang="zh-TW" altLang="en-US">
+                <a:effectLst>
+                  <a:outerShdw blurRad="38100" dist="38100" dir="2700000" algn="tl">
+                    <a:srgbClr val="000000">
+                      <a:alpha val="43137"/>
+                    </a:srgbClr>
+                  </a:outerShdw>
+                </a:effectLst>
+                <a:latin typeface="Charis SemiBold" panose="02000500060000020004" pitchFamily="2" charset="0"/>
+                <a:ea typeface="Noto Sans TC Medium" panose="020B0200000000000000" pitchFamily="34" charset="-128"/>
+              </a:rPr>
+              <a:t>火車</a:t>
+            </a:r>
+            <a:br>
+              <a:rPr lang="en-US" altLang="zh-TW">
+                <a:effectLst>
+                  <a:outerShdw blurRad="38100" dist="38100" dir="2700000" algn="tl">
+                    <a:srgbClr val="000000">
+                      <a:alpha val="43137"/>
+                    </a:srgbClr>
+                  </a:outerShdw>
+                </a:effectLst>
+                <a:latin typeface="Charis SemiBold" panose="02000500060000020004" pitchFamily="2" charset="0"/>
+                <a:ea typeface="Noto Sans TC Medium" panose="020B0200000000000000" pitchFamily="34" charset="-128"/>
+              </a:rPr>
+            </a:br>
+            <a:r>
+              <a:rPr lang="en-US" altLang="zh-TW">
+                <a:effectLst>
+                  <a:outerShdw blurRad="38100" dist="38100" dir="2700000" algn="tl">
+                    <a:srgbClr val="000000">
+                      <a:alpha val="43137"/>
+                    </a:srgbClr>
+                  </a:outerShdw>
+                </a:effectLst>
+                <a:latin typeface="Charis SemiBold" panose="02000500060000020004" pitchFamily="2" charset="0"/>
+                <a:ea typeface="Noto Sans TC Medium" panose="020B0200000000000000" pitchFamily="34" charset="-128"/>
+              </a:rPr>
+              <a:t>[hue³⁻¹ cia¹]</a:t>
+            </a:r>
+            <a:endParaRPr lang="zh-TW" altLang="en-US">
+              <a:effectLst>
+                <a:outerShdw blurRad="38100" dist="38100" dir="2700000" algn="tl">
+                  <a:srgbClr val="000000">
+                    <a:alpha val="43137"/>
+                  </a:srgbClr>
+                </a:outerShdw>
+              </a:effectLst>
+              <a:latin typeface="Charis SemiBold" panose="02000500060000020004" pitchFamily="2" charset="0"/>
+              <a:ea typeface="Noto Sans TC Medium" panose="020B0200000000000000" pitchFamily="34" charset="-128"/>
+            </a:endParaRPr>
+          </a:p>
+        </p:txBody>
+      </p:sp>
+      <p:sp>
+        <p:nvSpPr>
+          <p:cNvPr id="40" name="流程圖: 替代程序 39">
+            <a:extLst>
+              <a:ext uri="{FF2B5EF4-FFF2-40B4-BE49-F238E27FC236}">
+                <a16:creationId xmlns:a16="http://schemas.microsoft.com/office/drawing/2014/main" id="{F5FB1419-B313-6964-C323-0A3A2177471B}"/>
               </a:ext>
             </a:extLst>
           </p:cNvPr>
@@ -9235,7 +13998,7 @@
         </p:nvSpPr>
         <p:spPr>
           <a:xfrm>
-            <a:off x="1113181" y="4838368"/>
+            <a:off x="4258560" y="7212830"/>
             <a:ext cx="2083241" cy="755374"/>
           </a:xfrm>
           <a:prstGeom prst="flowChartAlternateProcess">
@@ -9263,16 +14026,81 @@
           <a:lstStyle/>
           <a:p>
             <a:pPr algn="ctr"/>
-            <a:endParaRPr lang="zh-TW" altLang="en-US"/>
-          </a:p>
-        </p:txBody>
-      </p:sp>
-      <p:sp>
-        <p:nvSpPr>
-          <p:cNvPr id="8" name="流程圖: 替代程序 7">
-            <a:extLst>
-              <a:ext uri="{FF2B5EF4-FFF2-40B4-BE49-F238E27FC236}">
-                <a16:creationId xmlns:a16="http://schemas.microsoft.com/office/drawing/2014/main" id="{CF531656-7385-FA41-49E3-2B62D79C7048}"/>
+            <a:r>
+              <a:rPr lang="en-US" altLang="zh-TW">
+                <a:effectLst>
+                  <a:outerShdw blurRad="38100" dist="38100" dir="2700000" algn="tl">
+                    <a:srgbClr val="000000">
+                      <a:alpha val="43137"/>
+                    </a:srgbClr>
+                  </a:outerShdw>
+                </a:effectLst>
+                <a:latin typeface="Charis SemiBold" panose="02000500060000020004" pitchFamily="2" charset="0"/>
+                <a:ea typeface="Noto Sans TC Medium" panose="020B0200000000000000" pitchFamily="34" charset="-128"/>
+              </a:rPr>
+              <a:t>【5】</a:t>
+            </a:r>
+            <a:r>
+              <a:rPr lang="zh-TW" altLang="en-US">
+                <a:effectLst>
+                  <a:outerShdw blurRad="38100" dist="38100" dir="2700000" algn="tl">
+                    <a:srgbClr val="000000">
+                      <a:alpha val="43137"/>
+                    </a:srgbClr>
+                  </a:outerShdw>
+                </a:effectLst>
+                <a:latin typeface="Charis SemiBold" panose="02000500060000020004" pitchFamily="2" charset="0"/>
+                <a:ea typeface="Noto Sans TC Medium" panose="020B0200000000000000" pitchFamily="34" charset="-128"/>
+              </a:rPr>
+              <a:t>貨車</a:t>
+            </a:r>
+            <a:br>
+              <a:rPr lang="en-US" altLang="zh-TW">
+                <a:effectLst>
+                  <a:outerShdw blurRad="38100" dist="38100" dir="2700000" algn="tl">
+                    <a:srgbClr val="000000">
+                      <a:alpha val="43137"/>
+                    </a:srgbClr>
+                  </a:outerShdw>
+                </a:effectLst>
+                <a:latin typeface="Charis SemiBold" panose="02000500060000020004" pitchFamily="2" charset="0"/>
+                <a:ea typeface="Noto Sans TC Medium" panose="020B0200000000000000" pitchFamily="34" charset="-128"/>
+              </a:rPr>
+            </a:br>
+            <a:r>
+              <a:rPr lang="en-US" altLang="zh-TW">
+                <a:effectLst>
+                  <a:outerShdw blurRad="38100" dist="38100" dir="2700000" algn="tl">
+                    <a:srgbClr val="000000">
+                      <a:alpha val="43137"/>
+                    </a:srgbClr>
+                  </a:outerShdw>
+                </a:effectLst>
+                <a:latin typeface="Charis SemiBold" panose="02000500060000020004" pitchFamily="2" charset="0"/>
+                <a:ea typeface="Noto Sans TC Medium" panose="020B0200000000000000" pitchFamily="34" charset="-128"/>
+              </a:rPr>
+              <a:t>[hue⁵⁻³ cia¹]</a:t>
+            </a:r>
+            <a:endParaRPr lang="zh-TW" altLang="en-US">
+              <a:effectLst>
+                <a:outerShdw blurRad="38100" dist="38100" dir="2700000" algn="tl">
+                  <a:srgbClr val="000000">
+                    <a:alpha val="43137"/>
+                  </a:srgbClr>
+                </a:outerShdw>
+              </a:effectLst>
+              <a:latin typeface="Charis SemiBold" panose="02000500060000020004" pitchFamily="2" charset="0"/>
+              <a:ea typeface="Noto Sans TC Medium" panose="020B0200000000000000" pitchFamily="34" charset="-128"/>
+            </a:endParaRPr>
+          </a:p>
+        </p:txBody>
+      </p:sp>
+      <p:sp>
+        <p:nvSpPr>
+          <p:cNvPr id="41" name="流程圖: 替代程序 40">
+            <a:extLst>
+              <a:ext uri="{FF2B5EF4-FFF2-40B4-BE49-F238E27FC236}">
+                <a16:creationId xmlns:a16="http://schemas.microsoft.com/office/drawing/2014/main" id="{25EA1BD7-E649-51C4-CD82-E2D84EF6444E}"/>
               </a:ext>
             </a:extLst>
           </p:cNvPr>
@@ -9281,7 +14109,239 @@
         </p:nvSpPr>
         <p:spPr>
           <a:xfrm>
-            <a:off x="1113182" y="6914984"/>
+            <a:off x="320962" y="10305774"/>
+            <a:ext cx="2083241" cy="755374"/>
+          </a:xfrm>
+          <a:prstGeom prst="flowChartAlternateProcess">
+            <a:avLst/>
+          </a:prstGeom>
+        </p:spPr>
+        <p:style>
+          <a:lnRef idx="0">
+            <a:schemeClr val="accent5"/>
+          </a:lnRef>
+          <a:fillRef idx="3">
+            <a:schemeClr val="accent5"/>
+          </a:fillRef>
+          <a:effectRef idx="3">
+            <a:schemeClr val="accent5"/>
+          </a:effectRef>
+          <a:fontRef idx="minor">
+            <a:schemeClr val="lt1"/>
+          </a:fontRef>
+        </p:style>
+        <p:txBody>
+          <a:bodyPr rtlCol="0" anchor="ctr"/>
+          <a:lstStyle/>
+          <a:p>
+            <a:pPr algn="ctr"/>
+            <a:r>
+              <a:rPr lang="en-US" altLang="zh-TW">
+                <a:effectLst>
+                  <a:outerShdw blurRad="38100" dist="38100" dir="2700000" algn="tl">
+                    <a:srgbClr val="000000">
+                      <a:alpha val="43137"/>
+                    </a:srgbClr>
+                  </a:outerShdw>
+                </a:effectLst>
+                <a:latin typeface="Charis SemiBold" panose="02000500060000020004" pitchFamily="2" charset="0"/>
+                <a:ea typeface="Noto Sans TC Medium" panose="020B0200000000000000" pitchFamily="34" charset="-128"/>
+              </a:rPr>
+              <a:t>【7】</a:t>
+            </a:r>
+            <a:r>
+              <a:rPr lang="zh-TW" altLang="en-US">
+                <a:effectLst>
+                  <a:outerShdw blurRad="38100" dist="38100" dir="2700000" algn="tl">
+                    <a:srgbClr val="000000">
+                      <a:alpha val="43137"/>
+                    </a:srgbClr>
+                  </a:outerShdw>
+                </a:effectLst>
+                <a:latin typeface="Charis SemiBold" panose="02000500060000020004" pitchFamily="2" charset="0"/>
+                <a:ea typeface="Noto Sans TC Medium" panose="020B0200000000000000" pitchFamily="34" charset="-128"/>
+              </a:rPr>
+              <a:t>骨頭</a:t>
+            </a:r>
+            <a:r>
+              <a:rPr lang="en-US" altLang="zh-TW">
+                <a:effectLst>
+                  <a:outerShdw blurRad="38100" dist="38100" dir="2700000" algn="tl">
+                    <a:srgbClr val="000000">
+                      <a:alpha val="43137"/>
+                    </a:srgbClr>
+                  </a:outerShdw>
+                </a:effectLst>
+                <a:latin typeface="Charis SemiBold" panose="02000500060000020004" pitchFamily="2" charset="0"/>
+                <a:ea typeface="Noto Sans TC Medium" panose="020B0200000000000000" pitchFamily="34" charset="-128"/>
+              </a:rPr>
+              <a:t> </a:t>
+            </a:r>
+            <a:br>
+              <a:rPr lang="en-US" altLang="zh-TW">
+                <a:effectLst>
+                  <a:outerShdw blurRad="38100" dist="38100" dir="2700000" algn="tl">
+                    <a:srgbClr val="000000">
+                      <a:alpha val="43137"/>
+                    </a:srgbClr>
+                  </a:outerShdw>
+                </a:effectLst>
+                <a:latin typeface="Charis SemiBold" panose="02000500060000020004" pitchFamily="2" charset="0"/>
+                <a:ea typeface="Noto Sans TC Medium" panose="020B0200000000000000" pitchFamily="34" charset="-128"/>
+              </a:rPr>
+            </a:br>
+            <a:r>
+              <a:rPr lang="en-US" altLang="zh-TW">
+                <a:effectLst>
+                  <a:outerShdw blurRad="38100" dist="38100" dir="2700000" algn="tl">
+                    <a:srgbClr val="000000">
+                      <a:alpha val="43137"/>
+                    </a:srgbClr>
+                  </a:outerShdw>
+                </a:effectLst>
+                <a:latin typeface="Charis SemiBold" panose="02000500060000020004" pitchFamily="2" charset="0"/>
+                <a:ea typeface="Noto Sans TC Medium" panose="020B0200000000000000" pitchFamily="34" charset="-128"/>
+              </a:rPr>
+              <a:t>[gut⁷⁻⁸ tao²]</a:t>
+            </a:r>
+            <a:endParaRPr lang="zh-TW" altLang="en-US">
+              <a:effectLst>
+                <a:outerShdw blurRad="38100" dist="38100" dir="2700000" algn="tl">
+                  <a:srgbClr val="000000">
+                    <a:alpha val="43137"/>
+                  </a:srgbClr>
+                </a:outerShdw>
+              </a:effectLst>
+              <a:latin typeface="Charis SemiBold" panose="02000500060000020004" pitchFamily="2" charset="0"/>
+              <a:ea typeface="Noto Sans TC Medium" panose="020B0200000000000000" pitchFamily="34" charset="-128"/>
+            </a:endParaRPr>
+          </a:p>
+        </p:txBody>
+      </p:sp>
+      <p:sp>
+        <p:nvSpPr>
+          <p:cNvPr id="42" name="流程圖: 替代程序 41">
+            <a:extLst>
+              <a:ext uri="{FF2B5EF4-FFF2-40B4-BE49-F238E27FC236}">
+                <a16:creationId xmlns:a16="http://schemas.microsoft.com/office/drawing/2014/main" id="{0348E340-2E93-0E40-67AB-9AC51A5F136D}"/>
+              </a:ext>
+            </a:extLst>
+          </p:cNvPr>
+          <p:cNvSpPr/>
+          <p:nvPr/>
+        </p:nvSpPr>
+        <p:spPr>
+          <a:xfrm>
+            <a:off x="4258560" y="10300488"/>
+            <a:ext cx="2083241" cy="755374"/>
+          </a:xfrm>
+          <a:prstGeom prst="flowChartAlternateProcess">
+            <a:avLst/>
+          </a:prstGeom>
+        </p:spPr>
+        <p:style>
+          <a:lnRef idx="0">
+            <a:schemeClr val="accent6"/>
+          </a:lnRef>
+          <a:fillRef idx="3">
+            <a:schemeClr val="accent6"/>
+          </a:fillRef>
+          <a:effectRef idx="3">
+            <a:schemeClr val="accent6"/>
+          </a:effectRef>
+          <a:fontRef idx="minor">
+            <a:schemeClr val="lt1"/>
+          </a:fontRef>
+        </p:style>
+        <p:txBody>
+          <a:bodyPr rtlCol="0" anchor="ctr"/>
+          <a:lstStyle/>
+          <a:p>
+            <a:pPr algn="ctr"/>
+            <a:r>
+              <a:rPr lang="en-US" altLang="zh-TW">
+                <a:effectLst>
+                  <a:outerShdw blurRad="38100" dist="38100" dir="2700000" algn="tl">
+                    <a:srgbClr val="000000">
+                      <a:alpha val="43137"/>
+                    </a:srgbClr>
+                  </a:outerShdw>
+                </a:effectLst>
+                <a:latin typeface="Charis SemiBold" panose="02000500060000020004" pitchFamily="2" charset="0"/>
+                <a:ea typeface="Noto Sans TC Medium" panose="020B0200000000000000" pitchFamily="34" charset="-128"/>
+              </a:rPr>
+              <a:t>【8】</a:t>
+            </a:r>
+            <a:r>
+              <a:rPr lang="zh-TW" altLang="en-US">
+                <a:effectLst>
+                  <a:outerShdw blurRad="38100" dist="38100" dir="2700000" algn="tl">
+                    <a:srgbClr val="000000">
+                      <a:alpha val="43137"/>
+                    </a:srgbClr>
+                  </a:outerShdw>
+                </a:effectLst>
+                <a:latin typeface="Charis SemiBold" panose="02000500060000020004" pitchFamily="2" charset="0"/>
+                <a:ea typeface="Noto Sans TC Medium" panose="020B0200000000000000" pitchFamily="34" charset="-128"/>
+              </a:rPr>
+              <a:t>轉頭</a:t>
+            </a:r>
+            <a:br>
+              <a:rPr lang="en-US" altLang="zh-TW">
+                <a:effectLst>
+                  <a:outerShdw blurRad="38100" dist="38100" dir="2700000" algn="tl">
+                    <a:srgbClr val="000000">
+                      <a:alpha val="43137"/>
+                    </a:srgbClr>
+                  </a:outerShdw>
+                </a:effectLst>
+                <a:latin typeface="Charis SemiBold" panose="02000500060000020004" pitchFamily="2" charset="0"/>
+                <a:ea typeface="Noto Sans TC Medium" panose="020B0200000000000000" pitchFamily="34" charset="-128"/>
+              </a:rPr>
+            </a:br>
+            <a:r>
+              <a:rPr lang="en-US" altLang="zh-TW">
+                <a:effectLst>
+                  <a:outerShdw blurRad="38100" dist="38100" dir="2700000" algn="tl">
+                    <a:srgbClr val="000000">
+                      <a:alpha val="43137"/>
+                    </a:srgbClr>
+                  </a:outerShdw>
+                </a:effectLst>
+                <a:latin typeface="Charis SemiBold" panose="02000500060000020004" pitchFamily="2" charset="0"/>
+                <a:ea typeface="Noto Sans TC Medium" panose="020B0200000000000000" pitchFamily="34" charset="-128"/>
+              </a:rPr>
+              <a:t>[wat⁸⁻⁷ tao²]</a:t>
+            </a:r>
+            <a:endParaRPr lang="zh-TW" altLang="en-US">
+              <a:effectLst>
+                <a:outerShdw blurRad="38100" dist="38100" dir="2700000" algn="tl">
+                  <a:srgbClr val="000000">
+                    <a:alpha val="43137"/>
+                  </a:srgbClr>
+                </a:outerShdw>
+              </a:effectLst>
+              <a:latin typeface="Charis SemiBold" panose="02000500060000020004" pitchFamily="2" charset="0"/>
+              <a:ea typeface="Noto Sans TC Medium" panose="020B0200000000000000" pitchFamily="34" charset="-128"/>
+            </a:endParaRPr>
+          </a:p>
+        </p:txBody>
+      </p:sp>
+      <p:sp>
+        <p:nvSpPr>
+          <p:cNvPr id="43" name="流程圖: 替代程序 42">
+            <a:extLst>
+              <a:ext uri="{FF2B5EF4-FFF2-40B4-BE49-F238E27FC236}">
+                <a16:creationId xmlns:a16="http://schemas.microsoft.com/office/drawing/2014/main" id="{8DA795E5-97C8-7A2F-8A79-709210A314BA}"/>
+              </a:ext>
+            </a:extLst>
+          </p:cNvPr>
+          <p:cNvSpPr/>
+          <p:nvPr/>
+        </p:nvSpPr>
+        <p:spPr>
+          <a:xfrm>
+            <a:off x="4258560" y="3674777"/>
             <a:ext cx="2083241" cy="755374"/>
           </a:xfrm>
           <a:prstGeom prst="flowChartAlternateProcess">
@@ -9309,16 +14369,81 @@
           <a:lstStyle/>
           <a:p>
             <a:pPr algn="ctr"/>
-            <a:endParaRPr lang="zh-TW" altLang="en-US"/>
-          </a:p>
-        </p:txBody>
-      </p:sp>
-      <p:sp>
-        <p:nvSpPr>
-          <p:cNvPr id="9" name="流程圖: 替代程序 8">
-            <a:extLst>
-              <a:ext uri="{FF2B5EF4-FFF2-40B4-BE49-F238E27FC236}">
-                <a16:creationId xmlns:a16="http://schemas.microsoft.com/office/drawing/2014/main" id="{9FA0335D-B031-0198-9D8D-3904B6B43D31}"/>
+            <a:r>
+              <a:rPr lang="en-US" altLang="zh-TW">
+                <a:effectLst>
+                  <a:outerShdw blurRad="38100" dist="38100" dir="2700000" algn="tl">
+                    <a:srgbClr val="000000">
+                      <a:alpha val="43137"/>
+                    </a:srgbClr>
+                  </a:outerShdw>
+                </a:effectLst>
+                <a:latin typeface="Charis SemiBold" panose="02000500060000020004" pitchFamily="2" charset="0"/>
+                <a:ea typeface="Noto Sans TC Medium" panose="020B0200000000000000" pitchFamily="34" charset="-128"/>
+              </a:rPr>
+              <a:t>【6】</a:t>
+            </a:r>
+            <a:r>
+              <a:rPr lang="zh-TW" altLang="en-US">
+                <a:effectLst>
+                  <a:outerShdw blurRad="38100" dist="38100" dir="2700000" algn="tl">
+                    <a:srgbClr val="000000">
+                      <a:alpha val="43137"/>
+                    </a:srgbClr>
+                  </a:outerShdw>
+                </a:effectLst>
+                <a:latin typeface="Charis SemiBold" panose="02000500060000020004" pitchFamily="2" charset="0"/>
+                <a:ea typeface="Noto Sans TC Medium" panose="020B0200000000000000" pitchFamily="34" charset="-128"/>
+              </a:rPr>
+              <a:t>會車</a:t>
+            </a:r>
+            <a:br>
+              <a:rPr lang="en-US" altLang="zh-TW">
+                <a:effectLst>
+                  <a:outerShdw blurRad="38100" dist="38100" dir="2700000" algn="tl">
+                    <a:srgbClr val="000000">
+                      <a:alpha val="43137"/>
+                    </a:srgbClr>
+                  </a:outerShdw>
+                </a:effectLst>
+                <a:latin typeface="Charis SemiBold" panose="02000500060000020004" pitchFamily="2" charset="0"/>
+                <a:ea typeface="Noto Sans TC Medium" panose="020B0200000000000000" pitchFamily="34" charset="-128"/>
+              </a:rPr>
+            </a:br>
+            <a:r>
+              <a:rPr lang="en-US" altLang="zh-TW">
+                <a:effectLst>
+                  <a:outerShdw blurRad="38100" dist="38100" dir="2700000" algn="tl">
+                    <a:srgbClr val="000000">
+                      <a:alpha val="43137"/>
+                    </a:srgbClr>
+                  </a:outerShdw>
+                </a:effectLst>
+                <a:latin typeface="Charis SemiBold" panose="02000500060000020004" pitchFamily="2" charset="0"/>
+                <a:ea typeface="Noto Sans TC Medium" panose="020B0200000000000000" pitchFamily="34" charset="-128"/>
+              </a:rPr>
+              <a:t>[hue⁶⁻⁵ cia¹]</a:t>
+            </a:r>
+            <a:endParaRPr lang="zh-TW" altLang="en-US">
+              <a:effectLst>
+                <a:outerShdw blurRad="38100" dist="38100" dir="2700000" algn="tl">
+                  <a:srgbClr val="000000">
+                    <a:alpha val="43137"/>
+                  </a:srgbClr>
+                </a:outerShdw>
+              </a:effectLst>
+              <a:latin typeface="Charis SemiBold" panose="02000500060000020004" pitchFamily="2" charset="0"/>
+              <a:ea typeface="Noto Sans TC Medium" panose="020B0200000000000000" pitchFamily="34" charset="-128"/>
+            </a:endParaRPr>
+          </a:p>
+        </p:txBody>
+      </p:sp>
+      <p:sp>
+        <p:nvSpPr>
+          <p:cNvPr id="44" name="流程圖: 替代程序 43">
+            <a:extLst>
+              <a:ext uri="{FF2B5EF4-FFF2-40B4-BE49-F238E27FC236}">
+                <a16:creationId xmlns:a16="http://schemas.microsoft.com/office/drawing/2014/main" id="{AD491773-C4F4-35BC-BA9A-00777E63230C}"/>
               </a:ext>
             </a:extLst>
           </p:cNvPr>
@@ -9327,7 +14452,7 @@
         </p:nvSpPr>
         <p:spPr>
           <a:xfrm>
-            <a:off x="4422249" y="6914984"/>
+            <a:off x="2289761" y="5429093"/>
             <a:ext cx="2083241" cy="755374"/>
           </a:xfrm>
           <a:prstGeom prst="flowChartAlternateProcess">
@@ -9355,133 +14480,100 @@
           <a:lstStyle/>
           <a:p>
             <a:pPr algn="ctr"/>
-            <a:endParaRPr lang="zh-TW" altLang="en-US"/>
-          </a:p>
-        </p:txBody>
-      </p:sp>
-      <p:sp>
-        <p:nvSpPr>
-          <p:cNvPr id="10" name="流程圖: 替代程序 9">
-            <a:extLst>
-              <a:ext uri="{FF2B5EF4-FFF2-40B4-BE49-F238E27FC236}">
-                <a16:creationId xmlns:a16="http://schemas.microsoft.com/office/drawing/2014/main" id="{B56F0ADC-DE2B-63A0-3DFE-F5ACA278E98F}"/>
-              </a:ext>
-            </a:extLst>
-          </p:cNvPr>
-          <p:cNvSpPr/>
-          <p:nvPr/>
-        </p:nvSpPr>
-        <p:spPr>
-          <a:xfrm>
-            <a:off x="4422250" y="4841019"/>
-            <a:ext cx="2083241" cy="755374"/>
-          </a:xfrm>
-          <a:prstGeom prst="flowChartAlternateProcess">
-            <a:avLst/>
-          </a:prstGeom>
-        </p:spPr>
-        <p:style>
-          <a:lnRef idx="2">
-            <a:schemeClr val="accent1">
-              <a:shade val="15000"/>
-            </a:schemeClr>
-          </a:lnRef>
-          <a:fillRef idx="1">
-            <a:schemeClr val="accent1"/>
-          </a:fillRef>
-          <a:effectRef idx="0">
-            <a:schemeClr val="accent1"/>
-          </a:effectRef>
-          <a:fontRef idx="minor">
-            <a:schemeClr val="lt1"/>
-          </a:fontRef>
-        </p:style>
-        <p:txBody>
-          <a:bodyPr rtlCol="0" anchor="ctr"/>
-          <a:lstStyle/>
-          <a:p>
-            <a:pPr algn="ctr"/>
-            <a:endParaRPr lang="zh-TW" altLang="en-US"/>
-          </a:p>
-        </p:txBody>
-      </p:sp>
-      <p:sp>
-        <p:nvSpPr>
-          <p:cNvPr id="11" name="流程圖: 替代程序 10">
-            <a:extLst>
-              <a:ext uri="{FF2B5EF4-FFF2-40B4-BE49-F238E27FC236}">
-                <a16:creationId xmlns:a16="http://schemas.microsoft.com/office/drawing/2014/main" id="{E847B6F9-01E4-BE37-0DFF-2D1F2BED4E4A}"/>
-              </a:ext>
-            </a:extLst>
-          </p:cNvPr>
-          <p:cNvSpPr/>
-          <p:nvPr/>
-        </p:nvSpPr>
-        <p:spPr>
-          <a:xfrm>
-            <a:off x="4422250" y="1757238"/>
-            <a:ext cx="2083241" cy="755374"/>
-          </a:xfrm>
-          <a:prstGeom prst="flowChartAlternateProcess">
-            <a:avLst/>
-          </a:prstGeom>
-        </p:spPr>
-        <p:style>
-          <a:lnRef idx="2">
-            <a:schemeClr val="accent1">
-              <a:shade val="15000"/>
-            </a:schemeClr>
-          </a:lnRef>
-          <a:fillRef idx="1">
-            <a:schemeClr val="accent1"/>
-          </a:fillRef>
-          <a:effectRef idx="0">
-            <a:schemeClr val="accent1"/>
-          </a:effectRef>
-          <a:fontRef idx="minor">
-            <a:schemeClr val="lt1"/>
-          </a:fontRef>
-        </p:style>
-        <p:txBody>
-          <a:bodyPr rtlCol="0" anchor="ctr"/>
-          <a:lstStyle/>
-          <a:p>
-            <a:pPr algn="ctr"/>
-            <a:endParaRPr lang="zh-TW" altLang="en-US"/>
+            <a:r>
+              <a:rPr lang="en-US" altLang="zh-TW">
+                <a:effectLst>
+                  <a:outerShdw blurRad="38100" dist="38100" dir="2700000" algn="tl">
+                    <a:srgbClr val="000000">
+                      <a:alpha val="43137"/>
+                    </a:srgbClr>
+                  </a:outerShdw>
+                </a:effectLst>
+                <a:latin typeface="Charis SemiBold" panose="02000500060000020004" pitchFamily="2" charset="0"/>
+                <a:ea typeface="Noto Sans TC Medium" panose="020B0200000000000000" pitchFamily="34" charset="-128"/>
+              </a:rPr>
+              <a:t>【2】</a:t>
+            </a:r>
+            <a:r>
+              <a:rPr lang="zh-TW" altLang="en-US">
+                <a:effectLst>
+                  <a:outerShdw blurRad="38100" dist="38100" dir="2700000" algn="tl">
+                    <a:srgbClr val="000000">
+                      <a:alpha val="43137"/>
+                    </a:srgbClr>
+                  </a:outerShdw>
+                </a:effectLst>
+                <a:latin typeface="Charis SemiBold" panose="02000500060000020004" pitchFamily="2" charset="0"/>
+                <a:ea typeface="Noto Sans TC Medium" panose="020B0200000000000000" pitchFamily="34" charset="-128"/>
+              </a:rPr>
+              <a:t>回車</a:t>
+            </a:r>
+            <a:br>
+              <a:rPr lang="en-US" altLang="zh-TW">
+                <a:effectLst>
+                  <a:outerShdw blurRad="38100" dist="38100" dir="2700000" algn="tl">
+                    <a:srgbClr val="000000">
+                      <a:alpha val="43137"/>
+                    </a:srgbClr>
+                  </a:outerShdw>
+                </a:effectLst>
+                <a:latin typeface="Charis SemiBold" panose="02000500060000020004" pitchFamily="2" charset="0"/>
+                <a:ea typeface="Noto Sans TC Medium" panose="020B0200000000000000" pitchFamily="34" charset="-128"/>
+              </a:rPr>
+            </a:br>
+            <a:r>
+              <a:rPr lang="en-US" altLang="zh-TW">
+                <a:effectLst>
+                  <a:outerShdw blurRad="38100" dist="38100" dir="2700000" algn="tl">
+                    <a:srgbClr val="000000">
+                      <a:alpha val="43137"/>
+                    </a:srgbClr>
+                  </a:outerShdw>
+                </a:effectLst>
+                <a:latin typeface="Charis SemiBold" panose="02000500060000020004" pitchFamily="2" charset="0"/>
+                <a:ea typeface="Noto Sans TC Medium" panose="020B0200000000000000" pitchFamily="34" charset="-128"/>
+              </a:rPr>
+              <a:t>[hue²⁻⁶ cia¹]</a:t>
+            </a:r>
+            <a:endParaRPr lang="zh-TW" altLang="en-US">
+              <a:effectLst>
+                <a:outerShdw blurRad="38100" dist="38100" dir="2700000" algn="tl">
+                  <a:srgbClr val="000000">
+                    <a:alpha val="43137"/>
+                  </a:srgbClr>
+                </a:outerShdw>
+              </a:effectLst>
+              <a:latin typeface="Charis SemiBold" panose="02000500060000020004" pitchFamily="2" charset="0"/>
+              <a:ea typeface="Noto Sans TC Medium" panose="020B0200000000000000" pitchFamily="34" charset="-128"/>
+            </a:endParaRPr>
           </a:p>
         </p:txBody>
       </p:sp>
       <p:cxnSp>
         <p:nvCxnSpPr>
-          <p:cNvPr id="13" name="接點: 肘形 12">
-            <a:extLst>
-              <a:ext uri="{FF2B5EF4-FFF2-40B4-BE49-F238E27FC236}">
-                <a16:creationId xmlns:a16="http://schemas.microsoft.com/office/drawing/2014/main" id="{C26424D9-1F0F-27AF-29AA-110DC9321F57}"/>
+          <p:cNvPr id="47" name="直線單箭頭接點 46">
+            <a:extLst>
+              <a:ext uri="{FF2B5EF4-FFF2-40B4-BE49-F238E27FC236}">
+                <a16:creationId xmlns:a16="http://schemas.microsoft.com/office/drawing/2014/main" id="{D7304F08-68A2-16E6-F8B9-F8C1F0934DA5}"/>
               </a:ext>
             </a:extLst>
           </p:cNvPr>
           <p:cNvCxnSpPr>
             <a:cxnSpLocks/>
-            <a:stCxn id="9" idx="0"/>
-            <a:endCxn id="7" idx="2"/>
+            <a:stCxn id="43" idx="2"/>
+            <a:endCxn id="40" idx="0"/>
           </p:cNvCxnSpPr>
           <p:nvPr/>
         </p:nvCxnSpPr>
         <p:spPr>
-          <a:xfrm rot="16200000" flipV="1">
-            <a:off x="3148715" y="4599829"/>
-            <a:ext cx="1321242" cy="3309068"/>
-          </a:xfrm>
-          <a:prstGeom prst="bentConnector3">
-            <a:avLst>
-              <a:gd name="adj1" fmla="val 50000"/>
-            </a:avLst>
+          <a:xfrm>
+            <a:off x="5300181" y="4430151"/>
+            <a:ext cx="0" cy="2782679"/>
+          </a:xfrm>
+          <a:prstGeom prst="straightConnector1">
+            <a:avLst/>
           </a:prstGeom>
           <a:ln>
-            <a:solidFill>
-              <a:schemeClr val="accent6"/>
-            </a:solidFill>
-            <a:prstDash val="sysDash"/>
             <a:tailEnd type="triangle"/>
           </a:ln>
         </p:spPr>
@@ -9502,92 +14594,10 @@
       </p:cxnSp>
       <p:cxnSp>
         <p:nvCxnSpPr>
-          <p:cNvPr id="17" name="接點: 肘形 16">
-            <a:extLst>
-              <a:ext uri="{FF2B5EF4-FFF2-40B4-BE49-F238E27FC236}">
-                <a16:creationId xmlns:a16="http://schemas.microsoft.com/office/drawing/2014/main" id="{B58633B8-958C-7FE1-C32C-DE0E4705EA83}"/>
-              </a:ext>
-            </a:extLst>
-          </p:cNvPr>
-          <p:cNvCxnSpPr>
-            <a:cxnSpLocks noGrp="1" noRot="1" noMove="1" noResize="1" noEditPoints="1" noAdjustHandles="1" noChangeArrowheads="1" noChangeShapeType="1"/>
-          </p:cNvCxnSpPr>
-          <p:nvPr/>
-        </p:nvCxnSpPr>
-        <p:spPr>
-          <a:xfrm rot="16200000" flipH="1">
-            <a:off x="2822713" y="2516583"/>
-            <a:ext cx="2325759" cy="2258174"/>
-          </a:xfrm>
-          <a:prstGeom prst="bentConnector3">
-            <a:avLst>
-              <a:gd name="adj1" fmla="val 16838"/>
-            </a:avLst>
-          </a:prstGeom>
-          <a:ln>
-            <a:tailEnd type="triangle"/>
-          </a:ln>
-        </p:spPr>
-        <p:style>
-          <a:lnRef idx="2">
-            <a:schemeClr val="accent1"/>
-          </a:lnRef>
-          <a:fillRef idx="0">
-            <a:schemeClr val="accent1"/>
-          </a:fillRef>
-          <a:effectRef idx="1">
-            <a:schemeClr val="accent1"/>
-          </a:effectRef>
-          <a:fontRef idx="minor">
-            <a:schemeClr val="tx1"/>
-          </a:fontRef>
-        </p:style>
-      </p:cxnSp>
-      <p:cxnSp>
-        <p:nvCxnSpPr>
-          <p:cNvPr id="28" name="直線單箭頭接點 27">
-            <a:extLst>
-              <a:ext uri="{FF2B5EF4-FFF2-40B4-BE49-F238E27FC236}">
-                <a16:creationId xmlns:a16="http://schemas.microsoft.com/office/drawing/2014/main" id="{D5BDFFBE-AFBE-A60E-D25C-55ABD9E689F3}"/>
-              </a:ext>
-            </a:extLst>
-          </p:cNvPr>
-          <p:cNvCxnSpPr/>
-          <p:nvPr/>
-        </p:nvCxnSpPr>
-        <p:spPr>
-          <a:xfrm>
-            <a:off x="5764696" y="2512612"/>
-            <a:ext cx="0" cy="2325756"/>
-          </a:xfrm>
-          <a:prstGeom prst="straightConnector1">
-            <a:avLst/>
-          </a:prstGeom>
-          <a:ln>
-            <a:tailEnd type="triangle"/>
-          </a:ln>
-        </p:spPr>
-        <p:style>
-          <a:lnRef idx="2">
-            <a:schemeClr val="accent1"/>
-          </a:lnRef>
-          <a:fillRef idx="0">
-            <a:schemeClr val="accent1"/>
-          </a:fillRef>
-          <a:effectRef idx="1">
-            <a:schemeClr val="accent1"/>
-          </a:effectRef>
-          <a:fontRef idx="minor">
-            <a:schemeClr val="tx1"/>
-          </a:fontRef>
-        </p:style>
-      </p:cxnSp>
-      <p:cxnSp>
-        <p:nvCxnSpPr>
-          <p:cNvPr id="29" name="直線單箭頭接點 28">
-            <a:extLst>
-              <a:ext uri="{FF2B5EF4-FFF2-40B4-BE49-F238E27FC236}">
-                <a16:creationId xmlns:a16="http://schemas.microsoft.com/office/drawing/2014/main" id="{232A6B40-9CC9-E30A-5DF4-703E30718897}"/>
+          <p:cNvPr id="48" name="直線單箭頭接點 47">
+            <a:extLst>
+              <a:ext uri="{FF2B5EF4-FFF2-40B4-BE49-F238E27FC236}">
+                <a16:creationId xmlns:a16="http://schemas.microsoft.com/office/drawing/2014/main" id="{86A24A0D-F6AC-7353-BEED-567D6677D8EA}"/>
               </a:ext>
             </a:extLst>
           </p:cNvPr>
@@ -9598,8 +14608,8 @@
         </p:nvCxnSpPr>
         <p:spPr>
           <a:xfrm flipH="1">
-            <a:off x="3196421" y="7383451"/>
-            <a:ext cx="1225827" cy="0"/>
+            <a:off x="2402378" y="10798770"/>
+            <a:ext cx="1889047" cy="0"/>
           </a:xfrm>
           <a:prstGeom prst="straightConnector1">
             <a:avLst/>
@@ -9628,10 +14638,10 @@
       </p:cxnSp>
       <p:cxnSp>
         <p:nvCxnSpPr>
-          <p:cNvPr id="33" name="直線單箭頭接點 32">
-            <a:extLst>
-              <a:ext uri="{FF2B5EF4-FFF2-40B4-BE49-F238E27FC236}">
-                <a16:creationId xmlns:a16="http://schemas.microsoft.com/office/drawing/2014/main" id="{A73E0610-D5F4-517A-C94C-680E6CC10FF2}"/>
+          <p:cNvPr id="49" name="直線單箭頭接點 48">
+            <a:extLst>
+              <a:ext uri="{FF2B5EF4-FFF2-40B4-BE49-F238E27FC236}">
+                <a16:creationId xmlns:a16="http://schemas.microsoft.com/office/drawing/2014/main" id="{5ECA1F50-981E-CDE7-E57F-452F1A44857E}"/>
               </a:ext>
             </a:extLst>
           </p:cNvPr>
@@ -9642,8 +14652,8 @@
         </p:nvCxnSpPr>
         <p:spPr>
           <a:xfrm>
-            <a:off x="3196420" y="7173408"/>
-            <a:ext cx="1225827" cy="0"/>
+            <a:off x="2387379" y="10554430"/>
+            <a:ext cx="1868737" cy="0"/>
           </a:xfrm>
           <a:prstGeom prst="straightConnector1">
             <a:avLst/>
@@ -9672,10 +14682,10 @@
       </p:cxnSp>
       <p:cxnSp>
         <p:nvCxnSpPr>
-          <p:cNvPr id="34" name="直線單箭頭接點 33">
-            <a:extLst>
-              <a:ext uri="{FF2B5EF4-FFF2-40B4-BE49-F238E27FC236}">
-                <a16:creationId xmlns:a16="http://schemas.microsoft.com/office/drawing/2014/main" id="{2A17D67A-7327-4DF7-5E0F-E3CB31DB1B9D}"/>
+          <p:cNvPr id="50" name="直線單箭頭接點 49">
+            <a:extLst>
+              <a:ext uri="{FF2B5EF4-FFF2-40B4-BE49-F238E27FC236}">
+                <a16:creationId xmlns:a16="http://schemas.microsoft.com/office/drawing/2014/main" id="{DAAF522E-942D-0CE6-FF45-C8A0804ADD4A}"/>
               </a:ext>
             </a:extLst>
           </p:cNvPr>
@@ -9685,9 +14695,9 @@
           <p:nvPr/>
         </p:nvCxnSpPr>
         <p:spPr>
-          <a:xfrm flipH="1">
-            <a:off x="3196420" y="5174312"/>
-            <a:ext cx="1225827" cy="0"/>
+          <a:xfrm>
+            <a:off x="2404203" y="4052464"/>
+            <a:ext cx="1854357" cy="0"/>
           </a:xfrm>
           <a:prstGeom prst="straightConnector1">
             <a:avLst/>
@@ -9713,27 +14723,32 @@
       </p:cxnSp>
       <p:cxnSp>
         <p:nvCxnSpPr>
-          <p:cNvPr id="37" name="直線單箭頭接點 36">
-            <a:extLst>
-              <a:ext uri="{FF2B5EF4-FFF2-40B4-BE49-F238E27FC236}">
-                <a16:creationId xmlns:a16="http://schemas.microsoft.com/office/drawing/2014/main" id="{84728C71-BFAE-BAF6-F5F2-E8ECDFA168CE}"/>
+          <p:cNvPr id="51" name="直線單箭頭接點 50">
+            <a:extLst>
+              <a:ext uri="{FF2B5EF4-FFF2-40B4-BE49-F238E27FC236}">
+                <a16:creationId xmlns:a16="http://schemas.microsoft.com/office/drawing/2014/main" id="{A582E7B1-70BD-1E02-6320-8DEAC8C935CC}"/>
               </a:ext>
             </a:extLst>
           </p:cNvPr>
           <p:cNvCxnSpPr>
             <a:cxnSpLocks/>
+            <a:stCxn id="41" idx="0"/>
+            <a:endCxn id="39" idx="2"/>
           </p:cNvCxnSpPr>
           <p:nvPr/>
         </p:nvCxnSpPr>
         <p:spPr>
-          <a:xfrm flipH="1" flipV="1">
-            <a:off x="2115046" y="4041431"/>
-            <a:ext cx="1" cy="796937"/>
+          <a:xfrm flipV="1">
+            <a:off x="1362583" y="7968204"/>
+            <a:ext cx="0" cy="2337570"/>
           </a:xfrm>
           <a:prstGeom prst="straightConnector1">
             <a:avLst/>
           </a:prstGeom>
           <a:ln>
+            <a:solidFill>
+              <a:schemeClr val="accent5"/>
+            </a:solidFill>
             <a:tailEnd type="triangle"/>
           </a:ln>
         </p:spPr>
@@ -9754,22 +14769,24 @@
       </p:cxnSp>
       <p:cxnSp>
         <p:nvCxnSpPr>
-          <p:cNvPr id="41" name="直線單箭頭接點 40">
-            <a:extLst>
-              <a:ext uri="{FF2B5EF4-FFF2-40B4-BE49-F238E27FC236}">
-                <a16:creationId xmlns:a16="http://schemas.microsoft.com/office/drawing/2014/main" id="{1446E769-8390-0499-1F71-DEC1F30C550E}"/>
+          <p:cNvPr id="52" name="直線單箭頭接點 51">
+            <a:extLst>
+              <a:ext uri="{FF2B5EF4-FFF2-40B4-BE49-F238E27FC236}">
+                <a16:creationId xmlns:a16="http://schemas.microsoft.com/office/drawing/2014/main" id="{7215C5E3-A5C9-540B-EF52-CDF76EF650B2}"/>
               </a:ext>
             </a:extLst>
           </p:cNvPr>
           <p:cNvCxnSpPr>
             <a:cxnSpLocks/>
+            <a:stCxn id="39" idx="0"/>
+            <a:endCxn id="38" idx="2"/>
           </p:cNvCxnSpPr>
           <p:nvPr/>
         </p:nvCxnSpPr>
         <p:spPr>
           <a:xfrm flipV="1">
-            <a:off x="2115046" y="2512612"/>
-            <a:ext cx="3" cy="773445"/>
+            <a:off x="1362583" y="4430151"/>
+            <a:ext cx="0" cy="2782679"/>
           </a:xfrm>
           <a:prstGeom prst="straightConnector1">
             <a:avLst/>
@@ -9795,34 +14812,446 @@
       </p:cxnSp>
       <p:sp>
         <p:nvSpPr>
-          <p:cNvPr id="72" name="左中括弧 71">
-            <a:extLst>
-              <a:ext uri="{FF2B5EF4-FFF2-40B4-BE49-F238E27FC236}">
-                <a16:creationId xmlns:a16="http://schemas.microsoft.com/office/drawing/2014/main" id="{B8141D24-4E8E-40A0-AC32-3F06E1469F4E}"/>
-              </a:ext>
-            </a:extLst>
-          </p:cNvPr>
-          <p:cNvSpPr>
-            <a:spLocks noGrp="1" noRot="1" noMove="1" noResize="1" noEditPoints="1" noAdjustHandles="1" noChangeArrowheads="1" noChangeShapeType="1"/>
-          </p:cNvSpPr>
+          <p:cNvPr id="54" name="文字方塊 53">
+            <a:extLst>
+              <a:ext uri="{FF2B5EF4-FFF2-40B4-BE49-F238E27FC236}">
+                <a16:creationId xmlns:a16="http://schemas.microsoft.com/office/drawing/2014/main" id="{647262E2-9615-7C25-B858-5C789303CE86}"/>
+              </a:ext>
+            </a:extLst>
+          </p:cNvPr>
+          <p:cNvSpPr txBox="1"/>
           <p:nvPr/>
         </p:nvSpPr>
         <p:spPr>
           <a:xfrm>
-            <a:off x="371721" y="3692797"/>
-            <a:ext cx="741455" cy="3599874"/>
-          </a:xfrm>
-          <a:prstGeom prst="leftBracket">
-            <a:avLst>
-              <a:gd name="adj" fmla="val 0"/>
-            </a:avLst>
+            <a:off x="3001276" y="10203208"/>
+            <a:ext cx="762000" cy="369332"/>
+          </a:xfrm>
+          <a:prstGeom prst="rect">
+            <a:avLst/>
+          </a:prstGeom>
+          <a:noFill/>
+        </p:spPr>
+        <p:txBody>
+          <a:bodyPr wrap="square" rtlCol="0">
+            <a:spAutoFit/>
+          </a:bodyPr>
+          <a:lstStyle/>
+          <a:p>
+            <a:pPr algn="ctr"/>
+            <a:r>
+              <a:rPr lang="en-US" altLang="zh-TW">
+                <a:solidFill>
+                  <a:schemeClr val="accent5"/>
+                </a:solidFill>
+                <a:effectLst>
+                  <a:outerShdw blurRad="38100" dist="38100" dir="2700000" algn="tl">
+                    <a:srgbClr val="000000">
+                      <a:alpha val="43137"/>
+                    </a:srgbClr>
+                  </a:outerShdw>
+                </a:effectLst>
+                <a:latin typeface="Charis SemiBold" panose="02000500060000020004" pitchFamily="2" charset="0"/>
+                <a:ea typeface="Noto Sans TC Medium" panose="020B0200000000000000" pitchFamily="34" charset="-128"/>
+              </a:rPr>
+              <a:t>p/t/k</a:t>
+            </a:r>
+            <a:endParaRPr lang="zh-TW" altLang="en-US">
+              <a:solidFill>
+                <a:schemeClr val="accent5"/>
+              </a:solidFill>
+              <a:effectLst>
+                <a:outerShdw blurRad="38100" dist="38100" dir="2700000" algn="tl">
+                  <a:srgbClr val="000000">
+                    <a:alpha val="43137"/>
+                  </a:srgbClr>
+                </a:outerShdw>
+              </a:effectLst>
+              <a:latin typeface="Charis SemiBold" panose="02000500060000020004" pitchFamily="2" charset="0"/>
+              <a:ea typeface="Noto Sans TC Medium" panose="020B0200000000000000" pitchFamily="34" charset="-128"/>
+            </a:endParaRPr>
+          </a:p>
+        </p:txBody>
+      </p:sp>
+      <p:sp>
+        <p:nvSpPr>
+          <p:cNvPr id="55" name="文字方塊 54">
+            <a:extLst>
+              <a:ext uri="{FF2B5EF4-FFF2-40B4-BE49-F238E27FC236}">
+                <a16:creationId xmlns:a16="http://schemas.microsoft.com/office/drawing/2014/main" id="{F46054B3-D2FC-73CF-2B0D-E28D7D9556C2}"/>
+              </a:ext>
+            </a:extLst>
+          </p:cNvPr>
+          <p:cNvSpPr txBox="1"/>
+          <p:nvPr/>
+        </p:nvSpPr>
+        <p:spPr>
+          <a:xfrm>
+            <a:off x="3001276" y="10776675"/>
+            <a:ext cx="762000" cy="369332"/>
+          </a:xfrm>
+          <a:prstGeom prst="rect">
+            <a:avLst/>
+          </a:prstGeom>
+          <a:noFill/>
+        </p:spPr>
+        <p:txBody>
+          <a:bodyPr wrap="square" rtlCol="0">
+            <a:spAutoFit/>
+          </a:bodyPr>
+          <a:lstStyle/>
+          <a:p>
+            <a:pPr algn="ctr"/>
+            <a:r>
+              <a:rPr lang="en-US" altLang="zh-TW">
+                <a:solidFill>
+                  <a:schemeClr val="accent6"/>
+                </a:solidFill>
+                <a:effectLst>
+                  <a:outerShdw blurRad="38100" dist="38100" dir="2700000" algn="tl">
+                    <a:srgbClr val="000000">
+                      <a:alpha val="43137"/>
+                    </a:srgbClr>
+                  </a:outerShdw>
+                </a:effectLst>
+                <a:latin typeface="Charis SemiBold" panose="02000500060000020004" pitchFamily="2" charset="0"/>
+                <a:ea typeface="Noto Sans TC Medium" panose="020B0200000000000000" pitchFamily="34" charset="-128"/>
+              </a:rPr>
+              <a:t>p/t/k</a:t>
+            </a:r>
+            <a:endParaRPr lang="zh-TW" altLang="en-US">
+              <a:solidFill>
+                <a:schemeClr val="accent6"/>
+              </a:solidFill>
+              <a:effectLst>
+                <a:outerShdw blurRad="38100" dist="38100" dir="2700000" algn="tl">
+                  <a:srgbClr val="000000">
+                    <a:alpha val="43137"/>
+                  </a:srgbClr>
+                </a:outerShdw>
+              </a:effectLst>
+              <a:latin typeface="Charis SemiBold" panose="02000500060000020004" pitchFamily="2" charset="0"/>
+              <a:ea typeface="Noto Sans TC Medium" panose="020B0200000000000000" pitchFamily="34" charset="-128"/>
+            </a:endParaRPr>
+          </a:p>
+        </p:txBody>
+      </p:sp>
+      <p:sp>
+        <p:nvSpPr>
+          <p:cNvPr id="56" name="文字方塊 55">
+            <a:extLst>
+              <a:ext uri="{FF2B5EF4-FFF2-40B4-BE49-F238E27FC236}">
+                <a16:creationId xmlns:a16="http://schemas.microsoft.com/office/drawing/2014/main" id="{FA1310AC-48FF-1E3E-6768-E666A7FD51FE}"/>
+              </a:ext>
+            </a:extLst>
+          </p:cNvPr>
+          <p:cNvSpPr txBox="1"/>
+          <p:nvPr/>
+        </p:nvSpPr>
+        <p:spPr>
+          <a:xfrm>
+            <a:off x="5070700" y="9095152"/>
+            <a:ext cx="212242" cy="369332"/>
+          </a:xfrm>
+          <a:prstGeom prst="rect">
+            <a:avLst/>
+          </a:prstGeom>
+          <a:noFill/>
+        </p:spPr>
+        <p:txBody>
+          <a:bodyPr wrap="square" rtlCol="0">
+            <a:spAutoFit/>
+          </a:bodyPr>
+          <a:lstStyle/>
+          <a:p>
+            <a:pPr algn="ctr"/>
+            <a:r>
+              <a:rPr lang="en-US" altLang="zh-TW">
+                <a:solidFill>
+                  <a:schemeClr val="accent6"/>
+                </a:solidFill>
+                <a:effectLst>
+                  <a:outerShdw blurRad="38100" dist="38100" dir="2700000" algn="tl">
+                    <a:srgbClr val="000000">
+                      <a:alpha val="43137"/>
+                    </a:srgbClr>
+                  </a:outerShdw>
+                </a:effectLst>
+                <a:latin typeface="Charis SemiBold" panose="02000500060000020004" pitchFamily="2" charset="0"/>
+                <a:ea typeface="Noto Sans TC Medium" panose="020B0200000000000000" pitchFamily="34" charset="-128"/>
+              </a:rPr>
+              <a:t>h</a:t>
+            </a:r>
+            <a:endParaRPr lang="zh-TW" altLang="en-US">
+              <a:solidFill>
+                <a:schemeClr val="accent6"/>
+              </a:solidFill>
+              <a:effectLst>
+                <a:outerShdw blurRad="38100" dist="38100" dir="2700000" algn="tl">
+                  <a:srgbClr val="000000">
+                    <a:alpha val="43137"/>
+                  </a:srgbClr>
+                </a:outerShdw>
+              </a:effectLst>
+              <a:latin typeface="Charis SemiBold" panose="02000500060000020004" pitchFamily="2" charset="0"/>
+              <a:ea typeface="Noto Sans TC Medium" panose="020B0200000000000000" pitchFamily="34" charset="-128"/>
+            </a:endParaRPr>
+          </a:p>
+        </p:txBody>
+      </p:sp>
+      <p:sp>
+        <p:nvSpPr>
+          <p:cNvPr id="57" name="文字方塊 56">
+            <a:extLst>
+              <a:ext uri="{FF2B5EF4-FFF2-40B4-BE49-F238E27FC236}">
+                <a16:creationId xmlns:a16="http://schemas.microsoft.com/office/drawing/2014/main" id="{7BD36804-3092-6D0C-BDD3-92FDD5423D07}"/>
+              </a:ext>
+            </a:extLst>
+          </p:cNvPr>
+          <p:cNvSpPr txBox="1"/>
+          <p:nvPr/>
+        </p:nvSpPr>
+        <p:spPr>
+          <a:xfrm>
+            <a:off x="1362816" y="9095152"/>
+            <a:ext cx="212242" cy="369332"/>
+          </a:xfrm>
+          <a:prstGeom prst="rect">
+            <a:avLst/>
+          </a:prstGeom>
+          <a:noFill/>
+        </p:spPr>
+        <p:txBody>
+          <a:bodyPr wrap="square" rtlCol="0">
+            <a:spAutoFit/>
+          </a:bodyPr>
+          <a:lstStyle/>
+          <a:p>
+            <a:pPr algn="ctr"/>
+            <a:r>
+              <a:rPr lang="en-US" altLang="zh-TW">
+                <a:solidFill>
+                  <a:schemeClr val="accent5"/>
+                </a:solidFill>
+                <a:effectLst>
+                  <a:outerShdw blurRad="38100" dist="38100" dir="2700000" algn="tl">
+                    <a:srgbClr val="000000">
+                      <a:alpha val="43137"/>
+                    </a:srgbClr>
+                  </a:outerShdw>
+                </a:effectLst>
+                <a:latin typeface="Charis SemiBold" panose="02000500060000020004" pitchFamily="2" charset="0"/>
+                <a:ea typeface="Noto Sans TC Medium" panose="020B0200000000000000" pitchFamily="34" charset="-128"/>
+              </a:rPr>
+              <a:t>h</a:t>
+            </a:r>
+            <a:endParaRPr lang="zh-TW" altLang="en-US">
+              <a:solidFill>
+                <a:schemeClr val="accent5"/>
+              </a:solidFill>
+              <a:effectLst>
+                <a:outerShdw blurRad="38100" dist="38100" dir="2700000" algn="tl">
+                  <a:srgbClr val="000000">
+                    <a:alpha val="43137"/>
+                  </a:srgbClr>
+                </a:outerShdw>
+              </a:effectLst>
+              <a:latin typeface="Charis SemiBold" panose="02000500060000020004" pitchFamily="2" charset="0"/>
+              <a:ea typeface="Noto Sans TC Medium" panose="020B0200000000000000" pitchFamily="34" charset="-128"/>
+            </a:endParaRPr>
+          </a:p>
+        </p:txBody>
+      </p:sp>
+      <p:sp>
+        <p:nvSpPr>
+          <p:cNvPr id="58" name="矩形: 圓角 57">
+            <a:extLst>
+              <a:ext uri="{FF2B5EF4-FFF2-40B4-BE49-F238E27FC236}">
+                <a16:creationId xmlns:a16="http://schemas.microsoft.com/office/drawing/2014/main" id="{2A83049B-C7B1-DF93-C61B-395A9F4107F3}"/>
+              </a:ext>
+            </a:extLst>
+          </p:cNvPr>
+          <p:cNvSpPr/>
+          <p:nvPr/>
+        </p:nvSpPr>
+        <p:spPr>
+          <a:xfrm>
+            <a:off x="2899489" y="9446374"/>
+            <a:ext cx="2324277" cy="369332"/>
+          </a:xfrm>
+          <a:prstGeom prst="roundRect">
+            <a:avLst/>
+          </a:prstGeom>
+        </p:spPr>
+        <p:style>
+          <a:lnRef idx="0">
+            <a:schemeClr val="accent6"/>
+          </a:lnRef>
+          <a:fillRef idx="3">
+            <a:schemeClr val="accent6"/>
+          </a:fillRef>
+          <a:effectRef idx="3">
+            <a:schemeClr val="accent6"/>
+          </a:effectRef>
+          <a:fontRef idx="minor">
+            <a:schemeClr val="lt1"/>
+          </a:fontRef>
+        </p:style>
+        <p:txBody>
+          <a:bodyPr rtlCol="0" anchor="ctr"/>
+          <a:lstStyle/>
+          <a:p>
+            <a:pPr algn="ctr"/>
+            <a:r>
+              <a:rPr lang="zh-TW" altLang="en-US">
+                <a:effectLst>
+                  <a:outerShdw blurRad="38100" dist="38100" dir="2700000" algn="tl">
+                    <a:srgbClr val="000000">
+                      <a:alpha val="43137"/>
+                    </a:srgbClr>
+                  </a:outerShdw>
+                </a:effectLst>
+                <a:latin typeface="Charis SemiBold" panose="02000500060000020004" pitchFamily="2" charset="0"/>
+                <a:ea typeface="Noto Sans TC Medium" panose="020B0200000000000000" pitchFamily="34" charset="-128"/>
+              </a:rPr>
+              <a:t>白頭</a:t>
+            </a:r>
+            <a:r>
+              <a:rPr lang="en-US" altLang="zh-TW">
+                <a:effectLst>
+                  <a:outerShdw blurRad="38100" dist="38100" dir="2700000" algn="tl">
+                    <a:srgbClr val="000000">
+                      <a:alpha val="43137"/>
+                    </a:srgbClr>
+                  </a:outerShdw>
+                </a:effectLst>
+                <a:latin typeface="Charis SemiBold" panose="02000500060000020004" pitchFamily="2" charset="0"/>
+                <a:ea typeface="Noto Sans TC Medium" panose="020B0200000000000000" pitchFamily="34" charset="-128"/>
+              </a:rPr>
+              <a:t>〔beh⁸⁻⁵ tao²〕</a:t>
+            </a:r>
+            <a:endParaRPr lang="zh-TW" altLang="en-US">
+              <a:effectLst>
+                <a:outerShdw blurRad="38100" dist="38100" dir="2700000" algn="tl">
+                  <a:srgbClr val="000000">
+                    <a:alpha val="43137"/>
+                  </a:srgbClr>
+                </a:outerShdw>
+              </a:effectLst>
+              <a:latin typeface="Charis SemiBold" panose="02000500060000020004" pitchFamily="2" charset="0"/>
+              <a:ea typeface="Noto Sans TC Medium" panose="020B0200000000000000" pitchFamily="34" charset="-128"/>
+            </a:endParaRPr>
+          </a:p>
+        </p:txBody>
+      </p:sp>
+      <p:sp>
+        <p:nvSpPr>
+          <p:cNvPr id="59" name="矩形: 圓角 58">
+            <a:extLst>
+              <a:ext uri="{FF2B5EF4-FFF2-40B4-BE49-F238E27FC236}">
+                <a16:creationId xmlns:a16="http://schemas.microsoft.com/office/drawing/2014/main" id="{69095007-8326-FCE7-1224-EE22613BF14C}"/>
+              </a:ext>
+            </a:extLst>
+          </p:cNvPr>
+          <p:cNvSpPr/>
+          <p:nvPr/>
+        </p:nvSpPr>
+        <p:spPr>
+          <a:xfrm>
+            <a:off x="1434892" y="8725819"/>
+            <a:ext cx="2247645" cy="426493"/>
+          </a:xfrm>
+          <a:prstGeom prst="roundRect">
+            <a:avLst/>
+          </a:prstGeom>
+        </p:spPr>
+        <p:style>
+          <a:lnRef idx="0">
+            <a:schemeClr val="accent5"/>
+          </a:lnRef>
+          <a:fillRef idx="3">
+            <a:schemeClr val="accent5"/>
+          </a:fillRef>
+          <a:effectRef idx="3">
+            <a:schemeClr val="accent5"/>
+          </a:effectRef>
+          <a:fontRef idx="minor">
+            <a:schemeClr val="lt1"/>
+          </a:fontRef>
+        </p:style>
+        <p:txBody>
+          <a:bodyPr rtlCol="0" anchor="ctr"/>
+          <a:lstStyle/>
+          <a:p>
+            <a:pPr algn="ctr"/>
+            <a:r>
+              <a:rPr lang="zh-TW" altLang="en-US">
+                <a:effectLst>
+                  <a:outerShdw blurRad="38100" dist="38100" dir="2700000" algn="tl">
+                    <a:srgbClr val="000000">
+                      <a:alpha val="43137"/>
+                    </a:srgbClr>
+                  </a:outerShdw>
+                </a:effectLst>
+                <a:latin typeface="Charis SemiBold" panose="02000500060000020004" pitchFamily="2" charset="0"/>
+                <a:ea typeface="Noto Sans TC Medium" panose="020B0200000000000000" pitchFamily="34" charset="-128"/>
+              </a:rPr>
+              <a:t>拍頭 </a:t>
+            </a:r>
+            <a:r>
+              <a:rPr lang="en-US" altLang="zh-TW">
+                <a:effectLst>
+                  <a:outerShdw blurRad="38100" dist="38100" dir="2700000" algn="tl">
+                    <a:srgbClr val="000000">
+                      <a:alpha val="43137"/>
+                    </a:srgbClr>
+                  </a:outerShdw>
+                </a:effectLst>
+                <a:latin typeface="Charis SemiBold" panose="02000500060000020004" pitchFamily="2" charset="0"/>
+                <a:ea typeface="Noto Sans TC Medium" panose="020B0200000000000000" pitchFamily="34" charset="-128"/>
+              </a:rPr>
+              <a:t>[pah⁷⁻³ tao²]</a:t>
+            </a:r>
+            <a:endParaRPr lang="zh-TW" altLang="en-US">
+              <a:effectLst>
+                <a:outerShdw blurRad="38100" dist="38100" dir="2700000" algn="tl">
+                  <a:srgbClr val="000000">
+                    <a:alpha val="43137"/>
+                  </a:srgbClr>
+                </a:outerShdw>
+              </a:effectLst>
+              <a:latin typeface="Charis SemiBold" panose="02000500060000020004" pitchFamily="2" charset="0"/>
+              <a:ea typeface="Noto Sans TC Medium" panose="020B0200000000000000" pitchFamily="34" charset="-128"/>
+            </a:endParaRPr>
+          </a:p>
+        </p:txBody>
+      </p:sp>
+      <p:cxnSp>
+        <p:nvCxnSpPr>
+          <p:cNvPr id="80" name="直線單箭頭接點 79">
+            <a:extLst>
+              <a:ext uri="{FF2B5EF4-FFF2-40B4-BE49-F238E27FC236}">
+                <a16:creationId xmlns:a16="http://schemas.microsoft.com/office/drawing/2014/main" id="{6F1FE431-0F4A-63BD-1E98-1EBB58C156BD}"/>
+              </a:ext>
+            </a:extLst>
+          </p:cNvPr>
+          <p:cNvCxnSpPr>
+            <a:cxnSpLocks/>
+          </p:cNvCxnSpPr>
+          <p:nvPr/>
+        </p:nvCxnSpPr>
+        <p:spPr>
+          <a:xfrm flipV="1">
+            <a:off x="5300181" y="7968204"/>
+            <a:ext cx="0" cy="2332284"/>
+          </a:xfrm>
+          <a:prstGeom prst="straightConnector1">
+            <a:avLst/>
           </a:prstGeom>
           <a:ln>
             <a:solidFill>
-              <a:schemeClr val="accent5"/>
+              <a:schemeClr val="accent6"/>
             </a:solidFill>
-            <a:prstDash val="sysDash"/>
-            <a:headEnd type="none"/>
             <a:tailEnd type="triangle"/>
           </a:ln>
         </p:spPr>
@@ -9840,19 +15269,331 @@
             <a:schemeClr val="tx1"/>
           </a:fontRef>
         </p:style>
-        <p:txBody>
-          <a:bodyPr rtlCol="0" anchor="ctr"/>
+      </p:cxnSp>
+      <p:cxnSp>
+        <p:nvCxnSpPr>
+          <p:cNvPr id="87" name="直線單箭頭接點 86">
+            <a:extLst>
+              <a:ext uri="{FF2B5EF4-FFF2-40B4-BE49-F238E27FC236}">
+                <a16:creationId xmlns:a16="http://schemas.microsoft.com/office/drawing/2014/main" id="{27E6B597-5E03-327F-1214-6C4BFCF9D4C7}"/>
+              </a:ext>
+            </a:extLst>
+          </p:cNvPr>
+          <p:cNvCxnSpPr>
+            <a:cxnSpLocks/>
+            <a:stCxn id="44" idx="0"/>
+          </p:cNvCxnSpPr>
+          <p:nvPr/>
+        </p:nvCxnSpPr>
+        <p:spPr>
+          <a:xfrm flipV="1">
+            <a:off x="3331382" y="4405745"/>
+            <a:ext cx="941360" cy="1023348"/>
+          </a:xfrm>
+          <a:prstGeom prst="straightConnector1">
+            <a:avLst/>
+          </a:prstGeom>
+          <a:ln>
+            <a:tailEnd type="triangle"/>
+          </a:ln>
+        </p:spPr>
+        <p:style>
+          <a:lnRef idx="2">
+            <a:schemeClr val="accent1"/>
+          </a:lnRef>
+          <a:fillRef idx="0">
+            <a:schemeClr val="accent1"/>
+          </a:fillRef>
+          <a:effectRef idx="1">
+            <a:schemeClr val="accent1"/>
+          </a:effectRef>
+          <a:fontRef idx="minor">
+            <a:schemeClr val="tx1"/>
+          </a:fontRef>
+        </p:style>
+      </p:cxnSp>
+      <p:cxnSp>
+        <p:nvCxnSpPr>
+          <p:cNvPr id="90" name="直線單箭頭接點 89">
+            <a:extLst>
+              <a:ext uri="{FF2B5EF4-FFF2-40B4-BE49-F238E27FC236}">
+                <a16:creationId xmlns:a16="http://schemas.microsoft.com/office/drawing/2014/main" id="{04BBE79D-28EC-4227-E3F7-B6599ED384F3}"/>
+              </a:ext>
+            </a:extLst>
+          </p:cNvPr>
+          <p:cNvCxnSpPr>
+            <a:cxnSpLocks/>
+            <a:stCxn id="44" idx="2"/>
+          </p:cNvCxnSpPr>
+          <p:nvPr/>
+        </p:nvCxnSpPr>
+        <p:spPr>
+          <a:xfrm>
+            <a:off x="3331382" y="6184467"/>
+            <a:ext cx="924734" cy="1082075"/>
+          </a:xfrm>
+          <a:prstGeom prst="straightConnector1">
+            <a:avLst/>
+          </a:prstGeom>
+          <a:ln>
+            <a:solidFill>
+              <a:schemeClr val="accent2"/>
+            </a:solidFill>
+            <a:prstDash val="sysDash"/>
+            <a:tailEnd type="triangle"/>
+          </a:ln>
+        </p:spPr>
+        <p:style>
+          <a:lnRef idx="2">
+            <a:schemeClr val="accent1"/>
+          </a:lnRef>
+          <a:fillRef idx="0">
+            <a:schemeClr val="accent1"/>
+          </a:fillRef>
+          <a:effectRef idx="1">
+            <a:schemeClr val="accent1"/>
+          </a:effectRef>
+          <a:fontRef idx="minor">
+            <a:schemeClr val="tx1"/>
+          </a:fontRef>
+        </p:style>
+      </p:cxnSp>
+      <p:cxnSp>
+        <p:nvCxnSpPr>
+          <p:cNvPr id="3" name="直線單箭頭接點 2">
+            <a:extLst>
+              <a:ext uri="{FF2B5EF4-FFF2-40B4-BE49-F238E27FC236}">
+                <a16:creationId xmlns:a16="http://schemas.microsoft.com/office/drawing/2014/main" id="{2CCBDF45-E0FB-05CB-37BA-4CC59B659163}"/>
+              </a:ext>
+            </a:extLst>
+          </p:cNvPr>
+          <p:cNvCxnSpPr>
+            <a:cxnSpLocks/>
+            <a:stCxn id="40" idx="1"/>
+            <a:endCxn id="39" idx="3"/>
+          </p:cNvCxnSpPr>
+          <p:nvPr/>
+        </p:nvCxnSpPr>
+        <p:spPr>
+          <a:xfrm flipH="1">
+            <a:off x="2404203" y="7590517"/>
+            <a:ext cx="1854357" cy="0"/>
+          </a:xfrm>
+          <a:prstGeom prst="straightConnector1">
+            <a:avLst/>
+          </a:prstGeom>
+          <a:ln>
+            <a:tailEnd type="triangle"/>
+          </a:ln>
+        </p:spPr>
+        <p:style>
+          <a:lnRef idx="2">
+            <a:schemeClr val="accent1"/>
+          </a:lnRef>
+          <a:fillRef idx="0">
+            <a:schemeClr val="accent1"/>
+          </a:fillRef>
+          <a:effectRef idx="1">
+            <a:schemeClr val="accent1"/>
+          </a:effectRef>
+          <a:fontRef idx="minor">
+            <a:schemeClr val="tx1"/>
+          </a:fontRef>
+        </p:style>
+      </p:cxnSp>
+      <p:sp>
+        <p:nvSpPr>
+          <p:cNvPr id="9" name="文字方塊 8">
+            <a:extLst>
+              <a:ext uri="{FF2B5EF4-FFF2-40B4-BE49-F238E27FC236}">
+                <a16:creationId xmlns:a16="http://schemas.microsoft.com/office/drawing/2014/main" id="{F2E9AC45-4D16-4613-3AC1-31520842C9A0}"/>
+              </a:ext>
+            </a:extLst>
+          </p:cNvPr>
+          <p:cNvSpPr txBox="1"/>
+          <p:nvPr/>
+        </p:nvSpPr>
+        <p:spPr>
+          <a:xfrm>
+            <a:off x="3816838" y="4820019"/>
+            <a:ext cx="212242" cy="369332"/>
+          </a:xfrm>
+          <a:prstGeom prst="rect">
+            <a:avLst/>
+          </a:prstGeom>
+          <a:noFill/>
+        </p:spPr>
+        <p:txBody>
+          <a:bodyPr wrap="square" rtlCol="0">
+            <a:spAutoFit/>
+          </a:bodyPr>
           <a:lstStyle/>
           <a:p>
             <a:pPr algn="ctr"/>
-            <a:endParaRPr lang="zh-TW" altLang="en-US"/>
+            <a:r>
+              <a:rPr lang="zh-TW" altLang="en-US">
+                <a:solidFill>
+                  <a:srgbClr val="FF0000"/>
+                </a:solidFill>
+                <a:effectLst>
+                  <a:outerShdw blurRad="38100" dist="38100" dir="2700000" algn="tl">
+                    <a:srgbClr val="000000">
+                      <a:alpha val="43137"/>
+                    </a:srgbClr>
+                  </a:outerShdw>
+                </a:effectLst>
+                <a:latin typeface="Charis SemiBold" panose="02000500060000020004" pitchFamily="2" charset="0"/>
+                <a:ea typeface="Noto Sans TC Medium" panose="020B0200000000000000" pitchFamily="34" charset="-128"/>
+              </a:rPr>
+              <a:t>漳</a:t>
+            </a:r>
+          </a:p>
+        </p:txBody>
+      </p:sp>
+      <p:sp>
+        <p:nvSpPr>
+          <p:cNvPr id="10" name="文字方塊 9">
+            <a:extLst>
+              <a:ext uri="{FF2B5EF4-FFF2-40B4-BE49-F238E27FC236}">
+                <a16:creationId xmlns:a16="http://schemas.microsoft.com/office/drawing/2014/main" id="{982E7419-1107-A5EF-D6AE-4F85BB3BA81B}"/>
+              </a:ext>
+            </a:extLst>
+          </p:cNvPr>
+          <p:cNvSpPr txBox="1"/>
+          <p:nvPr/>
+        </p:nvSpPr>
+        <p:spPr>
+          <a:xfrm>
+            <a:off x="3816838" y="6410697"/>
+            <a:ext cx="212242" cy="369332"/>
+          </a:xfrm>
+          <a:prstGeom prst="rect">
+            <a:avLst/>
+          </a:prstGeom>
+          <a:noFill/>
+        </p:spPr>
+        <p:txBody>
+          <a:bodyPr wrap="square" rtlCol="0">
+            <a:spAutoFit/>
+          </a:bodyPr>
+          <a:lstStyle/>
+          <a:p>
+            <a:pPr algn="ctr"/>
+            <a:r>
+              <a:rPr lang="zh-TW" altLang="en-US">
+                <a:solidFill>
+                  <a:srgbClr val="FF0000"/>
+                </a:solidFill>
+                <a:effectLst>
+                  <a:outerShdw blurRad="38100" dist="38100" dir="2700000" algn="tl">
+                    <a:srgbClr val="000000">
+                      <a:alpha val="43137"/>
+                    </a:srgbClr>
+                  </a:outerShdw>
+                </a:effectLst>
+                <a:latin typeface="Charis SemiBold" panose="02000500060000020004" pitchFamily="2" charset="0"/>
+                <a:ea typeface="Noto Sans TC Medium" panose="020B0200000000000000" pitchFamily="34" charset="-128"/>
+              </a:rPr>
+              <a:t>泉</a:t>
+            </a:r>
           </a:p>
         </p:txBody>
       </p:sp>
     </p:spTree>
     <p:extLst>
       <p:ext uri="{BB962C8B-B14F-4D97-AF65-F5344CB8AC3E}">
-        <p14:creationId xmlns:p14="http://schemas.microsoft.com/office/powerpoint/2010/main" val="33361210"/>
+        <p14:creationId xmlns:p14="http://schemas.microsoft.com/office/powerpoint/2010/main" val="269074792"/>
+      </p:ext>
+    </p:extLst>
+  </p:cSld>
+  <p:clrMapOvr>
+    <a:masterClrMapping/>
+  </p:clrMapOvr>
+</p:sld>
+</file>
+
+<file path=ppt/slides/slide9.xml><?xml version="1.0" encoding="utf-8"?>
+<p:sld xmlns:a="http://schemas.openxmlformats.org/drawingml/2006/main" xmlns:r="http://schemas.openxmlformats.org/officeDocument/2006/relationships" xmlns:p="http://schemas.openxmlformats.org/presentationml/2006/main">
+  <p:cSld>
+    <p:spTree>
+      <p:nvGrpSpPr>
+        <p:cNvPr id="1" name=""/>
+        <p:cNvGrpSpPr/>
+        <p:nvPr/>
+      </p:nvGrpSpPr>
+      <p:grpSpPr>
+        <a:xfrm>
+          <a:off x="0" y="0"/>
+          <a:ext cx="0" cy="0"/>
+          <a:chOff x="0" y="0"/>
+          <a:chExt cx="0" cy="0"/>
+        </a:xfrm>
+      </p:grpSpPr>
+      <p:sp>
+        <p:nvSpPr>
+          <p:cNvPr id="2" name="標題 1">
+            <a:extLst>
+              <a:ext uri="{FF2B5EF4-FFF2-40B4-BE49-F238E27FC236}">
+                <a16:creationId xmlns:a16="http://schemas.microsoft.com/office/drawing/2014/main" id="{B8015D3C-8F01-E615-67FA-73DE6D6DB733}"/>
+              </a:ext>
+            </a:extLst>
+          </p:cNvPr>
+          <p:cNvSpPr>
+            <a:spLocks noGrp="1"/>
+          </p:cNvSpPr>
+          <p:nvPr>
+            <p:ph type="title"/>
+          </p:nvPr>
+        </p:nvSpPr>
+        <p:spPr/>
+        <p:txBody>
+          <a:bodyPr/>
+          <a:lstStyle/>
+          <a:p>
+            <a:endParaRPr lang="zh-TW" altLang="en-US"/>
+          </a:p>
+        </p:txBody>
+      </p:sp>
+      <p:pic>
+        <p:nvPicPr>
+          <p:cNvPr id="4" name="圖片 3">
+            <a:extLst>
+              <a:ext uri="{FF2B5EF4-FFF2-40B4-BE49-F238E27FC236}">
+                <a16:creationId xmlns:a16="http://schemas.microsoft.com/office/drawing/2014/main" id="{8D3A7918-05CA-F39C-D294-368AE2F33B04}"/>
+              </a:ext>
+            </a:extLst>
+          </p:cNvPr>
+          <p:cNvPicPr>
+            <a:picLocks noChangeAspect="1"/>
+          </p:cNvPicPr>
+          <p:nvPr/>
+        </p:nvPicPr>
+        <p:blipFill>
+          <a:blip r:embed="rId2">
+            <a:extLst>
+              <a:ext uri="{28A0092B-C50C-407E-A947-70E740481C1C}">
+                <a14:useLocalDpi xmlns:a14="http://schemas.microsoft.com/office/drawing/2010/main" val="0"/>
+              </a:ext>
+            </a:extLst>
+          </a:blip>
+          <a:stretch>
+            <a:fillRect/>
+          </a:stretch>
+        </p:blipFill>
+        <p:spPr>
+          <a:xfrm>
+            <a:off x="0" y="2700162"/>
+            <a:ext cx="6858000" cy="6791675"/>
+          </a:xfrm>
+          <a:prstGeom prst="rect">
+            <a:avLst/>
+          </a:prstGeom>
+        </p:spPr>
+      </p:pic>
+    </p:spTree>
+    <p:extLst>
+      <p:ext uri="{BB962C8B-B14F-4D97-AF65-F5344CB8AC3E}">
+        <p14:creationId xmlns:p14="http://schemas.microsoft.com/office/powerpoint/2010/main" val="3826160857"/>
       </p:ext>
     </p:extLst>
   </p:cSld>
